--- a/02_projet/soutenance.pptx
+++ b/02_projet/soutenance.pptx
@@ -4,6 +4,9 @@
   <p:sldMasterIdLst>
     <p:sldMasterId id="2147483648" r:id="rId1"/>
   </p:sldMasterIdLst>
+  <p:notesMasterIdLst>
+    <p:notesMasterId r:id="rId17"/>
+  </p:notesMasterIdLst>
   <p:sldIdLst>
     <p:sldId id="256" r:id="rId2"/>
     <p:sldId id="257" r:id="rId3"/>
@@ -19,14 +22,8 @@
     <p:sldId id="267" r:id="rId13"/>
     <p:sldId id="268" r:id="rId14"/>
     <p:sldId id="269" r:id="rId15"/>
-    <p:sldId id="270" r:id="rId16"/>
-    <p:sldId id="271" r:id="rId17"/>
-    <p:sldId id="272" r:id="rId18"/>
-    <p:sldId id="273" r:id="rId19"/>
+    <p:sldId id="273" r:id="rId16"/>
   </p:sldIdLst>
-  <p:notesMasterIdLst>
-    <p:notesMasterId r:id="rId20"/>
-  </p:notesMasterIdLst>
   <p:sldSz cx="12192000" cy="6858000"/>
   <p:notesSz cx="6858000" cy="12192000"/>
   <p:defaultTextStyle>
@@ -121,6 +118,11 @@
       </a:defRPr>
     </a:lvl9pPr>
   </p:defaultTextStyle>
+  <p:extLst>
+    <p:ext uri="{EFAFB233-063F-42B5-8137-9DF3F51BA10A}">
+      <p15:sldGuideLst xmlns:p15="http://schemas.microsoft.com/office/powerpoint/2012/main"/>
+    </p:ext>
+  </p:extLst>
 </p:presentation>
 </file>
 
@@ -146,234 +148,10 @@
           <a:chExt cx="0" cy="0"/>
         </a:xfrm>
       </p:grpSpPr>
-      <p:sp>
-        <p:nvSpPr>
-          <p:cNvPr id="2" name="Header Placeholder 1"/>
-          <p:cNvSpPr>
-            <a:spLocks noGrp="1"/>
-          </p:cNvSpPr>
-          <p:nvPr>
-            <p:ph type="hdr" sz="quarter"/>
-          </p:nvPr>
-        </p:nvSpPr>
-        <p:spPr>
-          <a:xfrm>
-            <a:off x="0" y="0"/>
-            <a:ext cx="2971800" cy="458788"/>
-          </a:xfrm>
-          <a:prstGeom prst="rect">
-            <a:avLst/>
-          </a:prstGeom>
-        </p:spPr>
-        <p:txBody>
-          <a:bodyPr vert="horz" lIns="91440" tIns="45720" rIns="91440" bIns="45720" rtlCol="0"/>
-          <a:lstStyle>
-            <a:lvl1pPr algn="l">
-              <a:defRPr sz="1200"/>
-            </a:lvl1pPr>
-          </a:lstStyle>
-          <a:p>
-            <a:endParaRPr lang="en-US"/>
-          </a:p>
-        </p:txBody>
-      </p:sp>
-      <p:sp>
-        <p:nvSpPr>
-          <p:cNvPr id="3" name="Date Placeholder 2"/>
-          <p:cNvSpPr>
-            <a:spLocks noGrp="1"/>
-          </p:cNvSpPr>
-          <p:nvPr>
-            <p:ph type="dt" idx="1"/>
-          </p:nvPr>
-        </p:nvSpPr>
-        <p:spPr>
-          <a:xfrm>
-            <a:off x="3884613" y="0"/>
-            <a:ext cx="2971800" cy="458788"/>
-          </a:xfrm>
-          <a:prstGeom prst="rect">
-            <a:avLst/>
-          </a:prstGeom>
-        </p:spPr>
-        <p:txBody>
-          <a:bodyPr vert="horz" lIns="91440" tIns="45720" rIns="91440" bIns="45720" rtlCol="0"/>
-          <a:lstStyle>
-            <a:lvl1pPr algn="r">
-              <a:defRPr sz="1200"/>
-            </a:lvl1pPr>
-          </a:lstStyle>
-          <a:p>
-            <a:fld id="{5282F153-3F37-0F45-9E97-73ACFA13230C}" type="datetimeFigureOut">
-              <a:rPr lang="en-US"/>
-              <a:t>7/23/19</a:t>
-            </a:fld>
-            <a:endParaRPr lang="en-US"/>
-          </a:p>
-        </p:txBody>
-      </p:sp>
-      <p:sp>
-        <p:nvSpPr>
-          <p:cNvPr id="4" name="Slide Image Placeholder 3"/>
-          <p:cNvSpPr>
-            <a:spLocks noGrp="1" noRot="1" noChangeAspect="1"/>
-          </p:cNvSpPr>
-          <p:nvPr>
-            <p:ph type="sldImg" idx="2"/>
-          </p:nvPr>
-        </p:nvSpPr>
-        <p:spPr>
-          <a:xfrm>
-            <a:off x="685800" y="1143000"/>
-            <a:ext cx="5486400" cy="3086100"/>
-          </a:xfrm>
-          <a:prstGeom prst="rect">
-            <a:avLst/>
-          </a:prstGeom>
-          <a:noFill/>
-          <a:ln w="12700">
-            <a:solidFill>
-              <a:prstClr val="black"/>
-            </a:solidFill>
-          </a:ln>
-        </p:spPr>
-        <p:txBody>
-          <a:bodyPr vert="horz" lIns="91440" tIns="45720" rIns="91440" bIns="45720" rtlCol="0" anchor="ctr"/>
-          <a:lstStyle/>
-          <a:p>
-            <a:endParaRPr lang="en-US"/>
-          </a:p>
-        </p:txBody>
-      </p:sp>
-      <p:sp>
-        <p:nvSpPr>
-          <p:cNvPr id="5" name="Notes Placeholder 4"/>
-          <p:cNvSpPr>
-            <a:spLocks noGrp="1"/>
-          </p:cNvSpPr>
-          <p:nvPr>
-            <p:ph type="body" sz="quarter" idx="3"/>
-          </p:nvPr>
-        </p:nvSpPr>
-        <p:spPr>
-          <a:xfrm>
-            <a:off x="685800" y="4400550"/>
-            <a:ext cx="5486400" cy="3600450"/>
-          </a:xfrm>
-          <a:prstGeom prst="rect">
-            <a:avLst/>
-          </a:prstGeom>
-        </p:spPr>
-        <p:txBody>
-          <a:bodyPr vert="horz" lIns="91440" tIns="45720" rIns="91440" bIns="45720" rtlCol="0"/>
-          <a:lstStyle/>
-          <a:p>
-            <a:pPr lvl="0"/>
-            <a:r>
-              <a:rPr lang="en-US"/>
-              <a:t>Click to edit Master text styles</a:t>
-            </a:r>
-          </a:p>
-          <a:p>
-            <a:pPr lvl="1"/>
-            <a:r>
-              <a:rPr lang="en-US"/>
-              <a:t>Second level</a:t>
-            </a:r>
-          </a:p>
-          <a:p>
-            <a:pPr lvl="2"/>
-            <a:r>
-              <a:rPr lang="en-US"/>
-              <a:t>Third level</a:t>
-            </a:r>
-          </a:p>
-          <a:p>
-            <a:pPr lvl="3"/>
-            <a:r>
-              <a:rPr lang="en-US"/>
-              <a:t>Fourth level</a:t>
-            </a:r>
-          </a:p>
-          <a:p>
-            <a:pPr lvl="4"/>
-            <a:r>
-              <a:rPr lang="en-US"/>
-              <a:t>Fifth level</a:t>
-            </a:r>
-          </a:p>
-        </p:txBody>
-      </p:sp>
-      <p:sp>
-        <p:nvSpPr>
-          <p:cNvPr id="6" name="Footer Placeholder 5"/>
-          <p:cNvSpPr>
-            <a:spLocks noGrp="1"/>
-          </p:cNvSpPr>
-          <p:nvPr>
-            <p:ph type="ftr" sz="quarter" idx="4"/>
-          </p:nvPr>
-        </p:nvSpPr>
-        <p:spPr>
-          <a:xfrm>
-            <a:off x="0" y="8685213"/>
-            <a:ext cx="2971800" cy="458787"/>
-          </a:xfrm>
-          <a:prstGeom prst="rect">
-            <a:avLst/>
-          </a:prstGeom>
-        </p:spPr>
-        <p:txBody>
-          <a:bodyPr vert="horz" lIns="91440" tIns="45720" rIns="91440" bIns="45720" rtlCol="0" anchor="b"/>
-          <a:lstStyle>
-            <a:lvl1pPr algn="l">
-              <a:defRPr sz="1200"/>
-            </a:lvl1pPr>
-          </a:lstStyle>
-          <a:p>
-            <a:endParaRPr lang="en-US"/>
-          </a:p>
-        </p:txBody>
-      </p:sp>
-      <p:sp>
-        <p:nvSpPr>
-          <p:cNvPr id="7" name="Slide Number Placeholder 6"/>
-          <p:cNvSpPr>
-            <a:spLocks noGrp="1"/>
-          </p:cNvSpPr>
-          <p:nvPr>
-            <p:ph type="sldNum" sz="quarter" idx="5"/>
-          </p:nvPr>
-        </p:nvSpPr>
-        <p:spPr>
-          <a:xfrm>
-            <a:off x="3884613" y="8685213"/>
-            <a:ext cx="2971800" cy="458787"/>
-          </a:xfrm>
-          <a:prstGeom prst="rect">
-            <a:avLst/>
-          </a:prstGeom>
-        </p:spPr>
-        <p:txBody>
-          <a:bodyPr vert="horz" lIns="91440" tIns="45720" rIns="91440" bIns="45720" rtlCol="0" anchor="b"/>
-          <a:lstStyle>
-            <a:lvl1pPr algn="r">
-              <a:defRPr sz="1200"/>
-            </a:lvl1pPr>
-          </a:lstStyle>
-          <a:p>
-            <a:fld id="{CE5E9CC1-C706-0F49-92D6-E571CC5EEA8F}" type="slidenum">
-              <a:rPr lang="en-US"/>
-              <a:t>‹#›</a:t>
-            </a:fld>
-            <a:endParaRPr lang="en-US"/>
-          </a:p>
-        </p:txBody>
-      </p:sp>
     </p:spTree>
     <p:extLst>
       <p:ext uri="{BB962C8B-B14F-4D97-AF65-F5344CB8AC3E}">
-        <p14:creationId xmlns:p14="http://schemas.microsoft.com/office/powerpoint/2010/main" val="1024086991"/>
+        <p14:creationId xmlns:p14="http://schemas.microsoft.com/office/powerpoint/2010/main" val="3424452324"/>
       </p:ext>
     </p:extLst>
   </p:cSld>
@@ -523,7 +301,6 @@
 Annoncez la thèse d'emblée, sans préambule. « Nous avons analysé 3,4 millions de commandes. Une seule idée en est ressortie, et elle change la façon de piloter cette activité : vous ne vendez pas des produits, vous vendez une habitude. »
 Puis marquez un temps. Ne détaillez pas encore — la démonstration vient ensuite.</a:t>
             </a:r>
-            <a:endParaRPr lang="en-US" dirty="0"/>
           </a:p>
         </p:txBody>
       </p:sp>
@@ -614,7 +391,6 @@
 LA CONCLUSION : le client ne commande pas quand il manque de lait. Il rachète du lait quand il fait ses courses.
 À DIRE AVANT QU'ON LE DEMANDE : notre première analyse utilisait la médiane et concluait à une platitude parfaite. Or cette variable ne prend que des valeurs entières : la médiane tombait toujours sur 7 ou 8. C'était un artefact. La moyenne révèle l'écart réel. RACONTEZ CETTE ERREUR, ELLE VOUS SERT — elle prouve que vous vérifiez.</a:t>
             </a:r>
-            <a:endParaRPr lang="en-US" dirty="0"/>
           </a:p>
         </p:txBody>
       </p:sp>
@@ -705,7 +481,6 @@
 HONNÊTETÉ À ASSUMER : les écarts sont modestes — un à deux points. C'est une dérive lente, pas une substitution. Dites-le vous-même, cela vous crédibilise.
 LA CONSÉQUENCE OPÉRATIONNELLE RESTE VALABLE : les deux missions n'appellent ni les mêmes rayons ni les mêmes outils.</a:t>
             </a:r>
-            <a:endParaRPr lang="en-US" dirty="0"/>
           </a:p>
         </p:txBody>
       </p:sp>
@@ -796,7 +571,6 @@
 « Nous avons donc calculé le lift : combien de fois plus souvent que le hasard. Et là, les couples changent complètement. Jalapeños et coriandre. Coriandre et oignon rouge. Citrons verts et coriandre. Ce sont des RECETTES. »
 LA RÉVÉLATION : à côté de la routine hebdomadaire, il existe un achat d'intention — « ce soir je cuisine tel plat ». Et puisque le panier ne grossit jamais, c'est le seul canal mesuré par lequel une nouveauté peut y entrer.</a:t>
             </a:r>
-            <a:endParaRPr lang="en-US" dirty="0"/>
           </a:p>
         </p:txBody>
       </p:sp>
@@ -887,7 +661,6 @@
 « Thym, concentré de tomate, courge butternut, huile d'olive, gingembre, échalote. Ce sont des ingrédients, pas des produits de base. Tout le monde en achète un jour, personne n'en rachète chaque semaine. »
 LE RENVERSEMENT À FAIRE ENTENDRE : ce ne sont pas des échecs. Chercher à augmenter leur réachat serait une erreur — ils ne fonctionnent pas ainsi. Il faut les traiter comme des portes d'entrée vers une recette.</a:t>
             </a:r>
-            <a:endParaRPr lang="en-US" dirty="0"/>
           </a:p>
         </p:txBody>
       </p:sp>
@@ -979,7 +752,6 @@
 INSISTEZ SUR L'ORDRE : elles sont classées par rendement attendu, pas par facilité. La première est la plus rentable parce qu'elle agit sur la seule fenêtre où le comportement est encore malléable.
 SI ON DEMANDE LE COÛT : les trois premières sont des réallocations de budget existant, pas des dépenses nouvelles. Seule la quatrième demande un développement.</a:t>
             </a:r>
-            <a:endParaRPr lang="en-US" dirty="0"/>
           </a:p>
         </p:txBody>
       </p:sp>
@@ -1065,13 +837,11 @@
           <a:p>
             <a:r>
               <a:rPr lang="en-US" dirty="0"/>
-              <a:t>60 secondes — RESTEZ SIMPLE. Trois phrases suffisent, et ce sont celles-ci :
-CE QU'IL FAIT : pour un client et un produit qu'il a déjà acheté, il estime la probabilité que ce produit soit dans sa prochaine commande.
-COMMENT IL APPREND : on lui montre l'historique de 20 000 clients avec quelques indicateurs simples — depuis combien de commandes le client n'a pas repris ce produit, à quelle fréquence il le prend — et la réponse. Il apprend à relier les deux.
-CE QU'IL VAUT : présenté à un couple racheté et un couple non racheté, il les classe correctement 83 fois sur 100.
-N'ALLEZ PAS PLUS LOIN SPONTANÉMENT. Si on insiste : quatre modèles comparés, données découpées par client pour éviter toute fuite, seuil réglé sur un jeu de validation distinct.</a:t>
-            </a:r>
-            <a:endParaRPr lang="en-US" dirty="0"/>
+              <a:t>CLÔTURE — 20 secondes.
+Revenez à la phrase d'ouverture. La boucle se referme, et c'est elle que le jury emportera.
+« Nous avons commencé en disant que vous vendiez une habitude. Nous espérons vous avoir montré que c'est mesurable, et surtout que c'est actionnable. »
+Puis marquez un silence et proposez les questions. Ne meublez pas.</a:t>
+            </a:r>
           </a:p>
         </p:txBody>
       </p:sp>
@@ -1093,279 +863,6 @@
             <a:fld id="{F7021451-1387-4CA6-816F-3879F97B5CBC}" type="slidenum">
               <a:rPr lang="en-US"/>
               <a:t>15</a:t>
-            </a:fld>
-            <a:endParaRPr lang="en-US"/>
-          </a:p>
-        </p:txBody>
-      </p:sp>
-    </p:spTree>
-    <p:extLst>
-      <p:ext uri="{BB962C8B-B14F-4D97-AF65-F5344CB8AC3E}">
-        <p14:creationId xmlns:p14="http://schemas.microsoft.com/office/powerpoint/2010/main" val="1024086991"/>
-      </p:ext>
-    </p:extLst>
-  </p:cSld>
-  <p:clrMapOvr>
-    <a:masterClrMapping/>
-  </p:clrMapOvr>
-</p:notes>
-</file>
-
-<file path=ppt/notesSlides/notesSlide16.xml><?xml version="1.0" encoding="utf-8"?>
-<p:notes xmlns:a="http://schemas.openxmlformats.org/drawingml/2006/main" xmlns:r="http://schemas.openxmlformats.org/officeDocument/2006/relationships" xmlns:p="http://schemas.openxmlformats.org/presentationml/2006/main">
-  <p:cSld>
-    <p:spTree>
-      <p:nvGrpSpPr>
-        <p:cNvPr id="1" name=""/>
-        <p:cNvGrpSpPr/>
-        <p:nvPr/>
-      </p:nvGrpSpPr>
-      <p:grpSpPr>
-        <a:xfrm>
-          <a:off x="0" y="0"/>
-          <a:ext cx="0" cy="0"/>
-          <a:chOff x="0" y="0"/>
-          <a:chExt cx="0" cy="0"/>
-        </a:xfrm>
-      </p:grpSpPr>
-      <p:sp>
-        <p:nvSpPr>
-          <p:cNvPr id="2" name="Slide Image Placeholder 1"/>
-          <p:cNvSpPr>
-            <a:spLocks noGrp="1" noRot="1" noChangeAspect="1"/>
-          </p:cNvSpPr>
-          <p:nvPr>
-            <p:ph type="sldImg"/>
-          </p:nvPr>
-        </p:nvSpPr>
-        <p:spPr/>
-      </p:sp>
-      <p:sp>
-        <p:nvSpPr>
-          <p:cNvPr id="3" name="Notes Placeholder 2"/>
-          <p:cNvSpPr>
-            <a:spLocks noGrp="1"/>
-          </p:cNvSpPr>
-          <p:nvPr>
-            <p:ph type="body" idx="1"/>
-          </p:nvPr>
-        </p:nvSpPr>
-        <p:spPr/>
-        <p:txBody>
-          <a:bodyPr/>
-          <a:lstStyle/>
-          <a:p>
-            <a:r>
-              <a:rPr lang="en-US" dirty="0"/>
-              <a:t>45 secondes — NE SURVOLEZ PAS. Cette diapositive vous crédibilise plus que toutes les autres.
-« Le modèle s'appuie sur la récence. Un nouveau client en offre peu. Résultat : il est le moins fiable précisément là où l'action a le plus de valeur — sur les cinq premières commandes, qui sont notre première recommandation. »
-ENCHAÎNEZ IMMÉDIATEMENT SUR LA SOLUTION pour ne pas laisser le jury sur un constat d'échec : ne pas l'activer avant la cinquième commande, et traiter les nouveaux autrement.
-Un jury valorise davantage une limite lucide qu'un score flatteur.</a:t>
-            </a:r>
-            <a:endParaRPr lang="en-US" dirty="0"/>
-          </a:p>
-        </p:txBody>
-      </p:sp>
-      <p:sp>
-        <p:nvSpPr>
-          <p:cNvPr id="4" name="Slide Number Placeholder 3"/>
-          <p:cNvSpPr>
-            <a:spLocks noGrp="1"/>
-          </p:cNvSpPr>
-          <p:nvPr>
-            <p:ph type="sldNum" sz="quarter" idx="10"/>
-          </p:nvPr>
-        </p:nvSpPr>
-        <p:spPr/>
-        <p:txBody>
-          <a:bodyPr/>
-          <a:lstStyle/>
-          <a:p>
-            <a:fld id="{F7021451-1387-4CA6-816F-3879F97B5CBC}" type="slidenum">
-              <a:rPr lang="en-US"/>
-              <a:t>16</a:t>
-            </a:fld>
-            <a:endParaRPr lang="en-US"/>
-          </a:p>
-        </p:txBody>
-      </p:sp>
-    </p:spTree>
-    <p:extLst>
-      <p:ext uri="{BB962C8B-B14F-4D97-AF65-F5344CB8AC3E}">
-        <p14:creationId xmlns:p14="http://schemas.microsoft.com/office/powerpoint/2010/main" val="1024086991"/>
-      </p:ext>
-    </p:extLst>
-  </p:cSld>
-  <p:clrMapOvr>
-    <a:masterClrMapping/>
-  </p:clrMapOvr>
-</p:notes>
-</file>
-
-<file path=ppt/notesSlides/notesSlide17.xml><?xml version="1.0" encoding="utf-8"?>
-<p:notes xmlns:a="http://schemas.openxmlformats.org/drawingml/2006/main" xmlns:r="http://schemas.openxmlformats.org/officeDocument/2006/relationships" xmlns:p="http://schemas.openxmlformats.org/presentationml/2006/main">
-  <p:cSld>
-    <p:spTree>
-      <p:nvGrpSpPr>
-        <p:cNvPr id="1" name=""/>
-        <p:cNvGrpSpPr/>
-        <p:nvPr/>
-      </p:nvGrpSpPr>
-      <p:grpSpPr>
-        <a:xfrm>
-          <a:off x="0" y="0"/>
-          <a:ext cx="0" cy="0"/>
-          <a:chOff x="0" y="0"/>
-          <a:chExt cx="0" cy="0"/>
-        </a:xfrm>
-      </p:grpSpPr>
-      <p:sp>
-        <p:nvSpPr>
-          <p:cNvPr id="2" name="Slide Image Placeholder 1"/>
-          <p:cNvSpPr>
-            <a:spLocks noGrp="1" noRot="1" noChangeAspect="1"/>
-          </p:cNvSpPr>
-          <p:nvPr>
-            <p:ph type="sldImg"/>
-          </p:nvPr>
-        </p:nvSpPr>
-        <p:spPr/>
-      </p:sp>
-      <p:sp>
-        <p:nvSpPr>
-          <p:cNvPr id="3" name="Notes Placeholder 2"/>
-          <p:cNvSpPr>
-            <a:spLocks noGrp="1"/>
-          </p:cNvSpPr>
-          <p:nvPr>
-            <p:ph type="body" idx="1"/>
-          </p:nvPr>
-        </p:nvSpPr>
-        <p:spPr/>
-        <p:txBody>
-          <a:bodyPr/>
-          <a:lstStyle/>
-          <a:p>
-            <a:r>
-              <a:rPr lang="en-US" dirty="0"/>
-              <a:t>40 secondes.
-Énoncez-les calmement, sans vous excuser. Une analyse qui connaît ses bornes vaut mieux qu'une analyse qui prétend n'en avoir aucune.
-FORMULATION UTILE : « ces limites bornent nos conclusions, elles ne les invalident pas ». Chacune de nos quatre recommandations reste valable dans le périmètre décrit.
-SI ON DEMANDE CE QU'IL FAUDRAIT AJOUTER : le prix, en première variable. Une promotion modifie évidemment un rachat, et son absence est notre plus grande inconnue.</a:t>
-            </a:r>
-            <a:endParaRPr lang="en-US" dirty="0"/>
-          </a:p>
-        </p:txBody>
-      </p:sp>
-      <p:sp>
-        <p:nvSpPr>
-          <p:cNvPr id="4" name="Slide Number Placeholder 3"/>
-          <p:cNvSpPr>
-            <a:spLocks noGrp="1"/>
-          </p:cNvSpPr>
-          <p:nvPr>
-            <p:ph type="sldNum" sz="quarter" idx="10"/>
-          </p:nvPr>
-        </p:nvSpPr>
-        <p:spPr/>
-        <p:txBody>
-          <a:bodyPr/>
-          <a:lstStyle/>
-          <a:p>
-            <a:fld id="{F7021451-1387-4CA6-816F-3879F97B5CBC}" type="slidenum">
-              <a:rPr lang="en-US"/>
-              <a:t>17</a:t>
-            </a:fld>
-            <a:endParaRPr lang="en-US"/>
-          </a:p>
-        </p:txBody>
-      </p:sp>
-    </p:spTree>
-    <p:extLst>
-      <p:ext uri="{BB962C8B-B14F-4D97-AF65-F5344CB8AC3E}">
-        <p14:creationId xmlns:p14="http://schemas.microsoft.com/office/powerpoint/2010/main" val="1024086991"/>
-      </p:ext>
-    </p:extLst>
-  </p:cSld>
-  <p:clrMapOvr>
-    <a:masterClrMapping/>
-  </p:clrMapOvr>
-</p:notes>
-</file>
-
-<file path=ppt/notesSlides/notesSlide18.xml><?xml version="1.0" encoding="utf-8"?>
-<p:notes xmlns:a="http://schemas.openxmlformats.org/drawingml/2006/main" xmlns:r="http://schemas.openxmlformats.org/officeDocument/2006/relationships" xmlns:p="http://schemas.openxmlformats.org/presentationml/2006/main">
-  <p:cSld>
-    <p:spTree>
-      <p:nvGrpSpPr>
-        <p:cNvPr id="1" name=""/>
-        <p:cNvGrpSpPr/>
-        <p:nvPr/>
-      </p:nvGrpSpPr>
-      <p:grpSpPr>
-        <a:xfrm>
-          <a:off x="0" y="0"/>
-          <a:ext cx="0" cy="0"/>
-          <a:chOff x="0" y="0"/>
-          <a:chExt cx="0" cy="0"/>
-        </a:xfrm>
-      </p:grpSpPr>
-      <p:sp>
-        <p:nvSpPr>
-          <p:cNvPr id="2" name="Slide Image Placeholder 1"/>
-          <p:cNvSpPr>
-            <a:spLocks noGrp="1" noRot="1" noChangeAspect="1"/>
-          </p:cNvSpPr>
-          <p:nvPr>
-            <p:ph type="sldImg"/>
-          </p:nvPr>
-        </p:nvSpPr>
-        <p:spPr/>
-      </p:sp>
-      <p:sp>
-        <p:nvSpPr>
-          <p:cNvPr id="3" name="Notes Placeholder 2"/>
-          <p:cNvSpPr>
-            <a:spLocks noGrp="1"/>
-          </p:cNvSpPr>
-          <p:nvPr>
-            <p:ph type="body" idx="1"/>
-          </p:nvPr>
-        </p:nvSpPr>
-        <p:spPr/>
-        <p:txBody>
-          <a:bodyPr/>
-          <a:lstStyle/>
-          <a:p>
-            <a:r>
-              <a:rPr lang="en-US" dirty="0"/>
-              <a:t>CLÔTURE — 20 secondes.
-Revenez à la phrase d'ouverture. La boucle se referme, et c'est elle que le jury emportera.
-« Nous avons commencé en disant que vous vendiez une habitude. Nous espérons vous avoir montré que c'est mesurable, et surtout que c'est actionnable. »
-Puis marquez un silence et proposez les questions. Ne meublez pas.</a:t>
-            </a:r>
-            <a:endParaRPr lang="en-US" dirty="0"/>
-          </a:p>
-        </p:txBody>
-      </p:sp>
-      <p:sp>
-        <p:nvSpPr>
-          <p:cNvPr id="4" name="Slide Number Placeholder 3"/>
-          <p:cNvSpPr>
-            <a:spLocks noGrp="1"/>
-          </p:cNvSpPr>
-          <p:nvPr>
-            <p:ph type="sldNum" sz="quarter" idx="10"/>
-          </p:nvPr>
-        </p:nvSpPr>
-        <p:spPr/>
-        <p:txBody>
-          <a:bodyPr/>
-          <a:lstStyle/>
-          <a:p>
-            <a:fld id="{F7021451-1387-4CA6-816F-3879F97B5CBC}" type="slidenum">
-              <a:rPr lang="en-US"/>
-              <a:t>18</a:t>
             </a:fld>
             <a:endParaRPr lang="en-US"/>
           </a:p>
@@ -1434,7 +931,6 @@
 Cette diapositive n'est pas là pour impressionner mais pour établir que vous savez de quoi vous parlez. Insistez sur le contrôle d'intégrité : « nous avons vérifié qu'aucune clé n'était orpheline avant de joindre ».
 SI ON VOUS INTERROGE SUR LES PARTICULARITÉS : 206 209 valeurs manquantes correspondent exactement au nombre de clients — ce sont les premières commandes, qui n'ont par définition pas de précédente. Et 206 209 commandes sans produit sont les dernières de chaque client, retirées à l'origine comme jeu d'épreuve. Aucune n'est une erreur.</a:t>
             </a:r>
-            <a:endParaRPr lang="en-US" dirty="0"/>
           </a:p>
         </p:txBody>
       </p:sp>
@@ -1525,7 +1021,6 @@
 « Six articles sur dix que vous vendez, le client les avait déjà achetés. Votre chiffre d'affaires ne vient pas de la découverte, il vient de la répétition. »
 Tout ce qui suit découle de cette phrase — les dix démonstrations qui viennent ne font que l'établir et en tirer les conséquences.</a:t>
             </a:r>
-            <a:endParaRPr lang="en-US" dirty="0"/>
           </a:p>
         </p:txBody>
       </p:sp>
@@ -1616,7 +1111,6 @@
 LA CONCLUSION À ÉNONCER : le panier ne grossit pas, il se fige. Espérer un panier moyen plus gros est donc vain — c'est un objectif que les données déclarent inatteignable.
 OBJECTION PROBABLE : « la courbe descend à la fin ». Réponse : oui, de 10,4 à 9,0 après la quarantième commande, sur des effectifs plus faibles. Cela renforce l'argument.</a:t>
             </a:r>
-            <a:endParaRPr lang="en-US" dirty="0"/>
           </a:p>
         </p:txBody>
       </p:sp>
@@ -1707,7 +1201,6 @@
 L'INTERPRÉTATION : le début du panier, ce sont les courses automatiques — le client ne réfléchit pas. La fin, c'est l'improvisation. C'est là qu'il est encore disponible pour une suggestion.
 OBJECTION : « les positions élevées sont-elles fiables ? » Seules celles comptant au moins 20 000 lignes de commande sont tracées.</a:t>
             </a:r>
-            <a:endParaRPr lang="en-US" dirty="0"/>
           </a:p>
         </p:txBody>
       </p:sp>
@@ -1798,7 +1291,6 @@
 LA CONSÉQUENCE : leur appliquer le même objectif de fidélisation n'a pas de sens. C'est une erreur de pilotage courante, et elle se corrige sans rien investir.
 SI ON DEMANDE OÙ EST LE RAYON « NON RENSEIGNÉ » : écarté volontairement. Ce sont 1 258 produits non classés — liquide vaisselle, pommes, stylos — dont le taux moyen ne décrit aucun comportement. Ils restent dans les totaux, où ils pèsent 0,21 %.</a:t>
             </a:r>
-            <a:endParaRPr lang="en-US" dirty="0"/>
           </a:p>
         </p:txBody>
       </p:sp>
@@ -1889,7 +1381,6 @@
 LA FORMULE À RETENIR : une référence bio travaille trois fois plus qu'une référence ordinaire. Ce n'est pas une niche, c'est un moteur de fidélité sous-exploité.
 RÉSERVE À ANNONCER VOUS-MÊME : nous repérons le bio par le mot « organic » dans le libellé. C'est une approximation, mais l'écart est trop marqué pour tenir à ce biais. Et attention : nous constatons une association, pas une causalité.</a:t>
             </a:r>
-            <a:endParaRPr lang="en-US" dirty="0"/>
           </a:p>
         </p:txBody>
       </p:sp>
@@ -1980,7 +1471,6 @@
 L'INTERPRÉTATION : ce ne sont pas les mêmes courses. L'une ressemble au réapprovisionnement de semaine, l'autre à la course familiale. Une communication du dimanche ne parle pas au client du lundi.
 LE PIÈGE À ÉVITER : dimensionner la logistique sur la moyenne. Aucun client ne commande à l'heure moyenne.</a:t>
             </a:r>
-            <a:endParaRPr lang="en-US" dirty="0"/>
           </a:p>
         </p:txBody>
       </p:sp>
@@ -2071,7 +1561,6 @@
 LA NUANCE QUI COMPTE : ce n'est pas une hausse générale, c'est un transfert. Les mêmes clients font moins de courses d'appoint et davantage de vraies courses. Le dire ainsi vaut mieux que « le panier moyen augmente ».
 SI ON DEMANDE POURQUOI PAS UNE MOYENNE : parce qu'elle masque la nature de l'effet. Elle passe de 9,3 à 11,1, ce qui suggère une hausse uniforme — les tranches montrent un déplacement.</a:t>
             </a:r>
-            <a:endParaRPr lang="en-US" dirty="0"/>
           </a:p>
         </p:txBody>
       </p:sp>
@@ -2144,6 +1633,11 @@
 <file path=ppt/slideMasters/slideMaster1.xml><?xml version="1.0" encoding="utf-8"?>
 <p:sldMaster xmlns:a="http://schemas.openxmlformats.org/drawingml/2006/main" xmlns:r="http://schemas.openxmlformats.org/officeDocument/2006/relationships" xmlns:p="http://schemas.openxmlformats.org/presentationml/2006/main">
   <p:cSld>
+    <p:bg>
+      <p:bgRef idx="1001">
+        <a:schemeClr val="bg1"/>
+      </p:bgRef>
+    </p:bg>
     <p:spTree>
       <p:nvGrpSpPr>
         <p:cNvPr id="1" name=""/>
@@ -2426,6 +1920,7 @@
         <a:solidFill>
           <a:srgbClr val="0A5A62"/>
         </a:solidFill>
+        <a:effectLst/>
       </p:bgPr>
     </p:bg>
     <p:spTree>
@@ -2463,11 +1958,11 @@
           <a:bodyPr wrap="square" lIns="0" tIns="0" rIns="0" bIns="0" rtlCol="0" anchor="ctr"/>
           <a:lstStyle/>
           <a:p>
-            <a:pPr indent="0" marL="0">
-              <a:buNone/>
-            </a:pPr>
-            <a:r>
-              <a:rPr lang="en-US" sz="1100" b="1" spc="180" kern="0" dirty="0">
+            <a:pPr marL="0" indent="0">
+              <a:buNone/>
+            </a:pPr>
+            <a:r>
+              <a:rPr lang="en-US" sz="1100" b="1" kern="0" spc="180" dirty="0">
                 <a:solidFill>
                   <a:srgbClr val="8FCDD4"/>
                 </a:solidFill>
@@ -2502,7 +1997,7 @@
           <a:bodyPr wrap="square" lIns="0" tIns="0" rIns="0" bIns="0" rtlCol="0" anchor="ctr"/>
           <a:lstStyle/>
           <a:p>
-            <a:pPr indent="0" marL="0">
+            <a:pPr marL="0" indent="0">
               <a:lnSpc>
                 <a:spcPct val="102000"/>
               </a:lnSpc>
@@ -2522,7 +2017,7 @@
             <a:endParaRPr lang="en-US" sz="4200" dirty="0"/>
           </a:p>
           <a:p>
-            <a:pPr indent="0" marL="0">
+            <a:pPr marL="0" indent="0">
               <a:lnSpc>
                 <a:spcPct val="102000"/>
               </a:lnSpc>
@@ -2564,7 +2059,7 @@
           <a:bodyPr wrap="square" lIns="0" tIns="0" rIns="0" bIns="0" rtlCol="0" anchor="ctr"/>
           <a:lstStyle/>
           <a:p>
-            <a:pPr indent="0" marL="0">
+            <a:pPr marL="0" indent="0">
               <a:lnSpc>
                 <a:spcPct val="115000"/>
               </a:lnSpc>
@@ -2601,6 +2096,7 @@
         <a:solidFill>
           <a:srgbClr val="FFFFFF"/>
         </a:solidFill>
+        <a:effectLst/>
       </p:bgPr>
     </p:bg>
     <p:spTree>
@@ -2638,11 +2134,11 @@
           <a:bodyPr wrap="square" lIns="0" tIns="0" rIns="0" bIns="0" rtlCol="0" anchor="ctr"/>
           <a:lstStyle/>
           <a:p>
-            <a:pPr indent="0" marL="0">
-              <a:buNone/>
-            </a:pPr>
-            <a:r>
-              <a:rPr lang="en-US" sz="1050" b="1" spc="160" kern="0" dirty="0">
+            <a:pPr marL="0" indent="0">
+              <a:buNone/>
+            </a:pPr>
+            <a:r>
+              <a:rPr lang="en-US" sz="1050" b="1" kern="0" spc="160" dirty="0">
                 <a:solidFill>
                   <a:srgbClr val="0E7C86"/>
                 </a:solidFill>
@@ -2677,7 +2173,7 @@
           <a:bodyPr wrap="square" lIns="0" tIns="0" rIns="0" bIns="0" rtlCol="0" anchor="ctr"/>
           <a:lstStyle/>
           <a:p>
-            <a:pPr indent="0" marL="0">
+            <a:pPr marL="0" indent="0">
               <a:buNone/>
             </a:pPr>
             <a:r>
@@ -2697,14 +2193,14 @@
       </p:sp>
       <p:pic>
         <p:nvPicPr>
-          <p:cNvPr id="4" name="Image 0" descr="02_projet\_ppt\fig07.png">    </p:cNvPr>
+          <p:cNvPr id="4" name="Image 0" descr="02_projet\_ppt\fig07.png"/>
           <p:cNvPicPr>
             <a:picLocks noChangeAspect="1"/>
           </p:cNvPicPr>
           <p:nvPr/>
         </p:nvPicPr>
         <p:blipFill>
-          <a:blip r:embed="rId1"/>
+          <a:blip r:embed="rId3"/>
           <a:stretch>
             <a:fillRect/>
           </a:stretch>
@@ -2740,7 +2236,7 @@
           <a:bodyPr wrap="square" lIns="0" tIns="0" rIns="0" bIns="0" rtlCol="0" anchor="t"/>
           <a:lstStyle/>
           <a:p>
-            <a:pPr indent="0" marL="0">
+            <a:pPr marL="0" indent="0">
               <a:buNone/>
             </a:pPr>
             <a:r>
@@ -2784,6 +2280,13 @@
             <a:prstDash val="solid"/>
           </a:ln>
         </p:spPr>
+        <p:txBody>
+          <a:bodyPr/>
+          <a:lstStyle/>
+          <a:p>
+            <a:endParaRPr lang="fr-FR"/>
+          </a:p>
+        </p:txBody>
       </p:sp>
       <p:sp>
         <p:nvSpPr>
@@ -2806,11 +2309,11 @@
           <a:bodyPr wrap="square" lIns="0" tIns="0" rIns="0" bIns="0" rtlCol="0" anchor="ctr"/>
           <a:lstStyle/>
           <a:p>
-            <a:pPr indent="0" marL="0">
-              <a:buNone/>
-            </a:pPr>
-            <a:r>
-              <a:rPr lang="en-US" sz="950" b="1" spc="120" kern="0" dirty="0">
+            <a:pPr marL="0" indent="0">
+              <a:buNone/>
+            </a:pPr>
+            <a:r>
+              <a:rPr lang="en-US" sz="950" b="1" kern="0" spc="120" dirty="0">
                 <a:solidFill>
                   <a:srgbClr val="0E7C86"/>
                 </a:solidFill>
@@ -2845,7 +2348,7 @@
           <a:bodyPr wrap="square" lIns="0" tIns="0" rIns="0" bIns="0" rtlCol="0" anchor="t"/>
           <a:lstStyle/>
           <a:p>
-            <a:pPr indent="0" marL="0">
+            <a:pPr marL="0" indent="0">
               <a:lnSpc>
                 <a:spcPct val="110000"/>
               </a:lnSpc>
@@ -2887,7 +2390,7 @@
           <a:bodyPr wrap="square" lIns="0" tIns="0" rIns="0" bIns="0" rtlCol="0" anchor="ctr"/>
           <a:lstStyle/>
           <a:p>
-            <a:pPr indent="0" marL="0">
+            <a:pPr marL="0" indent="0">
               <a:buNone/>
             </a:pPr>
             <a:r>
@@ -2921,6 +2424,7 @@
         <a:solidFill>
           <a:srgbClr val="FFFFFF"/>
         </a:solidFill>
+        <a:effectLst/>
       </p:bgPr>
     </p:bg>
     <p:spTree>
@@ -2958,11 +2462,11 @@
           <a:bodyPr wrap="square" lIns="0" tIns="0" rIns="0" bIns="0" rtlCol="0" anchor="ctr"/>
           <a:lstStyle/>
           <a:p>
-            <a:pPr indent="0" marL="0">
-              <a:buNone/>
-            </a:pPr>
-            <a:r>
-              <a:rPr lang="en-US" sz="1050" b="1" spc="160" kern="0" dirty="0">
+            <a:pPr marL="0" indent="0">
+              <a:buNone/>
+            </a:pPr>
+            <a:r>
+              <a:rPr lang="en-US" sz="1050" b="1" kern="0" spc="160" dirty="0">
                 <a:solidFill>
                   <a:srgbClr val="0E7C86"/>
                 </a:solidFill>
@@ -2997,7 +2501,7 @@
           <a:bodyPr wrap="square" lIns="0" tIns="0" rIns="0" bIns="0" rtlCol="0" anchor="ctr"/>
           <a:lstStyle/>
           <a:p>
-            <a:pPr indent="0" marL="0">
+            <a:pPr marL="0" indent="0">
               <a:buNone/>
             </a:pPr>
             <a:r>
@@ -3017,14 +2521,14 @@
       </p:sp>
       <p:pic>
         <p:nvPicPr>
-          <p:cNvPr id="4" name="Image 0" descr="02_projet\_ppt\fig08.png">    </p:cNvPr>
+          <p:cNvPr id="4" name="Image 0" descr="02_projet\_ppt\fig08.png"/>
           <p:cNvPicPr>
             <a:picLocks noChangeAspect="1"/>
           </p:cNvPicPr>
           <p:nvPr/>
         </p:nvPicPr>
         <p:blipFill>
-          <a:blip r:embed="rId1"/>
+          <a:blip r:embed="rId3"/>
           <a:stretch>
             <a:fillRect/>
           </a:stretch>
@@ -3060,7 +2564,7 @@
           <a:bodyPr wrap="square" lIns="0" tIns="0" rIns="0" bIns="0" rtlCol="0" anchor="t"/>
           <a:lstStyle/>
           <a:p>
-            <a:pPr indent="0" marL="0">
+            <a:pPr marL="0" indent="0">
               <a:buNone/>
             </a:pPr>
             <a:r>
@@ -3104,6 +2608,13 @@
             <a:prstDash val="solid"/>
           </a:ln>
         </p:spPr>
+        <p:txBody>
+          <a:bodyPr/>
+          <a:lstStyle/>
+          <a:p>
+            <a:endParaRPr lang="fr-FR"/>
+          </a:p>
+        </p:txBody>
       </p:sp>
       <p:sp>
         <p:nvSpPr>
@@ -3126,11 +2637,11 @@
           <a:bodyPr wrap="square" lIns="0" tIns="0" rIns="0" bIns="0" rtlCol="0" anchor="ctr"/>
           <a:lstStyle/>
           <a:p>
-            <a:pPr indent="0" marL="0">
-              <a:buNone/>
-            </a:pPr>
-            <a:r>
-              <a:rPr lang="en-US" sz="950" b="1" spc="120" kern="0" dirty="0">
+            <a:pPr marL="0" indent="0">
+              <a:buNone/>
+            </a:pPr>
+            <a:r>
+              <a:rPr lang="en-US" sz="950" b="1" kern="0" spc="120" dirty="0">
                 <a:solidFill>
                   <a:srgbClr val="0E7C86"/>
                 </a:solidFill>
@@ -3165,7 +2676,7 @@
           <a:bodyPr wrap="square" lIns="0" tIns="0" rIns="0" bIns="0" rtlCol="0" anchor="t"/>
           <a:lstStyle/>
           <a:p>
-            <a:pPr indent="0" marL="0">
+            <a:pPr marL="0" indent="0">
               <a:lnSpc>
                 <a:spcPct val="110000"/>
               </a:lnSpc>
@@ -3207,7 +2718,7 @@
           <a:bodyPr wrap="square" lIns="0" tIns="0" rIns="0" bIns="0" rtlCol="0" anchor="ctr"/>
           <a:lstStyle/>
           <a:p>
-            <a:pPr indent="0" marL="0">
+            <a:pPr marL="0" indent="0">
               <a:buNone/>
             </a:pPr>
             <a:r>
@@ -3241,6 +2752,7 @@
         <a:solidFill>
           <a:srgbClr val="FFFFFF"/>
         </a:solidFill>
+        <a:effectLst/>
       </p:bgPr>
     </p:bg>
     <p:spTree>
@@ -3278,11 +2790,11 @@
           <a:bodyPr wrap="square" lIns="0" tIns="0" rIns="0" bIns="0" rtlCol="0" anchor="ctr"/>
           <a:lstStyle/>
           <a:p>
-            <a:pPr indent="0" marL="0">
-              <a:buNone/>
-            </a:pPr>
-            <a:r>
-              <a:rPr lang="en-US" sz="1050" b="1" spc="160" kern="0" dirty="0">
+            <a:pPr marL="0" indent="0">
+              <a:buNone/>
+            </a:pPr>
+            <a:r>
+              <a:rPr lang="en-US" sz="1050" b="1" kern="0" spc="160" dirty="0">
                 <a:solidFill>
                   <a:srgbClr val="0E7C86"/>
                 </a:solidFill>
@@ -3317,7 +2829,7 @@
           <a:bodyPr wrap="square" lIns="0" tIns="0" rIns="0" bIns="0" rtlCol="0" anchor="ctr"/>
           <a:lstStyle/>
           <a:p>
-            <a:pPr indent="0" marL="0">
+            <a:pPr marL="0" indent="0">
               <a:buNone/>
             </a:pPr>
             <a:r>
@@ -3337,14 +2849,14 @@
       </p:sp>
       <p:pic>
         <p:nvPicPr>
-          <p:cNvPr id="4" name="Image 0" descr="02_projet\_ppt\fig09.png">    </p:cNvPr>
+          <p:cNvPr id="4" name="Image 0" descr="02_projet\_ppt\fig09.png"/>
           <p:cNvPicPr>
             <a:picLocks noChangeAspect="1"/>
           </p:cNvPicPr>
           <p:nvPr/>
         </p:nvPicPr>
         <p:blipFill>
-          <a:blip r:embed="rId1"/>
+          <a:blip r:embed="rId3"/>
           <a:stretch>
             <a:fillRect/>
           </a:stretch>
@@ -3380,7 +2892,7 @@
           <a:bodyPr wrap="square" lIns="0" tIns="0" rIns="0" bIns="0" rtlCol="0" anchor="t"/>
           <a:lstStyle/>
           <a:p>
-            <a:pPr indent="0" marL="0">
+            <a:pPr marL="0" indent="0">
               <a:buNone/>
             </a:pPr>
             <a:r>
@@ -3424,6 +2936,13 @@
             <a:prstDash val="solid"/>
           </a:ln>
         </p:spPr>
+        <p:txBody>
+          <a:bodyPr/>
+          <a:lstStyle/>
+          <a:p>
+            <a:endParaRPr lang="fr-FR"/>
+          </a:p>
+        </p:txBody>
       </p:sp>
       <p:sp>
         <p:nvSpPr>
@@ -3446,11 +2965,11 @@
           <a:bodyPr wrap="square" lIns="0" tIns="0" rIns="0" bIns="0" rtlCol="0" anchor="ctr"/>
           <a:lstStyle/>
           <a:p>
-            <a:pPr indent="0" marL="0">
-              <a:buNone/>
-            </a:pPr>
-            <a:r>
-              <a:rPr lang="en-US" sz="950" b="1" spc="120" kern="0" dirty="0">
+            <a:pPr marL="0" indent="0">
+              <a:buNone/>
+            </a:pPr>
+            <a:r>
+              <a:rPr lang="en-US" sz="950" b="1" kern="0" spc="120" dirty="0">
                 <a:solidFill>
                   <a:srgbClr val="0E7C86"/>
                 </a:solidFill>
@@ -3485,7 +3004,7 @@
           <a:bodyPr wrap="square" lIns="0" tIns="0" rIns="0" bIns="0" rtlCol="0" anchor="t"/>
           <a:lstStyle/>
           <a:p>
-            <a:pPr indent="0" marL="0">
+            <a:pPr marL="0" indent="0">
               <a:lnSpc>
                 <a:spcPct val="110000"/>
               </a:lnSpc>
@@ -3527,7 +3046,7 @@
           <a:bodyPr wrap="square" lIns="0" tIns="0" rIns="0" bIns="0" rtlCol="0" anchor="ctr"/>
           <a:lstStyle/>
           <a:p>
-            <a:pPr indent="0" marL="0">
+            <a:pPr marL="0" indent="0">
               <a:buNone/>
             </a:pPr>
             <a:r>
@@ -3561,6 +3080,7 @@
         <a:solidFill>
           <a:srgbClr val="FFFFFF"/>
         </a:solidFill>
+        <a:effectLst/>
       </p:bgPr>
     </p:bg>
     <p:spTree>
@@ -3598,11 +3118,11 @@
           <a:bodyPr wrap="square" lIns="0" tIns="0" rIns="0" bIns="0" rtlCol="0" anchor="ctr"/>
           <a:lstStyle/>
           <a:p>
-            <a:pPr indent="0" marL="0">
-              <a:buNone/>
-            </a:pPr>
-            <a:r>
-              <a:rPr lang="en-US" sz="1050" b="1" spc="160" kern="0" dirty="0">
+            <a:pPr marL="0" indent="0">
+              <a:buNone/>
+            </a:pPr>
+            <a:r>
+              <a:rPr lang="en-US" sz="1050" b="1" kern="0" spc="160" dirty="0">
                 <a:solidFill>
                   <a:srgbClr val="0E7C86"/>
                 </a:solidFill>
@@ -3637,7 +3157,7 @@
           <a:bodyPr wrap="square" lIns="0" tIns="0" rIns="0" bIns="0" rtlCol="0" anchor="ctr"/>
           <a:lstStyle/>
           <a:p>
-            <a:pPr indent="0" marL="0">
+            <a:pPr marL="0" indent="0">
               <a:buNone/>
             </a:pPr>
             <a:r>
@@ -3657,14 +3177,14 @@
       </p:sp>
       <p:pic>
         <p:nvPicPr>
-          <p:cNvPr id="4" name="Image 0" descr="02_projet\_ppt\fig10.png">    </p:cNvPr>
+          <p:cNvPr id="4" name="Image 0" descr="02_projet\_ppt\fig10.png"/>
           <p:cNvPicPr>
             <a:picLocks noChangeAspect="1"/>
           </p:cNvPicPr>
           <p:nvPr/>
         </p:nvPicPr>
         <p:blipFill>
-          <a:blip r:embed="rId1"/>
+          <a:blip r:embed="rId3"/>
           <a:stretch>
             <a:fillRect/>
           </a:stretch>
@@ -3700,7 +3220,7 @@
           <a:bodyPr wrap="square" lIns="0" tIns="0" rIns="0" bIns="0" rtlCol="0" anchor="t"/>
           <a:lstStyle/>
           <a:p>
-            <a:pPr indent="0" marL="0">
+            <a:pPr marL="0" indent="0">
               <a:buNone/>
             </a:pPr>
             <a:r>
@@ -3744,6 +3264,13 @@
             <a:prstDash val="solid"/>
           </a:ln>
         </p:spPr>
+        <p:txBody>
+          <a:bodyPr/>
+          <a:lstStyle/>
+          <a:p>
+            <a:endParaRPr lang="fr-FR"/>
+          </a:p>
+        </p:txBody>
       </p:sp>
       <p:sp>
         <p:nvSpPr>
@@ -3766,11 +3293,11 @@
           <a:bodyPr wrap="square" lIns="0" tIns="0" rIns="0" bIns="0" rtlCol="0" anchor="ctr"/>
           <a:lstStyle/>
           <a:p>
-            <a:pPr indent="0" marL="0">
-              <a:buNone/>
-            </a:pPr>
-            <a:r>
-              <a:rPr lang="en-US" sz="950" b="1" spc="120" kern="0" dirty="0">
+            <a:pPr marL="0" indent="0">
+              <a:buNone/>
+            </a:pPr>
+            <a:r>
+              <a:rPr lang="en-US" sz="950" b="1" kern="0" spc="120" dirty="0">
                 <a:solidFill>
                   <a:srgbClr val="0E7C86"/>
                 </a:solidFill>
@@ -3805,7 +3332,7 @@
           <a:bodyPr wrap="square" lIns="0" tIns="0" rIns="0" bIns="0" rtlCol="0" anchor="t"/>
           <a:lstStyle/>
           <a:p>
-            <a:pPr indent="0" marL="0">
+            <a:pPr marL="0" indent="0">
               <a:lnSpc>
                 <a:spcPct val="110000"/>
               </a:lnSpc>
@@ -3847,7 +3374,7 @@
           <a:bodyPr wrap="square" lIns="0" tIns="0" rIns="0" bIns="0" rtlCol="0" anchor="ctr"/>
           <a:lstStyle/>
           <a:p>
-            <a:pPr indent="0" marL="0">
+            <a:pPr marL="0" indent="0">
               <a:buNone/>
             </a:pPr>
             <a:r>
@@ -3881,6 +3408,7 @@
         <a:solidFill>
           <a:srgbClr val="FFFFFF"/>
         </a:solidFill>
+        <a:effectLst/>
       </p:bgPr>
     </p:bg>
     <p:spTree>
@@ -3918,11 +3446,11 @@
           <a:bodyPr wrap="square" lIns="0" tIns="0" rIns="0" bIns="0" rtlCol="0" anchor="ctr"/>
           <a:lstStyle/>
           <a:p>
-            <a:pPr indent="0" marL="0">
-              <a:buNone/>
-            </a:pPr>
-            <a:r>
-              <a:rPr lang="en-US" sz="1050" b="1" spc="160" kern="0" dirty="0">
+            <a:pPr marL="0" indent="0">
+              <a:buNone/>
+            </a:pPr>
+            <a:r>
+              <a:rPr lang="en-US" sz="1050" b="1" kern="0" spc="160" dirty="0">
                 <a:solidFill>
                   <a:srgbClr val="0E7C86"/>
                 </a:solidFill>
@@ -3957,7 +3485,7 @@
           <a:bodyPr wrap="square" lIns="0" tIns="0" rIns="0" bIns="0" rtlCol="0" anchor="ctr"/>
           <a:lstStyle/>
           <a:p>
-            <a:pPr indent="0" marL="0">
+            <a:pPr marL="0" indent="0">
               <a:buNone/>
             </a:pPr>
             <a:r>
@@ -3999,6 +3527,13 @@
             <a:prstDash val="solid"/>
           </a:ln>
         </p:spPr>
+        <p:txBody>
+          <a:bodyPr/>
+          <a:lstStyle/>
+          <a:p>
+            <a:endParaRPr lang="fr-FR"/>
+          </a:p>
+        </p:txBody>
       </p:sp>
       <p:sp>
         <p:nvSpPr>
@@ -4021,7 +3556,7 @@
           <a:bodyPr wrap="square" lIns="0" tIns="0" rIns="0" bIns="0" rtlCol="0" anchor="ctr"/>
           <a:lstStyle/>
           <a:p>
-            <a:pPr algn="ctr" indent="0" marL="0">
+            <a:pPr marL="0" indent="0" algn="ctr">
               <a:buNone/>
             </a:pPr>
             <a:r>
@@ -4060,7 +3595,7 @@
           <a:bodyPr wrap="square" lIns="0" tIns="0" rIns="0" bIns="0" rtlCol="0" anchor="ctr"/>
           <a:lstStyle/>
           <a:p>
-            <a:pPr indent="0" marL="0">
+            <a:pPr marL="0" indent="0">
               <a:buNone/>
             </a:pPr>
             <a:r>
@@ -4099,7 +3634,7 @@
           <a:bodyPr wrap="square" lIns="0" tIns="0" rIns="0" bIns="0" rtlCol="0" anchor="t"/>
           <a:lstStyle/>
           <a:p>
-            <a:pPr indent="0" marL="0">
+            <a:pPr marL="0" indent="0">
               <a:lnSpc>
                 <a:spcPct val="110000"/>
               </a:lnSpc>
@@ -4144,6 +3679,13 @@
             <a:prstDash val="solid"/>
           </a:ln>
         </p:spPr>
+        <p:txBody>
+          <a:bodyPr/>
+          <a:lstStyle/>
+          <a:p>
+            <a:endParaRPr lang="fr-FR"/>
+          </a:p>
+        </p:txBody>
       </p:sp>
       <p:sp>
         <p:nvSpPr>
@@ -4166,7 +3708,7 @@
           <a:bodyPr wrap="square" lIns="0" tIns="0" rIns="0" bIns="0" rtlCol="0" anchor="ctr"/>
           <a:lstStyle/>
           <a:p>
-            <a:pPr algn="ctr" indent="0" marL="0">
+            <a:pPr marL="0" indent="0" algn="ctr">
               <a:buNone/>
             </a:pPr>
             <a:r>
@@ -4205,7 +3747,7 @@
           <a:bodyPr wrap="square" lIns="0" tIns="0" rIns="0" bIns="0" rtlCol="0" anchor="ctr"/>
           <a:lstStyle/>
           <a:p>
-            <a:pPr indent="0" marL="0">
+            <a:pPr marL="0" indent="0">
               <a:buNone/>
             </a:pPr>
             <a:r>
@@ -4244,7 +3786,7 @@
           <a:bodyPr wrap="square" lIns="0" tIns="0" rIns="0" bIns="0" rtlCol="0" anchor="t"/>
           <a:lstStyle/>
           <a:p>
-            <a:pPr indent="0" marL="0">
+            <a:pPr marL="0" indent="0">
               <a:lnSpc>
                 <a:spcPct val="110000"/>
               </a:lnSpc>
@@ -4289,6 +3831,13 @@
             <a:prstDash val="solid"/>
           </a:ln>
         </p:spPr>
+        <p:txBody>
+          <a:bodyPr/>
+          <a:lstStyle/>
+          <a:p>
+            <a:endParaRPr lang="fr-FR"/>
+          </a:p>
+        </p:txBody>
       </p:sp>
       <p:sp>
         <p:nvSpPr>
@@ -4311,7 +3860,7 @@
           <a:bodyPr wrap="square" lIns="0" tIns="0" rIns="0" bIns="0" rtlCol="0" anchor="ctr"/>
           <a:lstStyle/>
           <a:p>
-            <a:pPr algn="ctr" indent="0" marL="0">
+            <a:pPr marL="0" indent="0" algn="ctr">
               <a:buNone/>
             </a:pPr>
             <a:r>
@@ -4350,7 +3899,7 @@
           <a:bodyPr wrap="square" lIns="0" tIns="0" rIns="0" bIns="0" rtlCol="0" anchor="ctr"/>
           <a:lstStyle/>
           <a:p>
-            <a:pPr indent="0" marL="0">
+            <a:pPr marL="0" indent="0">
               <a:buNone/>
             </a:pPr>
             <a:r>
@@ -4389,7 +3938,7 @@
           <a:bodyPr wrap="square" lIns="0" tIns="0" rIns="0" bIns="0" rtlCol="0" anchor="t"/>
           <a:lstStyle/>
           <a:p>
-            <a:pPr indent="0" marL="0">
+            <a:pPr marL="0" indent="0">
               <a:lnSpc>
                 <a:spcPct val="110000"/>
               </a:lnSpc>
@@ -4434,6 +3983,13 @@
             <a:prstDash val="solid"/>
           </a:ln>
         </p:spPr>
+        <p:txBody>
+          <a:bodyPr/>
+          <a:lstStyle/>
+          <a:p>
+            <a:endParaRPr lang="fr-FR"/>
+          </a:p>
+        </p:txBody>
       </p:sp>
       <p:sp>
         <p:nvSpPr>
@@ -4456,7 +4012,7 @@
           <a:bodyPr wrap="square" lIns="0" tIns="0" rIns="0" bIns="0" rtlCol="0" anchor="ctr"/>
           <a:lstStyle/>
           <a:p>
-            <a:pPr algn="ctr" indent="0" marL="0">
+            <a:pPr marL="0" indent="0" algn="ctr">
               <a:buNone/>
             </a:pPr>
             <a:r>
@@ -4495,7 +4051,7 @@
           <a:bodyPr wrap="square" lIns="0" tIns="0" rIns="0" bIns="0" rtlCol="0" anchor="ctr"/>
           <a:lstStyle/>
           <a:p>
-            <a:pPr indent="0" marL="0">
+            <a:pPr marL="0" indent="0">
               <a:buNone/>
             </a:pPr>
             <a:r>
@@ -4534,7 +4090,7 @@
           <a:bodyPr wrap="square" lIns="0" tIns="0" rIns="0" bIns="0" rtlCol="0" anchor="t"/>
           <a:lstStyle/>
           <a:p>
-            <a:pPr indent="0" marL="0">
+            <a:pPr marL="0" indent="0">
               <a:lnSpc>
                 <a:spcPct val="110000"/>
               </a:lnSpc>
@@ -4565,12 +4121,13 @@
 
 <file path=ppt/slides/slide15.xml><?xml version="1.0" encoding="utf-8"?>
 <p:sld xmlns:a="http://schemas.openxmlformats.org/drawingml/2006/main" xmlns:r="http://schemas.openxmlformats.org/officeDocument/2006/relationships" xmlns:p="http://schemas.openxmlformats.org/presentationml/2006/main">
-  <p:cSld name="Slide 15">
+  <p:cSld name="Slide 18">
     <p:bg>
       <p:bgPr>
         <a:solidFill>
-          <a:srgbClr val="FFFFFF"/>
+          <a:srgbClr val="0A5A62"/>
         </a:solidFill>
+        <a:effectLst/>
       </p:bgPr>
     </p:bg>
     <p:spTree>
@@ -4595,8 +4152,8 @@
         </p:nvSpPr>
         <p:spPr>
           <a:xfrm>
-            <a:off x="594360" y="182880"/>
-            <a:ext cx="10972800" cy="219456"/>
+            <a:off x="594360" y="1920240"/>
+            <a:ext cx="10424160" cy="1371600"/>
           </a:xfrm>
           <a:prstGeom prst="rect">
             <a:avLst/>
@@ -4608,522 +4165,136 @@
           <a:bodyPr wrap="square" lIns="0" tIns="0" rIns="0" bIns="0" rtlCol="0" anchor="ctr"/>
           <a:lstStyle/>
           <a:p>
-            <a:pPr indent="0" marL="0">
-              <a:buNone/>
-            </a:pPr>
-            <a:r>
-              <a:rPr lang="en-US" sz="1050" b="1" spc="160" kern="0" dirty="0">
-                <a:solidFill>
-                  <a:srgbClr val="0E7C86"/>
+            <a:pPr marL="0" indent="0">
+              <a:buNone/>
+            </a:pPr>
+            <a:r>
+              <a:rPr lang="en-US" sz="4600" b="1" dirty="0">
+                <a:solidFill>
+                  <a:srgbClr val="FFFFFF"/>
+                </a:solidFill>
+                <a:latin typeface="Cambria" pitchFamily="34" charset="0"/>
+                <a:ea typeface="Cambria" pitchFamily="34" charset="-122"/>
+                <a:cs typeface="Cambria" pitchFamily="34" charset="-120"/>
+              </a:rPr>
+              <a:t>L'habitude est le produit.</a:t>
+            </a:r>
+            <a:endParaRPr lang="en-US" sz="4600" dirty="0"/>
+          </a:p>
+        </p:txBody>
+      </p:sp>
+      <p:sp>
+        <p:nvSpPr>
+          <p:cNvPr id="3" name="Text 1"/>
+          <p:cNvSpPr txBox="1"/>
+          <p:nvPr/>
+        </p:nvSpPr>
+        <p:spPr>
+          <a:xfrm>
+            <a:off x="594360" y="3429000"/>
+            <a:ext cx="9509760" cy="1188720"/>
+          </a:xfrm>
+          <a:prstGeom prst="rect">
+            <a:avLst/>
+          </a:prstGeom>
+          <a:noFill/>
+          <a:ln/>
+        </p:spPr>
+        <p:txBody>
+          <a:bodyPr wrap="square" lIns="0" tIns="0" rIns="0" bIns="0" rtlCol="0" anchor="ctr"/>
+          <a:lstStyle/>
+          <a:p>
+            <a:pPr marL="0" indent="0">
+              <a:lnSpc>
+                <a:spcPct val="125000"/>
+              </a:lnSpc>
+              <a:buNone/>
+            </a:pPr>
+            <a:r>
+              <a:rPr lang="en-US" sz="1600" dirty="0">
+                <a:solidFill>
+                  <a:srgbClr val="C3DDE0"/>
                 </a:solidFill>
                 <a:latin typeface="Calibri" pitchFamily="34" charset="0"/>
                 <a:ea typeface="Calibri" pitchFamily="34" charset="-122"/>
                 <a:cs typeface="Calibri" pitchFamily="34" charset="-120"/>
               </a:rPr>
-              <a:t>L'OUTIL QUI MET LA PREMIÈRE DÉCISION EN ŒUVRE</a:t>
-            </a:r>
-            <a:endParaRPr lang="en-US" sz="1050" dirty="0"/>
-          </a:p>
-        </p:txBody>
-      </p:sp>
-      <p:sp>
-        <p:nvSpPr>
-          <p:cNvPr id="3" name="Text 1"/>
-          <p:cNvSpPr txBox="1"/>
-          <p:nvPr/>
-        </p:nvSpPr>
-        <p:spPr>
-          <a:xfrm>
-            <a:off x="594360" y="384048"/>
-            <a:ext cx="10972800" cy="658368"/>
-          </a:xfrm>
-          <a:prstGeom prst="rect">
-            <a:avLst/>
-          </a:prstGeom>
-          <a:noFill/>
-          <a:ln/>
-        </p:spPr>
-        <p:txBody>
-          <a:bodyPr wrap="square" lIns="0" tIns="0" rIns="0" bIns="0" rtlCol="0" anchor="ctr"/>
-          <a:lstStyle/>
-          <a:p>
-            <a:pPr indent="0" marL="0">
-              <a:buNone/>
-            </a:pPr>
-            <a:r>
-              <a:rPr lang="en-US" sz="2700" b="1" dirty="0">
-                <a:solidFill>
-                  <a:srgbClr val="16232B"/>
-                </a:solidFill>
-                <a:latin typeface="Cambria" pitchFamily="34" charset="0"/>
-                <a:ea typeface="Cambria" pitchFamily="34" charset="-122"/>
-                <a:cs typeface="Cambria" pitchFamily="34" charset="-120"/>
-              </a:rPr>
-              <a:t>Prédire ce que contiendra la prochaine commande</a:t>
-            </a:r>
-            <a:endParaRPr lang="en-US" sz="2700" dirty="0"/>
-          </a:p>
-        </p:txBody>
-      </p:sp>
-      <p:sp>
-        <p:nvSpPr>
-          <p:cNvPr id="4" name="Shape 2"/>
-          <p:cNvSpPr/>
-          <p:nvPr/>
-        </p:nvSpPr>
-        <p:spPr>
-          <a:xfrm>
-            <a:off x="594360" y="1645920"/>
-            <a:ext cx="2560320" cy="1691640"/>
-          </a:xfrm>
-          <a:prstGeom prst="roundRect">
-            <a:avLst>
-              <a:gd name="adj" fmla="val 3243"/>
-            </a:avLst>
-          </a:prstGeom>
-          <a:solidFill>
-            <a:srgbClr val="EAF3F4"/>
-          </a:solidFill>
-          <a:ln w="12700">
-            <a:solidFill>
-              <a:srgbClr val="D3E5E7"/>
-            </a:solidFill>
-            <a:prstDash val="solid"/>
-          </a:ln>
-        </p:spPr>
-      </p:sp>
-      <p:sp>
-        <p:nvSpPr>
-          <p:cNvPr id="5" name="Text 3"/>
-          <p:cNvSpPr txBox="1"/>
-          <p:nvPr/>
-        </p:nvSpPr>
-        <p:spPr>
-          <a:xfrm>
-            <a:off x="822960" y="1874520"/>
-            <a:ext cx="2103120" cy="640080"/>
-          </a:xfrm>
-          <a:prstGeom prst="rect">
-            <a:avLst/>
-          </a:prstGeom>
-          <a:noFill/>
-          <a:ln/>
-        </p:spPr>
-        <p:txBody>
-          <a:bodyPr wrap="square" lIns="0" tIns="0" rIns="0" bIns="0" rtlCol="0" anchor="ctr"/>
-          <a:lstStyle/>
-          <a:p>
-            <a:pPr indent="0" marL="0">
-              <a:buNone/>
-            </a:pPr>
-            <a:r>
-              <a:rPr lang="en-US" sz="2700" b="1" dirty="0">
-                <a:solidFill>
-                  <a:srgbClr val="0E7C86"/>
-                </a:solidFill>
-                <a:latin typeface="Cambria" pitchFamily="34" charset="0"/>
-                <a:ea typeface="Cambria" pitchFamily="34" charset="-122"/>
-                <a:cs typeface="Cambria" pitchFamily="34" charset="-120"/>
-              </a:rPr>
-              <a:t>83 %</a:t>
-            </a:r>
-            <a:endParaRPr lang="en-US" sz="2700" dirty="0"/>
-          </a:p>
-        </p:txBody>
-      </p:sp>
-      <p:sp>
-        <p:nvSpPr>
-          <p:cNvPr id="6" name="Text 4"/>
-          <p:cNvSpPr txBox="1"/>
-          <p:nvPr/>
-        </p:nvSpPr>
-        <p:spPr>
-          <a:xfrm>
-            <a:off x="822960" y="2560320"/>
-            <a:ext cx="2103120" cy="548640"/>
-          </a:xfrm>
-          <a:prstGeom prst="rect">
-            <a:avLst/>
-          </a:prstGeom>
-          <a:noFill/>
-          <a:ln/>
-        </p:spPr>
-        <p:txBody>
-          <a:bodyPr wrap="square" lIns="0" tIns="0" rIns="0" bIns="0" rtlCol="0" anchor="t"/>
-          <a:lstStyle/>
-          <a:p>
-            <a:pPr indent="0" marL="0">
-              <a:buNone/>
-            </a:pPr>
-            <a:r>
-              <a:rPr lang="en-US" sz="1200" dirty="0">
-                <a:solidFill>
-                  <a:srgbClr val="5D6B75"/>
+              <a:t>La croissance ne viendra pas d'un panier plus gros — les données montrent qu'il ne bouge pas.</a:t>
+            </a:r>
+            <a:endParaRPr lang="en-US" sz="1600" dirty="0"/>
+          </a:p>
+          <a:p>
+            <a:pPr marL="0" indent="0">
+              <a:lnSpc>
+                <a:spcPct val="125000"/>
+              </a:lnSpc>
+              <a:buNone/>
+            </a:pPr>
+            <a:r>
+              <a:rPr lang="en-US" sz="1600" dirty="0">
+                <a:solidFill>
+                  <a:srgbClr val="C3DDE0"/>
                 </a:solidFill>
                 <a:latin typeface="Calibri" pitchFamily="34" charset="0"/>
                 <a:ea typeface="Calibri" pitchFamily="34" charset="-122"/>
                 <a:cs typeface="Calibri" pitchFamily="34" charset="-120"/>
               </a:rPr>
-              <a:t>de classements corrects</a:t>
-            </a:r>
-            <a:endParaRPr lang="en-US" sz="1200" dirty="0"/>
-          </a:p>
-        </p:txBody>
-      </p:sp>
-      <p:sp>
-        <p:nvSpPr>
-          <p:cNvPr id="7" name="Shape 5"/>
-          <p:cNvSpPr/>
-          <p:nvPr/>
-        </p:nvSpPr>
-        <p:spPr>
-          <a:xfrm>
-            <a:off x="3383280" y="1645920"/>
-            <a:ext cx="2560320" cy="1691640"/>
-          </a:xfrm>
-          <a:prstGeom prst="roundRect">
-            <a:avLst>
-              <a:gd name="adj" fmla="val 3243"/>
-            </a:avLst>
-          </a:prstGeom>
-          <a:solidFill>
-            <a:srgbClr val="EAF3F4"/>
-          </a:solidFill>
-          <a:ln w="12700">
-            <a:solidFill>
-              <a:srgbClr val="D3E5E7"/>
-            </a:solidFill>
-            <a:prstDash val="solid"/>
-          </a:ln>
-        </p:spPr>
-      </p:sp>
-      <p:sp>
-        <p:nvSpPr>
-          <p:cNvPr id="8" name="Text 6"/>
-          <p:cNvSpPr txBox="1"/>
-          <p:nvPr/>
-        </p:nvSpPr>
-        <p:spPr>
-          <a:xfrm>
-            <a:off x="3611880" y="1874520"/>
-            <a:ext cx="2103120" cy="640080"/>
-          </a:xfrm>
-          <a:prstGeom prst="rect">
-            <a:avLst/>
-          </a:prstGeom>
-          <a:noFill/>
-          <a:ln/>
-        </p:spPr>
-        <p:txBody>
-          <a:bodyPr wrap="square" lIns="0" tIns="0" rIns="0" bIns="0" rtlCol="0" anchor="ctr"/>
-          <a:lstStyle/>
-          <a:p>
-            <a:pPr indent="0" marL="0">
-              <a:buNone/>
-            </a:pPr>
-            <a:r>
-              <a:rPr lang="en-US" sz="2700" b="1" dirty="0">
-                <a:solidFill>
-                  <a:srgbClr val="0E7C86"/>
-                </a:solidFill>
-                <a:latin typeface="Cambria" pitchFamily="34" charset="0"/>
-                <a:ea typeface="Cambria" pitchFamily="34" charset="-122"/>
-                <a:cs typeface="Cambria" pitchFamily="34" charset="-120"/>
-              </a:rPr>
-              <a:t>1 sur 2</a:t>
-            </a:r>
-            <a:endParaRPr lang="en-US" sz="2700" dirty="0"/>
-          </a:p>
-        </p:txBody>
-      </p:sp>
-      <p:sp>
-        <p:nvSpPr>
-          <p:cNvPr id="9" name="Text 7"/>
-          <p:cNvSpPr txBox="1"/>
-          <p:nvPr/>
-        </p:nvSpPr>
-        <p:spPr>
-          <a:xfrm>
-            <a:off x="3611880" y="2560320"/>
-            <a:ext cx="2103120" cy="548640"/>
-          </a:xfrm>
-          <a:prstGeom prst="rect">
-            <a:avLst/>
-          </a:prstGeom>
-          <a:noFill/>
-          <a:ln/>
-        </p:spPr>
-        <p:txBody>
-          <a:bodyPr wrap="square" lIns="0" tIns="0" rIns="0" bIns="0" rtlCol="0" anchor="t"/>
-          <a:lstStyle/>
-          <a:p>
-            <a:pPr indent="0" marL="0">
-              <a:buNone/>
-            </a:pPr>
-            <a:r>
-              <a:rPr lang="en-US" sz="1200" dirty="0">
-                <a:solidFill>
-                  <a:srgbClr val="5D6B75"/>
+              <a:t>Elle viendra d'une habitude installée </a:t>
+            </a:r>
+            <a:endParaRPr lang="en-US" sz="1600" dirty="0"/>
+          </a:p>
+          <a:p>
+            <a:pPr marL="0" indent="0">
+              <a:lnSpc>
+                <a:spcPct val="125000"/>
+              </a:lnSpc>
+              <a:buNone/>
+            </a:pPr>
+            <a:r>
+              <a:rPr lang="en-US" sz="1600" b="1" dirty="0">
+                <a:solidFill>
+                  <a:srgbClr val="7FD3DB"/>
                 </a:solidFill>
                 <a:latin typeface="Calibri" pitchFamily="34" charset="0"/>
                 <a:ea typeface="Calibri" pitchFamily="34" charset="-122"/>
                 <a:cs typeface="Calibri" pitchFamily="34" charset="-120"/>
               </a:rPr>
-              <a:t>rachats détectés</a:t>
-            </a:r>
-            <a:endParaRPr lang="en-US" sz="1200" dirty="0"/>
-          </a:p>
-        </p:txBody>
-      </p:sp>
-      <p:sp>
-        <p:nvSpPr>
-          <p:cNvPr id="10" name="Shape 8"/>
-          <p:cNvSpPr/>
-          <p:nvPr/>
-        </p:nvSpPr>
-        <p:spPr>
-          <a:xfrm>
-            <a:off x="6172200" y="1645920"/>
-            <a:ext cx="2560320" cy="1691640"/>
-          </a:xfrm>
-          <a:prstGeom prst="roundRect">
-            <a:avLst>
-              <a:gd name="adj" fmla="val 3243"/>
-            </a:avLst>
-          </a:prstGeom>
-          <a:solidFill>
-            <a:srgbClr val="EAF3F4"/>
-          </a:solidFill>
-          <a:ln w="12700">
-            <a:solidFill>
-              <a:srgbClr val="D3E5E7"/>
-            </a:solidFill>
-            <a:prstDash val="solid"/>
-          </a:ln>
-        </p:spPr>
-      </p:sp>
-      <p:sp>
-        <p:nvSpPr>
-          <p:cNvPr id="11" name="Text 9"/>
-          <p:cNvSpPr txBox="1"/>
-          <p:nvPr/>
-        </p:nvSpPr>
-        <p:spPr>
-          <a:xfrm>
-            <a:off x="6400800" y="1874520"/>
-            <a:ext cx="2103120" cy="640080"/>
-          </a:xfrm>
-          <a:prstGeom prst="rect">
-            <a:avLst/>
-          </a:prstGeom>
-          <a:noFill/>
-          <a:ln/>
-        </p:spPr>
-        <p:txBody>
-          <a:bodyPr wrap="square" lIns="0" tIns="0" rIns="0" bIns="0" rtlCol="0" anchor="ctr"/>
-          <a:lstStyle/>
-          <a:p>
-            <a:pPr indent="0" marL="0">
-              <a:buNone/>
-            </a:pPr>
-            <a:r>
-              <a:rPr lang="en-US" sz="2700" b="1" dirty="0">
-                <a:solidFill>
-                  <a:srgbClr val="0E7C86"/>
-                </a:solidFill>
-                <a:latin typeface="Cambria" pitchFamily="34" charset="0"/>
-                <a:ea typeface="Cambria" pitchFamily="34" charset="-122"/>
-                <a:cs typeface="Cambria" pitchFamily="34" charset="-120"/>
-              </a:rPr>
-              <a:t>5 500</a:t>
-            </a:r>
-            <a:endParaRPr lang="en-US" sz="2700" dirty="0"/>
-          </a:p>
-        </p:txBody>
-      </p:sp>
-      <p:sp>
-        <p:nvSpPr>
-          <p:cNvPr id="12" name="Text 10"/>
-          <p:cNvSpPr txBox="1"/>
-          <p:nvPr/>
-        </p:nvSpPr>
-        <p:spPr>
-          <a:xfrm>
-            <a:off x="6400800" y="2560320"/>
-            <a:ext cx="2103120" cy="548640"/>
-          </a:xfrm>
-          <a:prstGeom prst="rect">
-            <a:avLst/>
-          </a:prstGeom>
-          <a:noFill/>
-          <a:ln/>
-        </p:spPr>
-        <p:txBody>
-          <a:bodyPr wrap="square" lIns="0" tIns="0" rIns="0" bIns="0" rtlCol="0" anchor="t"/>
-          <a:lstStyle/>
-          <a:p>
-            <a:pPr indent="0" marL="0">
-              <a:buNone/>
-            </a:pPr>
-            <a:r>
-              <a:rPr lang="en-US" sz="1200" dirty="0">
-                <a:solidFill>
-                  <a:srgbClr val="5D6B75"/>
+              <a:t>plus tôt</a:t>
+            </a:r>
+            <a:r>
+              <a:rPr lang="en-US" sz="1600" dirty="0">
+                <a:solidFill>
+                  <a:srgbClr val="C3DDE0"/>
                 </a:solidFill>
                 <a:latin typeface="Calibri" pitchFamily="34" charset="0"/>
                 <a:ea typeface="Calibri" pitchFamily="34" charset="-122"/>
                 <a:cs typeface="Calibri" pitchFamily="34" charset="-120"/>
               </a:rPr>
-              <a:t>clients traités par seconde</a:t>
-            </a:r>
-            <a:endParaRPr lang="en-US" sz="1200" dirty="0"/>
-          </a:p>
-        </p:txBody>
-      </p:sp>
-      <p:sp>
-        <p:nvSpPr>
-          <p:cNvPr id="13" name="Shape 11"/>
-          <p:cNvSpPr/>
-          <p:nvPr/>
-        </p:nvSpPr>
-        <p:spPr>
-          <a:xfrm>
-            <a:off x="8961120" y="1645920"/>
-            <a:ext cx="2560320" cy="1691640"/>
-          </a:xfrm>
-          <a:prstGeom prst="roundRect">
-            <a:avLst>
-              <a:gd name="adj" fmla="val 3243"/>
-            </a:avLst>
-          </a:prstGeom>
-          <a:solidFill>
-            <a:srgbClr val="EAF3F4"/>
-          </a:solidFill>
-          <a:ln w="12700">
-            <a:solidFill>
-              <a:srgbClr val="D3E5E7"/>
-            </a:solidFill>
-            <a:prstDash val="solid"/>
-          </a:ln>
-        </p:spPr>
-      </p:sp>
-      <p:sp>
-        <p:nvSpPr>
-          <p:cNvPr id="14" name="Text 12"/>
-          <p:cNvSpPr txBox="1"/>
-          <p:nvPr/>
-        </p:nvSpPr>
-        <p:spPr>
-          <a:xfrm>
-            <a:off x="9189720" y="1874520"/>
-            <a:ext cx="2103120" cy="640080"/>
-          </a:xfrm>
-          <a:prstGeom prst="rect">
-            <a:avLst/>
-          </a:prstGeom>
-          <a:noFill/>
-          <a:ln/>
-        </p:spPr>
-        <p:txBody>
-          <a:bodyPr wrap="square" lIns="0" tIns="0" rIns="0" bIns="0" rtlCol="0" anchor="ctr"/>
-          <a:lstStyle/>
-          <a:p>
-            <a:pPr indent="0" marL="0">
-              <a:buNone/>
-            </a:pPr>
-            <a:r>
-              <a:rPr lang="en-US" sz="2700" b="1" dirty="0">
-                <a:solidFill>
-                  <a:srgbClr val="0E7C86"/>
-                </a:solidFill>
-                <a:latin typeface="Cambria" pitchFamily="34" charset="0"/>
-                <a:ea typeface="Cambria" pitchFamily="34" charset="-122"/>
-                <a:cs typeface="Cambria" pitchFamily="34" charset="-120"/>
-              </a:rPr>
-              <a:t>4</a:t>
-            </a:r>
-            <a:endParaRPr lang="en-US" sz="2700" dirty="0"/>
-          </a:p>
-        </p:txBody>
-      </p:sp>
-      <p:sp>
-        <p:nvSpPr>
-          <p:cNvPr id="15" name="Text 13"/>
-          <p:cNvSpPr txBox="1"/>
-          <p:nvPr/>
-        </p:nvSpPr>
-        <p:spPr>
-          <a:xfrm>
-            <a:off x="9189720" y="2560320"/>
-            <a:ext cx="2103120" cy="548640"/>
-          </a:xfrm>
-          <a:prstGeom prst="rect">
-            <a:avLst/>
-          </a:prstGeom>
-          <a:noFill/>
-          <a:ln/>
-        </p:spPr>
-        <p:txBody>
-          <a:bodyPr wrap="square" lIns="0" tIns="0" rIns="0" bIns="0" rtlCol="0" anchor="t"/>
-          <a:lstStyle/>
-          <a:p>
-            <a:pPr indent="0" marL="0">
-              <a:buNone/>
-            </a:pPr>
-            <a:r>
-              <a:rPr lang="en-US" sz="1200" dirty="0">
-                <a:solidFill>
-                  <a:srgbClr val="5D6B75"/>
+              <a:t> et </a:t>
+            </a:r>
+            <a:r>
+              <a:rPr lang="en-US" sz="1600" b="1" dirty="0">
+                <a:solidFill>
+                  <a:srgbClr val="7FD3DB"/>
                 </a:solidFill>
                 <a:latin typeface="Calibri" pitchFamily="34" charset="0"/>
                 <a:ea typeface="Calibri" pitchFamily="34" charset="-122"/>
                 <a:cs typeface="Calibri" pitchFamily="34" charset="-120"/>
               </a:rPr>
-              <a:t>modèles comparés</a:t>
-            </a:r>
-            <a:endParaRPr lang="en-US" sz="1200" dirty="0"/>
-          </a:p>
-        </p:txBody>
-      </p:sp>
-      <p:sp>
-        <p:nvSpPr>
-          <p:cNvPr id="16" name="Text 14"/>
-          <p:cNvSpPr txBox="1"/>
-          <p:nvPr/>
-        </p:nvSpPr>
-        <p:spPr>
-          <a:xfrm>
-            <a:off x="594360" y="3749040"/>
-            <a:ext cx="10424160" cy="640080"/>
-          </a:xfrm>
-          <a:prstGeom prst="rect">
-            <a:avLst/>
-          </a:prstGeom>
-          <a:noFill/>
-          <a:ln/>
-        </p:spPr>
-        <p:txBody>
-          <a:bodyPr wrap="square" lIns="0" tIns="0" rIns="0" bIns="0" rtlCol="0" anchor="ctr"/>
-          <a:lstStyle/>
-          <a:p>
-            <a:pPr indent="0" marL="0">
-              <a:lnSpc>
-                <a:spcPct val="120000"/>
-              </a:lnSpc>
-              <a:buNone/>
-            </a:pPr>
-            <a:r>
-              <a:rPr lang="en-US" sz="1350" dirty="0">
-                <a:solidFill>
-                  <a:srgbClr val="5D6B75"/>
+              <a:t>plus large</a:t>
+            </a:r>
+            <a:r>
+              <a:rPr lang="en-US" sz="1600" dirty="0">
+                <a:solidFill>
+                  <a:srgbClr val="C3DDE0"/>
                 </a:solidFill>
                 <a:latin typeface="Calibri" pitchFamily="34" charset="0"/>
                 <a:ea typeface="Calibri" pitchFamily="34" charset="-122"/>
                 <a:cs typeface="Calibri" pitchFamily="34" charset="-120"/>
               </a:rPr>
-              <a:t>Nous avons volontairement présenté ce modèle en tableaux plutôt qu'en graphiques : une métrique se compare, elle ne se contemple pas.</a:t>
-            </a:r>
-            <a:endParaRPr lang="en-US" sz="1350" dirty="0"/>
+              <a:t>.</a:t>
+            </a:r>
+            <a:endParaRPr lang="en-US" sz="1600" dirty="0"/>
           </a:p>
         </p:txBody>
       </p:sp>
@@ -5135,14 +4306,15 @@
 </p:sld>
 </file>
 
-<file path=ppt/slides/slide16.xml><?xml version="1.0" encoding="utf-8"?>
+<file path=ppt/slides/slide2.xml><?xml version="1.0" encoding="utf-8"?>
 <p:sld xmlns:a="http://schemas.openxmlformats.org/drawingml/2006/main" xmlns:r="http://schemas.openxmlformats.org/officeDocument/2006/relationships" xmlns:p="http://schemas.openxmlformats.org/presentationml/2006/main">
-  <p:cSld name="Slide 16">
+  <p:cSld name="Slide 2">
     <p:bg>
       <p:bgPr>
         <a:solidFill>
           <a:srgbClr val="FFFFFF"/>
         </a:solidFill>
+        <a:effectLst/>
       </p:bgPr>
     </p:bg>
     <p:spTree>
@@ -5180,11 +4352,11 @@
           <a:bodyPr wrap="square" lIns="0" tIns="0" rIns="0" bIns="0" rtlCol="0" anchor="ctr"/>
           <a:lstStyle/>
           <a:p>
-            <a:pPr indent="0" marL="0">
-              <a:buNone/>
-            </a:pPr>
-            <a:r>
-              <a:rPr lang="en-US" sz="1050" b="1" spc="160" kern="0" dirty="0">
+            <a:pPr marL="0" indent="0">
+              <a:buNone/>
+            </a:pPr>
+            <a:r>
+              <a:rPr lang="en-US" sz="1050" b="1" kern="0" spc="160" dirty="0">
                 <a:solidFill>
                   <a:srgbClr val="0E7C86"/>
                 </a:solidFill>
@@ -5192,7 +4364,7 @@
                 <a:ea typeface="Calibri" pitchFamily="34" charset="-122"/>
                 <a:cs typeface="Calibri" pitchFamily="34" charset="-120"/>
               </a:rPr>
-              <a:t>CE QUE NOUS DEVONS VOUS DIRE</a:t>
+              <a:t>CE SUR QUOI NOUS NOUS APPUYONS</a:t>
             </a:r>
             <a:endParaRPr lang="en-US" sz="1050" dirty="0"/>
           </a:p>
@@ -5219,7 +4391,7 @@
           <a:bodyPr wrap="square" lIns="0" tIns="0" rIns="0" bIns="0" rtlCol="0" anchor="ctr"/>
           <a:lstStyle/>
           <a:p>
-            <a:pPr indent="0" marL="0">
+            <a:pPr marL="0" indent="0">
               <a:buNone/>
             </a:pPr>
             <a:r>
@@ -5231,7 +4403,7 @@
                 <a:ea typeface="Cambria" pitchFamily="34" charset="-122"/>
                 <a:cs typeface="Cambria" pitchFamily="34" charset="-120"/>
               </a:rPr>
-              <a:t>L'outil sert le moins bien ceux qui comptent le plus</a:t>
+              <a:t>Quatre ans de courses, cinq fichiers, aucune approximation</a:t>
             </a:r>
             <a:endParaRPr lang="en-US" sz="2700" dirty="0"/>
           </a:p>
@@ -5245,24 +4417,31 @@
         </p:nvSpPr>
         <p:spPr>
           <a:xfrm>
-            <a:off x="594360" y="1572768"/>
-            <a:ext cx="7680960" cy="566928"/>
+            <a:off x="594360" y="1600200"/>
+            <a:ext cx="2560320" cy="1783080"/>
           </a:xfrm>
           <a:prstGeom prst="roundRect">
             <a:avLst>
-              <a:gd name="adj" fmla="val 8065"/>
+              <a:gd name="adj" fmla="val 3077"/>
             </a:avLst>
           </a:prstGeom>
           <a:solidFill>
-            <a:srgbClr val="F5F8F9"/>
+            <a:srgbClr val="EAF3F4"/>
           </a:solidFill>
           <a:ln w="12700">
             <a:solidFill>
-              <a:srgbClr val="E2E9EB"/>
+              <a:srgbClr val="D3E5E7"/>
             </a:solidFill>
             <a:prstDash val="solid"/>
           </a:ln>
         </p:spPr>
+        <p:txBody>
+          <a:bodyPr/>
+          <a:lstStyle/>
+          <a:p>
+            <a:endParaRPr lang="fr-FR"/>
+          </a:p>
+        </p:txBody>
       </p:sp>
       <p:sp>
         <p:nvSpPr>
@@ -5272,8 +4451,8 @@
         </p:nvSpPr>
         <p:spPr>
           <a:xfrm>
-            <a:off x="868680" y="1572768"/>
-            <a:ext cx="5669280" cy="566928"/>
+            <a:off x="822960" y="1874520"/>
+            <a:ext cx="2103120" cy="685800"/>
           </a:xfrm>
           <a:prstGeom prst="rect">
             <a:avLst/>
@@ -5285,11 +4464,50 @@
           <a:bodyPr wrap="square" lIns="0" tIns="0" rIns="0" bIns="0" rtlCol="0" anchor="ctr"/>
           <a:lstStyle/>
           <a:p>
-            <a:pPr indent="0" marL="0">
-              <a:buNone/>
-            </a:pPr>
-            <a:r>
-              <a:rPr lang="en-US" sz="1350" dirty="0">
+            <a:pPr marL="0" indent="0">
+              <a:buNone/>
+            </a:pPr>
+            <a:r>
+              <a:rPr lang="en-US" sz="3000" b="1" dirty="0">
+                <a:solidFill>
+                  <a:srgbClr val="0E7C86"/>
+                </a:solidFill>
+                <a:latin typeface="Cambria" pitchFamily="34" charset="0"/>
+                <a:ea typeface="Cambria" pitchFamily="34" charset="-122"/>
+                <a:cs typeface="Cambria" pitchFamily="34" charset="-120"/>
+              </a:rPr>
+              <a:t>3,42 M</a:t>
+            </a:r>
+            <a:endParaRPr lang="en-US" sz="3000" dirty="0"/>
+          </a:p>
+        </p:txBody>
+      </p:sp>
+      <p:sp>
+        <p:nvSpPr>
+          <p:cNvPr id="6" name="Text 4"/>
+          <p:cNvSpPr txBox="1"/>
+          <p:nvPr/>
+        </p:nvSpPr>
+        <p:spPr>
+          <a:xfrm>
+            <a:off x="822960" y="2606040"/>
+            <a:ext cx="2103120" cy="548640"/>
+          </a:xfrm>
+          <a:prstGeom prst="rect">
+            <a:avLst/>
+          </a:prstGeom>
+          <a:noFill/>
+          <a:ln/>
+        </p:spPr>
+        <p:txBody>
+          <a:bodyPr wrap="square" lIns="0" tIns="0" rIns="0" bIns="0" rtlCol="0" anchor="t"/>
+          <a:lstStyle/>
+          <a:p>
+            <a:pPr marL="0" indent="0">
+              <a:buNone/>
+            </a:pPr>
+            <a:r>
+              <a:rPr lang="en-US" sz="1200" dirty="0">
                 <a:solidFill>
                   <a:srgbClr val="5D6B75"/>
                 </a:solidFill>
@@ -5297,22 +4515,56 @@
                 <a:ea typeface="Calibri" pitchFamily="34" charset="-122"/>
                 <a:cs typeface="Calibri" pitchFamily="34" charset="-120"/>
               </a:rPr>
-              <a:t>Clients intensifs (plus de 30 commandes)</a:t>
-            </a:r>
-            <a:endParaRPr lang="en-US" sz="1350" dirty="0"/>
-          </a:p>
-        </p:txBody>
-      </p:sp>
-      <p:sp>
-        <p:nvSpPr>
-          <p:cNvPr id="6" name="Text 4"/>
-          <p:cNvSpPr txBox="1"/>
-          <p:nvPr/>
-        </p:nvSpPr>
-        <p:spPr>
-          <a:xfrm>
-            <a:off x="6629400" y="1572768"/>
-            <a:ext cx="1371600" cy="566928"/>
+              <a:t>commandes analysées</a:t>
+            </a:r>
+            <a:endParaRPr lang="en-US" sz="1200" dirty="0"/>
+          </a:p>
+        </p:txBody>
+      </p:sp>
+      <p:sp>
+        <p:nvSpPr>
+          <p:cNvPr id="7" name="Shape 5"/>
+          <p:cNvSpPr/>
+          <p:nvPr/>
+        </p:nvSpPr>
+        <p:spPr>
+          <a:xfrm>
+            <a:off x="3383280" y="1600200"/>
+            <a:ext cx="2560320" cy="1783080"/>
+          </a:xfrm>
+          <a:prstGeom prst="roundRect">
+            <a:avLst>
+              <a:gd name="adj" fmla="val 3077"/>
+            </a:avLst>
+          </a:prstGeom>
+          <a:solidFill>
+            <a:srgbClr val="EAF3F4"/>
+          </a:solidFill>
+          <a:ln w="12700">
+            <a:solidFill>
+              <a:srgbClr val="D3E5E7"/>
+            </a:solidFill>
+            <a:prstDash val="solid"/>
+          </a:ln>
+        </p:spPr>
+        <p:txBody>
+          <a:bodyPr/>
+          <a:lstStyle/>
+          <a:p>
+            <a:endParaRPr lang="fr-FR"/>
+          </a:p>
+        </p:txBody>
+      </p:sp>
+      <p:sp>
+        <p:nvSpPr>
+          <p:cNvPr id="8" name="Text 6"/>
+          <p:cNvSpPr txBox="1"/>
+          <p:nvPr/>
+        </p:nvSpPr>
+        <p:spPr>
+          <a:xfrm>
+            <a:off x="3611880" y="1874520"/>
+            <a:ext cx="2103120" cy="685800"/>
           </a:xfrm>
           <a:prstGeom prst="rect">
             <a:avLst/>
@@ -5324,11 +4576,11 @@
           <a:bodyPr wrap="square" lIns="0" tIns="0" rIns="0" bIns="0" rtlCol="0" anchor="ctr"/>
           <a:lstStyle/>
           <a:p>
-            <a:pPr algn="r" indent="0" marL="0">
-              <a:buNone/>
-            </a:pPr>
-            <a:r>
-              <a:rPr lang="en-US" sz="1700" b="1" dirty="0">
+            <a:pPr marL="0" indent="0">
+              <a:buNone/>
+            </a:pPr>
+            <a:r>
+              <a:rPr lang="en-US" sz="3000" b="1" dirty="0">
                 <a:solidFill>
                   <a:srgbClr val="0E7C86"/>
                 </a:solidFill>
@@ -5336,49 +4588,95 @@
                 <a:ea typeface="Cambria" pitchFamily="34" charset="-122"/>
                 <a:cs typeface="Cambria" pitchFamily="34" charset="-120"/>
               </a:rPr>
-              <a:t>0,854</a:t>
-            </a:r>
-            <a:endParaRPr lang="en-US" sz="1700" dirty="0"/>
-          </a:p>
-        </p:txBody>
-      </p:sp>
-      <p:sp>
-        <p:nvSpPr>
-          <p:cNvPr id="7" name="Shape 5"/>
+              <a:t>206 209</a:t>
+            </a:r>
+            <a:endParaRPr lang="en-US" sz="3000" dirty="0"/>
+          </a:p>
+        </p:txBody>
+      </p:sp>
+      <p:sp>
+        <p:nvSpPr>
+          <p:cNvPr id="9" name="Text 7"/>
+          <p:cNvSpPr txBox="1"/>
+          <p:nvPr/>
+        </p:nvSpPr>
+        <p:spPr>
+          <a:xfrm>
+            <a:off x="3611880" y="2606040"/>
+            <a:ext cx="2103120" cy="548640"/>
+          </a:xfrm>
+          <a:prstGeom prst="rect">
+            <a:avLst/>
+          </a:prstGeom>
+          <a:noFill/>
+          <a:ln/>
+        </p:spPr>
+        <p:txBody>
+          <a:bodyPr wrap="square" lIns="0" tIns="0" rIns="0" bIns="0" rtlCol="0" anchor="t"/>
+          <a:lstStyle/>
+          <a:p>
+            <a:pPr marL="0" indent="0">
+              <a:buNone/>
+            </a:pPr>
+            <a:r>
+              <a:rPr lang="en-US" sz="1200" dirty="0">
+                <a:solidFill>
+                  <a:srgbClr val="5D6B75"/>
+                </a:solidFill>
+                <a:latin typeface="Calibri" pitchFamily="34" charset="0"/>
+                <a:ea typeface="Calibri" pitchFamily="34" charset="-122"/>
+                <a:cs typeface="Calibri" pitchFamily="34" charset="-120"/>
+              </a:rPr>
+              <a:t>clients suivis</a:t>
+            </a:r>
+            <a:endParaRPr lang="en-US" sz="1200" dirty="0"/>
+          </a:p>
+        </p:txBody>
+      </p:sp>
+      <p:sp>
+        <p:nvSpPr>
+          <p:cNvPr id="10" name="Shape 8"/>
           <p:cNvSpPr/>
           <p:nvPr/>
         </p:nvSpPr>
         <p:spPr>
           <a:xfrm>
-            <a:off x="594360" y="2286000"/>
-            <a:ext cx="7680960" cy="566928"/>
+            <a:off x="6172200" y="1600200"/>
+            <a:ext cx="2560320" cy="1783080"/>
           </a:xfrm>
           <a:prstGeom prst="roundRect">
             <a:avLst>
-              <a:gd name="adj" fmla="val 8065"/>
+              <a:gd name="adj" fmla="val 3077"/>
             </a:avLst>
           </a:prstGeom>
           <a:solidFill>
-            <a:srgbClr val="F5F8F9"/>
+            <a:srgbClr val="EAF3F4"/>
           </a:solidFill>
           <a:ln w="12700">
             <a:solidFill>
-              <a:srgbClr val="E2E9EB"/>
+              <a:srgbClr val="D3E5E7"/>
             </a:solidFill>
             <a:prstDash val="solid"/>
           </a:ln>
         </p:spPr>
-      </p:sp>
-      <p:sp>
-        <p:nvSpPr>
-          <p:cNvPr id="8" name="Text 6"/>
-          <p:cNvSpPr txBox="1"/>
-          <p:nvPr/>
-        </p:nvSpPr>
-        <p:spPr>
-          <a:xfrm>
-            <a:off x="868680" y="2286000"/>
-            <a:ext cx="5669280" cy="566928"/>
+        <p:txBody>
+          <a:bodyPr/>
+          <a:lstStyle/>
+          <a:p>
+            <a:endParaRPr lang="fr-FR"/>
+          </a:p>
+        </p:txBody>
+      </p:sp>
+      <p:sp>
+        <p:nvSpPr>
+          <p:cNvPr id="11" name="Text 9"/>
+          <p:cNvSpPr txBox="1"/>
+          <p:nvPr/>
+        </p:nvSpPr>
+        <p:spPr>
+          <a:xfrm>
+            <a:off x="6400800" y="1874520"/>
+            <a:ext cx="2103120" cy="685800"/>
           </a:xfrm>
           <a:prstGeom prst="rect">
             <a:avLst/>
@@ -5390,11 +4688,50 @@
           <a:bodyPr wrap="square" lIns="0" tIns="0" rIns="0" bIns="0" rtlCol="0" anchor="ctr"/>
           <a:lstStyle/>
           <a:p>
-            <a:pPr indent="0" marL="0">
-              <a:buNone/>
-            </a:pPr>
-            <a:r>
-              <a:rPr lang="en-US" sz="1350" dirty="0">
+            <a:pPr marL="0" indent="0">
+              <a:buNone/>
+            </a:pPr>
+            <a:r>
+              <a:rPr lang="en-US" sz="3000" b="1" dirty="0">
+                <a:solidFill>
+                  <a:srgbClr val="0E7C86"/>
+                </a:solidFill>
+                <a:latin typeface="Cambria" pitchFamily="34" charset="0"/>
+                <a:ea typeface="Cambria" pitchFamily="34" charset="-122"/>
+                <a:cs typeface="Cambria" pitchFamily="34" charset="-120"/>
+              </a:rPr>
+              <a:t>32,4 M</a:t>
+            </a:r>
+            <a:endParaRPr lang="en-US" sz="3000" dirty="0"/>
+          </a:p>
+        </p:txBody>
+      </p:sp>
+      <p:sp>
+        <p:nvSpPr>
+          <p:cNvPr id="12" name="Text 10"/>
+          <p:cNvSpPr txBox="1"/>
+          <p:nvPr/>
+        </p:nvSpPr>
+        <p:spPr>
+          <a:xfrm>
+            <a:off x="6400800" y="2606040"/>
+            <a:ext cx="2103120" cy="548640"/>
+          </a:xfrm>
+          <a:prstGeom prst="rect">
+            <a:avLst/>
+          </a:prstGeom>
+          <a:noFill/>
+          <a:ln/>
+        </p:spPr>
+        <p:txBody>
+          <a:bodyPr wrap="square" lIns="0" tIns="0" rIns="0" bIns="0" rtlCol="0" anchor="t"/>
+          <a:lstStyle/>
+          <a:p>
+            <a:pPr marL="0" indent="0">
+              <a:buNone/>
+            </a:pPr>
+            <a:r>
+              <a:rPr lang="en-US" sz="1200" dirty="0">
                 <a:solidFill>
                   <a:srgbClr val="5D6B75"/>
                 </a:solidFill>
@@ -5402,22 +4739,56 @@
                 <a:ea typeface="Calibri" pitchFamily="34" charset="-122"/>
                 <a:cs typeface="Calibri" pitchFamily="34" charset="-120"/>
               </a:rPr>
-              <a:t>Clients fidèles (16 à 30)</a:t>
-            </a:r>
-            <a:endParaRPr lang="en-US" sz="1350" dirty="0"/>
-          </a:p>
-        </p:txBody>
-      </p:sp>
-      <p:sp>
-        <p:nvSpPr>
-          <p:cNvPr id="9" name="Text 7"/>
-          <p:cNvSpPr txBox="1"/>
-          <p:nvPr/>
-        </p:nvSpPr>
-        <p:spPr>
-          <a:xfrm>
-            <a:off x="6629400" y="2286000"/>
-            <a:ext cx="1371600" cy="566928"/>
+              <a:t>lignes de produits</a:t>
+            </a:r>
+            <a:endParaRPr lang="en-US" sz="1200" dirty="0"/>
+          </a:p>
+        </p:txBody>
+      </p:sp>
+      <p:sp>
+        <p:nvSpPr>
+          <p:cNvPr id="13" name="Shape 11"/>
+          <p:cNvSpPr/>
+          <p:nvPr/>
+        </p:nvSpPr>
+        <p:spPr>
+          <a:xfrm>
+            <a:off x="8961120" y="1600200"/>
+            <a:ext cx="2560320" cy="1783080"/>
+          </a:xfrm>
+          <a:prstGeom prst="roundRect">
+            <a:avLst>
+              <a:gd name="adj" fmla="val 3077"/>
+            </a:avLst>
+          </a:prstGeom>
+          <a:solidFill>
+            <a:srgbClr val="EAF3F4"/>
+          </a:solidFill>
+          <a:ln w="12700">
+            <a:solidFill>
+              <a:srgbClr val="D3E5E7"/>
+            </a:solidFill>
+            <a:prstDash val="solid"/>
+          </a:ln>
+        </p:spPr>
+        <p:txBody>
+          <a:bodyPr/>
+          <a:lstStyle/>
+          <a:p>
+            <a:endParaRPr lang="fr-FR"/>
+          </a:p>
+        </p:txBody>
+      </p:sp>
+      <p:sp>
+        <p:nvSpPr>
+          <p:cNvPr id="14" name="Text 12"/>
+          <p:cNvSpPr txBox="1"/>
+          <p:nvPr/>
+        </p:nvSpPr>
+        <p:spPr>
+          <a:xfrm>
+            <a:off x="9189720" y="1874520"/>
+            <a:ext cx="2103120" cy="685800"/>
           </a:xfrm>
           <a:prstGeom prst="rect">
             <a:avLst/>
@@ -5429,77 +4800,50 @@
           <a:bodyPr wrap="square" lIns="0" tIns="0" rIns="0" bIns="0" rtlCol="0" anchor="ctr"/>
           <a:lstStyle/>
           <a:p>
-            <a:pPr algn="r" indent="0" marL="0">
-              <a:buNone/>
-            </a:pPr>
-            <a:r>
-              <a:rPr lang="en-US" sz="1700" b="1" dirty="0">
-                <a:solidFill>
-                  <a:srgbClr val="16232B"/>
+            <a:pPr marL="0" indent="0">
+              <a:buNone/>
+            </a:pPr>
+            <a:r>
+              <a:rPr lang="en-US" sz="3000" b="1" dirty="0">
+                <a:solidFill>
+                  <a:srgbClr val="0E7C86"/>
                 </a:solidFill>
                 <a:latin typeface="Cambria" pitchFamily="34" charset="0"/>
                 <a:ea typeface="Cambria" pitchFamily="34" charset="-122"/>
                 <a:cs typeface="Cambria" pitchFamily="34" charset="-120"/>
               </a:rPr>
-              <a:t>0,833</a:t>
-            </a:r>
-            <a:endParaRPr lang="en-US" sz="1700" dirty="0"/>
-          </a:p>
-        </p:txBody>
-      </p:sp>
-      <p:sp>
-        <p:nvSpPr>
-          <p:cNvPr id="10" name="Shape 8"/>
-          <p:cNvSpPr/>
-          <p:nvPr/>
-        </p:nvSpPr>
-        <p:spPr>
-          <a:xfrm>
-            <a:off x="594360" y="2999232"/>
-            <a:ext cx="7680960" cy="566928"/>
-          </a:xfrm>
-          <a:prstGeom prst="roundRect">
-            <a:avLst>
-              <a:gd name="adj" fmla="val 8065"/>
-            </a:avLst>
-          </a:prstGeom>
-          <a:solidFill>
-            <a:srgbClr val="F5F8F9"/>
-          </a:solidFill>
-          <a:ln w="12700">
-            <a:solidFill>
-              <a:srgbClr val="E2E9EB"/>
-            </a:solidFill>
-            <a:prstDash val="solid"/>
-          </a:ln>
-        </p:spPr>
-      </p:sp>
-      <p:sp>
-        <p:nvSpPr>
-          <p:cNvPr id="11" name="Text 9"/>
-          <p:cNvSpPr txBox="1"/>
-          <p:nvPr/>
-        </p:nvSpPr>
-        <p:spPr>
-          <a:xfrm>
-            <a:off x="868680" y="2999232"/>
-            <a:ext cx="5669280" cy="566928"/>
-          </a:xfrm>
-          <a:prstGeom prst="rect">
-            <a:avLst/>
-          </a:prstGeom>
-          <a:noFill/>
-          <a:ln/>
-        </p:spPr>
-        <p:txBody>
-          <a:bodyPr wrap="square" lIns="0" tIns="0" rIns="0" bIns="0" rtlCol="0" anchor="ctr"/>
-          <a:lstStyle/>
-          <a:p>
-            <a:pPr indent="0" marL="0">
-              <a:buNone/>
-            </a:pPr>
-            <a:r>
-              <a:rPr lang="en-US" sz="1350" dirty="0">
+              <a:t>49 688</a:t>
+            </a:r>
+            <a:endParaRPr lang="en-US" sz="3000" dirty="0"/>
+          </a:p>
+        </p:txBody>
+      </p:sp>
+      <p:sp>
+        <p:nvSpPr>
+          <p:cNvPr id="15" name="Text 13"/>
+          <p:cNvSpPr txBox="1"/>
+          <p:nvPr/>
+        </p:nvSpPr>
+        <p:spPr>
+          <a:xfrm>
+            <a:off x="9189720" y="2606040"/>
+            <a:ext cx="2103120" cy="548640"/>
+          </a:xfrm>
+          <a:prstGeom prst="rect">
+            <a:avLst/>
+          </a:prstGeom>
+          <a:noFill/>
+          <a:ln/>
+        </p:spPr>
+        <p:txBody>
+          <a:bodyPr wrap="square" lIns="0" tIns="0" rIns="0" bIns="0" rtlCol="0" anchor="t"/>
+          <a:lstStyle/>
+          <a:p>
+            <a:pPr marL="0" indent="0">
+              <a:buNone/>
+            </a:pPr>
+            <a:r>
+              <a:rPr lang="en-US" sz="1200" dirty="0">
                 <a:solidFill>
                   <a:srgbClr val="5D6B75"/>
                 </a:solidFill>
@@ -5507,22 +4851,22 @@
                 <a:ea typeface="Calibri" pitchFamily="34" charset="-122"/>
                 <a:cs typeface="Calibri" pitchFamily="34" charset="-120"/>
               </a:rPr>
-              <a:t>Clients réguliers (8 à 15)</a:t>
-            </a:r>
-            <a:endParaRPr lang="en-US" sz="1350" dirty="0"/>
-          </a:p>
-        </p:txBody>
-      </p:sp>
-      <p:sp>
-        <p:nvSpPr>
-          <p:cNvPr id="12" name="Text 10"/>
-          <p:cNvSpPr txBox="1"/>
-          <p:nvPr/>
-        </p:nvSpPr>
-        <p:spPr>
-          <a:xfrm>
-            <a:off x="6629400" y="2999232"/>
-            <a:ext cx="1371600" cy="566928"/>
+              <a:t>références au catalogue</a:t>
+            </a:r>
+            <a:endParaRPr lang="en-US" sz="1200" dirty="0"/>
+          </a:p>
+        </p:txBody>
+      </p:sp>
+      <p:sp>
+        <p:nvSpPr>
+          <p:cNvPr id="16" name="Text 14"/>
+          <p:cNvSpPr txBox="1"/>
+          <p:nvPr/>
+        </p:nvSpPr>
+        <p:spPr>
+          <a:xfrm>
+            <a:off x="594360" y="3794760"/>
+            <a:ext cx="10424160" cy="1005840"/>
           </a:xfrm>
           <a:prstGeom prst="rect">
             <a:avLst/>
@@ -5534,168 +4878,24 @@
           <a:bodyPr wrap="square" lIns="0" tIns="0" rIns="0" bIns="0" rtlCol="0" anchor="ctr"/>
           <a:lstStyle/>
           <a:p>
-            <a:pPr algn="r" indent="0" marL="0">
-              <a:buNone/>
-            </a:pPr>
-            <a:r>
-              <a:rPr lang="en-US" sz="1700" b="1" dirty="0">
-                <a:solidFill>
-                  <a:srgbClr val="16232B"/>
-                </a:solidFill>
-                <a:latin typeface="Cambria" pitchFamily="34" charset="0"/>
-                <a:ea typeface="Cambria" pitchFamily="34" charset="-122"/>
-                <a:cs typeface="Cambria" pitchFamily="34" charset="-120"/>
-              </a:rPr>
-              <a:t>0,799</a:t>
-            </a:r>
-            <a:endParaRPr lang="en-US" sz="1700" dirty="0"/>
-          </a:p>
-        </p:txBody>
-      </p:sp>
-      <p:sp>
-        <p:nvSpPr>
-          <p:cNvPr id="13" name="Shape 11"/>
-          <p:cNvSpPr/>
-          <p:nvPr/>
-        </p:nvSpPr>
-        <p:spPr>
-          <a:xfrm>
-            <a:off x="594360" y="3712464"/>
-            <a:ext cx="7680960" cy="566928"/>
-          </a:xfrm>
-          <a:prstGeom prst="roundRect">
-            <a:avLst>
-              <a:gd name="adj" fmla="val 8065"/>
-            </a:avLst>
-          </a:prstGeom>
-          <a:solidFill>
-            <a:srgbClr val="FBEDEA"/>
-          </a:solidFill>
-          <a:ln w="12700">
-            <a:solidFill>
-              <a:srgbClr val="E2E9EB"/>
-            </a:solidFill>
-            <a:prstDash val="solid"/>
-          </a:ln>
-        </p:spPr>
-      </p:sp>
-      <p:sp>
-        <p:nvSpPr>
-          <p:cNvPr id="14" name="Text 12"/>
-          <p:cNvSpPr txBox="1"/>
-          <p:nvPr/>
-        </p:nvSpPr>
-        <p:spPr>
-          <a:xfrm>
-            <a:off x="868680" y="3712464"/>
-            <a:ext cx="5669280" cy="566928"/>
-          </a:xfrm>
-          <a:prstGeom prst="rect">
-            <a:avLst/>
-          </a:prstGeom>
-          <a:noFill/>
-          <a:ln/>
-        </p:spPr>
-        <p:txBody>
-          <a:bodyPr wrap="square" lIns="0" tIns="0" rIns="0" bIns="0" rtlCol="0" anchor="ctr"/>
-          <a:lstStyle/>
-          <a:p>
-            <a:pPr indent="0" marL="0">
+            <a:pPr marL="0" indent="0">
+              <a:lnSpc>
+                <a:spcPct val="120000"/>
+              </a:lnSpc>
               <a:buNone/>
             </a:pPr>
             <a:r>
               <a:rPr lang="en-US" sz="1350" dirty="0">
                 <a:solidFill>
-                  <a:srgbClr val="16232B"/>
+                  <a:srgbClr val="5D6B75"/>
                 </a:solidFill>
                 <a:latin typeface="Calibri" pitchFamily="34" charset="0"/>
                 <a:ea typeface="Calibri" pitchFamily="34" charset="-122"/>
                 <a:cs typeface="Calibri" pitchFamily="34" charset="-120"/>
               </a:rPr>
-              <a:t>Nouveaux clients (moins de 8)</a:t>
+              <a:t>Cinq tables reliées par des clés, fusionnées en une base unique après contrôle d'intégrité. Deux particularités identifiées et traitées : les premières commandes n'ont pas d'historique, et la dernière commande de chaque client n'est pas documentée.</a:t>
             </a:r>
             <a:endParaRPr lang="en-US" sz="1350" dirty="0"/>
-          </a:p>
-        </p:txBody>
-      </p:sp>
-      <p:sp>
-        <p:nvSpPr>
-          <p:cNvPr id="15" name="Text 13"/>
-          <p:cNvSpPr txBox="1"/>
-          <p:nvPr/>
-        </p:nvSpPr>
-        <p:spPr>
-          <a:xfrm>
-            <a:off x="6629400" y="3712464"/>
-            <a:ext cx="1371600" cy="566928"/>
-          </a:xfrm>
-          <a:prstGeom prst="rect">
-            <a:avLst/>
-          </a:prstGeom>
-          <a:noFill/>
-          <a:ln/>
-        </p:spPr>
-        <p:txBody>
-          <a:bodyPr wrap="square" lIns="0" tIns="0" rIns="0" bIns="0" rtlCol="0" anchor="ctr"/>
-          <a:lstStyle/>
-          <a:p>
-            <a:pPr algn="r" indent="0" marL="0">
-              <a:buNone/>
-            </a:pPr>
-            <a:r>
-              <a:rPr lang="en-US" sz="1700" b="1" dirty="0">
-                <a:solidFill>
-                  <a:srgbClr val="B24634"/>
-                </a:solidFill>
-                <a:latin typeface="Cambria" pitchFamily="34" charset="0"/>
-                <a:ea typeface="Cambria" pitchFamily="34" charset="-122"/>
-                <a:cs typeface="Cambria" pitchFamily="34" charset="-120"/>
-              </a:rPr>
-              <a:t>0,764</a:t>
-            </a:r>
-            <a:endParaRPr lang="en-US" sz="1700" dirty="0"/>
-          </a:p>
-        </p:txBody>
-      </p:sp>
-      <p:sp>
-        <p:nvSpPr>
-          <p:cNvPr id="16" name="Text 14"/>
-          <p:cNvSpPr txBox="1"/>
-          <p:nvPr/>
-        </p:nvSpPr>
-        <p:spPr>
-          <a:xfrm>
-            <a:off x="8549640" y="1572768"/>
-            <a:ext cx="3017520" cy="2377440"/>
-          </a:xfrm>
-          <a:prstGeom prst="rect">
-            <a:avLst/>
-          </a:prstGeom>
-          <a:noFill/>
-          <a:ln/>
-        </p:spPr>
-        <p:txBody>
-          <a:bodyPr wrap="square" lIns="0" tIns="0" rIns="0" bIns="0" rtlCol="0" anchor="t"/>
-          <a:lstStyle/>
-          <a:p>
-            <a:pPr indent="0" marL="0">
-              <a:lnSpc>
-                <a:spcPct val="120000"/>
-              </a:lnSpc>
-              <a:buNone/>
-            </a:pPr>
-            <a:r>
-              <a:rPr lang="en-US" sz="1300" dirty="0">
-                <a:solidFill>
-                  <a:srgbClr val="16232B"/>
-                </a:solidFill>
-                <a:latin typeface="Calibri" pitchFamily="34" charset="0"/>
-                <a:ea typeface="Calibri" pitchFamily="34" charset="-122"/>
-                <a:cs typeface="Calibri" pitchFamily="34" charset="-120"/>
-              </a:rPr>
-              <a:t>Recommandation : ne pas activer l'outil avant la cinquième commande, et traiter les nouveaux clients par les produits d'entrée identifiés en démonstration 8.</a:t>
-            </a:r>
-            <a:endParaRPr lang="en-US" sz="1300" dirty="0"/>
           </a:p>
         </p:txBody>
       </p:sp>
@@ -5707,14 +4907,15 @@
 </p:sld>
 </file>
 
-<file path=ppt/slides/slide17.xml><?xml version="1.0" encoding="utf-8"?>
+<file path=ppt/slides/slide3.xml><?xml version="1.0" encoding="utf-8"?>
 <p:sld xmlns:a="http://schemas.openxmlformats.org/drawingml/2006/main" xmlns:r="http://schemas.openxmlformats.org/officeDocument/2006/relationships" xmlns:p="http://schemas.openxmlformats.org/presentationml/2006/main">
-  <p:cSld name="Slide 17">
+  <p:cSld name="Slide 3">
     <p:bg>
       <p:bgPr>
         <a:solidFill>
           <a:srgbClr val="FFFFFF"/>
         </a:solidFill>
+        <a:effectLst/>
       </p:bgPr>
     </p:bg>
     <p:spTree>
@@ -5739,7 +4940,7 @@
         </p:nvSpPr>
         <p:spPr>
           <a:xfrm>
-            <a:off x="594360" y="182880"/>
+            <a:off x="594360" y="1234440"/>
             <a:ext cx="10972800" cy="219456"/>
           </a:xfrm>
           <a:prstGeom prst="rect">
@@ -5752,11 +4953,11 @@
           <a:bodyPr wrap="square" lIns="0" tIns="0" rIns="0" bIns="0" rtlCol="0" anchor="ctr"/>
           <a:lstStyle/>
           <a:p>
-            <a:pPr indent="0" marL="0">
-              <a:buNone/>
-            </a:pPr>
-            <a:r>
-              <a:rPr lang="en-US" sz="1050" b="1" spc="160" kern="0" dirty="0">
+            <a:pPr marL="0" indent="0">
+              <a:buNone/>
+            </a:pPr>
+            <a:r>
+              <a:rPr lang="en-US" sz="1050" b="1" kern="0" spc="160" dirty="0">
                 <a:solidFill>
                   <a:srgbClr val="0E7C86"/>
                 </a:solidFill>
@@ -5764,7 +4965,7 @@
                 <a:ea typeface="Calibri" pitchFamily="34" charset="-122"/>
                 <a:cs typeface="Calibri" pitchFamily="34" charset="-120"/>
               </a:rPr>
-              <a:t>LES BORNES DE NOTRE TRAVAIL</a:t>
+              <a:t>LE CHIFFRE QUI COMMANDE TOUT LE RESTE</a:t>
             </a:r>
             <a:endParaRPr lang="en-US" sz="1050" dirty="0"/>
           </a:p>
@@ -5778,8 +4979,8 @@
         </p:nvSpPr>
         <p:spPr>
           <a:xfrm>
-            <a:off x="594360" y="384048"/>
-            <a:ext cx="10972800" cy="658368"/>
+            <a:off x="594360" y="1554480"/>
+            <a:ext cx="5669280" cy="2286000"/>
           </a:xfrm>
           <a:prstGeom prst="rect">
             <a:avLst/>
@@ -5791,59 +4992,34 @@
           <a:bodyPr wrap="square" lIns="0" tIns="0" rIns="0" bIns="0" rtlCol="0" anchor="ctr"/>
           <a:lstStyle/>
           <a:p>
-            <a:pPr indent="0" marL="0">
-              <a:buNone/>
-            </a:pPr>
-            <a:r>
-              <a:rPr lang="en-US" sz="2700" b="1" dirty="0">
-                <a:solidFill>
-                  <a:srgbClr val="16232B"/>
+            <a:pPr marL="0" indent="0">
+              <a:buNone/>
+            </a:pPr>
+            <a:r>
+              <a:rPr lang="en-US" sz="12000" b="1" dirty="0">
+                <a:solidFill>
+                  <a:srgbClr val="0E7C86"/>
                 </a:solidFill>
                 <a:latin typeface="Cambria" pitchFamily="34" charset="0"/>
                 <a:ea typeface="Cambria" pitchFamily="34" charset="-122"/>
                 <a:cs typeface="Cambria" pitchFamily="34" charset="-120"/>
               </a:rPr>
-              <a:t>Ce que ces données ne permettent pas de dire</a:t>
-            </a:r>
-            <a:endParaRPr lang="en-US" sz="2700" dirty="0"/>
-          </a:p>
-        </p:txBody>
-      </p:sp>
-      <p:sp>
-        <p:nvSpPr>
-          <p:cNvPr id="4" name="Shape 2"/>
-          <p:cNvSpPr/>
-          <p:nvPr/>
-        </p:nvSpPr>
-        <p:spPr>
-          <a:xfrm>
-            <a:off x="594360" y="1627632"/>
-            <a:ext cx="384048" cy="384048"/>
-          </a:xfrm>
-          <a:prstGeom prst="ellipse">
-            <a:avLst/>
-          </a:prstGeom>
-          <a:solidFill>
-            <a:srgbClr val="EAF3F4"/>
-          </a:solidFill>
-          <a:ln w="12700">
-            <a:solidFill>
-              <a:srgbClr val="C9DFE2"/>
-            </a:solidFill>
-            <a:prstDash val="solid"/>
-          </a:ln>
-        </p:spPr>
-      </p:sp>
-      <p:sp>
-        <p:nvSpPr>
-          <p:cNvPr id="5" name="Text 3"/>
-          <p:cNvSpPr txBox="1"/>
-          <p:nvPr/>
-        </p:nvSpPr>
-        <p:spPr>
-          <a:xfrm>
-            <a:off x="594360" y="1627632"/>
-            <a:ext cx="384048" cy="384048"/>
+              <a:t>59 %</a:t>
+            </a:r>
+            <a:endParaRPr lang="en-US" sz="12000" dirty="0"/>
+          </a:p>
+        </p:txBody>
+      </p:sp>
+      <p:sp>
+        <p:nvSpPr>
+          <p:cNvPr id="4" name="Text 2"/>
+          <p:cNvSpPr txBox="1"/>
+          <p:nvPr/>
+        </p:nvSpPr>
+        <p:spPr>
+          <a:xfrm>
+            <a:off x="6035040" y="1828800"/>
+            <a:ext cx="5394960" cy="1463040"/>
           </a:xfrm>
           <a:prstGeom prst="rect">
             <a:avLst/>
@@ -5855,34 +5031,88 @@
           <a:bodyPr wrap="square" lIns="0" tIns="0" rIns="0" bIns="0" rtlCol="0" anchor="ctr"/>
           <a:lstStyle/>
           <a:p>
-            <a:pPr algn="ctr" indent="0" marL="0">
-              <a:buNone/>
-            </a:pPr>
-            <a:r>
-              <a:rPr lang="en-US" sz="1500" b="1" dirty="0">
-                <a:solidFill>
-                  <a:srgbClr val="0E7C86"/>
+            <a:pPr marL="0" indent="0">
+              <a:lnSpc>
+                <a:spcPct val="110000"/>
+              </a:lnSpc>
+              <a:buNone/>
+            </a:pPr>
+            <a:r>
+              <a:rPr lang="en-US" sz="3000" dirty="0">
+                <a:solidFill>
+                  <a:srgbClr val="16232B"/>
                 </a:solidFill>
                 <a:latin typeface="Cambria" pitchFamily="34" charset="0"/>
                 <a:ea typeface="Cambria" pitchFamily="34" charset="-122"/>
                 <a:cs typeface="Cambria" pitchFamily="34" charset="-120"/>
               </a:rPr>
-              <a:t>!</a:t>
-            </a:r>
-            <a:endParaRPr lang="en-US" sz="1500" dirty="0"/>
-          </a:p>
-        </p:txBody>
-      </p:sp>
-      <p:sp>
-        <p:nvSpPr>
-          <p:cNvPr id="6" name="Text 4"/>
-          <p:cNvSpPr txBox="1"/>
-          <p:nvPr/>
-        </p:nvSpPr>
-        <p:spPr>
-          <a:xfrm>
-            <a:off x="1252728" y="1554480"/>
-            <a:ext cx="10241280" cy="384048"/>
+              <a:t>des articles vendus</a:t>
+            </a:r>
+            <a:endParaRPr lang="en-US" sz="3000" dirty="0"/>
+          </a:p>
+          <a:p>
+            <a:pPr marL="0" indent="0">
+              <a:lnSpc>
+                <a:spcPct val="110000"/>
+              </a:lnSpc>
+              <a:buNone/>
+            </a:pPr>
+            <a:r>
+              <a:rPr lang="en-US" sz="3000" dirty="0">
+                <a:solidFill>
+                  <a:srgbClr val="16232B"/>
+                </a:solidFill>
+                <a:latin typeface="Cambria" pitchFamily="34" charset="0"/>
+                <a:ea typeface="Cambria" pitchFamily="34" charset="-122"/>
+                <a:cs typeface="Cambria" pitchFamily="34" charset="-120"/>
+              </a:rPr>
+              <a:t>sont des </a:t>
+            </a:r>
+            <a:endParaRPr lang="en-US" sz="3000" dirty="0"/>
+          </a:p>
+          <a:p>
+            <a:pPr marL="0" indent="0">
+              <a:lnSpc>
+                <a:spcPct val="110000"/>
+              </a:lnSpc>
+              <a:buNone/>
+            </a:pPr>
+            <a:r>
+              <a:rPr lang="en-US" sz="3000" b="1" dirty="0">
+                <a:solidFill>
+                  <a:srgbClr val="0E7C86"/>
+                </a:solidFill>
+                <a:latin typeface="Cambria" pitchFamily="34" charset="0"/>
+                <a:ea typeface="Cambria" pitchFamily="34" charset="-122"/>
+                <a:cs typeface="Cambria" pitchFamily="34" charset="-120"/>
+              </a:rPr>
+              <a:t>rachats</a:t>
+            </a:r>
+            <a:r>
+              <a:rPr lang="en-US" sz="3000" dirty="0">
+                <a:solidFill>
+                  <a:srgbClr val="16232B"/>
+                </a:solidFill>
+                <a:latin typeface="Cambria" pitchFamily="34" charset="0"/>
+                <a:ea typeface="Cambria" pitchFamily="34" charset="-122"/>
+                <a:cs typeface="Cambria" pitchFamily="34" charset="-120"/>
+              </a:rPr>
+              <a:t>.</a:t>
+            </a:r>
+            <a:endParaRPr lang="en-US" sz="3000" dirty="0"/>
+          </a:p>
+        </p:txBody>
+      </p:sp>
+      <p:sp>
+        <p:nvSpPr>
+          <p:cNvPr id="5" name="Text 3"/>
+          <p:cNvSpPr txBox="1"/>
+          <p:nvPr/>
+        </p:nvSpPr>
+        <p:spPr>
+          <a:xfrm>
+            <a:off x="6035040" y="3429000"/>
+            <a:ext cx="5394960" cy="457200"/>
           </a:xfrm>
           <a:prstGeom prst="rect">
             <a:avLst/>
@@ -5894,353 +5124,21 @@
           <a:bodyPr wrap="square" lIns="0" tIns="0" rIns="0" bIns="0" rtlCol="0" anchor="ctr"/>
           <a:lstStyle/>
           <a:p>
-            <a:pPr indent="0" marL="0">
-              <a:buNone/>
-            </a:pPr>
-            <a:r>
-              <a:rPr lang="en-US" sz="1550" b="1" dirty="0">
-                <a:solidFill>
-                  <a:srgbClr val="16232B"/>
+            <a:pPr marL="0" indent="0">
+              <a:buNone/>
+            </a:pPr>
+            <a:r>
+              <a:rPr lang="en-US" sz="1400" dirty="0">
+                <a:solidFill>
+                  <a:srgbClr val="5D6B75"/>
                 </a:solidFill>
                 <a:latin typeface="Calibri" pitchFamily="34" charset="0"/>
                 <a:ea typeface="Calibri" pitchFamily="34" charset="-122"/>
                 <a:cs typeface="Calibri" pitchFamily="34" charset="-120"/>
               </a:rPr>
-              <a:t>Ni prix, ni marges.</a:t>
-            </a:r>
-            <a:endParaRPr lang="en-US" sz="1550" dirty="0"/>
-          </a:p>
-        </p:txBody>
-      </p:sp>
-      <p:sp>
-        <p:nvSpPr>
-          <p:cNvPr id="7" name="Text 5"/>
-          <p:cNvSpPr txBox="1"/>
-          <p:nvPr/>
-        </p:nvSpPr>
-        <p:spPr>
-          <a:xfrm>
-            <a:off x="1252728" y="1938528"/>
-            <a:ext cx="10241280" cy="713232"/>
-          </a:xfrm>
-          <a:prstGeom prst="rect">
-            <a:avLst/>
-          </a:prstGeom>
-          <a:noFill/>
-          <a:ln/>
-        </p:spPr>
-        <p:txBody>
-          <a:bodyPr wrap="square" lIns="0" tIns="0" rIns="0" bIns="0" rtlCol="0" anchor="t"/>
-          <a:lstStyle/>
-          <a:p>
-            <a:pPr indent="0" marL="0">
-              <a:lnSpc>
-                <a:spcPct val="115000"/>
-              </a:lnSpc>
-              <a:buNone/>
-            </a:pPr>
-            <a:r>
-              <a:rPr lang="en-US" sz="1300" dirty="0">
-                <a:solidFill>
-                  <a:srgbClr val="5D6B75"/>
-                </a:solidFill>
-                <a:latin typeface="Calibri" pitchFamily="34" charset="0"/>
-                <a:ea typeface="Calibri" pitchFamily="34" charset="-122"/>
-                <a:cs typeface="Calibri" pitchFamily="34" charset="-120"/>
-              </a:rPr>
-              <a:t>Nous décrivons des comportements, jamais leur rentabilité. Une recommandation de fidélisation peut porter sur un produit à marge nulle.</a:t>
-            </a:r>
-            <a:endParaRPr lang="en-US" sz="1300" dirty="0"/>
-          </a:p>
-        </p:txBody>
-      </p:sp>
-      <p:sp>
-        <p:nvSpPr>
-          <p:cNvPr id="8" name="Shape 6"/>
-          <p:cNvSpPr/>
-          <p:nvPr/>
-        </p:nvSpPr>
-        <p:spPr>
-          <a:xfrm>
-            <a:off x="594360" y="2926080"/>
-            <a:ext cx="384048" cy="384048"/>
-          </a:xfrm>
-          <a:prstGeom prst="ellipse">
-            <a:avLst/>
-          </a:prstGeom>
-          <a:solidFill>
-            <a:srgbClr val="EAF3F4"/>
-          </a:solidFill>
-          <a:ln w="12700">
-            <a:solidFill>
-              <a:srgbClr val="C9DFE2"/>
-            </a:solidFill>
-            <a:prstDash val="solid"/>
-          </a:ln>
-        </p:spPr>
-      </p:sp>
-      <p:sp>
-        <p:nvSpPr>
-          <p:cNvPr id="9" name="Text 7"/>
-          <p:cNvSpPr txBox="1"/>
-          <p:nvPr/>
-        </p:nvSpPr>
-        <p:spPr>
-          <a:xfrm>
-            <a:off x="594360" y="2926080"/>
-            <a:ext cx="384048" cy="384048"/>
-          </a:xfrm>
-          <a:prstGeom prst="rect">
-            <a:avLst/>
-          </a:prstGeom>
-          <a:noFill/>
-          <a:ln/>
-        </p:spPr>
-        <p:txBody>
-          <a:bodyPr wrap="square" lIns="0" tIns="0" rIns="0" bIns="0" rtlCol="0" anchor="ctr"/>
-          <a:lstStyle/>
-          <a:p>
-            <a:pPr algn="ctr" indent="0" marL="0">
-              <a:buNone/>
-            </a:pPr>
-            <a:r>
-              <a:rPr lang="en-US" sz="1500" b="1" dirty="0">
-                <a:solidFill>
-                  <a:srgbClr val="0E7C86"/>
-                </a:solidFill>
-                <a:latin typeface="Cambria" pitchFamily="34" charset="0"/>
-                <a:ea typeface="Cambria" pitchFamily="34" charset="-122"/>
-                <a:cs typeface="Cambria" pitchFamily="34" charset="-120"/>
-              </a:rPr>
-              <a:t>!</a:t>
-            </a:r>
-            <a:endParaRPr lang="en-US" sz="1500" dirty="0"/>
-          </a:p>
-        </p:txBody>
-      </p:sp>
-      <p:sp>
-        <p:nvSpPr>
-          <p:cNvPr id="10" name="Text 8"/>
-          <p:cNvSpPr txBox="1"/>
-          <p:nvPr/>
-        </p:nvSpPr>
-        <p:spPr>
-          <a:xfrm>
-            <a:off x="1252728" y="2852928"/>
-            <a:ext cx="10241280" cy="384048"/>
-          </a:xfrm>
-          <a:prstGeom prst="rect">
-            <a:avLst/>
-          </a:prstGeom>
-          <a:noFill/>
-          <a:ln/>
-        </p:spPr>
-        <p:txBody>
-          <a:bodyPr wrap="square" lIns="0" tIns="0" rIns="0" bIns="0" rtlCol="0" anchor="ctr"/>
-          <a:lstStyle/>
-          <a:p>
-            <a:pPr indent="0" marL="0">
-              <a:buNone/>
-            </a:pPr>
-            <a:r>
-              <a:rPr lang="en-US" sz="1550" b="1" dirty="0">
-                <a:solidFill>
-                  <a:srgbClr val="16232B"/>
-                </a:solidFill>
-                <a:latin typeface="Calibri" pitchFamily="34" charset="0"/>
-                <a:ea typeface="Calibri" pitchFamily="34" charset="-122"/>
-                <a:cs typeface="Calibri" pitchFamily="34" charset="-120"/>
-              </a:rPr>
-              <a:t>Le délai est plafonné à trente jours.</a:t>
-            </a:r>
-            <a:endParaRPr lang="en-US" sz="1550" dirty="0"/>
-          </a:p>
-        </p:txBody>
-      </p:sp>
-      <p:sp>
-        <p:nvSpPr>
-          <p:cNvPr id="11" name="Text 9"/>
-          <p:cNvSpPr txBox="1"/>
-          <p:nvPr/>
-        </p:nvSpPr>
-        <p:spPr>
-          <a:xfrm>
-            <a:off x="1252728" y="3236976"/>
-            <a:ext cx="10241280" cy="713232"/>
-          </a:xfrm>
-          <a:prstGeom prst="rect">
-            <a:avLst/>
-          </a:prstGeom>
-          <a:noFill/>
-          <a:ln/>
-        </p:spPr>
-        <p:txBody>
-          <a:bodyPr wrap="square" lIns="0" tIns="0" rIns="0" bIns="0" rtlCol="0" anchor="t"/>
-          <a:lstStyle/>
-          <a:p>
-            <a:pPr indent="0" marL="0">
-              <a:lnSpc>
-                <a:spcPct val="115000"/>
-              </a:lnSpc>
-              <a:buNone/>
-            </a:pPr>
-            <a:r>
-              <a:rPr lang="en-US" sz="1300" dirty="0">
-                <a:solidFill>
-                  <a:srgbClr val="5D6B75"/>
-                </a:solidFill>
-                <a:latin typeface="Calibri" pitchFamily="34" charset="0"/>
-                <a:ea typeface="Calibri" pitchFamily="34" charset="-122"/>
-                <a:cs typeface="Calibri" pitchFamily="34" charset="-120"/>
-              </a:rPr>
-              <a:t>Un client absent depuis six mois est indiscernable d'un client absent depuis un mois : l'analyse du décrochage est hors de portée.</a:t>
-            </a:r>
-            <a:endParaRPr lang="en-US" sz="1300" dirty="0"/>
-          </a:p>
-        </p:txBody>
-      </p:sp>
-      <p:sp>
-        <p:nvSpPr>
-          <p:cNvPr id="12" name="Shape 10"/>
-          <p:cNvSpPr/>
-          <p:nvPr/>
-        </p:nvSpPr>
-        <p:spPr>
-          <a:xfrm>
-            <a:off x="594360" y="4224528"/>
-            <a:ext cx="384048" cy="384048"/>
-          </a:xfrm>
-          <a:prstGeom prst="ellipse">
-            <a:avLst/>
-          </a:prstGeom>
-          <a:solidFill>
-            <a:srgbClr val="EAF3F4"/>
-          </a:solidFill>
-          <a:ln w="12700">
-            <a:solidFill>
-              <a:srgbClr val="C9DFE2"/>
-            </a:solidFill>
-            <a:prstDash val="solid"/>
-          </a:ln>
-        </p:spPr>
-      </p:sp>
-      <p:sp>
-        <p:nvSpPr>
-          <p:cNvPr id="13" name="Text 11"/>
-          <p:cNvSpPr txBox="1"/>
-          <p:nvPr/>
-        </p:nvSpPr>
-        <p:spPr>
-          <a:xfrm>
-            <a:off x="594360" y="4224528"/>
-            <a:ext cx="384048" cy="384048"/>
-          </a:xfrm>
-          <a:prstGeom prst="rect">
-            <a:avLst/>
-          </a:prstGeom>
-          <a:noFill/>
-          <a:ln/>
-        </p:spPr>
-        <p:txBody>
-          <a:bodyPr wrap="square" lIns="0" tIns="0" rIns="0" bIns="0" rtlCol="0" anchor="ctr"/>
-          <a:lstStyle/>
-          <a:p>
-            <a:pPr algn="ctr" indent="0" marL="0">
-              <a:buNone/>
-            </a:pPr>
-            <a:r>
-              <a:rPr lang="en-US" sz="1500" b="1" dirty="0">
-                <a:solidFill>
-                  <a:srgbClr val="0E7C86"/>
-                </a:solidFill>
-                <a:latin typeface="Cambria" pitchFamily="34" charset="0"/>
-                <a:ea typeface="Cambria" pitchFamily="34" charset="-122"/>
-                <a:cs typeface="Cambria" pitchFamily="34" charset="-120"/>
-              </a:rPr>
-              <a:t>!</a:t>
-            </a:r>
-            <a:endParaRPr lang="en-US" sz="1500" dirty="0"/>
-          </a:p>
-        </p:txBody>
-      </p:sp>
-      <p:sp>
-        <p:nvSpPr>
-          <p:cNvPr id="14" name="Text 12"/>
-          <p:cNvSpPr txBox="1"/>
-          <p:nvPr/>
-        </p:nvSpPr>
-        <p:spPr>
-          <a:xfrm>
-            <a:off x="1252728" y="4151376"/>
-            <a:ext cx="10241280" cy="384048"/>
-          </a:xfrm>
-          <a:prstGeom prst="rect">
-            <a:avLst/>
-          </a:prstGeom>
-          <a:noFill/>
-          <a:ln/>
-        </p:spPr>
-        <p:txBody>
-          <a:bodyPr wrap="square" lIns="0" tIns="0" rIns="0" bIns="0" rtlCol="0" anchor="ctr"/>
-          <a:lstStyle/>
-          <a:p>
-            <a:pPr indent="0" marL="0">
-              <a:buNone/>
-            </a:pPr>
-            <a:r>
-              <a:rPr lang="en-US" sz="1550" b="1" dirty="0">
-                <a:solidFill>
-                  <a:srgbClr val="16232B"/>
-                </a:solidFill>
-                <a:latin typeface="Calibri" pitchFamily="34" charset="0"/>
-                <a:ea typeface="Calibri" pitchFamily="34" charset="-122"/>
-                <a:cs typeface="Calibri" pitchFamily="34" charset="-120"/>
-              </a:rPr>
-              <a:t>Aucune causalité.</a:t>
-            </a:r>
-            <a:endParaRPr lang="en-US" sz="1550" dirty="0"/>
-          </a:p>
-        </p:txBody>
-      </p:sp>
-      <p:sp>
-        <p:nvSpPr>
-          <p:cNvPr id="15" name="Text 13"/>
-          <p:cNvSpPr txBox="1"/>
-          <p:nvPr/>
-        </p:nvSpPr>
-        <p:spPr>
-          <a:xfrm>
-            <a:off x="1252728" y="4535424"/>
-            <a:ext cx="10241280" cy="713232"/>
-          </a:xfrm>
-          <a:prstGeom prst="rect">
-            <a:avLst/>
-          </a:prstGeom>
-          <a:noFill/>
-          <a:ln/>
-        </p:spPr>
-        <p:txBody>
-          <a:bodyPr wrap="square" lIns="0" tIns="0" rIns="0" bIns="0" rtlCol="0" anchor="t"/>
-          <a:lstStyle/>
-          <a:p>
-            <a:pPr indent="0" marL="0">
-              <a:lnSpc>
-                <a:spcPct val="115000"/>
-              </a:lnSpc>
-              <a:buNone/>
-            </a:pPr>
-            <a:r>
-              <a:rPr lang="en-US" sz="1300" dirty="0">
-                <a:solidFill>
-                  <a:srgbClr val="5D6B75"/>
-                </a:solidFill>
-                <a:latin typeface="Calibri" pitchFamily="34" charset="0"/>
-                <a:ea typeface="Calibri" pitchFamily="34" charset="-122"/>
-                <a:cs typeface="Calibri" pitchFamily="34" charset="-120"/>
-              </a:rPr>
-              <a:t>Rien n'établit que le bio cause la fidélité — il se peut que les clients fidèles achètent du bio.</a:t>
-            </a:r>
-            <a:endParaRPr lang="en-US" sz="1300" dirty="0"/>
+              <a:t>Chez les clients installés, cette part dépasse 80 %.</a:t>
+            </a:r>
+            <a:endParaRPr lang="en-US" sz="1400" dirty="0"/>
           </a:p>
         </p:txBody>
       </p:sp>
@@ -6252,14 +5150,15 @@
 </p:sld>
 </file>
 
-<file path=ppt/slides/slide18.xml><?xml version="1.0" encoding="utf-8"?>
+<file path=ppt/slides/slide4.xml><?xml version="1.0" encoding="utf-8"?>
 <p:sld xmlns:a="http://schemas.openxmlformats.org/drawingml/2006/main" xmlns:r="http://schemas.openxmlformats.org/officeDocument/2006/relationships" xmlns:p="http://schemas.openxmlformats.org/presentationml/2006/main">
-  <p:cSld name="Slide 18">
+  <p:cSld name="Slide 4">
     <p:bg>
       <p:bgPr>
         <a:solidFill>
-          <a:srgbClr val="0A5A62"/>
+          <a:srgbClr val="FFFFFF"/>
         </a:solidFill>
+        <a:effectLst/>
       </p:bgPr>
     </p:bg>
     <p:spTree>
@@ -6284,8 +5183,8 @@
         </p:nvSpPr>
         <p:spPr>
           <a:xfrm>
-            <a:off x="594360" y="1920240"/>
-            <a:ext cx="10424160" cy="1371600"/>
+            <a:off x="594360" y="182880"/>
+            <a:ext cx="10972800" cy="219456"/>
           </a:xfrm>
           <a:prstGeom prst="rect">
             <a:avLst/>
@@ -6297,154 +5196,277 @@
           <a:bodyPr wrap="square" lIns="0" tIns="0" rIns="0" bIns="0" rtlCol="0" anchor="ctr"/>
           <a:lstStyle/>
           <a:p>
-            <a:pPr indent="0" marL="0">
-              <a:buNone/>
-            </a:pPr>
-            <a:r>
-              <a:rPr lang="en-US" sz="4600" b="1" dirty="0">
-                <a:solidFill>
-                  <a:srgbClr val="FFFFFF"/>
+            <a:pPr marL="0" indent="0">
+              <a:buNone/>
+            </a:pPr>
+            <a:r>
+              <a:rPr lang="en-US" sz="1050" b="1" kern="0" spc="160" dirty="0">
+                <a:solidFill>
+                  <a:srgbClr val="0E7C86"/>
+                </a:solidFill>
+                <a:latin typeface="Calibri" pitchFamily="34" charset="0"/>
+                <a:ea typeface="Calibri" pitchFamily="34" charset="-122"/>
+                <a:cs typeface="Calibri" pitchFamily="34" charset="-120"/>
+              </a:rPr>
+              <a:t>DÉMONSTRATION 1</a:t>
+            </a:r>
+            <a:endParaRPr lang="en-US" sz="1050" dirty="0"/>
+          </a:p>
+        </p:txBody>
+      </p:sp>
+      <p:sp>
+        <p:nvSpPr>
+          <p:cNvPr id="3" name="Text 1"/>
+          <p:cNvSpPr txBox="1"/>
+          <p:nvPr/>
+        </p:nvSpPr>
+        <p:spPr>
+          <a:xfrm>
+            <a:off x="594360" y="384048"/>
+            <a:ext cx="10972800" cy="658368"/>
+          </a:xfrm>
+          <a:prstGeom prst="rect">
+            <a:avLst/>
+          </a:prstGeom>
+          <a:noFill/>
+          <a:ln/>
+        </p:spPr>
+        <p:txBody>
+          <a:bodyPr wrap="square" lIns="0" tIns="0" rIns="0" bIns="0" rtlCol="0" anchor="ctr"/>
+          <a:lstStyle/>
+          <a:p>
+            <a:pPr marL="0" indent="0">
+              <a:buNone/>
+            </a:pPr>
+            <a:r>
+              <a:rPr lang="en-US" sz="2700" b="1" dirty="0">
+                <a:solidFill>
+                  <a:srgbClr val="16232B"/>
                 </a:solidFill>
                 <a:latin typeface="Cambria" pitchFamily="34" charset="0"/>
                 <a:ea typeface="Cambria" pitchFamily="34" charset="-122"/>
                 <a:cs typeface="Cambria" pitchFamily="34" charset="-120"/>
               </a:rPr>
-              <a:t>L'habitude est le produit.</a:t>
-            </a:r>
-            <a:endParaRPr lang="en-US" sz="4600" dirty="0"/>
-          </a:p>
-        </p:txBody>
-      </p:sp>
-      <p:sp>
-        <p:nvSpPr>
-          <p:cNvPr id="3" name="Text 1"/>
-          <p:cNvSpPr txBox="1"/>
-          <p:nvPr/>
-        </p:nvSpPr>
-        <p:spPr>
-          <a:xfrm>
-            <a:off x="594360" y="3429000"/>
-            <a:ext cx="9509760" cy="1188720"/>
-          </a:xfrm>
-          <a:prstGeom prst="rect">
-            <a:avLst/>
-          </a:prstGeom>
-          <a:noFill/>
-          <a:ln/>
-        </p:spPr>
-        <p:txBody>
-          <a:bodyPr wrap="square" lIns="0" tIns="0" rIns="0" bIns="0" rtlCol="0" anchor="ctr"/>
-          <a:lstStyle/>
-          <a:p>
-            <a:pPr indent="0" marL="0">
-              <a:lnSpc>
-                <a:spcPct val="125000"/>
-              </a:lnSpc>
-              <a:buNone/>
-            </a:pPr>
-            <a:r>
-              <a:rPr lang="en-US" sz="1600" dirty="0">
-                <a:solidFill>
-                  <a:srgbClr val="C3DDE0"/>
+              <a:t>La croissance ne viendra pas d'un panier plus gros</a:t>
+            </a:r>
+            <a:endParaRPr lang="en-US" sz="2700" dirty="0"/>
+          </a:p>
+        </p:txBody>
+      </p:sp>
+      <p:pic>
+        <p:nvPicPr>
+          <p:cNvPr id="4" name="Image 0" descr="02_projet\_ppt\fig01.png"/>
+          <p:cNvPicPr>
+            <a:picLocks noChangeAspect="1"/>
+          </p:cNvPicPr>
+          <p:nvPr/>
+        </p:nvPicPr>
+        <p:blipFill>
+          <a:blip r:embed="rId3"/>
+          <a:stretch>
+            <a:fillRect/>
+          </a:stretch>
+        </p:blipFill>
+        <p:spPr>
+          <a:xfrm>
+            <a:off x="594360" y="1519086"/>
+            <a:ext cx="6903720" cy="3490645"/>
+          </a:xfrm>
+          <a:prstGeom prst="rect">
+            <a:avLst/>
+          </a:prstGeom>
+        </p:spPr>
+      </p:pic>
+      <p:sp>
+        <p:nvSpPr>
+          <p:cNvPr id="5" name="Text 2"/>
+          <p:cNvSpPr txBox="1"/>
+          <p:nvPr/>
+        </p:nvSpPr>
+        <p:spPr>
+          <a:xfrm>
+            <a:off x="594360" y="5440680"/>
+            <a:ext cx="6903720" cy="457200"/>
+          </a:xfrm>
+          <a:prstGeom prst="rect">
+            <a:avLst/>
+          </a:prstGeom>
+          <a:noFill/>
+          <a:ln/>
+        </p:spPr>
+        <p:txBody>
+          <a:bodyPr wrap="square" lIns="0" tIns="0" rIns="0" bIns="0" rtlCol="0" anchor="t"/>
+          <a:lstStyle/>
+          <a:p>
+            <a:pPr marL="0" indent="0">
+              <a:buNone/>
+            </a:pPr>
+            <a:r>
+              <a:rPr lang="en-US" sz="1100" i="1" dirty="0">
+                <a:solidFill>
+                  <a:srgbClr val="5D6B75"/>
                 </a:solidFill>
                 <a:latin typeface="Calibri" pitchFamily="34" charset="0"/>
                 <a:ea typeface="Calibri" pitchFamily="34" charset="-122"/>
                 <a:cs typeface="Calibri" pitchFamily="34" charset="-120"/>
               </a:rPr>
-              <a:t>La croissance ne viendra pas d'un panier plus gros — les données montrent qu'il ne bouge pas.</a:t>
-            </a:r>
-            <a:endParaRPr lang="en-US" sz="1600" dirty="0"/>
-          </a:p>
-          <a:p>
-            <a:pPr indent="0" marL="0">
-              <a:lnSpc>
-                <a:spcPct val="125000"/>
-              </a:lnSpc>
-              <a:buNone/>
-            </a:pPr>
-            <a:r>
-              <a:rPr lang="en-US" sz="1600" dirty="0">
-                <a:solidFill>
-                  <a:srgbClr val="C3DDE0"/>
+              <a:t>Le panier reste à dix articles ; sa part de rachats passe de 29 % à 85 %.</a:t>
+            </a:r>
+            <a:endParaRPr lang="en-US" sz="1100" dirty="0"/>
+          </a:p>
+        </p:txBody>
+      </p:sp>
+      <p:sp>
+        <p:nvSpPr>
+          <p:cNvPr id="6" name="Shape 3"/>
+          <p:cNvSpPr/>
+          <p:nvPr/>
+        </p:nvSpPr>
+        <p:spPr>
+          <a:xfrm>
+            <a:off x="7818120" y="1207008"/>
+            <a:ext cx="3749040" cy="3200400"/>
+          </a:xfrm>
+          <a:prstGeom prst="roundRect">
+            <a:avLst>
+              <a:gd name="adj" fmla="val 1714"/>
+            </a:avLst>
+          </a:prstGeom>
+          <a:solidFill>
+            <a:srgbClr val="EAF3F4"/>
+          </a:solidFill>
+          <a:ln w="12700">
+            <a:solidFill>
+              <a:srgbClr val="D3E5E7"/>
+            </a:solidFill>
+            <a:prstDash val="solid"/>
+          </a:ln>
+        </p:spPr>
+        <p:txBody>
+          <a:bodyPr/>
+          <a:lstStyle/>
+          <a:p>
+            <a:endParaRPr lang="fr-FR"/>
+          </a:p>
+        </p:txBody>
+      </p:sp>
+      <p:sp>
+        <p:nvSpPr>
+          <p:cNvPr id="7" name="Text 4"/>
+          <p:cNvSpPr txBox="1"/>
+          <p:nvPr/>
+        </p:nvSpPr>
+        <p:spPr>
+          <a:xfrm>
+            <a:off x="8074152" y="1389888"/>
+            <a:ext cx="3236976" cy="219456"/>
+          </a:xfrm>
+          <a:prstGeom prst="rect">
+            <a:avLst/>
+          </a:prstGeom>
+          <a:noFill/>
+          <a:ln/>
+        </p:spPr>
+        <p:txBody>
+          <a:bodyPr wrap="square" lIns="0" tIns="0" rIns="0" bIns="0" rtlCol="0" anchor="ctr"/>
+          <a:lstStyle/>
+          <a:p>
+            <a:pPr marL="0" indent="0">
+              <a:buNone/>
+            </a:pPr>
+            <a:r>
+              <a:rPr lang="en-US" sz="950" b="1" kern="0" spc="120" dirty="0">
+                <a:solidFill>
+                  <a:srgbClr val="0E7C86"/>
                 </a:solidFill>
                 <a:latin typeface="Calibri" pitchFamily="34" charset="0"/>
                 <a:ea typeface="Calibri" pitchFamily="34" charset="-122"/>
                 <a:cs typeface="Calibri" pitchFamily="34" charset="-120"/>
               </a:rPr>
-              <a:t>Elle viendra d'une habitude installée </a:t>
-            </a:r>
-            <a:endParaRPr lang="en-US" sz="1600" dirty="0"/>
-          </a:p>
-          <a:p>
-            <a:pPr indent="0" marL="0">
+              <a:t>CE QUE NOUS PROPOSONS</a:t>
+            </a:r>
+            <a:endParaRPr lang="en-US" sz="950" dirty="0"/>
+          </a:p>
+        </p:txBody>
+      </p:sp>
+      <p:sp>
+        <p:nvSpPr>
+          <p:cNvPr id="8" name="Text 5"/>
+          <p:cNvSpPr txBox="1"/>
+          <p:nvPr/>
+        </p:nvSpPr>
+        <p:spPr>
+          <a:xfrm>
+            <a:off x="8074152" y="1682496"/>
+            <a:ext cx="3236976" cy="2505456"/>
+          </a:xfrm>
+          <a:prstGeom prst="rect">
+            <a:avLst/>
+          </a:prstGeom>
+          <a:noFill/>
+          <a:ln/>
+        </p:spPr>
+        <p:txBody>
+          <a:bodyPr wrap="square" lIns="0" tIns="0" rIns="0" bIns="0" rtlCol="0" anchor="t"/>
+          <a:lstStyle/>
+          <a:p>
+            <a:pPr marL="0" indent="0">
               <a:lnSpc>
-                <a:spcPct val="125000"/>
+                <a:spcPct val="110000"/>
               </a:lnSpc>
               <a:buNone/>
             </a:pPr>
             <a:r>
-              <a:rPr lang="en-US" sz="1600" b="1" dirty="0">
-                <a:solidFill>
-                  <a:srgbClr val="7FD3DB"/>
+              <a:rPr lang="en-US" sz="1300" dirty="0">
+                <a:solidFill>
+                  <a:srgbClr val="16232B"/>
                 </a:solidFill>
                 <a:latin typeface="Calibri" pitchFamily="34" charset="0"/>
                 <a:ea typeface="Calibri" pitchFamily="34" charset="-122"/>
                 <a:cs typeface="Calibri" pitchFamily="34" charset="-120"/>
               </a:rPr>
-              <a:t>plus tôt</a:t>
-            </a:r>
-            <a:pPr indent="0" marL="0">
-              <a:lnSpc>
-                <a:spcPct val="125000"/>
-              </a:lnSpc>
-              <a:buNone/>
-            </a:pPr>
-            <a:r>
-              <a:rPr lang="en-US" sz="1600" dirty="0">
-                <a:solidFill>
-                  <a:srgbClr val="C3DDE0"/>
-                </a:solidFill>
-                <a:latin typeface="Calibri" pitchFamily="34" charset="0"/>
-                <a:ea typeface="Calibri" pitchFamily="34" charset="-122"/>
-                <a:cs typeface="Calibri" pitchFamily="34" charset="-120"/>
-              </a:rPr>
-              <a:t> et </a:t>
-            </a:r>
-            <a:pPr indent="0" marL="0">
-              <a:lnSpc>
-                <a:spcPct val="125000"/>
-              </a:lnSpc>
-              <a:buNone/>
-            </a:pPr>
-            <a:r>
-              <a:rPr lang="en-US" sz="1600" b="1" dirty="0">
-                <a:solidFill>
-                  <a:srgbClr val="7FD3DB"/>
-                </a:solidFill>
-                <a:latin typeface="Calibri" pitchFamily="34" charset="0"/>
-                <a:ea typeface="Calibri" pitchFamily="34" charset="-122"/>
-                <a:cs typeface="Calibri" pitchFamily="34" charset="-120"/>
-              </a:rPr>
-              <a:t>plus large</a:t>
-            </a:r>
-            <a:pPr indent="0" marL="0">
-              <a:lnSpc>
-                <a:spcPct val="125000"/>
-              </a:lnSpc>
-              <a:buNone/>
-            </a:pPr>
-            <a:r>
-              <a:rPr lang="en-US" sz="1600" dirty="0">
-                <a:solidFill>
-                  <a:srgbClr val="C3DDE0"/>
-                </a:solidFill>
-                <a:latin typeface="Calibri" pitchFamily="34" charset="0"/>
-                <a:ea typeface="Calibri" pitchFamily="34" charset="-122"/>
-                <a:cs typeface="Calibri" pitchFamily="34" charset="-120"/>
-              </a:rPr>
-              <a:t>.</a:t>
-            </a:r>
-            <a:endParaRPr lang="en-US" sz="1600" dirty="0"/>
+              <a:t>Réserver le budget de découverte — échantillons, réductions, mise en avant — aux clients de moins de cinq commandes, et le couper au-delà de la dixième.</a:t>
+            </a:r>
+            <a:endParaRPr lang="en-US" sz="1300" dirty="0"/>
+          </a:p>
+        </p:txBody>
+      </p:sp>
+      <p:sp>
+        <p:nvSpPr>
+          <p:cNvPr id="9" name="Text 6"/>
+          <p:cNvSpPr txBox="1"/>
+          <p:nvPr/>
+        </p:nvSpPr>
+        <p:spPr>
+          <a:xfrm>
+            <a:off x="7818120" y="4663440"/>
+            <a:ext cx="548640" cy="548640"/>
+          </a:xfrm>
+          <a:prstGeom prst="rect">
+            <a:avLst/>
+          </a:prstGeom>
+          <a:noFill/>
+          <a:ln/>
+        </p:spPr>
+        <p:txBody>
+          <a:bodyPr wrap="square" lIns="0" tIns="0" rIns="0" bIns="0" rtlCol="0" anchor="ctr"/>
+          <a:lstStyle/>
+          <a:p>
+            <a:pPr marL="0" indent="0">
+              <a:buNone/>
+            </a:pPr>
+            <a:r>
+              <a:rPr lang="en-US" sz="3400" b="1" dirty="0">
+                <a:solidFill>
+                  <a:srgbClr val="D8E4E6"/>
+                </a:solidFill>
+                <a:latin typeface="Cambria" pitchFamily="34" charset="0"/>
+                <a:ea typeface="Cambria" pitchFamily="34" charset="-122"/>
+                <a:cs typeface="Cambria" pitchFamily="34" charset="-120"/>
+              </a:rPr>
+              <a:t>1</a:t>
+            </a:r>
+            <a:endParaRPr lang="en-US" sz="3400" dirty="0"/>
           </a:p>
         </p:txBody>
       </p:sp>
@@ -6456,14 +5478,15 @@
 </p:sld>
 </file>
 
-<file path=ppt/slides/slide2.xml><?xml version="1.0" encoding="utf-8"?>
+<file path=ppt/slides/slide5.xml><?xml version="1.0" encoding="utf-8"?>
 <p:sld xmlns:a="http://schemas.openxmlformats.org/drawingml/2006/main" xmlns:r="http://schemas.openxmlformats.org/officeDocument/2006/relationships" xmlns:p="http://schemas.openxmlformats.org/presentationml/2006/main">
-  <p:cSld name="Slide 2">
+  <p:cSld name="Slide 5">
     <p:bg>
       <p:bgPr>
         <a:solidFill>
           <a:srgbClr val="FFFFFF"/>
         </a:solidFill>
+        <a:effectLst/>
       </p:bgPr>
     </p:bg>
     <p:spTree>
@@ -6501,11 +5524,11 @@
           <a:bodyPr wrap="square" lIns="0" tIns="0" rIns="0" bIns="0" rtlCol="0" anchor="ctr"/>
           <a:lstStyle/>
           <a:p>
-            <a:pPr indent="0" marL="0">
-              <a:buNone/>
-            </a:pPr>
-            <a:r>
-              <a:rPr lang="en-US" sz="1050" b="1" spc="160" kern="0" dirty="0">
+            <a:pPr marL="0" indent="0">
+              <a:buNone/>
+            </a:pPr>
+            <a:r>
+              <a:rPr lang="en-US" sz="1050" b="1" kern="0" spc="160" dirty="0">
                 <a:solidFill>
                   <a:srgbClr val="0E7C86"/>
                 </a:solidFill>
@@ -6513,7 +5536,7 @@
                 <a:ea typeface="Calibri" pitchFamily="34" charset="-122"/>
                 <a:cs typeface="Calibri" pitchFamily="34" charset="-120"/>
               </a:rPr>
-              <a:t>CE SUR QUOI NOUS NOUS APPUYONS</a:t>
+              <a:t>DÉMONSTRATION 2</a:t>
             </a:r>
             <a:endParaRPr lang="en-US" sz="1050" dirty="0"/>
           </a:p>
@@ -6540,7 +5563,7 @@
           <a:bodyPr wrap="square" lIns="0" tIns="0" rIns="0" bIns="0" rtlCol="0" anchor="ctr"/>
           <a:lstStyle/>
           <a:p>
-            <a:pPr indent="0" marL="0">
+            <a:pPr marL="0" indent="0">
               <a:buNone/>
             </a:pPr>
             <a:r>
@@ -6552,26 +5575,89 @@
                 <a:ea typeface="Cambria" pitchFamily="34" charset="-122"/>
                 <a:cs typeface="Cambria" pitchFamily="34" charset="-120"/>
               </a:rPr>
-              <a:t>Quatre ans de courses, cinq fichiers, aucune approximation</a:t>
+              <a:t>L'ordre de remplissage trahit l'habitude</a:t>
             </a:r>
             <a:endParaRPr lang="en-US" sz="2700" dirty="0"/>
           </a:p>
         </p:txBody>
       </p:sp>
-      <p:sp>
-        <p:nvSpPr>
-          <p:cNvPr id="4" name="Shape 2"/>
+      <p:pic>
+        <p:nvPicPr>
+          <p:cNvPr id="4" name="Image 0" descr="02_projet\_ppt\fig02.png"/>
+          <p:cNvPicPr>
+            <a:picLocks noChangeAspect="1"/>
+          </p:cNvPicPr>
+          <p:nvPr/>
+        </p:nvPicPr>
+        <p:blipFill>
+          <a:blip r:embed="rId3"/>
+          <a:stretch>
+            <a:fillRect/>
+          </a:stretch>
+        </p:blipFill>
+        <p:spPr>
+          <a:xfrm>
+            <a:off x="594360" y="1596655"/>
+            <a:ext cx="6903720" cy="3335505"/>
+          </a:xfrm>
+          <a:prstGeom prst="rect">
+            <a:avLst/>
+          </a:prstGeom>
+        </p:spPr>
+      </p:pic>
+      <p:sp>
+        <p:nvSpPr>
+          <p:cNvPr id="5" name="Text 2"/>
+          <p:cNvSpPr txBox="1"/>
+          <p:nvPr/>
+        </p:nvSpPr>
+        <p:spPr>
+          <a:xfrm>
+            <a:off x="594360" y="5440680"/>
+            <a:ext cx="6903720" cy="457200"/>
+          </a:xfrm>
+          <a:prstGeom prst="rect">
+            <a:avLst/>
+          </a:prstGeom>
+          <a:noFill/>
+          <a:ln/>
+        </p:spPr>
+        <p:txBody>
+          <a:bodyPr wrap="square" lIns="0" tIns="0" rIns="0" bIns="0" rtlCol="0" anchor="t"/>
+          <a:lstStyle/>
+          <a:p>
+            <a:pPr marL="0" indent="0">
+              <a:buNone/>
+            </a:pPr>
+            <a:r>
+              <a:rPr lang="en-US" sz="1100" i="1" dirty="0">
+                <a:solidFill>
+                  <a:srgbClr val="5D6B75"/>
+                </a:solidFill>
+                <a:latin typeface="Calibri" pitchFamily="34" charset="0"/>
+                <a:ea typeface="Calibri" pitchFamily="34" charset="-122"/>
+                <a:cs typeface="Calibri" pitchFamily="34" charset="-120"/>
+              </a:rPr>
+              <a:t>67,8 % de rachats en première position, 48 % en vingtième.</a:t>
+            </a:r>
+            <a:endParaRPr lang="en-US" sz="1100" dirty="0"/>
+          </a:p>
+        </p:txBody>
+      </p:sp>
+      <p:sp>
+        <p:nvSpPr>
+          <p:cNvPr id="6" name="Shape 3"/>
           <p:cNvSpPr/>
           <p:nvPr/>
         </p:nvSpPr>
         <p:spPr>
           <a:xfrm>
-            <a:off x="594360" y="1600200"/>
-            <a:ext cx="2560320" cy="1783080"/>
+            <a:off x="7818120" y="1207008"/>
+            <a:ext cx="3749040" cy="3200400"/>
           </a:xfrm>
           <a:prstGeom prst="roundRect">
             <a:avLst>
-              <a:gd name="adj" fmla="val 3077"/>
+              <a:gd name="adj" fmla="val 1714"/>
             </a:avLst>
           </a:prstGeom>
           <a:solidFill>
@@ -6584,17 +5670,24 @@
             <a:prstDash val="solid"/>
           </a:ln>
         </p:spPr>
-      </p:sp>
-      <p:sp>
-        <p:nvSpPr>
-          <p:cNvPr id="5" name="Text 3"/>
-          <p:cNvSpPr txBox="1"/>
-          <p:nvPr/>
-        </p:nvSpPr>
-        <p:spPr>
-          <a:xfrm>
-            <a:off x="822960" y="1874520"/>
-            <a:ext cx="2103120" cy="685800"/>
+        <p:txBody>
+          <a:bodyPr/>
+          <a:lstStyle/>
+          <a:p>
+            <a:endParaRPr lang="fr-FR"/>
+          </a:p>
+        </p:txBody>
+      </p:sp>
+      <p:sp>
+        <p:nvSpPr>
+          <p:cNvPr id="7" name="Text 4"/>
+          <p:cNvSpPr txBox="1"/>
+          <p:nvPr/>
+        </p:nvSpPr>
+        <p:spPr>
+          <a:xfrm>
+            <a:off x="8074152" y="1389888"/>
+            <a:ext cx="3236976" cy="219456"/>
           </a:xfrm>
           <a:prstGeom prst="rect">
             <a:avLst/>
@@ -6606,417 +5699,102 @@
           <a:bodyPr wrap="square" lIns="0" tIns="0" rIns="0" bIns="0" rtlCol="0" anchor="ctr"/>
           <a:lstStyle/>
           <a:p>
-            <a:pPr indent="0" marL="0">
-              <a:buNone/>
-            </a:pPr>
-            <a:r>
-              <a:rPr lang="en-US" sz="3000" b="1" dirty="0">
+            <a:pPr marL="0" indent="0">
+              <a:buNone/>
+            </a:pPr>
+            <a:r>
+              <a:rPr lang="en-US" sz="950" b="1" kern="0" spc="120" dirty="0">
                 <a:solidFill>
                   <a:srgbClr val="0E7C86"/>
+                </a:solidFill>
+                <a:latin typeface="Calibri" pitchFamily="34" charset="0"/>
+                <a:ea typeface="Calibri" pitchFamily="34" charset="-122"/>
+                <a:cs typeface="Calibri" pitchFamily="34" charset="-120"/>
+              </a:rPr>
+              <a:t>CE QUE NOUS PROPOSONS</a:t>
+            </a:r>
+            <a:endParaRPr lang="en-US" sz="950" dirty="0"/>
+          </a:p>
+        </p:txBody>
+      </p:sp>
+      <p:sp>
+        <p:nvSpPr>
+          <p:cNvPr id="8" name="Text 5"/>
+          <p:cNvSpPr txBox="1"/>
+          <p:nvPr/>
+        </p:nvSpPr>
+        <p:spPr>
+          <a:xfrm>
+            <a:off x="8074152" y="1682496"/>
+            <a:ext cx="3236976" cy="2505456"/>
+          </a:xfrm>
+          <a:prstGeom prst="rect">
+            <a:avLst/>
+          </a:prstGeom>
+          <a:noFill/>
+          <a:ln/>
+        </p:spPr>
+        <p:txBody>
+          <a:bodyPr wrap="square" lIns="0" tIns="0" rIns="0" bIns="0" rtlCol="0" anchor="t"/>
+          <a:lstStyle/>
+          <a:p>
+            <a:pPr marL="0" indent="0">
+              <a:lnSpc>
+                <a:spcPct val="110000"/>
+              </a:lnSpc>
+              <a:buNone/>
+            </a:pPr>
+            <a:r>
+              <a:rPr lang="en-US" sz="1300" dirty="0">
+                <a:solidFill>
+                  <a:srgbClr val="16232B"/>
+                </a:solidFill>
+                <a:latin typeface="Calibri" pitchFamily="34" charset="0"/>
+                <a:ea typeface="Calibri" pitchFamily="34" charset="-122"/>
+                <a:cs typeface="Calibri" pitchFamily="34" charset="-120"/>
+              </a:rPr>
+              <a:t>Ne jamais placer de suggestion en début de panier : on y interrompt une routine. Concentrer les recommandations sur les dernières positions.</a:t>
+            </a:r>
+            <a:endParaRPr lang="en-US" sz="1300" dirty="0"/>
+          </a:p>
+        </p:txBody>
+      </p:sp>
+      <p:sp>
+        <p:nvSpPr>
+          <p:cNvPr id="9" name="Text 6"/>
+          <p:cNvSpPr txBox="1"/>
+          <p:nvPr/>
+        </p:nvSpPr>
+        <p:spPr>
+          <a:xfrm>
+            <a:off x="7818120" y="4663440"/>
+            <a:ext cx="548640" cy="548640"/>
+          </a:xfrm>
+          <a:prstGeom prst="rect">
+            <a:avLst/>
+          </a:prstGeom>
+          <a:noFill/>
+          <a:ln/>
+        </p:spPr>
+        <p:txBody>
+          <a:bodyPr wrap="square" lIns="0" tIns="0" rIns="0" bIns="0" rtlCol="0" anchor="ctr"/>
+          <a:lstStyle/>
+          <a:p>
+            <a:pPr marL="0" indent="0">
+              <a:buNone/>
+            </a:pPr>
+            <a:r>
+              <a:rPr lang="en-US" sz="3400" b="1" dirty="0">
+                <a:solidFill>
+                  <a:srgbClr val="D8E4E6"/>
                 </a:solidFill>
                 <a:latin typeface="Cambria" pitchFamily="34" charset="0"/>
                 <a:ea typeface="Cambria" pitchFamily="34" charset="-122"/>
                 <a:cs typeface="Cambria" pitchFamily="34" charset="-120"/>
               </a:rPr>
-              <a:t>3,42 M</a:t>
-            </a:r>
-            <a:endParaRPr lang="en-US" sz="3000" dirty="0"/>
-          </a:p>
-        </p:txBody>
-      </p:sp>
-      <p:sp>
-        <p:nvSpPr>
-          <p:cNvPr id="6" name="Text 4"/>
-          <p:cNvSpPr txBox="1"/>
-          <p:nvPr/>
-        </p:nvSpPr>
-        <p:spPr>
-          <a:xfrm>
-            <a:off x="822960" y="2606040"/>
-            <a:ext cx="2103120" cy="548640"/>
-          </a:xfrm>
-          <a:prstGeom prst="rect">
-            <a:avLst/>
-          </a:prstGeom>
-          <a:noFill/>
-          <a:ln/>
-        </p:spPr>
-        <p:txBody>
-          <a:bodyPr wrap="square" lIns="0" tIns="0" rIns="0" bIns="0" rtlCol="0" anchor="t"/>
-          <a:lstStyle/>
-          <a:p>
-            <a:pPr indent="0" marL="0">
-              <a:buNone/>
-            </a:pPr>
-            <a:r>
-              <a:rPr lang="en-US" sz="1200" dirty="0">
-                <a:solidFill>
-                  <a:srgbClr val="5D6B75"/>
-                </a:solidFill>
-                <a:latin typeface="Calibri" pitchFamily="34" charset="0"/>
-                <a:ea typeface="Calibri" pitchFamily="34" charset="-122"/>
-                <a:cs typeface="Calibri" pitchFamily="34" charset="-120"/>
-              </a:rPr>
-              <a:t>commandes analysées</a:t>
-            </a:r>
-            <a:endParaRPr lang="en-US" sz="1200" dirty="0"/>
-          </a:p>
-        </p:txBody>
-      </p:sp>
-      <p:sp>
-        <p:nvSpPr>
-          <p:cNvPr id="7" name="Shape 5"/>
-          <p:cNvSpPr/>
-          <p:nvPr/>
-        </p:nvSpPr>
-        <p:spPr>
-          <a:xfrm>
-            <a:off x="3383280" y="1600200"/>
-            <a:ext cx="2560320" cy="1783080"/>
-          </a:xfrm>
-          <a:prstGeom prst="roundRect">
-            <a:avLst>
-              <a:gd name="adj" fmla="val 3077"/>
-            </a:avLst>
-          </a:prstGeom>
-          <a:solidFill>
-            <a:srgbClr val="EAF3F4"/>
-          </a:solidFill>
-          <a:ln w="12700">
-            <a:solidFill>
-              <a:srgbClr val="D3E5E7"/>
-            </a:solidFill>
-            <a:prstDash val="solid"/>
-          </a:ln>
-        </p:spPr>
-      </p:sp>
-      <p:sp>
-        <p:nvSpPr>
-          <p:cNvPr id="8" name="Text 6"/>
-          <p:cNvSpPr txBox="1"/>
-          <p:nvPr/>
-        </p:nvSpPr>
-        <p:spPr>
-          <a:xfrm>
-            <a:off x="3611880" y="1874520"/>
-            <a:ext cx="2103120" cy="685800"/>
-          </a:xfrm>
-          <a:prstGeom prst="rect">
-            <a:avLst/>
-          </a:prstGeom>
-          <a:noFill/>
-          <a:ln/>
-        </p:spPr>
-        <p:txBody>
-          <a:bodyPr wrap="square" lIns="0" tIns="0" rIns="0" bIns="0" rtlCol="0" anchor="ctr"/>
-          <a:lstStyle/>
-          <a:p>
-            <a:pPr indent="0" marL="0">
-              <a:buNone/>
-            </a:pPr>
-            <a:r>
-              <a:rPr lang="en-US" sz="3000" b="1" dirty="0">
-                <a:solidFill>
-                  <a:srgbClr val="0E7C86"/>
-                </a:solidFill>
-                <a:latin typeface="Cambria" pitchFamily="34" charset="0"/>
-                <a:ea typeface="Cambria" pitchFamily="34" charset="-122"/>
-                <a:cs typeface="Cambria" pitchFamily="34" charset="-120"/>
-              </a:rPr>
-              <a:t>206 209</a:t>
-            </a:r>
-            <a:endParaRPr lang="en-US" sz="3000" dirty="0"/>
-          </a:p>
-        </p:txBody>
-      </p:sp>
-      <p:sp>
-        <p:nvSpPr>
-          <p:cNvPr id="9" name="Text 7"/>
-          <p:cNvSpPr txBox="1"/>
-          <p:nvPr/>
-        </p:nvSpPr>
-        <p:spPr>
-          <a:xfrm>
-            <a:off x="3611880" y="2606040"/>
-            <a:ext cx="2103120" cy="548640"/>
-          </a:xfrm>
-          <a:prstGeom prst="rect">
-            <a:avLst/>
-          </a:prstGeom>
-          <a:noFill/>
-          <a:ln/>
-        </p:spPr>
-        <p:txBody>
-          <a:bodyPr wrap="square" lIns="0" tIns="0" rIns="0" bIns="0" rtlCol="0" anchor="t"/>
-          <a:lstStyle/>
-          <a:p>
-            <a:pPr indent="0" marL="0">
-              <a:buNone/>
-            </a:pPr>
-            <a:r>
-              <a:rPr lang="en-US" sz="1200" dirty="0">
-                <a:solidFill>
-                  <a:srgbClr val="5D6B75"/>
-                </a:solidFill>
-                <a:latin typeface="Calibri" pitchFamily="34" charset="0"/>
-                <a:ea typeface="Calibri" pitchFamily="34" charset="-122"/>
-                <a:cs typeface="Calibri" pitchFamily="34" charset="-120"/>
-              </a:rPr>
-              <a:t>clients suivis</a:t>
-            </a:r>
-            <a:endParaRPr lang="en-US" sz="1200" dirty="0"/>
-          </a:p>
-        </p:txBody>
-      </p:sp>
-      <p:sp>
-        <p:nvSpPr>
-          <p:cNvPr id="10" name="Shape 8"/>
-          <p:cNvSpPr/>
-          <p:nvPr/>
-        </p:nvSpPr>
-        <p:spPr>
-          <a:xfrm>
-            <a:off x="6172200" y="1600200"/>
-            <a:ext cx="2560320" cy="1783080"/>
-          </a:xfrm>
-          <a:prstGeom prst="roundRect">
-            <a:avLst>
-              <a:gd name="adj" fmla="val 3077"/>
-            </a:avLst>
-          </a:prstGeom>
-          <a:solidFill>
-            <a:srgbClr val="EAF3F4"/>
-          </a:solidFill>
-          <a:ln w="12700">
-            <a:solidFill>
-              <a:srgbClr val="D3E5E7"/>
-            </a:solidFill>
-            <a:prstDash val="solid"/>
-          </a:ln>
-        </p:spPr>
-      </p:sp>
-      <p:sp>
-        <p:nvSpPr>
-          <p:cNvPr id="11" name="Text 9"/>
-          <p:cNvSpPr txBox="1"/>
-          <p:nvPr/>
-        </p:nvSpPr>
-        <p:spPr>
-          <a:xfrm>
-            <a:off x="6400800" y="1874520"/>
-            <a:ext cx="2103120" cy="685800"/>
-          </a:xfrm>
-          <a:prstGeom prst="rect">
-            <a:avLst/>
-          </a:prstGeom>
-          <a:noFill/>
-          <a:ln/>
-        </p:spPr>
-        <p:txBody>
-          <a:bodyPr wrap="square" lIns="0" tIns="0" rIns="0" bIns="0" rtlCol="0" anchor="ctr"/>
-          <a:lstStyle/>
-          <a:p>
-            <a:pPr indent="0" marL="0">
-              <a:buNone/>
-            </a:pPr>
-            <a:r>
-              <a:rPr lang="en-US" sz="3000" b="1" dirty="0">
-                <a:solidFill>
-                  <a:srgbClr val="0E7C86"/>
-                </a:solidFill>
-                <a:latin typeface="Cambria" pitchFamily="34" charset="0"/>
-                <a:ea typeface="Cambria" pitchFamily="34" charset="-122"/>
-                <a:cs typeface="Cambria" pitchFamily="34" charset="-120"/>
-              </a:rPr>
-              <a:t>32,4 M</a:t>
-            </a:r>
-            <a:endParaRPr lang="en-US" sz="3000" dirty="0"/>
-          </a:p>
-        </p:txBody>
-      </p:sp>
-      <p:sp>
-        <p:nvSpPr>
-          <p:cNvPr id="12" name="Text 10"/>
-          <p:cNvSpPr txBox="1"/>
-          <p:nvPr/>
-        </p:nvSpPr>
-        <p:spPr>
-          <a:xfrm>
-            <a:off x="6400800" y="2606040"/>
-            <a:ext cx="2103120" cy="548640"/>
-          </a:xfrm>
-          <a:prstGeom prst="rect">
-            <a:avLst/>
-          </a:prstGeom>
-          <a:noFill/>
-          <a:ln/>
-        </p:spPr>
-        <p:txBody>
-          <a:bodyPr wrap="square" lIns="0" tIns="0" rIns="0" bIns="0" rtlCol="0" anchor="t"/>
-          <a:lstStyle/>
-          <a:p>
-            <a:pPr indent="0" marL="0">
-              <a:buNone/>
-            </a:pPr>
-            <a:r>
-              <a:rPr lang="en-US" sz="1200" dirty="0">
-                <a:solidFill>
-                  <a:srgbClr val="5D6B75"/>
-                </a:solidFill>
-                <a:latin typeface="Calibri" pitchFamily="34" charset="0"/>
-                <a:ea typeface="Calibri" pitchFamily="34" charset="-122"/>
-                <a:cs typeface="Calibri" pitchFamily="34" charset="-120"/>
-              </a:rPr>
-              <a:t>lignes de produits</a:t>
-            </a:r>
-            <a:endParaRPr lang="en-US" sz="1200" dirty="0"/>
-          </a:p>
-        </p:txBody>
-      </p:sp>
-      <p:sp>
-        <p:nvSpPr>
-          <p:cNvPr id="13" name="Shape 11"/>
-          <p:cNvSpPr/>
-          <p:nvPr/>
-        </p:nvSpPr>
-        <p:spPr>
-          <a:xfrm>
-            <a:off x="8961120" y="1600200"/>
-            <a:ext cx="2560320" cy="1783080"/>
-          </a:xfrm>
-          <a:prstGeom prst="roundRect">
-            <a:avLst>
-              <a:gd name="adj" fmla="val 3077"/>
-            </a:avLst>
-          </a:prstGeom>
-          <a:solidFill>
-            <a:srgbClr val="EAF3F4"/>
-          </a:solidFill>
-          <a:ln w="12700">
-            <a:solidFill>
-              <a:srgbClr val="D3E5E7"/>
-            </a:solidFill>
-            <a:prstDash val="solid"/>
-          </a:ln>
-        </p:spPr>
-      </p:sp>
-      <p:sp>
-        <p:nvSpPr>
-          <p:cNvPr id="14" name="Text 12"/>
-          <p:cNvSpPr txBox="1"/>
-          <p:nvPr/>
-        </p:nvSpPr>
-        <p:spPr>
-          <a:xfrm>
-            <a:off x="9189720" y="1874520"/>
-            <a:ext cx="2103120" cy="685800"/>
-          </a:xfrm>
-          <a:prstGeom prst="rect">
-            <a:avLst/>
-          </a:prstGeom>
-          <a:noFill/>
-          <a:ln/>
-        </p:spPr>
-        <p:txBody>
-          <a:bodyPr wrap="square" lIns="0" tIns="0" rIns="0" bIns="0" rtlCol="0" anchor="ctr"/>
-          <a:lstStyle/>
-          <a:p>
-            <a:pPr indent="0" marL="0">
-              <a:buNone/>
-            </a:pPr>
-            <a:r>
-              <a:rPr lang="en-US" sz="3000" b="1" dirty="0">
-                <a:solidFill>
-                  <a:srgbClr val="0E7C86"/>
-                </a:solidFill>
-                <a:latin typeface="Cambria" pitchFamily="34" charset="0"/>
-                <a:ea typeface="Cambria" pitchFamily="34" charset="-122"/>
-                <a:cs typeface="Cambria" pitchFamily="34" charset="-120"/>
-              </a:rPr>
-              <a:t>49 688</a:t>
-            </a:r>
-            <a:endParaRPr lang="en-US" sz="3000" dirty="0"/>
-          </a:p>
-        </p:txBody>
-      </p:sp>
-      <p:sp>
-        <p:nvSpPr>
-          <p:cNvPr id="15" name="Text 13"/>
-          <p:cNvSpPr txBox="1"/>
-          <p:nvPr/>
-        </p:nvSpPr>
-        <p:spPr>
-          <a:xfrm>
-            <a:off x="9189720" y="2606040"/>
-            <a:ext cx="2103120" cy="548640"/>
-          </a:xfrm>
-          <a:prstGeom prst="rect">
-            <a:avLst/>
-          </a:prstGeom>
-          <a:noFill/>
-          <a:ln/>
-        </p:spPr>
-        <p:txBody>
-          <a:bodyPr wrap="square" lIns="0" tIns="0" rIns="0" bIns="0" rtlCol="0" anchor="t"/>
-          <a:lstStyle/>
-          <a:p>
-            <a:pPr indent="0" marL="0">
-              <a:buNone/>
-            </a:pPr>
-            <a:r>
-              <a:rPr lang="en-US" sz="1200" dirty="0">
-                <a:solidFill>
-                  <a:srgbClr val="5D6B75"/>
-                </a:solidFill>
-                <a:latin typeface="Calibri" pitchFamily="34" charset="0"/>
-                <a:ea typeface="Calibri" pitchFamily="34" charset="-122"/>
-                <a:cs typeface="Calibri" pitchFamily="34" charset="-120"/>
-              </a:rPr>
-              <a:t>références au catalogue</a:t>
-            </a:r>
-            <a:endParaRPr lang="en-US" sz="1200" dirty="0"/>
-          </a:p>
-        </p:txBody>
-      </p:sp>
-      <p:sp>
-        <p:nvSpPr>
-          <p:cNvPr id="16" name="Text 14"/>
-          <p:cNvSpPr txBox="1"/>
-          <p:nvPr/>
-        </p:nvSpPr>
-        <p:spPr>
-          <a:xfrm>
-            <a:off x="594360" y="3794760"/>
-            <a:ext cx="10424160" cy="1005840"/>
-          </a:xfrm>
-          <a:prstGeom prst="rect">
-            <a:avLst/>
-          </a:prstGeom>
-          <a:noFill/>
-          <a:ln/>
-        </p:spPr>
-        <p:txBody>
-          <a:bodyPr wrap="square" lIns="0" tIns="0" rIns="0" bIns="0" rtlCol="0" anchor="ctr"/>
-          <a:lstStyle/>
-          <a:p>
-            <a:pPr indent="0" marL="0">
-              <a:lnSpc>
-                <a:spcPct val="120000"/>
-              </a:lnSpc>
-              <a:buNone/>
-            </a:pPr>
-            <a:r>
-              <a:rPr lang="en-US" sz="1350" dirty="0">
-                <a:solidFill>
-                  <a:srgbClr val="5D6B75"/>
-                </a:solidFill>
-                <a:latin typeface="Calibri" pitchFamily="34" charset="0"/>
-                <a:ea typeface="Calibri" pitchFamily="34" charset="-122"/>
-                <a:cs typeface="Calibri" pitchFamily="34" charset="-120"/>
-              </a:rPr>
-              <a:t>Cinq tables reliées par des clés, fusionnées en une base unique après contrôle d'intégrité. Deux particularités identifiées et traitées : les premières commandes n'ont pas d'historique, et la dernière commande de chaque client n'est pas documentée.</a:t>
-            </a:r>
-            <a:endParaRPr lang="en-US" sz="1350" dirty="0"/>
+              <a:t>2</a:t>
+            </a:r>
+            <a:endParaRPr lang="en-US" sz="3400" dirty="0"/>
           </a:p>
         </p:txBody>
       </p:sp>
@@ -7028,14 +5806,15 @@
 </p:sld>
 </file>
 
-<file path=ppt/slides/slide3.xml><?xml version="1.0" encoding="utf-8"?>
+<file path=ppt/slides/slide6.xml><?xml version="1.0" encoding="utf-8"?>
 <p:sld xmlns:a="http://schemas.openxmlformats.org/drawingml/2006/main" xmlns:r="http://schemas.openxmlformats.org/officeDocument/2006/relationships" xmlns:p="http://schemas.openxmlformats.org/presentationml/2006/main">
-  <p:cSld name="Slide 3">
+  <p:cSld name="Slide 6">
     <p:bg>
       <p:bgPr>
         <a:solidFill>
           <a:srgbClr val="FFFFFF"/>
         </a:solidFill>
+        <a:effectLst/>
       </p:bgPr>
     </p:bg>
     <p:spTree>
@@ -7060,7 +5839,7 @@
         </p:nvSpPr>
         <p:spPr>
           <a:xfrm>
-            <a:off x="594360" y="1234440"/>
+            <a:off x="594360" y="182880"/>
             <a:ext cx="10972800" cy="219456"/>
           </a:xfrm>
           <a:prstGeom prst="rect">
@@ -7073,11 +5852,11 @@
           <a:bodyPr wrap="square" lIns="0" tIns="0" rIns="0" bIns="0" rtlCol="0" anchor="ctr"/>
           <a:lstStyle/>
           <a:p>
-            <a:pPr indent="0" marL="0">
-              <a:buNone/>
-            </a:pPr>
-            <a:r>
-              <a:rPr lang="en-US" sz="1050" b="1" spc="160" kern="0" dirty="0">
+            <a:pPr marL="0" indent="0">
+              <a:buNone/>
+            </a:pPr>
+            <a:r>
+              <a:rPr lang="en-US" sz="1050" b="1" kern="0" spc="160" dirty="0">
                 <a:solidFill>
                   <a:srgbClr val="0E7C86"/>
                 </a:solidFill>
@@ -7085,7 +5864,7 @@
                 <a:ea typeface="Calibri" pitchFamily="34" charset="-122"/>
                 <a:cs typeface="Calibri" pitchFamily="34" charset="-120"/>
               </a:rPr>
-              <a:t>LE CHIFFRE QUI COMMANDE TOUT LE RESTE</a:t>
+              <a:t>DÉMONSTRATION 3</a:t>
             </a:r>
             <a:endParaRPr lang="en-US" sz="1050" dirty="0"/>
           </a:p>
@@ -7099,8 +5878,8 @@
         </p:nvSpPr>
         <p:spPr>
           <a:xfrm>
-            <a:off x="594360" y="1554480"/>
-            <a:ext cx="5669280" cy="2286000"/>
+            <a:off x="594360" y="384048"/>
+            <a:ext cx="10972800" cy="658368"/>
           </a:xfrm>
           <a:prstGeom prst="rect">
             <a:avLst/>
@@ -7112,34 +5891,131 @@
           <a:bodyPr wrap="square" lIns="0" tIns="0" rIns="0" bIns="0" rtlCol="0" anchor="ctr"/>
           <a:lstStyle/>
           <a:p>
-            <a:pPr indent="0" marL="0">
-              <a:buNone/>
-            </a:pPr>
-            <a:r>
-              <a:rPr lang="en-US" sz="12000" b="1" dirty="0">
-                <a:solidFill>
-                  <a:srgbClr val="0E7C86"/>
+            <a:pPr marL="0" indent="0">
+              <a:buNone/>
+            </a:pPr>
+            <a:r>
+              <a:rPr lang="en-US" sz="2700" b="1" dirty="0">
+                <a:solidFill>
+                  <a:srgbClr val="16232B"/>
                 </a:solidFill>
                 <a:latin typeface="Cambria" pitchFamily="34" charset="0"/>
                 <a:ea typeface="Cambria" pitchFamily="34" charset="-122"/>
                 <a:cs typeface="Cambria" pitchFamily="34" charset="-120"/>
               </a:rPr>
-              <a:t>59 %</a:t>
-            </a:r>
-            <a:endParaRPr lang="en-US" sz="12000" dirty="0"/>
-          </a:p>
-        </p:txBody>
-      </p:sp>
-      <p:sp>
-        <p:nvSpPr>
-          <p:cNvPr id="4" name="Text 2"/>
-          <p:cNvSpPr txBox="1"/>
-          <p:nvPr/>
-        </p:nvSpPr>
-        <p:spPr>
-          <a:xfrm>
-            <a:off x="6035040" y="1828800"/>
-            <a:ext cx="5394960" cy="1463040"/>
+              <a:t>Vos rayons n'ont pas le même métier</a:t>
+            </a:r>
+            <a:endParaRPr lang="en-US" sz="2700" dirty="0"/>
+          </a:p>
+        </p:txBody>
+      </p:sp>
+      <p:pic>
+        <p:nvPicPr>
+          <p:cNvPr id="4" name="Image 0" descr="02_projet\_ppt\fig03.png"/>
+          <p:cNvPicPr>
+            <a:picLocks noChangeAspect="1"/>
+          </p:cNvPicPr>
+          <p:nvPr/>
+        </p:nvPicPr>
+        <p:blipFill>
+          <a:blip r:embed="rId3"/>
+          <a:stretch>
+            <a:fillRect/>
+          </a:stretch>
+        </p:blipFill>
+        <p:spPr>
+          <a:xfrm>
+            <a:off x="1117040" y="1207008"/>
+            <a:ext cx="5858359" cy="4114800"/>
+          </a:xfrm>
+          <a:prstGeom prst="rect">
+            <a:avLst/>
+          </a:prstGeom>
+        </p:spPr>
+      </p:pic>
+      <p:sp>
+        <p:nvSpPr>
+          <p:cNvPr id="5" name="Text 2"/>
+          <p:cNvSpPr txBox="1"/>
+          <p:nvPr/>
+        </p:nvSpPr>
+        <p:spPr>
+          <a:xfrm>
+            <a:off x="594360" y="5440680"/>
+            <a:ext cx="6903720" cy="457200"/>
+          </a:xfrm>
+          <a:prstGeom prst="rect">
+            <a:avLst/>
+          </a:prstGeom>
+          <a:noFill/>
+          <a:ln/>
+        </p:spPr>
+        <p:txBody>
+          <a:bodyPr wrap="square" lIns="0" tIns="0" rIns="0" bIns="0" rtlCol="0" anchor="t"/>
+          <a:lstStyle/>
+          <a:p>
+            <a:pPr marL="0" indent="0">
+              <a:buNone/>
+            </a:pPr>
+            <a:r>
+              <a:rPr lang="en-US" sz="1100" i="1" dirty="0">
+                <a:solidFill>
+                  <a:srgbClr val="5D6B75"/>
+                </a:solidFill>
+                <a:latin typeface="Calibri" pitchFamily="34" charset="0"/>
+                <a:ea typeface="Calibri" pitchFamily="34" charset="-122"/>
+                <a:cs typeface="Calibri" pitchFamily="34" charset="-120"/>
+              </a:rPr>
+              <a:t>Un facteur deux sépare les produits laitiers (67 %) de l'hygiène (32 %).</a:t>
+            </a:r>
+            <a:endParaRPr lang="en-US" sz="1100" dirty="0"/>
+          </a:p>
+        </p:txBody>
+      </p:sp>
+      <p:sp>
+        <p:nvSpPr>
+          <p:cNvPr id="6" name="Shape 3"/>
+          <p:cNvSpPr/>
+          <p:nvPr/>
+        </p:nvSpPr>
+        <p:spPr>
+          <a:xfrm>
+            <a:off x="7818120" y="1207008"/>
+            <a:ext cx="3749040" cy="3200400"/>
+          </a:xfrm>
+          <a:prstGeom prst="roundRect">
+            <a:avLst>
+              <a:gd name="adj" fmla="val 1714"/>
+            </a:avLst>
+          </a:prstGeom>
+          <a:solidFill>
+            <a:srgbClr val="EAF3F4"/>
+          </a:solidFill>
+          <a:ln w="12700">
+            <a:solidFill>
+              <a:srgbClr val="D3E5E7"/>
+            </a:solidFill>
+            <a:prstDash val="solid"/>
+          </a:ln>
+        </p:spPr>
+        <p:txBody>
+          <a:bodyPr/>
+          <a:lstStyle/>
+          <a:p>
+            <a:endParaRPr lang="fr-FR"/>
+          </a:p>
+        </p:txBody>
+      </p:sp>
+      <p:sp>
+        <p:nvSpPr>
+          <p:cNvPr id="7" name="Text 4"/>
+          <p:cNvSpPr txBox="1"/>
+          <p:nvPr/>
+        </p:nvSpPr>
+        <p:spPr>
+          <a:xfrm>
+            <a:off x="8074152" y="1389888"/>
+            <a:ext cx="3236976" cy="219456"/>
           </a:xfrm>
           <a:prstGeom prst="rect">
             <a:avLst/>
@@ -7151,120 +6027,102 @@
           <a:bodyPr wrap="square" lIns="0" tIns="0" rIns="0" bIns="0" rtlCol="0" anchor="ctr"/>
           <a:lstStyle/>
           <a:p>
-            <a:pPr indent="0" marL="0">
+            <a:pPr marL="0" indent="0">
+              <a:buNone/>
+            </a:pPr>
+            <a:r>
+              <a:rPr lang="en-US" sz="950" b="1" kern="0" spc="120" dirty="0">
+                <a:solidFill>
+                  <a:srgbClr val="0E7C86"/>
+                </a:solidFill>
+                <a:latin typeface="Calibri" pitchFamily="34" charset="0"/>
+                <a:ea typeface="Calibri" pitchFamily="34" charset="-122"/>
+                <a:cs typeface="Calibri" pitchFamily="34" charset="-120"/>
+              </a:rPr>
+              <a:t>CE QUE NOUS PROPOSONS</a:t>
+            </a:r>
+            <a:endParaRPr lang="en-US" sz="950" dirty="0"/>
+          </a:p>
+        </p:txBody>
+      </p:sp>
+      <p:sp>
+        <p:nvSpPr>
+          <p:cNvPr id="8" name="Text 5"/>
+          <p:cNvSpPr txBox="1"/>
+          <p:nvPr/>
+        </p:nvSpPr>
+        <p:spPr>
+          <a:xfrm>
+            <a:off x="8074152" y="1682496"/>
+            <a:ext cx="3236976" cy="2505456"/>
+          </a:xfrm>
+          <a:prstGeom prst="rect">
+            <a:avLst/>
+          </a:prstGeom>
+          <a:noFill/>
+          <a:ln/>
+        </p:spPr>
+        <p:txBody>
+          <a:bodyPr wrap="square" lIns="0" tIns="0" rIns="0" bIns="0" rtlCol="0" anchor="t"/>
+          <a:lstStyle/>
+          <a:p>
+            <a:pPr marL="0" indent="0">
               <a:lnSpc>
                 <a:spcPct val="110000"/>
               </a:lnSpc>
               <a:buNone/>
             </a:pPr>
             <a:r>
-              <a:rPr lang="en-US" sz="3000" dirty="0">
+              <a:rPr lang="en-US" sz="1300" dirty="0">
                 <a:solidFill>
                   <a:srgbClr val="16232B"/>
+                </a:solidFill>
+                <a:latin typeface="Calibri" pitchFamily="34" charset="0"/>
+                <a:ea typeface="Calibri" pitchFamily="34" charset="-122"/>
+                <a:cs typeface="Calibri" pitchFamily="34" charset="-120"/>
+              </a:rPr>
+              <a:t>Donner des objectifs distincts aux rayons. Le laitier se pilote sur la régularité de réachat, l'hygiène sur la marge par commande.</a:t>
+            </a:r>
+            <a:endParaRPr lang="en-US" sz="1300" dirty="0"/>
+          </a:p>
+        </p:txBody>
+      </p:sp>
+      <p:sp>
+        <p:nvSpPr>
+          <p:cNvPr id="9" name="Text 6"/>
+          <p:cNvSpPr txBox="1"/>
+          <p:nvPr/>
+        </p:nvSpPr>
+        <p:spPr>
+          <a:xfrm>
+            <a:off x="7818120" y="4663440"/>
+            <a:ext cx="548640" cy="548640"/>
+          </a:xfrm>
+          <a:prstGeom prst="rect">
+            <a:avLst/>
+          </a:prstGeom>
+          <a:noFill/>
+          <a:ln/>
+        </p:spPr>
+        <p:txBody>
+          <a:bodyPr wrap="square" lIns="0" tIns="0" rIns="0" bIns="0" rtlCol="0" anchor="ctr"/>
+          <a:lstStyle/>
+          <a:p>
+            <a:pPr marL="0" indent="0">
+              <a:buNone/>
+            </a:pPr>
+            <a:r>
+              <a:rPr lang="en-US" sz="3400" b="1" dirty="0">
+                <a:solidFill>
+                  <a:srgbClr val="D8E4E6"/>
                 </a:solidFill>
                 <a:latin typeface="Cambria" pitchFamily="34" charset="0"/>
                 <a:ea typeface="Cambria" pitchFamily="34" charset="-122"/>
                 <a:cs typeface="Cambria" pitchFamily="34" charset="-120"/>
               </a:rPr>
-              <a:t>des articles vendus</a:t>
-            </a:r>
-            <a:endParaRPr lang="en-US" sz="3000" dirty="0"/>
-          </a:p>
-          <a:p>
-            <a:pPr indent="0" marL="0">
-              <a:lnSpc>
-                <a:spcPct val="110000"/>
-              </a:lnSpc>
-              <a:buNone/>
-            </a:pPr>
-            <a:r>
-              <a:rPr lang="en-US" sz="3000" dirty="0">
-                <a:solidFill>
-                  <a:srgbClr val="16232B"/>
-                </a:solidFill>
-                <a:latin typeface="Cambria" pitchFamily="34" charset="0"/>
-                <a:ea typeface="Cambria" pitchFamily="34" charset="-122"/>
-                <a:cs typeface="Cambria" pitchFamily="34" charset="-120"/>
-              </a:rPr>
-              <a:t>sont des </a:t>
-            </a:r>
-            <a:endParaRPr lang="en-US" sz="3000" dirty="0"/>
-          </a:p>
-          <a:p>
-            <a:pPr indent="0" marL="0">
-              <a:lnSpc>
-                <a:spcPct val="110000"/>
-              </a:lnSpc>
-              <a:buNone/>
-            </a:pPr>
-            <a:r>
-              <a:rPr lang="en-US" sz="3000" b="1" dirty="0">
-                <a:solidFill>
-                  <a:srgbClr val="0E7C86"/>
-                </a:solidFill>
-                <a:latin typeface="Cambria" pitchFamily="34" charset="0"/>
-                <a:ea typeface="Cambria" pitchFamily="34" charset="-122"/>
-                <a:cs typeface="Cambria" pitchFamily="34" charset="-120"/>
-              </a:rPr>
-              <a:t>rachats</a:t>
-            </a:r>
-            <a:pPr indent="0" marL="0">
-              <a:lnSpc>
-                <a:spcPct val="110000"/>
-              </a:lnSpc>
-              <a:buNone/>
-            </a:pPr>
-            <a:r>
-              <a:rPr lang="en-US" sz="3000" dirty="0">
-                <a:solidFill>
-                  <a:srgbClr val="16232B"/>
-                </a:solidFill>
-                <a:latin typeface="Cambria" pitchFamily="34" charset="0"/>
-                <a:ea typeface="Cambria" pitchFamily="34" charset="-122"/>
-                <a:cs typeface="Cambria" pitchFamily="34" charset="-120"/>
-              </a:rPr>
-              <a:t>.</a:t>
-            </a:r>
-            <a:endParaRPr lang="en-US" sz="3000" dirty="0"/>
-          </a:p>
-        </p:txBody>
-      </p:sp>
-      <p:sp>
-        <p:nvSpPr>
-          <p:cNvPr id="5" name="Text 3"/>
-          <p:cNvSpPr txBox="1"/>
-          <p:nvPr/>
-        </p:nvSpPr>
-        <p:spPr>
-          <a:xfrm>
-            <a:off x="6035040" y="3429000"/>
-            <a:ext cx="5394960" cy="457200"/>
-          </a:xfrm>
-          <a:prstGeom prst="rect">
-            <a:avLst/>
-          </a:prstGeom>
-          <a:noFill/>
-          <a:ln/>
-        </p:spPr>
-        <p:txBody>
-          <a:bodyPr wrap="square" lIns="0" tIns="0" rIns="0" bIns="0" rtlCol="0" anchor="ctr"/>
-          <a:lstStyle/>
-          <a:p>
-            <a:pPr indent="0" marL="0">
-              <a:buNone/>
-            </a:pPr>
-            <a:r>
-              <a:rPr lang="en-US" sz="1400" dirty="0">
-                <a:solidFill>
-                  <a:srgbClr val="5D6B75"/>
-                </a:solidFill>
-                <a:latin typeface="Calibri" pitchFamily="34" charset="0"/>
-                <a:ea typeface="Calibri" pitchFamily="34" charset="-122"/>
-                <a:cs typeface="Calibri" pitchFamily="34" charset="-120"/>
-              </a:rPr>
-              <a:t>Chez les clients installés, cette part dépasse 80 %.</a:t>
-            </a:r>
-            <a:endParaRPr lang="en-US" sz="1400" dirty="0"/>
+              <a:t>3</a:t>
+            </a:r>
+            <a:endParaRPr lang="en-US" sz="3400" dirty="0"/>
           </a:p>
         </p:txBody>
       </p:sp>
@@ -7276,14 +6134,15 @@
 </p:sld>
 </file>
 
-<file path=ppt/slides/slide4.xml><?xml version="1.0" encoding="utf-8"?>
+<file path=ppt/slides/slide7.xml><?xml version="1.0" encoding="utf-8"?>
 <p:sld xmlns:a="http://schemas.openxmlformats.org/drawingml/2006/main" xmlns:r="http://schemas.openxmlformats.org/officeDocument/2006/relationships" xmlns:p="http://schemas.openxmlformats.org/presentationml/2006/main">
-  <p:cSld name="Slide 4">
+  <p:cSld name="Slide 7">
     <p:bg>
       <p:bgPr>
         <a:solidFill>
           <a:srgbClr val="FFFFFF"/>
         </a:solidFill>
+        <a:effectLst/>
       </p:bgPr>
     </p:bg>
     <p:spTree>
@@ -7321,11 +6180,11 @@
           <a:bodyPr wrap="square" lIns="0" tIns="0" rIns="0" bIns="0" rtlCol="0" anchor="ctr"/>
           <a:lstStyle/>
           <a:p>
-            <a:pPr indent="0" marL="0">
-              <a:buNone/>
-            </a:pPr>
-            <a:r>
-              <a:rPr lang="en-US" sz="1050" b="1" spc="160" kern="0" dirty="0">
+            <a:pPr marL="0" indent="0">
+              <a:buNone/>
+            </a:pPr>
+            <a:r>
+              <a:rPr lang="en-US" sz="1050" b="1" kern="0" spc="160" dirty="0">
                 <a:solidFill>
                   <a:srgbClr val="0E7C86"/>
                 </a:solidFill>
@@ -7333,7 +6192,7 @@
                 <a:ea typeface="Calibri" pitchFamily="34" charset="-122"/>
                 <a:cs typeface="Calibri" pitchFamily="34" charset="-120"/>
               </a:rPr>
-              <a:t>DÉMONSTRATION 1</a:t>
+              <a:t>DÉMONSTRATION 4</a:t>
             </a:r>
             <a:endParaRPr lang="en-US" sz="1050" dirty="0"/>
           </a:p>
@@ -7360,7 +6219,7 @@
           <a:bodyPr wrap="square" lIns="0" tIns="0" rIns="0" bIns="0" rtlCol="0" anchor="ctr"/>
           <a:lstStyle/>
           <a:p>
-            <a:pPr indent="0" marL="0">
+            <a:pPr marL="0" indent="0">
               <a:buNone/>
             </a:pPr>
             <a:r>
@@ -7372,7 +6231,7 @@
                 <a:ea typeface="Cambria" pitchFamily="34" charset="-122"/>
                 <a:cs typeface="Cambria" pitchFamily="34" charset="-120"/>
               </a:rPr>
-              <a:t>La croissance ne viendra pas d'un panier plus gros</a:t>
+              <a:t>Le bio travaille trois fois plus que sa place au catalogue</a:t>
             </a:r>
             <a:endParaRPr lang="en-US" sz="2700" dirty="0"/>
           </a:p>
@@ -7380,22 +6239,22 @@
       </p:sp>
       <p:pic>
         <p:nvPicPr>
-          <p:cNvPr id="4" name="Image 0" descr="02_projet\_ppt\fig01.png">    </p:cNvPr>
+          <p:cNvPr id="4" name="Image 0" descr="02_projet\_ppt\fig04.png"/>
           <p:cNvPicPr>
             <a:picLocks noChangeAspect="1"/>
           </p:cNvPicPr>
           <p:nvPr/>
         </p:nvPicPr>
         <p:blipFill>
-          <a:blip r:embed="rId1"/>
+          <a:blip r:embed="rId3"/>
           <a:stretch>
             <a:fillRect/>
           </a:stretch>
         </p:blipFill>
         <p:spPr>
           <a:xfrm>
-            <a:off x="594360" y="1519086"/>
-            <a:ext cx="6903720" cy="3490645"/>
+            <a:off x="594360" y="1748794"/>
+            <a:ext cx="6903720" cy="3031227"/>
           </a:xfrm>
           <a:prstGeom prst="rect">
             <a:avLst/>
@@ -7423,7 +6282,7 @@
           <a:bodyPr wrap="square" lIns="0" tIns="0" rIns="0" bIns="0" rtlCol="0" anchor="t"/>
           <a:lstStyle/>
           <a:p>
-            <a:pPr indent="0" marL="0">
+            <a:pPr marL="0" indent="0">
               <a:buNone/>
             </a:pPr>
             <a:r>
@@ -7435,7 +6294,7 @@
                 <a:ea typeface="Calibri" pitchFamily="34" charset="-122"/>
                 <a:cs typeface="Calibri" pitchFamily="34" charset="-120"/>
               </a:rPr>
-              <a:t>Le panier reste à dix articles ; sa part de rachats passe de 29 % à 85 %.</a:t>
+              <a:t>10 % des références, 31,6 % des ventes, et 6,6 points de rachat en plus.</a:t>
             </a:r>
             <a:endParaRPr lang="en-US" sz="1100" dirty="0"/>
           </a:p>
@@ -7467,6 +6326,13 @@
             <a:prstDash val="solid"/>
           </a:ln>
         </p:spPr>
+        <p:txBody>
+          <a:bodyPr/>
+          <a:lstStyle/>
+          <a:p>
+            <a:endParaRPr lang="fr-FR"/>
+          </a:p>
+        </p:txBody>
       </p:sp>
       <p:sp>
         <p:nvSpPr>
@@ -7489,11 +6355,11 @@
           <a:bodyPr wrap="square" lIns="0" tIns="0" rIns="0" bIns="0" rtlCol="0" anchor="ctr"/>
           <a:lstStyle/>
           <a:p>
-            <a:pPr indent="0" marL="0">
-              <a:buNone/>
-            </a:pPr>
-            <a:r>
-              <a:rPr lang="en-US" sz="950" b="1" spc="120" kern="0" dirty="0">
+            <a:pPr marL="0" indent="0">
+              <a:buNone/>
+            </a:pPr>
+            <a:r>
+              <a:rPr lang="en-US" sz="950" b="1" kern="0" spc="120" dirty="0">
                 <a:solidFill>
                   <a:srgbClr val="0E7C86"/>
                 </a:solidFill>
@@ -7528,7 +6394,7 @@
           <a:bodyPr wrap="square" lIns="0" tIns="0" rIns="0" bIns="0" rtlCol="0" anchor="t"/>
           <a:lstStyle/>
           <a:p>
-            <a:pPr indent="0" marL="0">
+            <a:pPr marL="0" indent="0">
               <a:lnSpc>
                 <a:spcPct val="110000"/>
               </a:lnSpc>
@@ -7543,7 +6409,7 @@
                 <a:ea typeface="Calibri" pitchFamily="34" charset="-122"/>
                 <a:cs typeface="Calibri" pitchFamily="34" charset="-120"/>
               </a:rPr>
-              <a:t>Réserver le budget de découverte — échantillons, réductions, mise en avant — aux clients de moins de cinq commandes, et le couper au-delà de la dixième.</a:t>
+              <a:t>Densifier l'offre bio dans les rayons où elle est encore mince. Le rendement de l'investissement est connu d'avance.</a:t>
             </a:r>
             <a:endParaRPr lang="en-US" sz="1300" dirty="0"/>
           </a:p>
@@ -7570,7 +6436,7 @@
           <a:bodyPr wrap="square" lIns="0" tIns="0" rIns="0" bIns="0" rtlCol="0" anchor="ctr"/>
           <a:lstStyle/>
           <a:p>
-            <a:pPr indent="0" marL="0">
+            <a:pPr marL="0" indent="0">
               <a:buNone/>
             </a:pPr>
             <a:r>
@@ -7582,7 +6448,7 @@
                 <a:ea typeface="Cambria" pitchFamily="34" charset="-122"/>
                 <a:cs typeface="Cambria" pitchFamily="34" charset="-120"/>
               </a:rPr>
-              <a:t>1</a:t>
+              <a:t>4</a:t>
             </a:r>
             <a:endParaRPr lang="en-US" sz="3400" dirty="0"/>
           </a:p>
@@ -7596,14 +6462,15 @@
 </p:sld>
 </file>
 
-<file path=ppt/slides/slide5.xml><?xml version="1.0" encoding="utf-8"?>
+<file path=ppt/slides/slide8.xml><?xml version="1.0" encoding="utf-8"?>
 <p:sld xmlns:a="http://schemas.openxmlformats.org/drawingml/2006/main" xmlns:r="http://schemas.openxmlformats.org/officeDocument/2006/relationships" xmlns:p="http://schemas.openxmlformats.org/presentationml/2006/main">
-  <p:cSld name="Slide 5">
+  <p:cSld name="Slide 8">
     <p:bg>
       <p:bgPr>
         <a:solidFill>
           <a:srgbClr val="FFFFFF"/>
         </a:solidFill>
+        <a:effectLst/>
       </p:bgPr>
     </p:bg>
     <p:spTree>
@@ -7641,11 +6508,11 @@
           <a:bodyPr wrap="square" lIns="0" tIns="0" rIns="0" bIns="0" rtlCol="0" anchor="ctr"/>
           <a:lstStyle/>
           <a:p>
-            <a:pPr indent="0" marL="0">
-              <a:buNone/>
-            </a:pPr>
-            <a:r>
-              <a:rPr lang="en-US" sz="1050" b="1" spc="160" kern="0" dirty="0">
+            <a:pPr marL="0" indent="0">
+              <a:buNone/>
+            </a:pPr>
+            <a:r>
+              <a:rPr lang="en-US" sz="1050" b="1" kern="0" spc="160" dirty="0">
                 <a:solidFill>
                   <a:srgbClr val="0E7C86"/>
                 </a:solidFill>
@@ -7653,7 +6520,7 @@
                 <a:ea typeface="Calibri" pitchFamily="34" charset="-122"/>
                 <a:cs typeface="Calibri" pitchFamily="34" charset="-120"/>
               </a:rPr>
-              <a:t>DÉMONSTRATION 2</a:t>
+              <a:t>DÉMONSTRATION 5</a:t>
             </a:r>
             <a:endParaRPr lang="en-US" sz="1050" dirty="0"/>
           </a:p>
@@ -7680,7 +6547,7 @@
           <a:bodyPr wrap="square" lIns="0" tIns="0" rIns="0" bIns="0" rtlCol="0" anchor="ctr"/>
           <a:lstStyle/>
           <a:p>
-            <a:pPr indent="0" marL="0">
+            <a:pPr marL="0" indent="0">
               <a:buNone/>
             </a:pPr>
             <a:r>
@@ -7692,7 +6559,7 @@
                 <a:ea typeface="Cambria" pitchFamily="34" charset="-122"/>
                 <a:cs typeface="Cambria" pitchFamily="34" charset="-120"/>
               </a:rPr>
-              <a:t>L'ordre de remplissage trahit l'habitude</a:t>
+              <a:t>Vous avez deux clientèles, à deux moments</a:t>
             </a:r>
             <a:endParaRPr lang="en-US" sz="2700" dirty="0"/>
           </a:p>
@@ -7700,22 +6567,22 @@
       </p:sp>
       <p:pic>
         <p:nvPicPr>
-          <p:cNvPr id="4" name="Image 0" descr="02_projet\_ppt\fig02.png">    </p:cNvPr>
+          <p:cNvPr id="4" name="Image 0" descr="02_projet\_ppt\fig05.png"/>
           <p:cNvPicPr>
             <a:picLocks noChangeAspect="1"/>
           </p:cNvPicPr>
           <p:nvPr/>
         </p:nvPicPr>
         <p:blipFill>
-          <a:blip r:embed="rId1"/>
+          <a:blip r:embed="rId3"/>
           <a:stretch>
             <a:fillRect/>
           </a:stretch>
         </p:blipFill>
         <p:spPr>
           <a:xfrm>
-            <a:off x="594360" y="1596655"/>
-            <a:ext cx="6903720" cy="3335505"/>
+            <a:off x="594360" y="1922018"/>
+            <a:ext cx="6903720" cy="2684780"/>
           </a:xfrm>
           <a:prstGeom prst="rect">
             <a:avLst/>
@@ -7743,7 +6610,7 @@
           <a:bodyPr wrap="square" lIns="0" tIns="0" rIns="0" bIns="0" rtlCol="0" anchor="t"/>
           <a:lstStyle/>
           <a:p>
-            <a:pPr indent="0" marL="0">
+            <a:pPr marL="0" indent="0">
               <a:buNone/>
             </a:pPr>
             <a:r>
@@ -7755,7 +6622,7 @@
                 <a:ea typeface="Calibri" pitchFamily="34" charset="-122"/>
                 <a:cs typeface="Calibri" pitchFamily="34" charset="-120"/>
               </a:rPr>
-              <a:t>67,8 % de rachats en première position, 48 % en vingtième.</a:t>
+              <a:t>Deux foyers nettement séparés : lundi 10 h, et dimanche début d'après-midi.</a:t>
             </a:r>
             <a:endParaRPr lang="en-US" sz="1100" dirty="0"/>
           </a:p>
@@ -7787,6 +6654,13 @@
             <a:prstDash val="solid"/>
           </a:ln>
         </p:spPr>
+        <p:txBody>
+          <a:bodyPr/>
+          <a:lstStyle/>
+          <a:p>
+            <a:endParaRPr lang="fr-FR"/>
+          </a:p>
+        </p:txBody>
       </p:sp>
       <p:sp>
         <p:nvSpPr>
@@ -7809,11 +6683,11 @@
           <a:bodyPr wrap="square" lIns="0" tIns="0" rIns="0" bIns="0" rtlCol="0" anchor="ctr"/>
           <a:lstStyle/>
           <a:p>
-            <a:pPr indent="0" marL="0">
-              <a:buNone/>
-            </a:pPr>
-            <a:r>
-              <a:rPr lang="en-US" sz="950" b="1" spc="120" kern="0" dirty="0">
+            <a:pPr marL="0" indent="0">
+              <a:buNone/>
+            </a:pPr>
+            <a:r>
+              <a:rPr lang="en-US" sz="950" b="1" kern="0" spc="120" dirty="0">
                 <a:solidFill>
                   <a:srgbClr val="0E7C86"/>
                 </a:solidFill>
@@ -7848,7 +6722,7 @@
           <a:bodyPr wrap="square" lIns="0" tIns="0" rIns="0" bIns="0" rtlCol="0" anchor="t"/>
           <a:lstStyle/>
           <a:p>
-            <a:pPr indent="0" marL="0">
+            <a:pPr marL="0" indent="0">
               <a:lnSpc>
                 <a:spcPct val="110000"/>
               </a:lnSpc>
@@ -7863,7 +6737,7 @@
                 <a:ea typeface="Calibri" pitchFamily="34" charset="-122"/>
                 <a:cs typeface="Calibri" pitchFamily="34" charset="-120"/>
               </a:rPr>
-              <a:t>Ne jamais placer de suggestion en début de panier : on y interrompt une routine. Concentrer les recommandations sur les dernières positions.</a:t>
+              <a:t>Dédoubler créneaux de livraison et campagnes. Dimensionner la logistique sur les deux pointes, jamais sur une moyenne qui ne correspond à rien.</a:t>
             </a:r>
             <a:endParaRPr lang="en-US" sz="1300" dirty="0"/>
           </a:p>
@@ -7890,7 +6764,7 @@
           <a:bodyPr wrap="square" lIns="0" tIns="0" rIns="0" bIns="0" rtlCol="0" anchor="ctr"/>
           <a:lstStyle/>
           <a:p>
-            <a:pPr indent="0" marL="0">
+            <a:pPr marL="0" indent="0">
               <a:buNone/>
             </a:pPr>
             <a:r>
@@ -7902,7 +6776,7 @@
                 <a:ea typeface="Cambria" pitchFamily="34" charset="-122"/>
                 <a:cs typeface="Cambria" pitchFamily="34" charset="-120"/>
               </a:rPr>
-              <a:t>2</a:t>
+              <a:t>5</a:t>
             </a:r>
             <a:endParaRPr lang="en-US" sz="3400" dirty="0"/>
           </a:p>
@@ -7916,14 +6790,15 @@
 </p:sld>
 </file>
 
-<file path=ppt/slides/slide6.xml><?xml version="1.0" encoding="utf-8"?>
+<file path=ppt/slides/slide9.xml><?xml version="1.0" encoding="utf-8"?>
 <p:sld xmlns:a="http://schemas.openxmlformats.org/drawingml/2006/main" xmlns:r="http://schemas.openxmlformats.org/officeDocument/2006/relationships" xmlns:p="http://schemas.openxmlformats.org/presentationml/2006/main">
-  <p:cSld name="Slide 6">
+  <p:cSld name="Slide 9">
     <p:bg>
       <p:bgPr>
         <a:solidFill>
           <a:srgbClr val="FFFFFF"/>
         </a:solidFill>
+        <a:effectLst/>
       </p:bgPr>
     </p:bg>
     <p:spTree>
@@ -7961,11 +6836,11 @@
           <a:bodyPr wrap="square" lIns="0" tIns="0" rIns="0" bIns="0" rtlCol="0" anchor="ctr"/>
           <a:lstStyle/>
           <a:p>
-            <a:pPr indent="0" marL="0">
-              <a:buNone/>
-            </a:pPr>
-            <a:r>
-              <a:rPr lang="en-US" sz="1050" b="1" spc="160" kern="0" dirty="0">
+            <a:pPr marL="0" indent="0">
+              <a:buNone/>
+            </a:pPr>
+            <a:r>
+              <a:rPr lang="en-US" sz="1050" b="1" kern="0" spc="160" dirty="0">
                 <a:solidFill>
                   <a:srgbClr val="0E7C86"/>
                 </a:solidFill>
@@ -7973,7 +6848,7 @@
                 <a:ea typeface="Calibri" pitchFamily="34" charset="-122"/>
                 <a:cs typeface="Calibri" pitchFamily="34" charset="-120"/>
               </a:rPr>
-              <a:t>DÉMONSTRATION 3</a:t>
+              <a:t>DÉMONSTRATION 6</a:t>
             </a:r>
             <a:endParaRPr lang="en-US" sz="1050" dirty="0"/>
           </a:p>
@@ -8000,7 +6875,7 @@
           <a:bodyPr wrap="square" lIns="0" tIns="0" rIns="0" bIns="0" rtlCol="0" anchor="ctr"/>
           <a:lstStyle/>
           <a:p>
-            <a:pPr indent="0" marL="0">
+            <a:pPr marL="0" indent="0">
               <a:buNone/>
             </a:pPr>
             <a:r>
@@ -8012,7 +6887,7 @@
                 <a:ea typeface="Cambria" pitchFamily="34" charset="-122"/>
                 <a:cs typeface="Cambria" pitchFamily="34" charset="-120"/>
               </a:rPr>
-              <a:t>Vos rayons n'ont pas le même métier</a:t>
+              <a:t>Le week-end ne gonfle pas les paniers, il les déplace</a:t>
             </a:r>
             <a:endParaRPr lang="en-US" sz="2700" dirty="0"/>
           </a:p>
@@ -8020,22 +6895,22 @@
       </p:sp>
       <p:pic>
         <p:nvPicPr>
-          <p:cNvPr id="4" name="Image 0" descr="02_projet\_ppt\fig03.png">    </p:cNvPr>
+          <p:cNvPr id="4" name="Image 0" descr="02_projet\_ppt\fig06.png"/>
           <p:cNvPicPr>
             <a:picLocks noChangeAspect="1"/>
           </p:cNvPicPr>
           <p:nvPr/>
         </p:nvPicPr>
         <p:blipFill>
-          <a:blip r:embed="rId1"/>
+          <a:blip r:embed="rId3"/>
           <a:stretch>
             <a:fillRect/>
           </a:stretch>
         </p:blipFill>
         <p:spPr>
           <a:xfrm>
-            <a:off x="1117040" y="1207008"/>
-            <a:ext cx="5858359" cy="4114800"/>
+            <a:off x="594360" y="1481726"/>
+            <a:ext cx="6903720" cy="3565364"/>
           </a:xfrm>
           <a:prstGeom prst="rect">
             <a:avLst/>
@@ -8063,7 +6938,7 @@
           <a:bodyPr wrap="square" lIns="0" tIns="0" rIns="0" bIns="0" rtlCol="0" anchor="t"/>
           <a:lstStyle/>
           <a:p>
-            <a:pPr indent="0" marL="0">
+            <a:pPr marL="0" indent="0">
               <a:buNone/>
             </a:pPr>
             <a:r>
@@ -8075,7 +6950,7 @@
                 <a:ea typeface="Calibri" pitchFamily="34" charset="-122"/>
                 <a:cs typeface="Calibri" pitchFamily="34" charset="-120"/>
               </a:rPr>
-              <a:t>Un facteur deux sépare les produits laitiers (67 %) de l'hygiène (32 %).</a:t>
+              <a:t>Les petits paniers reculent de 7 points au profit des gros.</a:t>
             </a:r>
             <a:endParaRPr lang="en-US" sz="1100" dirty="0"/>
           </a:p>
@@ -8107,6 +6982,13 @@
             <a:prstDash val="solid"/>
           </a:ln>
         </p:spPr>
+        <p:txBody>
+          <a:bodyPr/>
+          <a:lstStyle/>
+          <a:p>
+            <a:endParaRPr lang="fr-FR"/>
+          </a:p>
+        </p:txBody>
       </p:sp>
       <p:sp>
         <p:nvSpPr>
@@ -8129,11 +7011,11 @@
           <a:bodyPr wrap="square" lIns="0" tIns="0" rIns="0" bIns="0" rtlCol="0" anchor="ctr"/>
           <a:lstStyle/>
           <a:p>
-            <a:pPr indent="0" marL="0">
-              <a:buNone/>
-            </a:pPr>
-            <a:r>
-              <a:rPr lang="en-US" sz="950" b="1" spc="120" kern="0" dirty="0">
+            <a:pPr marL="0" indent="0">
+              <a:buNone/>
+            </a:pPr>
+            <a:r>
+              <a:rPr lang="en-US" sz="950" b="1" kern="0" spc="120" dirty="0">
                 <a:solidFill>
                   <a:srgbClr val="0E7C86"/>
                 </a:solidFill>
@@ -8168,7 +7050,7 @@
           <a:bodyPr wrap="square" lIns="0" tIns="0" rIns="0" bIns="0" rtlCol="0" anchor="t"/>
           <a:lstStyle/>
           <a:p>
-            <a:pPr indent="0" marL="0">
+            <a:pPr marL="0" indent="0">
               <a:lnSpc>
                 <a:spcPct val="110000"/>
               </a:lnSpc>
@@ -8183,7 +7065,7 @@
                 <a:ea typeface="Calibri" pitchFamily="34" charset="-122"/>
                 <a:cs typeface="Calibri" pitchFamily="34" charset="-120"/>
               </a:rPr>
-              <a:t>Donner des objectifs distincts aux rayons. Le laitier se pilote sur la régularité de réachat, l'hygiène sur la marge par commande.</a:t>
+              <a:t>Placer les offres à seuil — « livraison offerte dès X articles » — le week-end, où les gros paniers sont déjà la norme.</a:t>
             </a:r>
             <a:endParaRPr lang="en-US" sz="1300" dirty="0"/>
           </a:p>
@@ -8210,967 +7092,7 @@
           <a:bodyPr wrap="square" lIns="0" tIns="0" rIns="0" bIns="0" rtlCol="0" anchor="ctr"/>
           <a:lstStyle/>
           <a:p>
-            <a:pPr indent="0" marL="0">
-              <a:buNone/>
-            </a:pPr>
-            <a:r>
-              <a:rPr lang="en-US" sz="3400" b="1" dirty="0">
-                <a:solidFill>
-                  <a:srgbClr val="D8E4E6"/>
-                </a:solidFill>
-                <a:latin typeface="Cambria" pitchFamily="34" charset="0"/>
-                <a:ea typeface="Cambria" pitchFamily="34" charset="-122"/>
-                <a:cs typeface="Cambria" pitchFamily="34" charset="-120"/>
-              </a:rPr>
-              <a:t>3</a:t>
-            </a:r>
-            <a:endParaRPr lang="en-US" sz="3400" dirty="0"/>
-          </a:p>
-        </p:txBody>
-      </p:sp>
-    </p:spTree>
-  </p:cSld>
-  <p:clrMapOvr>
-    <a:masterClrMapping/>
-  </p:clrMapOvr>
-</p:sld>
-</file>
-
-<file path=ppt/slides/slide7.xml><?xml version="1.0" encoding="utf-8"?>
-<p:sld xmlns:a="http://schemas.openxmlformats.org/drawingml/2006/main" xmlns:r="http://schemas.openxmlformats.org/officeDocument/2006/relationships" xmlns:p="http://schemas.openxmlformats.org/presentationml/2006/main">
-  <p:cSld name="Slide 7">
-    <p:bg>
-      <p:bgPr>
-        <a:solidFill>
-          <a:srgbClr val="FFFFFF"/>
-        </a:solidFill>
-      </p:bgPr>
-    </p:bg>
-    <p:spTree>
-      <p:nvGrpSpPr>
-        <p:cNvPr id="1" name=""/>
-        <p:cNvGrpSpPr/>
-        <p:nvPr/>
-      </p:nvGrpSpPr>
-      <p:grpSpPr>
-        <a:xfrm>
-          <a:off x="0" y="0"/>
-          <a:ext cx="0" cy="0"/>
-          <a:chOff x="0" y="0"/>
-          <a:chExt cx="0" cy="0"/>
-        </a:xfrm>
-      </p:grpSpPr>
-      <p:sp>
-        <p:nvSpPr>
-          <p:cNvPr id="2" name="Text 0"/>
-          <p:cNvSpPr txBox="1"/>
-          <p:nvPr/>
-        </p:nvSpPr>
-        <p:spPr>
-          <a:xfrm>
-            <a:off x="594360" y="182880"/>
-            <a:ext cx="10972800" cy="219456"/>
-          </a:xfrm>
-          <a:prstGeom prst="rect">
-            <a:avLst/>
-          </a:prstGeom>
-          <a:noFill/>
-          <a:ln/>
-        </p:spPr>
-        <p:txBody>
-          <a:bodyPr wrap="square" lIns="0" tIns="0" rIns="0" bIns="0" rtlCol="0" anchor="ctr"/>
-          <a:lstStyle/>
-          <a:p>
-            <a:pPr indent="0" marL="0">
-              <a:buNone/>
-            </a:pPr>
-            <a:r>
-              <a:rPr lang="en-US" sz="1050" b="1" spc="160" kern="0" dirty="0">
-                <a:solidFill>
-                  <a:srgbClr val="0E7C86"/>
-                </a:solidFill>
-                <a:latin typeface="Calibri" pitchFamily="34" charset="0"/>
-                <a:ea typeface="Calibri" pitchFamily="34" charset="-122"/>
-                <a:cs typeface="Calibri" pitchFamily="34" charset="-120"/>
-              </a:rPr>
-              <a:t>DÉMONSTRATION 4</a:t>
-            </a:r>
-            <a:endParaRPr lang="en-US" sz="1050" dirty="0"/>
-          </a:p>
-        </p:txBody>
-      </p:sp>
-      <p:sp>
-        <p:nvSpPr>
-          <p:cNvPr id="3" name="Text 1"/>
-          <p:cNvSpPr txBox="1"/>
-          <p:nvPr/>
-        </p:nvSpPr>
-        <p:spPr>
-          <a:xfrm>
-            <a:off x="594360" y="384048"/>
-            <a:ext cx="10972800" cy="658368"/>
-          </a:xfrm>
-          <a:prstGeom prst="rect">
-            <a:avLst/>
-          </a:prstGeom>
-          <a:noFill/>
-          <a:ln/>
-        </p:spPr>
-        <p:txBody>
-          <a:bodyPr wrap="square" lIns="0" tIns="0" rIns="0" bIns="0" rtlCol="0" anchor="ctr"/>
-          <a:lstStyle/>
-          <a:p>
-            <a:pPr indent="0" marL="0">
-              <a:buNone/>
-            </a:pPr>
-            <a:r>
-              <a:rPr lang="en-US" sz="2700" b="1" dirty="0">
-                <a:solidFill>
-                  <a:srgbClr val="16232B"/>
-                </a:solidFill>
-                <a:latin typeface="Cambria" pitchFamily="34" charset="0"/>
-                <a:ea typeface="Cambria" pitchFamily="34" charset="-122"/>
-                <a:cs typeface="Cambria" pitchFamily="34" charset="-120"/>
-              </a:rPr>
-              <a:t>Le bio travaille trois fois plus que sa place au catalogue</a:t>
-            </a:r>
-            <a:endParaRPr lang="en-US" sz="2700" dirty="0"/>
-          </a:p>
-        </p:txBody>
-      </p:sp>
-      <p:pic>
-        <p:nvPicPr>
-          <p:cNvPr id="4" name="Image 0" descr="02_projet\_ppt\fig04.png">    </p:cNvPr>
-          <p:cNvPicPr>
-            <a:picLocks noChangeAspect="1"/>
-          </p:cNvPicPr>
-          <p:nvPr/>
-        </p:nvPicPr>
-        <p:blipFill>
-          <a:blip r:embed="rId1"/>
-          <a:stretch>
-            <a:fillRect/>
-          </a:stretch>
-        </p:blipFill>
-        <p:spPr>
-          <a:xfrm>
-            <a:off x="594360" y="1748794"/>
-            <a:ext cx="6903720" cy="3031227"/>
-          </a:xfrm>
-          <a:prstGeom prst="rect">
-            <a:avLst/>
-          </a:prstGeom>
-        </p:spPr>
-      </p:pic>
-      <p:sp>
-        <p:nvSpPr>
-          <p:cNvPr id="5" name="Text 2"/>
-          <p:cNvSpPr txBox="1"/>
-          <p:nvPr/>
-        </p:nvSpPr>
-        <p:spPr>
-          <a:xfrm>
-            <a:off x="594360" y="5440680"/>
-            <a:ext cx="6903720" cy="457200"/>
-          </a:xfrm>
-          <a:prstGeom prst="rect">
-            <a:avLst/>
-          </a:prstGeom>
-          <a:noFill/>
-          <a:ln/>
-        </p:spPr>
-        <p:txBody>
-          <a:bodyPr wrap="square" lIns="0" tIns="0" rIns="0" bIns="0" rtlCol="0" anchor="t"/>
-          <a:lstStyle/>
-          <a:p>
-            <a:pPr indent="0" marL="0">
-              <a:buNone/>
-            </a:pPr>
-            <a:r>
-              <a:rPr lang="en-US" sz="1100" i="1" dirty="0">
-                <a:solidFill>
-                  <a:srgbClr val="5D6B75"/>
-                </a:solidFill>
-                <a:latin typeface="Calibri" pitchFamily="34" charset="0"/>
-                <a:ea typeface="Calibri" pitchFamily="34" charset="-122"/>
-                <a:cs typeface="Calibri" pitchFamily="34" charset="-120"/>
-              </a:rPr>
-              <a:t>10 % des références, 31,6 % des ventes, et 6,6 points de rachat en plus.</a:t>
-            </a:r>
-            <a:endParaRPr lang="en-US" sz="1100" dirty="0"/>
-          </a:p>
-        </p:txBody>
-      </p:sp>
-      <p:sp>
-        <p:nvSpPr>
-          <p:cNvPr id="6" name="Shape 3"/>
-          <p:cNvSpPr/>
-          <p:nvPr/>
-        </p:nvSpPr>
-        <p:spPr>
-          <a:xfrm>
-            <a:off x="7818120" y="1207008"/>
-            <a:ext cx="3749040" cy="3200400"/>
-          </a:xfrm>
-          <a:prstGeom prst="roundRect">
-            <a:avLst>
-              <a:gd name="adj" fmla="val 1714"/>
-            </a:avLst>
-          </a:prstGeom>
-          <a:solidFill>
-            <a:srgbClr val="EAF3F4"/>
-          </a:solidFill>
-          <a:ln w="12700">
-            <a:solidFill>
-              <a:srgbClr val="D3E5E7"/>
-            </a:solidFill>
-            <a:prstDash val="solid"/>
-          </a:ln>
-        </p:spPr>
-      </p:sp>
-      <p:sp>
-        <p:nvSpPr>
-          <p:cNvPr id="7" name="Text 4"/>
-          <p:cNvSpPr txBox="1"/>
-          <p:nvPr/>
-        </p:nvSpPr>
-        <p:spPr>
-          <a:xfrm>
-            <a:off x="8074152" y="1389888"/>
-            <a:ext cx="3236976" cy="219456"/>
-          </a:xfrm>
-          <a:prstGeom prst="rect">
-            <a:avLst/>
-          </a:prstGeom>
-          <a:noFill/>
-          <a:ln/>
-        </p:spPr>
-        <p:txBody>
-          <a:bodyPr wrap="square" lIns="0" tIns="0" rIns="0" bIns="0" rtlCol="0" anchor="ctr"/>
-          <a:lstStyle/>
-          <a:p>
-            <a:pPr indent="0" marL="0">
-              <a:buNone/>
-            </a:pPr>
-            <a:r>
-              <a:rPr lang="en-US" sz="950" b="1" spc="120" kern="0" dirty="0">
-                <a:solidFill>
-                  <a:srgbClr val="0E7C86"/>
-                </a:solidFill>
-                <a:latin typeface="Calibri" pitchFamily="34" charset="0"/>
-                <a:ea typeface="Calibri" pitchFamily="34" charset="-122"/>
-                <a:cs typeface="Calibri" pitchFamily="34" charset="-120"/>
-              </a:rPr>
-              <a:t>CE QUE NOUS PROPOSONS</a:t>
-            </a:r>
-            <a:endParaRPr lang="en-US" sz="950" dirty="0"/>
-          </a:p>
-        </p:txBody>
-      </p:sp>
-      <p:sp>
-        <p:nvSpPr>
-          <p:cNvPr id="8" name="Text 5"/>
-          <p:cNvSpPr txBox="1"/>
-          <p:nvPr/>
-        </p:nvSpPr>
-        <p:spPr>
-          <a:xfrm>
-            <a:off x="8074152" y="1682496"/>
-            <a:ext cx="3236976" cy="2505456"/>
-          </a:xfrm>
-          <a:prstGeom prst="rect">
-            <a:avLst/>
-          </a:prstGeom>
-          <a:noFill/>
-          <a:ln/>
-        </p:spPr>
-        <p:txBody>
-          <a:bodyPr wrap="square" lIns="0" tIns="0" rIns="0" bIns="0" rtlCol="0" anchor="t"/>
-          <a:lstStyle/>
-          <a:p>
-            <a:pPr indent="0" marL="0">
-              <a:lnSpc>
-                <a:spcPct val="110000"/>
-              </a:lnSpc>
-              <a:buNone/>
-            </a:pPr>
-            <a:r>
-              <a:rPr lang="en-US" sz="1300" dirty="0">
-                <a:solidFill>
-                  <a:srgbClr val="16232B"/>
-                </a:solidFill>
-                <a:latin typeface="Calibri" pitchFamily="34" charset="0"/>
-                <a:ea typeface="Calibri" pitchFamily="34" charset="-122"/>
-                <a:cs typeface="Calibri" pitchFamily="34" charset="-120"/>
-              </a:rPr>
-              <a:t>Densifier l'offre bio dans les rayons où elle est encore mince. Le rendement de l'investissement est connu d'avance.</a:t>
-            </a:r>
-            <a:endParaRPr lang="en-US" sz="1300" dirty="0"/>
-          </a:p>
-        </p:txBody>
-      </p:sp>
-      <p:sp>
-        <p:nvSpPr>
-          <p:cNvPr id="9" name="Text 6"/>
-          <p:cNvSpPr txBox="1"/>
-          <p:nvPr/>
-        </p:nvSpPr>
-        <p:spPr>
-          <a:xfrm>
-            <a:off x="7818120" y="4663440"/>
-            <a:ext cx="548640" cy="548640"/>
-          </a:xfrm>
-          <a:prstGeom prst="rect">
-            <a:avLst/>
-          </a:prstGeom>
-          <a:noFill/>
-          <a:ln/>
-        </p:spPr>
-        <p:txBody>
-          <a:bodyPr wrap="square" lIns="0" tIns="0" rIns="0" bIns="0" rtlCol="0" anchor="ctr"/>
-          <a:lstStyle/>
-          <a:p>
-            <a:pPr indent="0" marL="0">
-              <a:buNone/>
-            </a:pPr>
-            <a:r>
-              <a:rPr lang="en-US" sz="3400" b="1" dirty="0">
-                <a:solidFill>
-                  <a:srgbClr val="D8E4E6"/>
-                </a:solidFill>
-                <a:latin typeface="Cambria" pitchFamily="34" charset="0"/>
-                <a:ea typeface="Cambria" pitchFamily="34" charset="-122"/>
-                <a:cs typeface="Cambria" pitchFamily="34" charset="-120"/>
-              </a:rPr>
-              <a:t>4</a:t>
-            </a:r>
-            <a:endParaRPr lang="en-US" sz="3400" dirty="0"/>
-          </a:p>
-        </p:txBody>
-      </p:sp>
-    </p:spTree>
-  </p:cSld>
-  <p:clrMapOvr>
-    <a:masterClrMapping/>
-  </p:clrMapOvr>
-</p:sld>
-</file>
-
-<file path=ppt/slides/slide8.xml><?xml version="1.0" encoding="utf-8"?>
-<p:sld xmlns:a="http://schemas.openxmlformats.org/drawingml/2006/main" xmlns:r="http://schemas.openxmlformats.org/officeDocument/2006/relationships" xmlns:p="http://schemas.openxmlformats.org/presentationml/2006/main">
-  <p:cSld name="Slide 8">
-    <p:bg>
-      <p:bgPr>
-        <a:solidFill>
-          <a:srgbClr val="FFFFFF"/>
-        </a:solidFill>
-      </p:bgPr>
-    </p:bg>
-    <p:spTree>
-      <p:nvGrpSpPr>
-        <p:cNvPr id="1" name=""/>
-        <p:cNvGrpSpPr/>
-        <p:nvPr/>
-      </p:nvGrpSpPr>
-      <p:grpSpPr>
-        <a:xfrm>
-          <a:off x="0" y="0"/>
-          <a:ext cx="0" cy="0"/>
-          <a:chOff x="0" y="0"/>
-          <a:chExt cx="0" cy="0"/>
-        </a:xfrm>
-      </p:grpSpPr>
-      <p:sp>
-        <p:nvSpPr>
-          <p:cNvPr id="2" name="Text 0"/>
-          <p:cNvSpPr txBox="1"/>
-          <p:nvPr/>
-        </p:nvSpPr>
-        <p:spPr>
-          <a:xfrm>
-            <a:off x="594360" y="182880"/>
-            <a:ext cx="10972800" cy="219456"/>
-          </a:xfrm>
-          <a:prstGeom prst="rect">
-            <a:avLst/>
-          </a:prstGeom>
-          <a:noFill/>
-          <a:ln/>
-        </p:spPr>
-        <p:txBody>
-          <a:bodyPr wrap="square" lIns="0" tIns="0" rIns="0" bIns="0" rtlCol="0" anchor="ctr"/>
-          <a:lstStyle/>
-          <a:p>
-            <a:pPr indent="0" marL="0">
-              <a:buNone/>
-            </a:pPr>
-            <a:r>
-              <a:rPr lang="en-US" sz="1050" b="1" spc="160" kern="0" dirty="0">
-                <a:solidFill>
-                  <a:srgbClr val="0E7C86"/>
-                </a:solidFill>
-                <a:latin typeface="Calibri" pitchFamily="34" charset="0"/>
-                <a:ea typeface="Calibri" pitchFamily="34" charset="-122"/>
-                <a:cs typeface="Calibri" pitchFamily="34" charset="-120"/>
-              </a:rPr>
-              <a:t>DÉMONSTRATION 5</a:t>
-            </a:r>
-            <a:endParaRPr lang="en-US" sz="1050" dirty="0"/>
-          </a:p>
-        </p:txBody>
-      </p:sp>
-      <p:sp>
-        <p:nvSpPr>
-          <p:cNvPr id="3" name="Text 1"/>
-          <p:cNvSpPr txBox="1"/>
-          <p:nvPr/>
-        </p:nvSpPr>
-        <p:spPr>
-          <a:xfrm>
-            <a:off x="594360" y="384048"/>
-            <a:ext cx="10972800" cy="658368"/>
-          </a:xfrm>
-          <a:prstGeom prst="rect">
-            <a:avLst/>
-          </a:prstGeom>
-          <a:noFill/>
-          <a:ln/>
-        </p:spPr>
-        <p:txBody>
-          <a:bodyPr wrap="square" lIns="0" tIns="0" rIns="0" bIns="0" rtlCol="0" anchor="ctr"/>
-          <a:lstStyle/>
-          <a:p>
-            <a:pPr indent="0" marL="0">
-              <a:buNone/>
-            </a:pPr>
-            <a:r>
-              <a:rPr lang="en-US" sz="2700" b="1" dirty="0">
-                <a:solidFill>
-                  <a:srgbClr val="16232B"/>
-                </a:solidFill>
-                <a:latin typeface="Cambria" pitchFamily="34" charset="0"/>
-                <a:ea typeface="Cambria" pitchFamily="34" charset="-122"/>
-                <a:cs typeface="Cambria" pitchFamily="34" charset="-120"/>
-              </a:rPr>
-              <a:t>Vous avez deux clientèles, à deux moments</a:t>
-            </a:r>
-            <a:endParaRPr lang="en-US" sz="2700" dirty="0"/>
-          </a:p>
-        </p:txBody>
-      </p:sp>
-      <p:pic>
-        <p:nvPicPr>
-          <p:cNvPr id="4" name="Image 0" descr="02_projet\_ppt\fig05.png">    </p:cNvPr>
-          <p:cNvPicPr>
-            <a:picLocks noChangeAspect="1"/>
-          </p:cNvPicPr>
-          <p:nvPr/>
-        </p:nvPicPr>
-        <p:blipFill>
-          <a:blip r:embed="rId1"/>
-          <a:stretch>
-            <a:fillRect/>
-          </a:stretch>
-        </p:blipFill>
-        <p:spPr>
-          <a:xfrm>
-            <a:off x="594360" y="1922018"/>
-            <a:ext cx="6903720" cy="2684780"/>
-          </a:xfrm>
-          <a:prstGeom prst="rect">
-            <a:avLst/>
-          </a:prstGeom>
-        </p:spPr>
-      </p:pic>
-      <p:sp>
-        <p:nvSpPr>
-          <p:cNvPr id="5" name="Text 2"/>
-          <p:cNvSpPr txBox="1"/>
-          <p:nvPr/>
-        </p:nvSpPr>
-        <p:spPr>
-          <a:xfrm>
-            <a:off x="594360" y="5440680"/>
-            <a:ext cx="6903720" cy="457200"/>
-          </a:xfrm>
-          <a:prstGeom prst="rect">
-            <a:avLst/>
-          </a:prstGeom>
-          <a:noFill/>
-          <a:ln/>
-        </p:spPr>
-        <p:txBody>
-          <a:bodyPr wrap="square" lIns="0" tIns="0" rIns="0" bIns="0" rtlCol="0" anchor="t"/>
-          <a:lstStyle/>
-          <a:p>
-            <a:pPr indent="0" marL="0">
-              <a:buNone/>
-            </a:pPr>
-            <a:r>
-              <a:rPr lang="en-US" sz="1100" i="1" dirty="0">
-                <a:solidFill>
-                  <a:srgbClr val="5D6B75"/>
-                </a:solidFill>
-                <a:latin typeface="Calibri" pitchFamily="34" charset="0"/>
-                <a:ea typeface="Calibri" pitchFamily="34" charset="-122"/>
-                <a:cs typeface="Calibri" pitchFamily="34" charset="-120"/>
-              </a:rPr>
-              <a:t>Deux foyers nettement séparés : lundi 10 h, et dimanche début d'après-midi.</a:t>
-            </a:r>
-            <a:endParaRPr lang="en-US" sz="1100" dirty="0"/>
-          </a:p>
-        </p:txBody>
-      </p:sp>
-      <p:sp>
-        <p:nvSpPr>
-          <p:cNvPr id="6" name="Shape 3"/>
-          <p:cNvSpPr/>
-          <p:nvPr/>
-        </p:nvSpPr>
-        <p:spPr>
-          <a:xfrm>
-            <a:off x="7818120" y="1207008"/>
-            <a:ext cx="3749040" cy="3200400"/>
-          </a:xfrm>
-          <a:prstGeom prst="roundRect">
-            <a:avLst>
-              <a:gd name="adj" fmla="val 1714"/>
-            </a:avLst>
-          </a:prstGeom>
-          <a:solidFill>
-            <a:srgbClr val="EAF3F4"/>
-          </a:solidFill>
-          <a:ln w="12700">
-            <a:solidFill>
-              <a:srgbClr val="D3E5E7"/>
-            </a:solidFill>
-            <a:prstDash val="solid"/>
-          </a:ln>
-        </p:spPr>
-      </p:sp>
-      <p:sp>
-        <p:nvSpPr>
-          <p:cNvPr id="7" name="Text 4"/>
-          <p:cNvSpPr txBox="1"/>
-          <p:nvPr/>
-        </p:nvSpPr>
-        <p:spPr>
-          <a:xfrm>
-            <a:off x="8074152" y="1389888"/>
-            <a:ext cx="3236976" cy="219456"/>
-          </a:xfrm>
-          <a:prstGeom prst="rect">
-            <a:avLst/>
-          </a:prstGeom>
-          <a:noFill/>
-          <a:ln/>
-        </p:spPr>
-        <p:txBody>
-          <a:bodyPr wrap="square" lIns="0" tIns="0" rIns="0" bIns="0" rtlCol="0" anchor="ctr"/>
-          <a:lstStyle/>
-          <a:p>
-            <a:pPr indent="0" marL="0">
-              <a:buNone/>
-            </a:pPr>
-            <a:r>
-              <a:rPr lang="en-US" sz="950" b="1" spc="120" kern="0" dirty="0">
-                <a:solidFill>
-                  <a:srgbClr val="0E7C86"/>
-                </a:solidFill>
-                <a:latin typeface="Calibri" pitchFamily="34" charset="0"/>
-                <a:ea typeface="Calibri" pitchFamily="34" charset="-122"/>
-                <a:cs typeface="Calibri" pitchFamily="34" charset="-120"/>
-              </a:rPr>
-              <a:t>CE QUE NOUS PROPOSONS</a:t>
-            </a:r>
-            <a:endParaRPr lang="en-US" sz="950" dirty="0"/>
-          </a:p>
-        </p:txBody>
-      </p:sp>
-      <p:sp>
-        <p:nvSpPr>
-          <p:cNvPr id="8" name="Text 5"/>
-          <p:cNvSpPr txBox="1"/>
-          <p:nvPr/>
-        </p:nvSpPr>
-        <p:spPr>
-          <a:xfrm>
-            <a:off x="8074152" y="1682496"/>
-            <a:ext cx="3236976" cy="2505456"/>
-          </a:xfrm>
-          <a:prstGeom prst="rect">
-            <a:avLst/>
-          </a:prstGeom>
-          <a:noFill/>
-          <a:ln/>
-        </p:spPr>
-        <p:txBody>
-          <a:bodyPr wrap="square" lIns="0" tIns="0" rIns="0" bIns="0" rtlCol="0" anchor="t"/>
-          <a:lstStyle/>
-          <a:p>
-            <a:pPr indent="0" marL="0">
-              <a:lnSpc>
-                <a:spcPct val="110000"/>
-              </a:lnSpc>
-              <a:buNone/>
-            </a:pPr>
-            <a:r>
-              <a:rPr lang="en-US" sz="1300" dirty="0">
-                <a:solidFill>
-                  <a:srgbClr val="16232B"/>
-                </a:solidFill>
-                <a:latin typeface="Calibri" pitchFamily="34" charset="0"/>
-                <a:ea typeface="Calibri" pitchFamily="34" charset="-122"/>
-                <a:cs typeface="Calibri" pitchFamily="34" charset="-120"/>
-              </a:rPr>
-              <a:t>Dédoubler créneaux de livraison et campagnes. Dimensionner la logistique sur les deux pointes, jamais sur une moyenne qui ne correspond à rien.</a:t>
-            </a:r>
-            <a:endParaRPr lang="en-US" sz="1300" dirty="0"/>
-          </a:p>
-        </p:txBody>
-      </p:sp>
-      <p:sp>
-        <p:nvSpPr>
-          <p:cNvPr id="9" name="Text 6"/>
-          <p:cNvSpPr txBox="1"/>
-          <p:nvPr/>
-        </p:nvSpPr>
-        <p:spPr>
-          <a:xfrm>
-            <a:off x="7818120" y="4663440"/>
-            <a:ext cx="548640" cy="548640"/>
-          </a:xfrm>
-          <a:prstGeom prst="rect">
-            <a:avLst/>
-          </a:prstGeom>
-          <a:noFill/>
-          <a:ln/>
-        </p:spPr>
-        <p:txBody>
-          <a:bodyPr wrap="square" lIns="0" tIns="0" rIns="0" bIns="0" rtlCol="0" anchor="ctr"/>
-          <a:lstStyle/>
-          <a:p>
-            <a:pPr indent="0" marL="0">
-              <a:buNone/>
-            </a:pPr>
-            <a:r>
-              <a:rPr lang="en-US" sz="3400" b="1" dirty="0">
-                <a:solidFill>
-                  <a:srgbClr val="D8E4E6"/>
-                </a:solidFill>
-                <a:latin typeface="Cambria" pitchFamily="34" charset="0"/>
-                <a:ea typeface="Cambria" pitchFamily="34" charset="-122"/>
-                <a:cs typeface="Cambria" pitchFamily="34" charset="-120"/>
-              </a:rPr>
-              <a:t>5</a:t>
-            </a:r>
-            <a:endParaRPr lang="en-US" sz="3400" dirty="0"/>
-          </a:p>
-        </p:txBody>
-      </p:sp>
-    </p:spTree>
-  </p:cSld>
-  <p:clrMapOvr>
-    <a:masterClrMapping/>
-  </p:clrMapOvr>
-</p:sld>
-</file>
-
-<file path=ppt/slides/slide9.xml><?xml version="1.0" encoding="utf-8"?>
-<p:sld xmlns:a="http://schemas.openxmlformats.org/drawingml/2006/main" xmlns:r="http://schemas.openxmlformats.org/officeDocument/2006/relationships" xmlns:p="http://schemas.openxmlformats.org/presentationml/2006/main">
-  <p:cSld name="Slide 9">
-    <p:bg>
-      <p:bgPr>
-        <a:solidFill>
-          <a:srgbClr val="FFFFFF"/>
-        </a:solidFill>
-      </p:bgPr>
-    </p:bg>
-    <p:spTree>
-      <p:nvGrpSpPr>
-        <p:cNvPr id="1" name=""/>
-        <p:cNvGrpSpPr/>
-        <p:nvPr/>
-      </p:nvGrpSpPr>
-      <p:grpSpPr>
-        <a:xfrm>
-          <a:off x="0" y="0"/>
-          <a:ext cx="0" cy="0"/>
-          <a:chOff x="0" y="0"/>
-          <a:chExt cx="0" cy="0"/>
-        </a:xfrm>
-      </p:grpSpPr>
-      <p:sp>
-        <p:nvSpPr>
-          <p:cNvPr id="2" name="Text 0"/>
-          <p:cNvSpPr txBox="1"/>
-          <p:nvPr/>
-        </p:nvSpPr>
-        <p:spPr>
-          <a:xfrm>
-            <a:off x="594360" y="182880"/>
-            <a:ext cx="10972800" cy="219456"/>
-          </a:xfrm>
-          <a:prstGeom prst="rect">
-            <a:avLst/>
-          </a:prstGeom>
-          <a:noFill/>
-          <a:ln/>
-        </p:spPr>
-        <p:txBody>
-          <a:bodyPr wrap="square" lIns="0" tIns="0" rIns="0" bIns="0" rtlCol="0" anchor="ctr"/>
-          <a:lstStyle/>
-          <a:p>
-            <a:pPr indent="0" marL="0">
-              <a:buNone/>
-            </a:pPr>
-            <a:r>
-              <a:rPr lang="en-US" sz="1050" b="1" spc="160" kern="0" dirty="0">
-                <a:solidFill>
-                  <a:srgbClr val="0E7C86"/>
-                </a:solidFill>
-                <a:latin typeface="Calibri" pitchFamily="34" charset="0"/>
-                <a:ea typeface="Calibri" pitchFamily="34" charset="-122"/>
-                <a:cs typeface="Calibri" pitchFamily="34" charset="-120"/>
-              </a:rPr>
-              <a:t>DÉMONSTRATION 6</a:t>
-            </a:r>
-            <a:endParaRPr lang="en-US" sz="1050" dirty="0"/>
-          </a:p>
-        </p:txBody>
-      </p:sp>
-      <p:sp>
-        <p:nvSpPr>
-          <p:cNvPr id="3" name="Text 1"/>
-          <p:cNvSpPr txBox="1"/>
-          <p:nvPr/>
-        </p:nvSpPr>
-        <p:spPr>
-          <a:xfrm>
-            <a:off x="594360" y="384048"/>
-            <a:ext cx="10972800" cy="658368"/>
-          </a:xfrm>
-          <a:prstGeom prst="rect">
-            <a:avLst/>
-          </a:prstGeom>
-          <a:noFill/>
-          <a:ln/>
-        </p:spPr>
-        <p:txBody>
-          <a:bodyPr wrap="square" lIns="0" tIns="0" rIns="0" bIns="0" rtlCol="0" anchor="ctr"/>
-          <a:lstStyle/>
-          <a:p>
-            <a:pPr indent="0" marL="0">
-              <a:buNone/>
-            </a:pPr>
-            <a:r>
-              <a:rPr lang="en-US" sz="2700" b="1" dirty="0">
-                <a:solidFill>
-                  <a:srgbClr val="16232B"/>
-                </a:solidFill>
-                <a:latin typeface="Cambria" pitchFamily="34" charset="0"/>
-                <a:ea typeface="Cambria" pitchFamily="34" charset="-122"/>
-                <a:cs typeface="Cambria" pitchFamily="34" charset="-120"/>
-              </a:rPr>
-              <a:t>Le week-end ne gonfle pas les paniers, il les déplace</a:t>
-            </a:r>
-            <a:endParaRPr lang="en-US" sz="2700" dirty="0"/>
-          </a:p>
-        </p:txBody>
-      </p:sp>
-      <p:pic>
-        <p:nvPicPr>
-          <p:cNvPr id="4" name="Image 0" descr="02_projet\_ppt\fig06.png">    </p:cNvPr>
-          <p:cNvPicPr>
-            <a:picLocks noChangeAspect="1"/>
-          </p:cNvPicPr>
-          <p:nvPr/>
-        </p:nvPicPr>
-        <p:blipFill>
-          <a:blip r:embed="rId1"/>
-          <a:stretch>
-            <a:fillRect/>
-          </a:stretch>
-        </p:blipFill>
-        <p:spPr>
-          <a:xfrm>
-            <a:off x="594360" y="1481726"/>
-            <a:ext cx="6903720" cy="3565364"/>
-          </a:xfrm>
-          <a:prstGeom prst="rect">
-            <a:avLst/>
-          </a:prstGeom>
-        </p:spPr>
-      </p:pic>
-      <p:sp>
-        <p:nvSpPr>
-          <p:cNvPr id="5" name="Text 2"/>
-          <p:cNvSpPr txBox="1"/>
-          <p:nvPr/>
-        </p:nvSpPr>
-        <p:spPr>
-          <a:xfrm>
-            <a:off x="594360" y="5440680"/>
-            <a:ext cx="6903720" cy="457200"/>
-          </a:xfrm>
-          <a:prstGeom prst="rect">
-            <a:avLst/>
-          </a:prstGeom>
-          <a:noFill/>
-          <a:ln/>
-        </p:spPr>
-        <p:txBody>
-          <a:bodyPr wrap="square" lIns="0" tIns="0" rIns="0" bIns="0" rtlCol="0" anchor="t"/>
-          <a:lstStyle/>
-          <a:p>
-            <a:pPr indent="0" marL="0">
-              <a:buNone/>
-            </a:pPr>
-            <a:r>
-              <a:rPr lang="en-US" sz="1100" i="1" dirty="0">
-                <a:solidFill>
-                  <a:srgbClr val="5D6B75"/>
-                </a:solidFill>
-                <a:latin typeface="Calibri" pitchFamily="34" charset="0"/>
-                <a:ea typeface="Calibri" pitchFamily="34" charset="-122"/>
-                <a:cs typeface="Calibri" pitchFamily="34" charset="-120"/>
-              </a:rPr>
-              <a:t>Les petits paniers reculent de 7 points au profit des gros.</a:t>
-            </a:r>
-            <a:endParaRPr lang="en-US" sz="1100" dirty="0"/>
-          </a:p>
-        </p:txBody>
-      </p:sp>
-      <p:sp>
-        <p:nvSpPr>
-          <p:cNvPr id="6" name="Shape 3"/>
-          <p:cNvSpPr/>
-          <p:nvPr/>
-        </p:nvSpPr>
-        <p:spPr>
-          <a:xfrm>
-            <a:off x="7818120" y="1207008"/>
-            <a:ext cx="3749040" cy="3200400"/>
-          </a:xfrm>
-          <a:prstGeom prst="roundRect">
-            <a:avLst>
-              <a:gd name="adj" fmla="val 1714"/>
-            </a:avLst>
-          </a:prstGeom>
-          <a:solidFill>
-            <a:srgbClr val="EAF3F4"/>
-          </a:solidFill>
-          <a:ln w="12700">
-            <a:solidFill>
-              <a:srgbClr val="D3E5E7"/>
-            </a:solidFill>
-            <a:prstDash val="solid"/>
-          </a:ln>
-        </p:spPr>
-      </p:sp>
-      <p:sp>
-        <p:nvSpPr>
-          <p:cNvPr id="7" name="Text 4"/>
-          <p:cNvSpPr txBox="1"/>
-          <p:nvPr/>
-        </p:nvSpPr>
-        <p:spPr>
-          <a:xfrm>
-            <a:off x="8074152" y="1389888"/>
-            <a:ext cx="3236976" cy="219456"/>
-          </a:xfrm>
-          <a:prstGeom prst="rect">
-            <a:avLst/>
-          </a:prstGeom>
-          <a:noFill/>
-          <a:ln/>
-        </p:spPr>
-        <p:txBody>
-          <a:bodyPr wrap="square" lIns="0" tIns="0" rIns="0" bIns="0" rtlCol="0" anchor="ctr"/>
-          <a:lstStyle/>
-          <a:p>
-            <a:pPr indent="0" marL="0">
-              <a:buNone/>
-            </a:pPr>
-            <a:r>
-              <a:rPr lang="en-US" sz="950" b="1" spc="120" kern="0" dirty="0">
-                <a:solidFill>
-                  <a:srgbClr val="0E7C86"/>
-                </a:solidFill>
-                <a:latin typeface="Calibri" pitchFamily="34" charset="0"/>
-                <a:ea typeface="Calibri" pitchFamily="34" charset="-122"/>
-                <a:cs typeface="Calibri" pitchFamily="34" charset="-120"/>
-              </a:rPr>
-              <a:t>CE QUE NOUS PROPOSONS</a:t>
-            </a:r>
-            <a:endParaRPr lang="en-US" sz="950" dirty="0"/>
-          </a:p>
-        </p:txBody>
-      </p:sp>
-      <p:sp>
-        <p:nvSpPr>
-          <p:cNvPr id="8" name="Text 5"/>
-          <p:cNvSpPr txBox="1"/>
-          <p:nvPr/>
-        </p:nvSpPr>
-        <p:spPr>
-          <a:xfrm>
-            <a:off x="8074152" y="1682496"/>
-            <a:ext cx="3236976" cy="2505456"/>
-          </a:xfrm>
-          <a:prstGeom prst="rect">
-            <a:avLst/>
-          </a:prstGeom>
-          <a:noFill/>
-          <a:ln/>
-        </p:spPr>
-        <p:txBody>
-          <a:bodyPr wrap="square" lIns="0" tIns="0" rIns="0" bIns="0" rtlCol="0" anchor="t"/>
-          <a:lstStyle/>
-          <a:p>
-            <a:pPr indent="0" marL="0">
-              <a:lnSpc>
-                <a:spcPct val="110000"/>
-              </a:lnSpc>
-              <a:buNone/>
-            </a:pPr>
-            <a:r>
-              <a:rPr lang="en-US" sz="1300" dirty="0">
-                <a:solidFill>
-                  <a:srgbClr val="16232B"/>
-                </a:solidFill>
-                <a:latin typeface="Calibri" pitchFamily="34" charset="0"/>
-                <a:ea typeface="Calibri" pitchFamily="34" charset="-122"/>
-                <a:cs typeface="Calibri" pitchFamily="34" charset="-120"/>
-              </a:rPr>
-              <a:t>Placer les offres à seuil — « livraison offerte dès X articles » — le week-end, où les gros paniers sont déjà la norme.</a:t>
-            </a:r>
-            <a:endParaRPr lang="en-US" sz="1300" dirty="0"/>
-          </a:p>
-        </p:txBody>
-      </p:sp>
-      <p:sp>
-        <p:nvSpPr>
-          <p:cNvPr id="9" name="Text 6"/>
-          <p:cNvSpPr txBox="1"/>
-          <p:nvPr/>
-        </p:nvSpPr>
-        <p:spPr>
-          <a:xfrm>
-            <a:off x="7818120" y="4663440"/>
-            <a:ext cx="548640" cy="548640"/>
-          </a:xfrm>
-          <a:prstGeom prst="rect">
-            <a:avLst/>
-          </a:prstGeom>
-          <a:noFill/>
-          <a:ln/>
-        </p:spPr>
-        <p:txBody>
-          <a:bodyPr wrap="square" lIns="0" tIns="0" rIns="0" bIns="0" rtlCol="0" anchor="ctr"/>
-          <a:lstStyle/>
-          <a:p>
-            <a:pPr indent="0" marL="0">
+            <a:pPr marL="0" indent="0">
               <a:buNone/>
             </a:pPr>
             <a:r>
@@ -9489,4 +7411,319 @@
     </a:ext>
   </a:extLst>
 </a:theme>
+</file>
+
+<file path=ppt/theme/theme2.xml><?xml version="1.0" encoding="utf-8"?>
+<a:theme xmlns:a="http://schemas.openxmlformats.org/drawingml/2006/main" name="Thème Office">
+  <a:themeElements>
+    <a:clrScheme name="Office">
+      <a:dk1>
+        <a:sysClr val="windowText" lastClr="000000"/>
+      </a:dk1>
+      <a:lt1>
+        <a:sysClr val="window" lastClr="FFFFFF"/>
+      </a:lt1>
+      <a:dk2>
+        <a:srgbClr val="0E2841"/>
+      </a:dk2>
+      <a:lt2>
+        <a:srgbClr val="E8E8E8"/>
+      </a:lt2>
+      <a:accent1>
+        <a:srgbClr val="156082"/>
+      </a:accent1>
+      <a:accent2>
+        <a:srgbClr val="E97132"/>
+      </a:accent2>
+      <a:accent3>
+        <a:srgbClr val="196B24"/>
+      </a:accent3>
+      <a:accent4>
+        <a:srgbClr val="0F9ED5"/>
+      </a:accent4>
+      <a:accent5>
+        <a:srgbClr val="A02B93"/>
+      </a:accent5>
+      <a:accent6>
+        <a:srgbClr val="4EA72E"/>
+      </a:accent6>
+      <a:hlink>
+        <a:srgbClr val="467886"/>
+      </a:hlink>
+      <a:folHlink>
+        <a:srgbClr val="96607D"/>
+      </a:folHlink>
+    </a:clrScheme>
+    <a:fontScheme name="Office">
+      <a:majorFont>
+        <a:latin typeface="Aptos Display" panose="02110004020202020204"/>
+        <a:ea typeface=""/>
+        <a:cs typeface=""/>
+        <a:font script="Jpan" typeface="游ゴシック Light"/>
+        <a:font script="Hang" typeface="맑은 고딕"/>
+        <a:font script="Hans" typeface="等线 Light"/>
+        <a:font script="Hant" typeface="新細明體"/>
+        <a:font script="Arab" typeface="Times New Roman"/>
+        <a:font script="Hebr" typeface="Times New Roman"/>
+        <a:font script="Thai" typeface="Angsana New"/>
+        <a:font script="Ethi" typeface="Nyala"/>
+        <a:font script="Beng" typeface="Vrinda"/>
+        <a:font script="Gujr" typeface="Shruti"/>
+        <a:font script="Khmr" typeface="MoolBoran"/>
+        <a:font script="Knda" typeface="Tunga"/>
+        <a:font script="Guru" typeface="Raavi"/>
+        <a:font script="Cans" typeface="Euphemia"/>
+        <a:font script="Cher" typeface="Plantagenet Cherokee"/>
+        <a:font script="Yiii" typeface="Microsoft Yi Baiti"/>
+        <a:font script="Tibt" typeface="Microsoft Himalaya"/>
+        <a:font script="Thaa" typeface="MV Boli"/>
+        <a:font script="Deva" typeface="Mangal"/>
+        <a:font script="Telu" typeface="Gautami"/>
+        <a:font script="Taml" typeface="Latha"/>
+        <a:font script="Syrc" typeface="Estrangelo Edessa"/>
+        <a:font script="Orya" typeface="Kalinga"/>
+        <a:font script="Mlym" typeface="Kartika"/>
+        <a:font script="Laoo" typeface="DokChampa"/>
+        <a:font script="Sinh" typeface="Iskoola Pota"/>
+        <a:font script="Mong" typeface="Mongolian Baiti"/>
+        <a:font script="Viet" typeface="Times New Roman"/>
+        <a:font script="Uigh" typeface="Microsoft Uighur"/>
+        <a:font script="Geor" typeface="Sylfaen"/>
+        <a:font script="Armn" typeface="Arial"/>
+        <a:font script="Bugi" typeface="Leelawadee UI"/>
+        <a:font script="Bopo" typeface="Microsoft JhengHei"/>
+        <a:font script="Java" typeface="Javanese Text"/>
+        <a:font script="Lisu" typeface="Segoe UI"/>
+        <a:font script="Mymr" typeface="Myanmar Text"/>
+        <a:font script="Nkoo" typeface="Ebrima"/>
+        <a:font script="Olck" typeface="Nirmala UI"/>
+        <a:font script="Osma" typeface="Ebrima"/>
+        <a:font script="Phag" typeface="Phagspa"/>
+        <a:font script="Syrn" typeface="Estrangelo Edessa"/>
+        <a:font script="Syrj" typeface="Estrangelo Edessa"/>
+        <a:font script="Syre" typeface="Estrangelo Edessa"/>
+        <a:font script="Sora" typeface="Nirmala UI"/>
+        <a:font script="Tale" typeface="Microsoft Tai Le"/>
+        <a:font script="Talu" typeface="Microsoft New Tai Lue"/>
+        <a:font script="Tfng" typeface="Ebrima"/>
+      </a:majorFont>
+      <a:minorFont>
+        <a:latin typeface="Aptos" panose="02110004020202020204"/>
+        <a:ea typeface=""/>
+        <a:cs typeface=""/>
+        <a:font script="Jpan" typeface="游ゴシック"/>
+        <a:font script="Hang" typeface="맑은 고딕"/>
+        <a:font script="Hans" typeface="等线"/>
+        <a:font script="Hant" typeface="新細明體"/>
+        <a:font script="Arab" typeface="Arial"/>
+        <a:font script="Hebr" typeface="Arial"/>
+        <a:font script="Thai" typeface="Cordia New"/>
+        <a:font script="Ethi" typeface="Nyala"/>
+        <a:font script="Beng" typeface="Vrinda"/>
+        <a:font script="Gujr" typeface="Shruti"/>
+        <a:font script="Khmr" typeface="DaunPenh"/>
+        <a:font script="Knda" typeface="Tunga"/>
+        <a:font script="Guru" typeface="Raavi"/>
+        <a:font script="Cans" typeface="Euphemia"/>
+        <a:font script="Cher" typeface="Plantagenet Cherokee"/>
+        <a:font script="Yiii" typeface="Microsoft Yi Baiti"/>
+        <a:font script="Tibt" typeface="Microsoft Himalaya"/>
+        <a:font script="Thaa" typeface="MV Boli"/>
+        <a:font script="Deva" typeface="Mangal"/>
+        <a:font script="Telu" typeface="Gautami"/>
+        <a:font script="Taml" typeface="Latha"/>
+        <a:font script="Syrc" typeface="Estrangelo Edessa"/>
+        <a:font script="Orya" typeface="Kalinga"/>
+        <a:font script="Mlym" typeface="Kartika"/>
+        <a:font script="Laoo" typeface="DokChampa"/>
+        <a:font script="Sinh" typeface="Iskoola Pota"/>
+        <a:font script="Mong" typeface="Mongolian Baiti"/>
+        <a:font script="Viet" typeface="Arial"/>
+        <a:font script="Uigh" typeface="Microsoft Uighur"/>
+        <a:font script="Geor" typeface="Sylfaen"/>
+        <a:font script="Armn" typeface="Arial"/>
+        <a:font script="Bugi" typeface="Leelawadee UI"/>
+        <a:font script="Bopo" typeface="Microsoft JhengHei"/>
+        <a:font script="Java" typeface="Javanese Text"/>
+        <a:font script="Lisu" typeface="Segoe UI"/>
+        <a:font script="Mymr" typeface="Myanmar Text"/>
+        <a:font script="Nkoo" typeface="Ebrima"/>
+        <a:font script="Olck" typeface="Nirmala UI"/>
+        <a:font script="Osma" typeface="Ebrima"/>
+        <a:font script="Phag" typeface="Phagspa"/>
+        <a:font script="Syrn" typeface="Estrangelo Edessa"/>
+        <a:font script="Syrj" typeface="Estrangelo Edessa"/>
+        <a:font script="Syre" typeface="Estrangelo Edessa"/>
+        <a:font script="Sora" typeface="Nirmala UI"/>
+        <a:font script="Tale" typeface="Microsoft Tai Le"/>
+        <a:font script="Talu" typeface="Microsoft New Tai Lue"/>
+        <a:font script="Tfng" typeface="Ebrima"/>
+      </a:minorFont>
+    </a:fontScheme>
+    <a:fmtScheme name="Office">
+      <a:fillStyleLst>
+        <a:solidFill>
+          <a:schemeClr val="phClr"/>
+        </a:solidFill>
+        <a:gradFill rotWithShape="1">
+          <a:gsLst>
+            <a:gs pos="0">
+              <a:schemeClr val="phClr">
+                <a:lumMod val="110000"/>
+                <a:satMod val="105000"/>
+                <a:tint val="67000"/>
+              </a:schemeClr>
+            </a:gs>
+            <a:gs pos="50000">
+              <a:schemeClr val="phClr">
+                <a:lumMod val="105000"/>
+                <a:satMod val="103000"/>
+                <a:tint val="73000"/>
+              </a:schemeClr>
+            </a:gs>
+            <a:gs pos="100000">
+              <a:schemeClr val="phClr">
+                <a:lumMod val="105000"/>
+                <a:satMod val="109000"/>
+                <a:tint val="81000"/>
+              </a:schemeClr>
+            </a:gs>
+          </a:gsLst>
+          <a:lin ang="5400000" scaled="0"/>
+        </a:gradFill>
+        <a:gradFill rotWithShape="1">
+          <a:gsLst>
+            <a:gs pos="0">
+              <a:schemeClr val="phClr">
+                <a:satMod val="103000"/>
+                <a:lumMod val="102000"/>
+                <a:tint val="94000"/>
+              </a:schemeClr>
+            </a:gs>
+            <a:gs pos="50000">
+              <a:schemeClr val="phClr">
+                <a:satMod val="110000"/>
+                <a:lumMod val="100000"/>
+                <a:shade val="100000"/>
+              </a:schemeClr>
+            </a:gs>
+            <a:gs pos="100000">
+              <a:schemeClr val="phClr">
+                <a:lumMod val="99000"/>
+                <a:satMod val="120000"/>
+                <a:shade val="78000"/>
+              </a:schemeClr>
+            </a:gs>
+          </a:gsLst>
+          <a:lin ang="5400000" scaled="0"/>
+        </a:gradFill>
+      </a:fillStyleLst>
+      <a:lnStyleLst>
+        <a:ln w="12700" cap="flat" cmpd="sng" algn="ctr">
+          <a:solidFill>
+            <a:schemeClr val="phClr"/>
+          </a:solidFill>
+          <a:prstDash val="solid"/>
+          <a:miter lim="800000"/>
+        </a:ln>
+        <a:ln w="19050" cap="flat" cmpd="sng" algn="ctr">
+          <a:solidFill>
+            <a:schemeClr val="phClr"/>
+          </a:solidFill>
+          <a:prstDash val="solid"/>
+          <a:miter lim="800000"/>
+        </a:ln>
+        <a:ln w="25400" cap="flat" cmpd="sng" algn="ctr">
+          <a:solidFill>
+            <a:schemeClr val="phClr"/>
+          </a:solidFill>
+          <a:prstDash val="solid"/>
+          <a:miter lim="800000"/>
+        </a:ln>
+      </a:lnStyleLst>
+      <a:effectStyleLst>
+        <a:effectStyle>
+          <a:effectLst/>
+        </a:effectStyle>
+        <a:effectStyle>
+          <a:effectLst/>
+        </a:effectStyle>
+        <a:effectStyle>
+          <a:effectLst>
+            <a:outerShdw blurRad="57150" dist="19050" dir="5400000" algn="ctr" rotWithShape="0">
+              <a:srgbClr val="000000">
+                <a:alpha val="63000"/>
+              </a:srgbClr>
+            </a:outerShdw>
+          </a:effectLst>
+        </a:effectStyle>
+      </a:effectStyleLst>
+      <a:bgFillStyleLst>
+        <a:solidFill>
+          <a:schemeClr val="phClr"/>
+        </a:solidFill>
+        <a:solidFill>
+          <a:schemeClr val="phClr">
+            <a:tint val="95000"/>
+            <a:satMod val="170000"/>
+          </a:schemeClr>
+        </a:solidFill>
+        <a:gradFill rotWithShape="1">
+          <a:gsLst>
+            <a:gs pos="0">
+              <a:schemeClr val="phClr">
+                <a:tint val="93000"/>
+                <a:satMod val="150000"/>
+                <a:shade val="98000"/>
+                <a:lumMod val="102000"/>
+              </a:schemeClr>
+            </a:gs>
+            <a:gs pos="50000">
+              <a:schemeClr val="phClr">
+                <a:tint val="98000"/>
+                <a:satMod val="130000"/>
+                <a:shade val="90000"/>
+                <a:lumMod val="103000"/>
+              </a:schemeClr>
+            </a:gs>
+            <a:gs pos="100000">
+              <a:schemeClr val="phClr">
+                <a:shade val="63000"/>
+                <a:satMod val="120000"/>
+              </a:schemeClr>
+            </a:gs>
+          </a:gsLst>
+          <a:lin ang="5400000" scaled="0"/>
+        </a:gradFill>
+      </a:bgFillStyleLst>
+    </a:fmtScheme>
+  </a:themeElements>
+  <a:objectDefaults>
+    <a:lnDef>
+      <a:spPr/>
+      <a:bodyPr/>
+      <a:lstStyle/>
+      <a:style>
+        <a:lnRef idx="2">
+          <a:schemeClr val="accent1"/>
+        </a:lnRef>
+        <a:fillRef idx="0">
+          <a:schemeClr val="accent1"/>
+        </a:fillRef>
+        <a:effectRef idx="1">
+          <a:schemeClr val="accent1"/>
+        </a:effectRef>
+        <a:fontRef idx="minor">
+          <a:schemeClr val="tx1"/>
+        </a:fontRef>
+      </a:style>
+    </a:lnDef>
+  </a:objectDefaults>
+  <a:extraClrSchemeLst/>
+  <a:extLst>
+    <a:ext uri="{05A4C25C-085E-4340-85A3-A5531E510DB2}">
+      <thm15:themeFamily xmlns:thm15="http://schemas.microsoft.com/office/thememl/2012/main" name="Office Theme" id="{2E142A2C-CD16-42D6-873A-C26D2A0506FA}" vid="{1BDDFF52-6CD6-40A5-AB3C-68EB2F1E4D0A}"/>
+    </a:ext>
+  </a:extLst>
+</a:theme>
 </file>
--- a/02_projet/soutenance.pptx
+++ b/02_projet/soutenance.pptx
@@ -10,6 +10,7 @@
   <p:sldIdLst>
     <p:sldId id="256" r:id="rId2"/>
     <p:sldId id="257" r:id="rId3"/>
+    <p:sldId id="274" r:id="rId22"/>
     <p:sldId id="258" r:id="rId4"/>
     <p:sldId id="259" r:id="rId5"/>
     <p:sldId id="260" r:id="rId6"/>
@@ -874,6 +875,93 @@
         <p14:creationId xmlns:p14="http://schemas.microsoft.com/office/powerpoint/2010/main" val="1024086991"/>
       </p:ext>
     </p:extLst>
+  </p:cSld>
+  <p:clrMapOvr>
+    <a:masterClrMapping/>
+  </p:clrMapOvr>
+</p:notes>
+</file>
+
+<file path=ppt/notesSlides/notesSlide16.xml><?xml version="1.0" encoding="utf-8"?>
+<p:notes xmlns:a="http://schemas.openxmlformats.org/drawingml/2006/main" xmlns:p="http://schemas.openxmlformats.org/presentationml/2006/main" xmlns:r="http://schemas.openxmlformats.org/officeDocument/2006/relationships">
+  <p:cSld>
+    <p:spTree>
+      <p:nvGrpSpPr>
+        <p:cNvPr id="1" name=""/>
+        <p:cNvGrpSpPr/>
+        <p:nvPr/>
+      </p:nvGrpSpPr>
+      <p:grpSpPr>
+        <a:xfrm>
+          <a:off x="0" y="0"/>
+          <a:ext cx="0" cy="0"/>
+          <a:chOff x="0" y="0"/>
+          <a:chExt cx="0" cy="0"/>
+        </a:xfrm>
+      </p:grpSpPr>
+      <p:sp>
+        <p:nvSpPr>
+          <p:cNvPr id="2" name="Slide Image Placeholder 1"/>
+          <p:cNvSpPr>
+            <a:spLocks noGrp="1" noRot="1" noChangeAspect="1"/>
+          </p:cNvSpPr>
+          <p:nvPr>
+            <p:ph type="sldImg"/>
+          </p:nvPr>
+        </p:nvSpPr>
+        <p:spPr/>
+      </p:sp>
+      <p:sp>
+        <p:nvSpPr>
+          <p:cNvPr id="3" name="Notes Placeholder 2"/>
+          <p:cNvSpPr>
+            <a:spLocks noGrp="1"/>
+          </p:cNvSpPr>
+          <p:nvPr>
+            <p:ph type="body" idx="1"/>
+          </p:nvPr>
+        </p:nvSpPr>
+        <p:spPr/>
+        <p:txBody>
+          <a:bodyPr/>
+          <a:lstStyle/>
+          <a:p>
+            <a:r>
+              <a:rPr lang="fr-FR"/>
+              <a:t>AVEC QUOI — 40 secondes.
+Cette diapositive répond à une question que le jury posera de toute façon. Ne lisez pas les quatre cases : donnez la logique. « Chaque bibliothèque a été choisie contre une alternative, pas prise par défaut. »
+LE POINT À FAIRE ENTENDRE : Matplotlib plutôt que Seaborn est un choix coûteux — davantage de lignes de code — mais c'est lui qui nous a permis de retirer chaque ornement inutile. Sans ce contrôle, la promesse d'un graphique lisible ne tenait pas.
+LE CHIFFRE À CITER : 3,2 Go ramenés à 1,0 Go en imposant les types. Par défaut pandas met tout entier en int64, huit octets par valeur ; un jour de semaine en occupe un seul. Sur 32 millions de lignes, cet écart décide de la faisabilité.
+SI ON DEMANDE POURQUOI PAS POLARS : plus rapide, mais moins répandu. Ce code est fait pour être relu et repris — nous avons préféré le standard à la performance.
+SI ON DEMANDE POURQUOI PAS UNE BASE DE DONNÉES : une fois typées, les cinq tables tiennent en mémoire. Un SGBD n'aurait rien apporté et aurait ajouté une dépendance à installer.</a:t>
+            </a:r>
+          </a:p>
+        </p:txBody>
+      </p:sp>
+      <p:sp>
+        <p:nvSpPr>
+          <p:cNvPr id="4" name="Slide Number Placeholder 3"/>
+          <p:cNvSpPr>
+            <a:spLocks noGrp="1"/>
+          </p:cNvSpPr>
+          <p:nvPr>
+            <p:ph type="sldNum" sz="quarter" idx="10"/>
+          </p:nvPr>
+        </p:nvSpPr>
+        <p:spPr/>
+        <p:txBody>
+          <a:bodyPr/>
+          <a:lstStyle/>
+          <a:p>
+            <a:fld id="{F7021451-1387-4CA6-816F-3879F97B5CBC}" type="slidenum">
+              <a:rPr lang="en-US"/>
+              <a:t>2</a:t>
+            </a:fld>
+            <a:endParaRPr lang="en-US"/>
+          </a:p>
+        </p:txBody>
+      </p:sp>
+    </p:spTree>
   </p:cSld>
   <p:clrMapOvr>
     <a:masterClrMapping/>
@@ -2090,6 +2178,334 @@
 
 <file path=ppt/slides/slide10.xml><?xml version="1.0" encoding="utf-8"?>
 <p:sld xmlns:a="http://schemas.openxmlformats.org/drawingml/2006/main" xmlns:r="http://schemas.openxmlformats.org/officeDocument/2006/relationships" xmlns:p="http://schemas.openxmlformats.org/presentationml/2006/main">
+  <p:cSld name="Slide 9">
+    <p:bg>
+      <p:bgPr>
+        <a:solidFill>
+          <a:srgbClr val="FFFFFF"/>
+        </a:solidFill>
+        <a:effectLst/>
+      </p:bgPr>
+    </p:bg>
+    <p:spTree>
+      <p:nvGrpSpPr>
+        <p:cNvPr id="1" name=""/>
+        <p:cNvGrpSpPr/>
+        <p:nvPr/>
+      </p:nvGrpSpPr>
+      <p:grpSpPr>
+        <a:xfrm>
+          <a:off x="0" y="0"/>
+          <a:ext cx="0" cy="0"/>
+          <a:chOff x="0" y="0"/>
+          <a:chExt cx="0" cy="0"/>
+        </a:xfrm>
+      </p:grpSpPr>
+      <p:sp>
+        <p:nvSpPr>
+          <p:cNvPr id="2" name="Text 0"/>
+          <p:cNvSpPr txBox="1"/>
+          <p:nvPr/>
+        </p:nvSpPr>
+        <p:spPr>
+          <a:xfrm>
+            <a:off x="594360" y="182880"/>
+            <a:ext cx="10972800" cy="219456"/>
+          </a:xfrm>
+          <a:prstGeom prst="rect">
+            <a:avLst/>
+          </a:prstGeom>
+          <a:noFill/>
+          <a:ln/>
+        </p:spPr>
+        <p:txBody>
+          <a:bodyPr wrap="square" lIns="0" tIns="0" rIns="0" bIns="0" rtlCol="0" anchor="ctr"/>
+          <a:lstStyle/>
+          <a:p>
+            <a:pPr marL="0" indent="0">
+              <a:buNone/>
+            </a:pPr>
+            <a:r>
+              <a:rPr lang="en-US" sz="1050" b="1" kern="0" spc="160" dirty="0">
+                <a:solidFill>
+                  <a:srgbClr val="0E7C86"/>
+                </a:solidFill>
+                <a:latin typeface="Calibri" pitchFamily="34" charset="0"/>
+                <a:ea typeface="Calibri" pitchFamily="34" charset="-122"/>
+                <a:cs typeface="Calibri" pitchFamily="34" charset="-120"/>
+              </a:rPr>
+              <a:t>DÉMONSTRATION 6</a:t>
+            </a:r>
+            <a:endParaRPr lang="en-US" sz="1050" dirty="0"/>
+          </a:p>
+        </p:txBody>
+      </p:sp>
+      <p:sp>
+        <p:nvSpPr>
+          <p:cNvPr id="3" name="Text 1"/>
+          <p:cNvSpPr txBox="1"/>
+          <p:nvPr/>
+        </p:nvSpPr>
+        <p:spPr>
+          <a:xfrm>
+            <a:off x="594360" y="384048"/>
+            <a:ext cx="10972800" cy="658368"/>
+          </a:xfrm>
+          <a:prstGeom prst="rect">
+            <a:avLst/>
+          </a:prstGeom>
+          <a:noFill/>
+          <a:ln/>
+        </p:spPr>
+        <p:txBody>
+          <a:bodyPr wrap="square" lIns="0" tIns="0" rIns="0" bIns="0" rtlCol="0" anchor="ctr"/>
+          <a:lstStyle/>
+          <a:p>
+            <a:pPr marL="0" indent="0">
+              <a:buNone/>
+            </a:pPr>
+            <a:r>
+              <a:rPr lang="en-US" sz="2700" b="1" dirty="0">
+                <a:solidFill>
+                  <a:srgbClr val="16232B"/>
+                </a:solidFill>
+                <a:latin typeface="Cambria" pitchFamily="34" charset="0"/>
+                <a:ea typeface="Cambria" pitchFamily="34" charset="-122"/>
+                <a:cs typeface="Cambria" pitchFamily="34" charset="-120"/>
+              </a:rPr>
+              <a:t>Le week-end ne gonfle pas les paniers, il les déplace</a:t>
+            </a:r>
+            <a:endParaRPr lang="en-US" sz="2700" dirty="0"/>
+          </a:p>
+        </p:txBody>
+      </p:sp>
+      <p:pic>
+        <p:nvPicPr>
+          <p:cNvPr id="4" name="Image 0" descr="02_projet\_ppt\fig06.png"/>
+          <p:cNvPicPr>
+            <a:picLocks noChangeAspect="1"/>
+          </p:cNvPicPr>
+          <p:nvPr/>
+        </p:nvPicPr>
+        <p:blipFill>
+          <a:blip r:embed="rId3"/>
+          <a:stretch>
+            <a:fillRect/>
+          </a:stretch>
+        </p:blipFill>
+        <p:spPr>
+          <a:xfrm>
+            <a:off x="594360" y="1481726"/>
+            <a:ext cx="6903720" cy="3565364"/>
+          </a:xfrm>
+          <a:prstGeom prst="rect">
+            <a:avLst/>
+          </a:prstGeom>
+        </p:spPr>
+      </p:pic>
+      <p:sp>
+        <p:nvSpPr>
+          <p:cNvPr id="5" name="Text 2"/>
+          <p:cNvSpPr txBox="1"/>
+          <p:nvPr/>
+        </p:nvSpPr>
+        <p:spPr>
+          <a:xfrm>
+            <a:off x="594360" y="5440680"/>
+            <a:ext cx="6903720" cy="457200"/>
+          </a:xfrm>
+          <a:prstGeom prst="rect">
+            <a:avLst/>
+          </a:prstGeom>
+          <a:noFill/>
+          <a:ln/>
+        </p:spPr>
+        <p:txBody>
+          <a:bodyPr wrap="square" lIns="0" tIns="0" rIns="0" bIns="0" rtlCol="0" anchor="t"/>
+          <a:lstStyle/>
+          <a:p>
+            <a:pPr marL="0" indent="0">
+              <a:buNone/>
+            </a:pPr>
+            <a:r>
+              <a:rPr lang="en-US" sz="1100" i="1" dirty="0">
+                <a:solidFill>
+                  <a:srgbClr val="5D6B75"/>
+                </a:solidFill>
+                <a:latin typeface="Calibri" pitchFamily="34" charset="0"/>
+                <a:ea typeface="Calibri" pitchFamily="34" charset="-122"/>
+                <a:cs typeface="Calibri" pitchFamily="34" charset="-120"/>
+              </a:rPr>
+              <a:t>Les petits paniers reculent de 7 points au profit des gros.</a:t>
+            </a:r>
+            <a:endParaRPr lang="en-US" sz="1100" dirty="0"/>
+          </a:p>
+        </p:txBody>
+      </p:sp>
+      <p:sp>
+        <p:nvSpPr>
+          <p:cNvPr id="6" name="Shape 3"/>
+          <p:cNvSpPr/>
+          <p:nvPr/>
+        </p:nvSpPr>
+        <p:spPr>
+          <a:xfrm>
+            <a:off x="7818120" y="1207008"/>
+            <a:ext cx="3749040" cy="3200400"/>
+          </a:xfrm>
+          <a:prstGeom prst="roundRect">
+            <a:avLst>
+              <a:gd name="adj" fmla="val 1714"/>
+            </a:avLst>
+          </a:prstGeom>
+          <a:solidFill>
+            <a:srgbClr val="EAF3F4"/>
+          </a:solidFill>
+          <a:ln w="12700">
+            <a:solidFill>
+              <a:srgbClr val="D3E5E7"/>
+            </a:solidFill>
+            <a:prstDash val="solid"/>
+          </a:ln>
+        </p:spPr>
+        <p:txBody>
+          <a:bodyPr/>
+          <a:lstStyle/>
+          <a:p>
+            <a:endParaRPr lang="fr-FR"/>
+          </a:p>
+        </p:txBody>
+      </p:sp>
+      <p:sp>
+        <p:nvSpPr>
+          <p:cNvPr id="7" name="Text 4"/>
+          <p:cNvSpPr txBox="1"/>
+          <p:nvPr/>
+        </p:nvSpPr>
+        <p:spPr>
+          <a:xfrm>
+            <a:off x="8074152" y="1389888"/>
+            <a:ext cx="3236976" cy="219456"/>
+          </a:xfrm>
+          <a:prstGeom prst="rect">
+            <a:avLst/>
+          </a:prstGeom>
+          <a:noFill/>
+          <a:ln/>
+        </p:spPr>
+        <p:txBody>
+          <a:bodyPr wrap="square" lIns="0" tIns="0" rIns="0" bIns="0" rtlCol="0" anchor="ctr"/>
+          <a:lstStyle/>
+          <a:p>
+            <a:pPr marL="0" indent="0">
+              <a:buNone/>
+            </a:pPr>
+            <a:r>
+              <a:rPr lang="en-US" sz="950" b="1" kern="0" spc="120" dirty="0">
+                <a:solidFill>
+                  <a:srgbClr val="0E7C86"/>
+                </a:solidFill>
+                <a:latin typeface="Calibri" pitchFamily="34" charset="0"/>
+                <a:ea typeface="Calibri" pitchFamily="34" charset="-122"/>
+                <a:cs typeface="Calibri" pitchFamily="34" charset="-120"/>
+              </a:rPr>
+              <a:t>CE QUE NOUS PROPOSONS</a:t>
+            </a:r>
+            <a:endParaRPr lang="en-US" sz="950" dirty="0"/>
+          </a:p>
+        </p:txBody>
+      </p:sp>
+      <p:sp>
+        <p:nvSpPr>
+          <p:cNvPr id="8" name="Text 5"/>
+          <p:cNvSpPr txBox="1"/>
+          <p:nvPr/>
+        </p:nvSpPr>
+        <p:spPr>
+          <a:xfrm>
+            <a:off x="8074152" y="1682496"/>
+            <a:ext cx="3236976" cy="2505456"/>
+          </a:xfrm>
+          <a:prstGeom prst="rect">
+            <a:avLst/>
+          </a:prstGeom>
+          <a:noFill/>
+          <a:ln/>
+        </p:spPr>
+        <p:txBody>
+          <a:bodyPr wrap="square" lIns="0" tIns="0" rIns="0" bIns="0" rtlCol="0" anchor="t"/>
+          <a:lstStyle/>
+          <a:p>
+            <a:pPr marL="0" indent="0">
+              <a:lnSpc>
+                <a:spcPct val="110000"/>
+              </a:lnSpc>
+              <a:buNone/>
+            </a:pPr>
+            <a:r>
+              <a:rPr lang="en-US" sz="1300" dirty="0">
+                <a:solidFill>
+                  <a:srgbClr val="16232B"/>
+                </a:solidFill>
+                <a:latin typeface="Calibri" pitchFamily="34" charset="0"/>
+                <a:ea typeface="Calibri" pitchFamily="34" charset="-122"/>
+                <a:cs typeface="Calibri" pitchFamily="34" charset="-120"/>
+              </a:rPr>
+              <a:t>Placer les offres à seuil — « livraison offerte dès X articles » — le week-end, où les gros paniers sont déjà la norme.</a:t>
+            </a:r>
+            <a:endParaRPr lang="en-US" sz="1300" dirty="0"/>
+          </a:p>
+        </p:txBody>
+      </p:sp>
+      <p:sp>
+        <p:nvSpPr>
+          <p:cNvPr id="9" name="Text 6"/>
+          <p:cNvSpPr txBox="1"/>
+          <p:nvPr/>
+        </p:nvSpPr>
+        <p:spPr>
+          <a:xfrm>
+            <a:off x="7818120" y="4663440"/>
+            <a:ext cx="548640" cy="548640"/>
+          </a:xfrm>
+          <a:prstGeom prst="rect">
+            <a:avLst/>
+          </a:prstGeom>
+          <a:noFill/>
+          <a:ln/>
+        </p:spPr>
+        <p:txBody>
+          <a:bodyPr wrap="square" lIns="0" tIns="0" rIns="0" bIns="0" rtlCol="0" anchor="ctr"/>
+          <a:lstStyle/>
+          <a:p>
+            <a:pPr marL="0" indent="0">
+              <a:buNone/>
+            </a:pPr>
+            <a:r>
+              <a:rPr lang="en-US" sz="3400" b="1" dirty="0">
+                <a:solidFill>
+                  <a:srgbClr val="D8E4E6"/>
+                </a:solidFill>
+                <a:latin typeface="Cambria" pitchFamily="34" charset="0"/>
+                <a:ea typeface="Cambria" pitchFamily="34" charset="-122"/>
+                <a:cs typeface="Cambria" pitchFamily="34" charset="-120"/>
+              </a:rPr>
+              <a:t>6</a:t>
+            </a:r>
+            <a:endParaRPr lang="en-US" sz="3400" dirty="0"/>
+          </a:p>
+        </p:txBody>
+      </p:sp>
+    </p:spTree>
+  </p:cSld>
+  <p:clrMapOvr>
+    <a:masterClrMapping/>
+  </p:clrMapOvr>
+</p:sld>
+</file>
+
+<file path=ppt/slides/slide11.xml><?xml version="1.0" encoding="utf-8"?>
+<p:sld xmlns:a="http://schemas.openxmlformats.org/drawingml/2006/main" xmlns:r="http://schemas.openxmlformats.org/officeDocument/2006/relationships" xmlns:p="http://schemas.openxmlformats.org/presentationml/2006/main">
   <p:cSld name="Slide 10">
     <p:bg>
       <p:bgPr>
@@ -2416,7 +2832,7 @@
 </p:sld>
 </file>
 
-<file path=ppt/slides/slide11.xml><?xml version="1.0" encoding="utf-8"?>
+<file path=ppt/slides/slide12.xml><?xml version="1.0" encoding="utf-8"?>
 <p:sld xmlns:a="http://schemas.openxmlformats.org/drawingml/2006/main" xmlns:r="http://schemas.openxmlformats.org/officeDocument/2006/relationships" xmlns:p="http://schemas.openxmlformats.org/presentationml/2006/main">
   <p:cSld name="Slide 11">
     <p:bg>
@@ -2744,7 +3160,7 @@
 </p:sld>
 </file>
 
-<file path=ppt/slides/slide12.xml><?xml version="1.0" encoding="utf-8"?>
+<file path=ppt/slides/slide13.xml><?xml version="1.0" encoding="utf-8"?>
 <p:sld xmlns:a="http://schemas.openxmlformats.org/drawingml/2006/main" xmlns:r="http://schemas.openxmlformats.org/officeDocument/2006/relationships" xmlns:p="http://schemas.openxmlformats.org/presentationml/2006/main">
   <p:cSld name="Slide 12">
     <p:bg>
@@ -3072,7 +3488,7 @@
 </p:sld>
 </file>
 
-<file path=ppt/slides/slide13.xml><?xml version="1.0" encoding="utf-8"?>
+<file path=ppt/slides/slide14.xml><?xml version="1.0" encoding="utf-8"?>
 <p:sld xmlns:a="http://schemas.openxmlformats.org/drawingml/2006/main" xmlns:r="http://schemas.openxmlformats.org/officeDocument/2006/relationships" xmlns:p="http://schemas.openxmlformats.org/presentationml/2006/main">
   <p:cSld name="Slide 13">
     <p:bg>
@@ -3400,7 +3816,7 @@
 </p:sld>
 </file>
 
-<file path=ppt/slides/slide14.xml><?xml version="1.0" encoding="utf-8"?>
+<file path=ppt/slides/slide15.xml><?xml version="1.0" encoding="utf-8"?>
 <p:sld xmlns:a="http://schemas.openxmlformats.org/drawingml/2006/main" xmlns:r="http://schemas.openxmlformats.org/officeDocument/2006/relationships" xmlns:p="http://schemas.openxmlformats.org/presentationml/2006/main">
   <p:cSld name="Slide 14">
     <p:bg>
@@ -4119,7 +4535,7 @@
 </p:sld>
 </file>
 
-<file path=ppt/slides/slide15.xml><?xml version="1.0" encoding="utf-8"?>
+<file path=ppt/slides/slide16.xml><?xml version="1.0" encoding="utf-8"?>
 <p:sld xmlns:a="http://schemas.openxmlformats.org/drawingml/2006/main" xmlns:r="http://schemas.openxmlformats.org/officeDocument/2006/relationships" xmlns:p="http://schemas.openxmlformats.org/presentationml/2006/main">
   <p:cSld name="Slide 18">
     <p:bg>
@@ -4908,6 +5324,767 @@
 </file>
 
 <file path=ppt/slides/slide3.xml><?xml version="1.0" encoding="utf-8"?>
+<p:sld xmlns:a="http://schemas.openxmlformats.org/drawingml/2006/main" xmlns:p="http://schemas.openxmlformats.org/presentationml/2006/main" xmlns:r="http://schemas.openxmlformats.org/officeDocument/2006/relationships">
+  <p:cSld>
+    <p:bg>
+      <p:bgPr>
+        <a:solidFill>
+          <a:srgbClr val="FFFFFF"/>
+        </a:solidFill>
+        <a:effectLst/>
+      </p:bgPr>
+    </p:bg>
+    <p:spTree>
+      <p:nvGrpSpPr>
+        <p:cNvPr id="1" name=""/>
+        <p:cNvGrpSpPr/>
+        <p:nvPr/>
+      </p:nvGrpSpPr>
+      <p:grpSpPr/>
+      <p:sp>
+        <p:nvSpPr>
+          <p:cNvPr id="2" name="Text 0"/>
+          <p:cNvSpPr txBox="1"/>
+          <p:nvPr/>
+        </p:nvSpPr>
+        <p:spPr>
+          <a:xfrm>
+            <a:off x="594360" y="182880"/>
+            <a:ext cx="10972800" cy="219456"/>
+          </a:xfrm>
+          <a:prstGeom prst="rect">
+            <a:avLst/>
+          </a:prstGeom>
+          <a:noFill/>
+        </p:spPr>
+        <p:txBody>
+          <a:bodyPr wrap="square" anchor="ctr" lIns="0" rIns="0" tIns="0" bIns="0">
+            <a:spAutoFit/>
+          </a:bodyPr>
+          <a:lstStyle/>
+          <a:p>
+            <a:r>
+              <a:rPr sz="1050" b="1" spc="160">
+                <a:solidFill>
+                  <a:srgbClr val="0E7C86"/>
+                </a:solidFill>
+                <a:latin typeface="Calibri"/>
+              </a:rPr>
+              <a:t>AVEC QUOI NOUS AVONS TRAVAILLÉ</a:t>
+            </a:r>
+          </a:p>
+        </p:txBody>
+      </p:sp>
+      <p:sp>
+        <p:nvSpPr>
+          <p:cNvPr id="3" name="Text 1"/>
+          <p:cNvSpPr txBox="1"/>
+          <p:nvPr/>
+        </p:nvSpPr>
+        <p:spPr>
+          <a:xfrm>
+            <a:off x="594360" y="384048"/>
+            <a:ext cx="10972800" cy="658368"/>
+          </a:xfrm>
+          <a:prstGeom prst="rect">
+            <a:avLst/>
+          </a:prstGeom>
+          <a:noFill/>
+        </p:spPr>
+        <p:txBody>
+          <a:bodyPr wrap="square" anchor="ctr" lIns="0" rIns="0" tIns="0" bIns="0">
+            <a:spAutoFit/>
+          </a:bodyPr>
+          <a:lstStyle/>
+          <a:p>
+            <a:r>
+              <a:rPr sz="2700" b="1">
+                <a:solidFill>
+                  <a:srgbClr val="16232B"/>
+                </a:solidFill>
+                <a:latin typeface="Cambria"/>
+              </a:rPr>
+              <a:t>Quatre bibliothèques, un choix assumé pour chacune</a:t>
+            </a:r>
+          </a:p>
+        </p:txBody>
+      </p:sp>
+      <p:sp>
+        <p:nvSpPr>
+          <p:cNvPr id="4" name="Shape 0"/>
+          <p:cNvSpPr/>
+          <p:nvPr/>
+        </p:nvSpPr>
+        <p:spPr>
+          <a:xfrm>
+            <a:off x="594360" y="1325880"/>
+            <a:ext cx="5358384" cy="1938528"/>
+          </a:xfrm>
+          <a:prstGeom prst="roundRect">
+            <a:avLst>
+              <a:gd name="adj" fmla="val 2800"/>
+            </a:avLst>
+          </a:prstGeom>
+          <a:solidFill>
+            <a:srgbClr val="FFFFFF"/>
+          </a:solidFill>
+          <a:ln w="12700">
+            <a:solidFill>
+              <a:srgbClr val="DFE6EA"/>
+            </a:solidFill>
+          </a:ln>
+          <a:effectLst/>
+        </p:spPr>
+        <p:style>
+          <a:lnRef idx="1">
+            <a:schemeClr val="accent1"/>
+          </a:lnRef>
+          <a:fillRef idx="3">
+            <a:schemeClr val="accent1"/>
+          </a:fillRef>
+          <a:effectRef idx="2">
+            <a:schemeClr val="accent1"/>
+          </a:effectRef>
+          <a:fontRef idx="minor">
+            <a:schemeClr val="lt1"/>
+          </a:fontRef>
+        </p:style>
+        <p:txBody>
+          <a:bodyPr rtlCol="0" anchor="ctr"/>
+          <a:lstStyle/>
+          <a:p>
+            <a:pPr algn="ctr"/>
+          </a:p>
+        </p:txBody>
+      </p:sp>
+      <p:sp>
+        <p:nvSpPr>
+          <p:cNvPr id="5" name="Text 2"/>
+          <p:cNvSpPr txBox="1"/>
+          <p:nvPr/>
+        </p:nvSpPr>
+        <p:spPr>
+          <a:xfrm>
+            <a:off x="868680" y="1508760"/>
+            <a:ext cx="4809744" cy="365760"/>
+          </a:xfrm>
+          <a:prstGeom prst="rect">
+            <a:avLst/>
+          </a:prstGeom>
+          <a:noFill/>
+        </p:spPr>
+        <p:txBody>
+          <a:bodyPr wrap="square" anchor="t" lIns="0" rIns="0" tIns="0" bIns="0">
+            <a:spAutoFit/>
+          </a:bodyPr>
+          <a:lstStyle/>
+          <a:p>
+            <a:r>
+              <a:rPr sz="1800" b="1">
+                <a:solidFill>
+                  <a:srgbClr val="0E7C86"/>
+                </a:solidFill>
+                <a:latin typeface="Cambria"/>
+              </a:rPr>
+              <a:t>pandas</a:t>
+            </a:r>
+            <a:r>
+              <a:rPr sz="1050" b="0">
+                <a:solidFill>
+                  <a:srgbClr val="5D6B75"/>
+                </a:solidFill>
+                <a:latin typeface="Calibri"/>
+              </a:rPr>
+              <a:t>   3.0</a:t>
+            </a:r>
+          </a:p>
+        </p:txBody>
+      </p:sp>
+      <p:sp>
+        <p:nvSpPr>
+          <p:cNvPr id="6" name="Text 3"/>
+          <p:cNvSpPr txBox="1"/>
+          <p:nvPr/>
+        </p:nvSpPr>
+        <p:spPr>
+          <a:xfrm>
+            <a:off x="868680" y="1965960"/>
+            <a:ext cx="4809744" cy="1069848"/>
+          </a:xfrm>
+          <a:prstGeom prst="rect">
+            <a:avLst/>
+          </a:prstGeom>
+          <a:noFill/>
+        </p:spPr>
+        <p:txBody>
+          <a:bodyPr wrap="square" anchor="t" lIns="0" rIns="0" tIns="0" bIns="0">
+            <a:spAutoFit/>
+          </a:bodyPr>
+          <a:lstStyle/>
+          <a:p>
+            <a:pPr>
+              <a:lnSpc>
+                <a:spcPct val="118000"/>
+              </a:lnSpc>
+            </a:pPr>
+            <a:r>
+              <a:rPr sz="1150" b="0">
+                <a:solidFill>
+                  <a:srgbClr val="5D6B75"/>
+                </a:solidFill>
+                <a:latin typeface="Calibri"/>
+              </a:rPr>
+              <a:t>Toute la manipulation. Le modèle </a:t>
+            </a:r>
+            <a:r>
+              <a:rPr sz="1150" b="1">
+                <a:solidFill>
+                  <a:srgbClr val="16232B"/>
+                </a:solidFill>
+                <a:latin typeface="Calibri"/>
+              </a:rPr>
+              <a:t>DataFrame</a:t>
+            </a:r>
+            <a:r>
+              <a:rPr sz="1150" b="0">
+                <a:solidFill>
+                  <a:srgbClr val="5D6B75"/>
+                </a:solidFill>
+                <a:latin typeface="Calibri"/>
+              </a:rPr>
+              <a:t> épouse le format tabulaire des CSV, et jointures comme regroupements y sont natifs, exécutés en C plutôt qu'en boucles Python. Polars irait plus vite ; pandas reste le standard qu'un relecteur sait lire.</a:t>
+            </a:r>
+          </a:p>
+        </p:txBody>
+      </p:sp>
+      <p:sp>
+        <p:nvSpPr>
+          <p:cNvPr id="7" name="Shape 1"/>
+          <p:cNvSpPr/>
+          <p:nvPr/>
+        </p:nvSpPr>
+        <p:spPr>
+          <a:xfrm>
+            <a:off x="6236208" y="1325880"/>
+            <a:ext cx="5358384" cy="1938528"/>
+          </a:xfrm>
+          <a:prstGeom prst="roundRect">
+            <a:avLst>
+              <a:gd name="adj" fmla="val 2800"/>
+            </a:avLst>
+          </a:prstGeom>
+          <a:solidFill>
+            <a:srgbClr val="FFFFFF"/>
+          </a:solidFill>
+          <a:ln w="12700">
+            <a:solidFill>
+              <a:srgbClr val="DFE6EA"/>
+            </a:solidFill>
+          </a:ln>
+          <a:effectLst/>
+        </p:spPr>
+        <p:style>
+          <a:lnRef idx="1">
+            <a:schemeClr val="accent1"/>
+          </a:lnRef>
+          <a:fillRef idx="3">
+            <a:schemeClr val="accent1"/>
+          </a:fillRef>
+          <a:effectRef idx="2">
+            <a:schemeClr val="accent1"/>
+          </a:effectRef>
+          <a:fontRef idx="minor">
+            <a:schemeClr val="lt1"/>
+          </a:fontRef>
+        </p:style>
+        <p:txBody>
+          <a:bodyPr rtlCol="0" anchor="ctr"/>
+          <a:lstStyle/>
+          <a:p>
+            <a:pPr algn="ctr"/>
+          </a:p>
+        </p:txBody>
+      </p:sp>
+      <p:sp>
+        <p:nvSpPr>
+          <p:cNvPr id="8" name="Text 4"/>
+          <p:cNvSpPr txBox="1"/>
+          <p:nvPr/>
+        </p:nvSpPr>
+        <p:spPr>
+          <a:xfrm>
+            <a:off x="6510528" y="1508760"/>
+            <a:ext cx="4809744" cy="365760"/>
+          </a:xfrm>
+          <a:prstGeom prst="rect">
+            <a:avLst/>
+          </a:prstGeom>
+          <a:noFill/>
+        </p:spPr>
+        <p:txBody>
+          <a:bodyPr wrap="square" anchor="t" lIns="0" rIns="0" tIns="0" bIns="0">
+            <a:spAutoFit/>
+          </a:bodyPr>
+          <a:lstStyle/>
+          <a:p>
+            <a:r>
+              <a:rPr sz="1800" b="1">
+                <a:solidFill>
+                  <a:srgbClr val="0E7C86"/>
+                </a:solidFill>
+                <a:latin typeface="Cambria"/>
+              </a:rPr>
+              <a:t>NumPy</a:t>
+            </a:r>
+            <a:r>
+              <a:rPr sz="1050" b="0">
+                <a:solidFill>
+                  <a:srgbClr val="5D6B75"/>
+                </a:solidFill>
+                <a:latin typeface="Calibri"/>
+              </a:rPr>
+              <a:t>   2.5</a:t>
+            </a:r>
+          </a:p>
+        </p:txBody>
+      </p:sp>
+      <p:sp>
+        <p:nvSpPr>
+          <p:cNvPr id="9" name="Text 5"/>
+          <p:cNvSpPr txBox="1"/>
+          <p:nvPr/>
+        </p:nvSpPr>
+        <p:spPr>
+          <a:xfrm>
+            <a:off x="6510528" y="1965960"/>
+            <a:ext cx="4809744" cy="1069848"/>
+          </a:xfrm>
+          <a:prstGeom prst="rect">
+            <a:avLst/>
+          </a:prstGeom>
+          <a:noFill/>
+        </p:spPr>
+        <p:txBody>
+          <a:bodyPr wrap="square" anchor="t" lIns="0" rIns="0" tIns="0" bIns="0">
+            <a:spAutoFit/>
+          </a:bodyPr>
+          <a:lstStyle/>
+          <a:p>
+            <a:pPr>
+              <a:lnSpc>
+                <a:spcPct val="118000"/>
+              </a:lnSpc>
+            </a:pPr>
+            <a:r>
+              <a:rPr sz="1150" b="0">
+                <a:solidFill>
+                  <a:srgbClr val="5D6B75"/>
+                </a:solidFill>
+                <a:latin typeface="Calibri"/>
+              </a:rPr>
+              <a:t>Les tableaux typés sur lesquels pandas repose lui-même. Nous nous en servons directement pour le calcul vectorisé — une opération sur 32 millions de valeurs d'un seul coup — et pour le tirage aléatoire à graine fixe qui rend l'exécution reproductible.</a:t>
+            </a:r>
+          </a:p>
+        </p:txBody>
+      </p:sp>
+      <p:sp>
+        <p:nvSpPr>
+          <p:cNvPr id="10" name="Shape 2"/>
+          <p:cNvSpPr/>
+          <p:nvPr/>
+        </p:nvSpPr>
+        <p:spPr>
+          <a:xfrm>
+            <a:off x="594360" y="3401568"/>
+            <a:ext cx="5358384" cy="1938528"/>
+          </a:xfrm>
+          <a:prstGeom prst="roundRect">
+            <a:avLst>
+              <a:gd name="adj" fmla="val 2800"/>
+            </a:avLst>
+          </a:prstGeom>
+          <a:solidFill>
+            <a:srgbClr val="FFFFFF"/>
+          </a:solidFill>
+          <a:ln w="12700">
+            <a:solidFill>
+              <a:srgbClr val="DFE6EA"/>
+            </a:solidFill>
+          </a:ln>
+          <a:effectLst/>
+        </p:spPr>
+        <p:style>
+          <a:lnRef idx="1">
+            <a:schemeClr val="accent1"/>
+          </a:lnRef>
+          <a:fillRef idx="3">
+            <a:schemeClr val="accent1"/>
+          </a:fillRef>
+          <a:effectRef idx="2">
+            <a:schemeClr val="accent1"/>
+          </a:effectRef>
+          <a:fontRef idx="minor">
+            <a:schemeClr val="lt1"/>
+          </a:fontRef>
+        </p:style>
+        <p:txBody>
+          <a:bodyPr rtlCol="0" anchor="ctr"/>
+          <a:lstStyle/>
+          <a:p>
+            <a:pPr algn="ctr"/>
+          </a:p>
+        </p:txBody>
+      </p:sp>
+      <p:sp>
+        <p:nvSpPr>
+          <p:cNvPr id="11" name="Text 6"/>
+          <p:cNvSpPr txBox="1"/>
+          <p:nvPr/>
+        </p:nvSpPr>
+        <p:spPr>
+          <a:xfrm>
+            <a:off x="868680" y="3584448"/>
+            <a:ext cx="4809744" cy="365760"/>
+          </a:xfrm>
+          <a:prstGeom prst="rect">
+            <a:avLst/>
+          </a:prstGeom>
+          <a:noFill/>
+        </p:spPr>
+        <p:txBody>
+          <a:bodyPr wrap="square" anchor="t" lIns="0" rIns="0" tIns="0" bIns="0">
+            <a:spAutoFit/>
+          </a:bodyPr>
+          <a:lstStyle/>
+          <a:p>
+            <a:r>
+              <a:rPr sz="1800" b="1">
+                <a:solidFill>
+                  <a:srgbClr val="0E7C86"/>
+                </a:solidFill>
+                <a:latin typeface="Cambria"/>
+              </a:rPr>
+              <a:t>Matplotlib</a:t>
+            </a:r>
+            <a:r>
+              <a:rPr sz="1050" b="0">
+                <a:solidFill>
+                  <a:srgbClr val="5D6B75"/>
+                </a:solidFill>
+                <a:latin typeface="Calibri"/>
+              </a:rPr>
+              <a:t>   3.11</a:t>
+            </a:r>
+          </a:p>
+        </p:txBody>
+      </p:sp>
+      <p:sp>
+        <p:nvSpPr>
+          <p:cNvPr id="12" name="Text 7"/>
+          <p:cNvSpPr txBox="1"/>
+          <p:nvPr/>
+        </p:nvSpPr>
+        <p:spPr>
+          <a:xfrm>
+            <a:off x="868680" y="4041648"/>
+            <a:ext cx="4809744" cy="1069848"/>
+          </a:xfrm>
+          <a:prstGeom prst="rect">
+            <a:avLst/>
+          </a:prstGeom>
+          <a:noFill/>
+        </p:spPr>
+        <p:txBody>
+          <a:bodyPr wrap="square" anchor="t" lIns="0" rIns="0" tIns="0" bIns="0">
+            <a:spAutoFit/>
+          </a:bodyPr>
+          <a:lstStyle/>
+          <a:p>
+            <a:pPr>
+              <a:lnSpc>
+                <a:spcPct val="118000"/>
+              </a:lnSpc>
+            </a:pPr>
+            <a:r>
+              <a:rPr sz="1150" b="0">
+                <a:solidFill>
+                  <a:srgbClr val="5D6B75"/>
+                </a:solidFill>
+                <a:latin typeface="Calibri"/>
+              </a:rPr>
+              <a:t>Les dix graphiques. Seaborn serait plus flatteur en moins de lignes, Plotly ajouterait l'interactivité ; Matplotlib donne le contrôle sur </a:t>
+            </a:r>
+            <a:r>
+              <a:rPr sz="1150" b="1">
+                <a:solidFill>
+                  <a:srgbClr val="16232B"/>
+                </a:solidFill>
+                <a:latin typeface="Calibri"/>
+              </a:rPr>
+              <a:t>chaque</a:t>
+            </a:r>
+            <a:r>
+              <a:rPr sz="1150" b="0">
+                <a:solidFill>
+                  <a:srgbClr val="5D6B75"/>
+                </a:solidFill>
+                <a:latin typeface="Calibri"/>
+              </a:rPr>
+              <a:t> élément — indispensable quand il faut justifier chaque choix visuel et retirer tout ornement inutile.</a:t>
+            </a:r>
+          </a:p>
+        </p:txBody>
+      </p:sp>
+      <p:sp>
+        <p:nvSpPr>
+          <p:cNvPr id="13" name="Shape 3"/>
+          <p:cNvSpPr/>
+          <p:nvPr/>
+        </p:nvSpPr>
+        <p:spPr>
+          <a:xfrm>
+            <a:off x="6236208" y="3401568"/>
+            <a:ext cx="5358384" cy="1938528"/>
+          </a:xfrm>
+          <a:prstGeom prst="roundRect">
+            <a:avLst>
+              <a:gd name="adj" fmla="val 2800"/>
+            </a:avLst>
+          </a:prstGeom>
+          <a:solidFill>
+            <a:srgbClr val="FFFFFF"/>
+          </a:solidFill>
+          <a:ln w="12700">
+            <a:solidFill>
+              <a:srgbClr val="DFE6EA"/>
+            </a:solidFill>
+          </a:ln>
+          <a:effectLst/>
+        </p:spPr>
+        <p:style>
+          <a:lnRef idx="1">
+            <a:schemeClr val="accent1"/>
+          </a:lnRef>
+          <a:fillRef idx="3">
+            <a:schemeClr val="accent1"/>
+          </a:fillRef>
+          <a:effectRef idx="2">
+            <a:schemeClr val="accent1"/>
+          </a:effectRef>
+          <a:fontRef idx="minor">
+            <a:schemeClr val="lt1"/>
+          </a:fontRef>
+        </p:style>
+        <p:txBody>
+          <a:bodyPr rtlCol="0" anchor="ctr"/>
+          <a:lstStyle/>
+          <a:p>
+            <a:pPr algn="ctr"/>
+          </a:p>
+        </p:txBody>
+      </p:sp>
+      <p:sp>
+        <p:nvSpPr>
+          <p:cNvPr id="14" name="Text 8"/>
+          <p:cNvSpPr txBox="1"/>
+          <p:nvPr/>
+        </p:nvSpPr>
+        <p:spPr>
+          <a:xfrm>
+            <a:off x="6510528" y="3584448"/>
+            <a:ext cx="4809744" cy="365760"/>
+          </a:xfrm>
+          <a:prstGeom prst="rect">
+            <a:avLst/>
+          </a:prstGeom>
+          <a:noFill/>
+        </p:spPr>
+        <p:txBody>
+          <a:bodyPr wrap="square" anchor="t" lIns="0" rIns="0" tIns="0" bIns="0">
+            <a:spAutoFit/>
+          </a:bodyPr>
+          <a:lstStyle/>
+          <a:p>
+            <a:r>
+              <a:rPr sz="1800" b="1">
+                <a:solidFill>
+                  <a:srgbClr val="0E7C86"/>
+                </a:solidFill>
+                <a:latin typeface="Cambria"/>
+              </a:rPr>
+              <a:t>scikit-learn</a:t>
+            </a:r>
+            <a:r>
+              <a:rPr sz="1050" b="0">
+                <a:solidFill>
+                  <a:srgbClr val="5D6B75"/>
+                </a:solidFill>
+                <a:latin typeface="Calibri"/>
+              </a:rPr>
+              <a:t>   1.9</a:t>
+            </a:r>
+          </a:p>
+        </p:txBody>
+      </p:sp>
+      <p:sp>
+        <p:nvSpPr>
+          <p:cNvPr id="15" name="Text 9"/>
+          <p:cNvSpPr txBox="1"/>
+          <p:nvPr/>
+        </p:nvSpPr>
+        <p:spPr>
+          <a:xfrm>
+            <a:off x="6510528" y="4041648"/>
+            <a:ext cx="4809744" cy="1069848"/>
+          </a:xfrm>
+          <a:prstGeom prst="rect">
+            <a:avLst/>
+          </a:prstGeom>
+          <a:noFill/>
+        </p:spPr>
+        <p:txBody>
+          <a:bodyPr wrap="square" anchor="t" lIns="0" rIns="0" tIns="0" bIns="0">
+            <a:spAutoFit/>
+          </a:bodyPr>
+          <a:lstStyle/>
+          <a:p>
+            <a:pPr>
+              <a:lnSpc>
+                <a:spcPct val="118000"/>
+              </a:lnSpc>
+            </a:pPr>
+            <a:r>
+              <a:rPr sz="1150" b="0">
+                <a:solidFill>
+                  <a:srgbClr val="5D6B75"/>
+                </a:solidFill>
+                <a:latin typeface="Calibri"/>
+              </a:rPr>
+              <a:t>Le modèle prédictif. Découpe, algorithmes, métriques et importance des variables partagent la même interface </a:t>
+            </a:r>
+            <a:r>
+              <a:rPr sz="1150" b="1">
+                <a:solidFill>
+                  <a:srgbClr val="16232B"/>
+                </a:solidFill>
+                <a:latin typeface="Calibri"/>
+              </a:rPr>
+              <a:t>fit / predict</a:t>
+            </a:r>
+            <a:r>
+              <a:rPr sz="1150" b="0">
+                <a:solidFill>
+                  <a:srgbClr val="5D6B75"/>
+                </a:solidFill>
+                <a:latin typeface="Calibri"/>
+              </a:rPr>
+              <a:t> : comparer quatre modèles ne demande alors que d'en changer le nom.</a:t>
+            </a:r>
+          </a:p>
+        </p:txBody>
+      </p:sp>
+      <p:sp>
+        <p:nvSpPr>
+          <p:cNvPr id="16" name="Text 10"/>
+          <p:cNvSpPr txBox="1"/>
+          <p:nvPr/>
+        </p:nvSpPr>
+        <p:spPr>
+          <a:xfrm>
+            <a:off x="594360" y="5623560"/>
+            <a:ext cx="10972800" cy="777240"/>
+          </a:xfrm>
+          <a:prstGeom prst="rect">
+            <a:avLst/>
+          </a:prstGeom>
+          <a:noFill/>
+        </p:spPr>
+        <p:txBody>
+          <a:bodyPr wrap="square" anchor="ctr" lIns="0" rIns="0" tIns="0" bIns="0">
+            <a:spAutoFit/>
+          </a:bodyPr>
+          <a:lstStyle/>
+          <a:p>
+            <a:pPr>
+              <a:lnSpc>
+                <a:spcPct val="120000"/>
+              </a:lnSpc>
+            </a:pPr>
+            <a:r>
+              <a:rPr sz="1350" b="0">
+                <a:solidFill>
+                  <a:srgbClr val="5D6B75"/>
+                </a:solidFill>
+                <a:latin typeface="Calibri"/>
+              </a:rPr>
+              <a:t>Versions figées dans </a:t>
+            </a:r>
+            <a:r>
+              <a:rPr sz="1300" b="0">
+                <a:solidFill>
+                  <a:srgbClr val="16232B"/>
+                </a:solidFill>
+                <a:latin typeface="Consolas"/>
+              </a:rPr>
+              <a:t>requirements.txt</a:t>
+            </a:r>
+            <a:r>
+              <a:rPr sz="1350" b="0">
+                <a:solidFill>
+                  <a:srgbClr val="5D6B75"/>
+                </a:solidFill>
+                <a:latin typeface="Calibri"/>
+              </a:rPr>
+              <a:t>. Les types compacts imposés à pandas — </a:t>
+            </a:r>
+            <a:r>
+              <a:rPr sz="1350" b="1">
+                <a:solidFill>
+                  <a:srgbClr val="16232B"/>
+                </a:solidFill>
+                <a:latin typeface="Calibri"/>
+              </a:rPr>
+              <a:t>int8</a:t>
+            </a:r>
+            <a:r>
+              <a:rPr sz="1350" b="0">
+                <a:solidFill>
+                  <a:srgbClr val="5D6B75"/>
+                </a:solidFill>
+                <a:latin typeface="Calibri"/>
+              </a:rPr>
+              <a:t>, </a:t>
+            </a:r>
+            <a:r>
+              <a:rPr sz="1350" b="1">
+                <a:solidFill>
+                  <a:srgbClr val="16232B"/>
+                </a:solidFill>
+                <a:latin typeface="Calibri"/>
+              </a:rPr>
+              <a:t>int16</a:t>
+            </a:r>
+            <a:r>
+              <a:rPr sz="1350" b="0">
+                <a:solidFill>
+                  <a:srgbClr val="5D6B75"/>
+                </a:solidFill>
+                <a:latin typeface="Calibri"/>
+              </a:rPr>
+              <a:t>, catégories — ramènent l'empreinte mémoire de 3,2 Go à 1,0 Go : c'est ce qui rend le projet exécutable sur une machine ordinaire, et non sur un serveur.</a:t>
+            </a:r>
+          </a:p>
+        </p:txBody>
+      </p:sp>
+    </p:spTree>
+  </p:cSld>
+  <p:clrMapOvr>
+    <a:masterClrMapping/>
+  </p:clrMapOvr>
+</p:sld>
+</file>
+
+<file path=ppt/slides/slide4.xml><?xml version="1.0" encoding="utf-8"?>
 <p:sld xmlns:a="http://schemas.openxmlformats.org/drawingml/2006/main" xmlns:r="http://schemas.openxmlformats.org/officeDocument/2006/relationships" xmlns:p="http://schemas.openxmlformats.org/presentationml/2006/main">
   <p:cSld name="Slide 3">
     <p:bg>
@@ -5150,7 +6327,7 @@
 </p:sld>
 </file>
 
-<file path=ppt/slides/slide4.xml><?xml version="1.0" encoding="utf-8"?>
+<file path=ppt/slides/slide5.xml><?xml version="1.0" encoding="utf-8"?>
 <p:sld xmlns:a="http://schemas.openxmlformats.org/drawingml/2006/main" xmlns:r="http://schemas.openxmlformats.org/officeDocument/2006/relationships" xmlns:p="http://schemas.openxmlformats.org/presentationml/2006/main">
   <p:cSld name="Slide 4">
     <p:bg>
@@ -5478,7 +6655,7 @@
 </p:sld>
 </file>
 
-<file path=ppt/slides/slide5.xml><?xml version="1.0" encoding="utf-8"?>
+<file path=ppt/slides/slide6.xml><?xml version="1.0" encoding="utf-8"?>
 <p:sld xmlns:a="http://schemas.openxmlformats.org/drawingml/2006/main" xmlns:r="http://schemas.openxmlformats.org/officeDocument/2006/relationships" xmlns:p="http://schemas.openxmlformats.org/presentationml/2006/main">
   <p:cSld name="Slide 5">
     <p:bg>
@@ -5806,7 +6983,7 @@
 </p:sld>
 </file>
 
-<file path=ppt/slides/slide6.xml><?xml version="1.0" encoding="utf-8"?>
+<file path=ppt/slides/slide7.xml><?xml version="1.0" encoding="utf-8"?>
 <p:sld xmlns:a="http://schemas.openxmlformats.org/drawingml/2006/main" xmlns:r="http://schemas.openxmlformats.org/officeDocument/2006/relationships" xmlns:p="http://schemas.openxmlformats.org/presentationml/2006/main">
   <p:cSld name="Slide 6">
     <p:bg>
@@ -6134,7 +7311,7 @@
 </p:sld>
 </file>
 
-<file path=ppt/slides/slide7.xml><?xml version="1.0" encoding="utf-8"?>
+<file path=ppt/slides/slide8.xml><?xml version="1.0" encoding="utf-8"?>
 <p:sld xmlns:a="http://schemas.openxmlformats.org/drawingml/2006/main" xmlns:r="http://schemas.openxmlformats.org/officeDocument/2006/relationships" xmlns:p="http://schemas.openxmlformats.org/presentationml/2006/main">
   <p:cSld name="Slide 7">
     <p:bg>
@@ -6462,7 +7639,7 @@
 </p:sld>
 </file>
 
-<file path=ppt/slides/slide8.xml><?xml version="1.0" encoding="utf-8"?>
+<file path=ppt/slides/slide9.xml><?xml version="1.0" encoding="utf-8"?>
 <p:sld xmlns:a="http://schemas.openxmlformats.org/drawingml/2006/main" xmlns:r="http://schemas.openxmlformats.org/officeDocument/2006/relationships" xmlns:p="http://schemas.openxmlformats.org/presentationml/2006/main">
   <p:cSld name="Slide 8">
     <p:bg>
@@ -6777,334 +7954,6 @@
                 <a:cs typeface="Cambria" pitchFamily="34" charset="-120"/>
               </a:rPr>
               <a:t>5</a:t>
-            </a:r>
-            <a:endParaRPr lang="en-US" sz="3400" dirty="0"/>
-          </a:p>
-        </p:txBody>
-      </p:sp>
-    </p:spTree>
-  </p:cSld>
-  <p:clrMapOvr>
-    <a:masterClrMapping/>
-  </p:clrMapOvr>
-</p:sld>
-</file>
-
-<file path=ppt/slides/slide9.xml><?xml version="1.0" encoding="utf-8"?>
-<p:sld xmlns:a="http://schemas.openxmlformats.org/drawingml/2006/main" xmlns:r="http://schemas.openxmlformats.org/officeDocument/2006/relationships" xmlns:p="http://schemas.openxmlformats.org/presentationml/2006/main">
-  <p:cSld name="Slide 9">
-    <p:bg>
-      <p:bgPr>
-        <a:solidFill>
-          <a:srgbClr val="FFFFFF"/>
-        </a:solidFill>
-        <a:effectLst/>
-      </p:bgPr>
-    </p:bg>
-    <p:spTree>
-      <p:nvGrpSpPr>
-        <p:cNvPr id="1" name=""/>
-        <p:cNvGrpSpPr/>
-        <p:nvPr/>
-      </p:nvGrpSpPr>
-      <p:grpSpPr>
-        <a:xfrm>
-          <a:off x="0" y="0"/>
-          <a:ext cx="0" cy="0"/>
-          <a:chOff x="0" y="0"/>
-          <a:chExt cx="0" cy="0"/>
-        </a:xfrm>
-      </p:grpSpPr>
-      <p:sp>
-        <p:nvSpPr>
-          <p:cNvPr id="2" name="Text 0"/>
-          <p:cNvSpPr txBox="1"/>
-          <p:nvPr/>
-        </p:nvSpPr>
-        <p:spPr>
-          <a:xfrm>
-            <a:off x="594360" y="182880"/>
-            <a:ext cx="10972800" cy="219456"/>
-          </a:xfrm>
-          <a:prstGeom prst="rect">
-            <a:avLst/>
-          </a:prstGeom>
-          <a:noFill/>
-          <a:ln/>
-        </p:spPr>
-        <p:txBody>
-          <a:bodyPr wrap="square" lIns="0" tIns="0" rIns="0" bIns="0" rtlCol="0" anchor="ctr"/>
-          <a:lstStyle/>
-          <a:p>
-            <a:pPr marL="0" indent="0">
-              <a:buNone/>
-            </a:pPr>
-            <a:r>
-              <a:rPr lang="en-US" sz="1050" b="1" kern="0" spc="160" dirty="0">
-                <a:solidFill>
-                  <a:srgbClr val="0E7C86"/>
-                </a:solidFill>
-                <a:latin typeface="Calibri" pitchFamily="34" charset="0"/>
-                <a:ea typeface="Calibri" pitchFamily="34" charset="-122"/>
-                <a:cs typeface="Calibri" pitchFamily="34" charset="-120"/>
-              </a:rPr>
-              <a:t>DÉMONSTRATION 6</a:t>
-            </a:r>
-            <a:endParaRPr lang="en-US" sz="1050" dirty="0"/>
-          </a:p>
-        </p:txBody>
-      </p:sp>
-      <p:sp>
-        <p:nvSpPr>
-          <p:cNvPr id="3" name="Text 1"/>
-          <p:cNvSpPr txBox="1"/>
-          <p:nvPr/>
-        </p:nvSpPr>
-        <p:spPr>
-          <a:xfrm>
-            <a:off x="594360" y="384048"/>
-            <a:ext cx="10972800" cy="658368"/>
-          </a:xfrm>
-          <a:prstGeom prst="rect">
-            <a:avLst/>
-          </a:prstGeom>
-          <a:noFill/>
-          <a:ln/>
-        </p:spPr>
-        <p:txBody>
-          <a:bodyPr wrap="square" lIns="0" tIns="0" rIns="0" bIns="0" rtlCol="0" anchor="ctr"/>
-          <a:lstStyle/>
-          <a:p>
-            <a:pPr marL="0" indent="0">
-              <a:buNone/>
-            </a:pPr>
-            <a:r>
-              <a:rPr lang="en-US" sz="2700" b="1" dirty="0">
-                <a:solidFill>
-                  <a:srgbClr val="16232B"/>
-                </a:solidFill>
-                <a:latin typeface="Cambria" pitchFamily="34" charset="0"/>
-                <a:ea typeface="Cambria" pitchFamily="34" charset="-122"/>
-                <a:cs typeface="Cambria" pitchFamily="34" charset="-120"/>
-              </a:rPr>
-              <a:t>Le week-end ne gonfle pas les paniers, il les déplace</a:t>
-            </a:r>
-            <a:endParaRPr lang="en-US" sz="2700" dirty="0"/>
-          </a:p>
-        </p:txBody>
-      </p:sp>
-      <p:pic>
-        <p:nvPicPr>
-          <p:cNvPr id="4" name="Image 0" descr="02_projet\_ppt\fig06.png"/>
-          <p:cNvPicPr>
-            <a:picLocks noChangeAspect="1"/>
-          </p:cNvPicPr>
-          <p:nvPr/>
-        </p:nvPicPr>
-        <p:blipFill>
-          <a:blip r:embed="rId3"/>
-          <a:stretch>
-            <a:fillRect/>
-          </a:stretch>
-        </p:blipFill>
-        <p:spPr>
-          <a:xfrm>
-            <a:off x="594360" y="1481726"/>
-            <a:ext cx="6903720" cy="3565364"/>
-          </a:xfrm>
-          <a:prstGeom prst="rect">
-            <a:avLst/>
-          </a:prstGeom>
-        </p:spPr>
-      </p:pic>
-      <p:sp>
-        <p:nvSpPr>
-          <p:cNvPr id="5" name="Text 2"/>
-          <p:cNvSpPr txBox="1"/>
-          <p:nvPr/>
-        </p:nvSpPr>
-        <p:spPr>
-          <a:xfrm>
-            <a:off x="594360" y="5440680"/>
-            <a:ext cx="6903720" cy="457200"/>
-          </a:xfrm>
-          <a:prstGeom prst="rect">
-            <a:avLst/>
-          </a:prstGeom>
-          <a:noFill/>
-          <a:ln/>
-        </p:spPr>
-        <p:txBody>
-          <a:bodyPr wrap="square" lIns="0" tIns="0" rIns="0" bIns="0" rtlCol="0" anchor="t"/>
-          <a:lstStyle/>
-          <a:p>
-            <a:pPr marL="0" indent="0">
-              <a:buNone/>
-            </a:pPr>
-            <a:r>
-              <a:rPr lang="en-US" sz="1100" i="1" dirty="0">
-                <a:solidFill>
-                  <a:srgbClr val="5D6B75"/>
-                </a:solidFill>
-                <a:latin typeface="Calibri" pitchFamily="34" charset="0"/>
-                <a:ea typeface="Calibri" pitchFamily="34" charset="-122"/>
-                <a:cs typeface="Calibri" pitchFamily="34" charset="-120"/>
-              </a:rPr>
-              <a:t>Les petits paniers reculent de 7 points au profit des gros.</a:t>
-            </a:r>
-            <a:endParaRPr lang="en-US" sz="1100" dirty="0"/>
-          </a:p>
-        </p:txBody>
-      </p:sp>
-      <p:sp>
-        <p:nvSpPr>
-          <p:cNvPr id="6" name="Shape 3"/>
-          <p:cNvSpPr/>
-          <p:nvPr/>
-        </p:nvSpPr>
-        <p:spPr>
-          <a:xfrm>
-            <a:off x="7818120" y="1207008"/>
-            <a:ext cx="3749040" cy="3200400"/>
-          </a:xfrm>
-          <a:prstGeom prst="roundRect">
-            <a:avLst>
-              <a:gd name="adj" fmla="val 1714"/>
-            </a:avLst>
-          </a:prstGeom>
-          <a:solidFill>
-            <a:srgbClr val="EAF3F4"/>
-          </a:solidFill>
-          <a:ln w="12700">
-            <a:solidFill>
-              <a:srgbClr val="D3E5E7"/>
-            </a:solidFill>
-            <a:prstDash val="solid"/>
-          </a:ln>
-        </p:spPr>
-        <p:txBody>
-          <a:bodyPr/>
-          <a:lstStyle/>
-          <a:p>
-            <a:endParaRPr lang="fr-FR"/>
-          </a:p>
-        </p:txBody>
-      </p:sp>
-      <p:sp>
-        <p:nvSpPr>
-          <p:cNvPr id="7" name="Text 4"/>
-          <p:cNvSpPr txBox="1"/>
-          <p:nvPr/>
-        </p:nvSpPr>
-        <p:spPr>
-          <a:xfrm>
-            <a:off x="8074152" y="1389888"/>
-            <a:ext cx="3236976" cy="219456"/>
-          </a:xfrm>
-          <a:prstGeom prst="rect">
-            <a:avLst/>
-          </a:prstGeom>
-          <a:noFill/>
-          <a:ln/>
-        </p:spPr>
-        <p:txBody>
-          <a:bodyPr wrap="square" lIns="0" tIns="0" rIns="0" bIns="0" rtlCol="0" anchor="ctr"/>
-          <a:lstStyle/>
-          <a:p>
-            <a:pPr marL="0" indent="0">
-              <a:buNone/>
-            </a:pPr>
-            <a:r>
-              <a:rPr lang="en-US" sz="950" b="1" kern="0" spc="120" dirty="0">
-                <a:solidFill>
-                  <a:srgbClr val="0E7C86"/>
-                </a:solidFill>
-                <a:latin typeface="Calibri" pitchFamily="34" charset="0"/>
-                <a:ea typeface="Calibri" pitchFamily="34" charset="-122"/>
-                <a:cs typeface="Calibri" pitchFamily="34" charset="-120"/>
-              </a:rPr>
-              <a:t>CE QUE NOUS PROPOSONS</a:t>
-            </a:r>
-            <a:endParaRPr lang="en-US" sz="950" dirty="0"/>
-          </a:p>
-        </p:txBody>
-      </p:sp>
-      <p:sp>
-        <p:nvSpPr>
-          <p:cNvPr id="8" name="Text 5"/>
-          <p:cNvSpPr txBox="1"/>
-          <p:nvPr/>
-        </p:nvSpPr>
-        <p:spPr>
-          <a:xfrm>
-            <a:off x="8074152" y="1682496"/>
-            <a:ext cx="3236976" cy="2505456"/>
-          </a:xfrm>
-          <a:prstGeom prst="rect">
-            <a:avLst/>
-          </a:prstGeom>
-          <a:noFill/>
-          <a:ln/>
-        </p:spPr>
-        <p:txBody>
-          <a:bodyPr wrap="square" lIns="0" tIns="0" rIns="0" bIns="0" rtlCol="0" anchor="t"/>
-          <a:lstStyle/>
-          <a:p>
-            <a:pPr marL="0" indent="0">
-              <a:lnSpc>
-                <a:spcPct val="110000"/>
-              </a:lnSpc>
-              <a:buNone/>
-            </a:pPr>
-            <a:r>
-              <a:rPr lang="en-US" sz="1300" dirty="0">
-                <a:solidFill>
-                  <a:srgbClr val="16232B"/>
-                </a:solidFill>
-                <a:latin typeface="Calibri" pitchFamily="34" charset="0"/>
-                <a:ea typeface="Calibri" pitchFamily="34" charset="-122"/>
-                <a:cs typeface="Calibri" pitchFamily="34" charset="-120"/>
-              </a:rPr>
-              <a:t>Placer les offres à seuil — « livraison offerte dès X articles » — le week-end, où les gros paniers sont déjà la norme.</a:t>
-            </a:r>
-            <a:endParaRPr lang="en-US" sz="1300" dirty="0"/>
-          </a:p>
-        </p:txBody>
-      </p:sp>
-      <p:sp>
-        <p:nvSpPr>
-          <p:cNvPr id="9" name="Text 6"/>
-          <p:cNvSpPr txBox="1"/>
-          <p:nvPr/>
-        </p:nvSpPr>
-        <p:spPr>
-          <a:xfrm>
-            <a:off x="7818120" y="4663440"/>
-            <a:ext cx="548640" cy="548640"/>
-          </a:xfrm>
-          <a:prstGeom prst="rect">
-            <a:avLst/>
-          </a:prstGeom>
-          <a:noFill/>
-          <a:ln/>
-        </p:spPr>
-        <p:txBody>
-          <a:bodyPr wrap="square" lIns="0" tIns="0" rIns="0" bIns="0" rtlCol="0" anchor="ctr"/>
-          <a:lstStyle/>
-          <a:p>
-            <a:pPr marL="0" indent="0">
-              <a:buNone/>
-            </a:pPr>
-            <a:r>
-              <a:rPr lang="en-US" sz="3400" b="1" dirty="0">
-                <a:solidFill>
-                  <a:srgbClr val="D8E4E6"/>
-                </a:solidFill>
-                <a:latin typeface="Cambria" pitchFamily="34" charset="0"/>
-                <a:ea typeface="Cambria" pitchFamily="34" charset="-122"/>
-                <a:cs typeface="Cambria" pitchFamily="34" charset="-120"/>
-              </a:rPr>
-              <a:t>6</a:t>
             </a:r>
             <a:endParaRPr lang="en-US" sz="3400" dirty="0"/>
           </a:p>

--- a/02_projet/soutenance.pptx
+++ b/02_projet/soutenance.pptx
@@ -929,7 +929,7 @@
             <a:r>
               <a:rPr lang="fr-FR"/>
               <a:t>AVEC QUOI — 40 secondes.
-Cette diapositive répond à une question que le jury posera de toute façon. Ne lisez pas les quatre cases : donnez la logique. « Chaque bibliothèque a été choisie contre une alternative, pas prise par défaut. »
+Ne lisez pas les quatre cases : donnez la logique. « Chaque bibliothèque a été choisie contre une alternative, pas prise par défaut. »
 LE POINT À FAIRE ENTENDRE : Matplotlib plutôt que Seaborn est un choix coûteux — davantage de lignes de code — mais c'est lui qui nous a permis de retirer chaque ornement inutile. Sans ce contrôle, la promesse d'un graphique lisible ne tenait pas.
 LE CHIFFRE À CITER : 3,2 Go ramenés à 1,0 Go en imposant les types. Par défaut pandas met tout entier en int64, huit octets par valeur ; un jour de semaine en occupe un seul. Sur 32 millions de lignes, cet écart décide de la faisabilité.
 SI ON DEMANDE POURQUOI PAS POLARS : plus rapide, mais moins répandu. Ce code est fait pour être relu et repris — nous avons préféré le standard à la performance.
@@ -2178,334 +2178,6 @@
 
 <file path=ppt/slides/slide10.xml><?xml version="1.0" encoding="utf-8"?>
 <p:sld xmlns:a="http://schemas.openxmlformats.org/drawingml/2006/main" xmlns:r="http://schemas.openxmlformats.org/officeDocument/2006/relationships" xmlns:p="http://schemas.openxmlformats.org/presentationml/2006/main">
-  <p:cSld name="Slide 9">
-    <p:bg>
-      <p:bgPr>
-        <a:solidFill>
-          <a:srgbClr val="FFFFFF"/>
-        </a:solidFill>
-        <a:effectLst/>
-      </p:bgPr>
-    </p:bg>
-    <p:spTree>
-      <p:nvGrpSpPr>
-        <p:cNvPr id="1" name=""/>
-        <p:cNvGrpSpPr/>
-        <p:nvPr/>
-      </p:nvGrpSpPr>
-      <p:grpSpPr>
-        <a:xfrm>
-          <a:off x="0" y="0"/>
-          <a:ext cx="0" cy="0"/>
-          <a:chOff x="0" y="0"/>
-          <a:chExt cx="0" cy="0"/>
-        </a:xfrm>
-      </p:grpSpPr>
-      <p:sp>
-        <p:nvSpPr>
-          <p:cNvPr id="2" name="Text 0"/>
-          <p:cNvSpPr txBox="1"/>
-          <p:nvPr/>
-        </p:nvSpPr>
-        <p:spPr>
-          <a:xfrm>
-            <a:off x="594360" y="182880"/>
-            <a:ext cx="10972800" cy="219456"/>
-          </a:xfrm>
-          <a:prstGeom prst="rect">
-            <a:avLst/>
-          </a:prstGeom>
-          <a:noFill/>
-          <a:ln/>
-        </p:spPr>
-        <p:txBody>
-          <a:bodyPr wrap="square" lIns="0" tIns="0" rIns="0" bIns="0" rtlCol="0" anchor="ctr"/>
-          <a:lstStyle/>
-          <a:p>
-            <a:pPr marL="0" indent="0">
-              <a:buNone/>
-            </a:pPr>
-            <a:r>
-              <a:rPr lang="en-US" sz="1050" b="1" kern="0" spc="160" dirty="0">
-                <a:solidFill>
-                  <a:srgbClr val="0E7C86"/>
-                </a:solidFill>
-                <a:latin typeface="Calibri" pitchFamily="34" charset="0"/>
-                <a:ea typeface="Calibri" pitchFamily="34" charset="-122"/>
-                <a:cs typeface="Calibri" pitchFamily="34" charset="-120"/>
-              </a:rPr>
-              <a:t>DÉMONSTRATION 6</a:t>
-            </a:r>
-            <a:endParaRPr lang="en-US" sz="1050" dirty="0"/>
-          </a:p>
-        </p:txBody>
-      </p:sp>
-      <p:sp>
-        <p:nvSpPr>
-          <p:cNvPr id="3" name="Text 1"/>
-          <p:cNvSpPr txBox="1"/>
-          <p:nvPr/>
-        </p:nvSpPr>
-        <p:spPr>
-          <a:xfrm>
-            <a:off x="594360" y="384048"/>
-            <a:ext cx="10972800" cy="658368"/>
-          </a:xfrm>
-          <a:prstGeom prst="rect">
-            <a:avLst/>
-          </a:prstGeom>
-          <a:noFill/>
-          <a:ln/>
-        </p:spPr>
-        <p:txBody>
-          <a:bodyPr wrap="square" lIns="0" tIns="0" rIns="0" bIns="0" rtlCol="0" anchor="ctr"/>
-          <a:lstStyle/>
-          <a:p>
-            <a:pPr marL="0" indent="0">
-              <a:buNone/>
-            </a:pPr>
-            <a:r>
-              <a:rPr lang="en-US" sz="2700" b="1" dirty="0">
-                <a:solidFill>
-                  <a:srgbClr val="16232B"/>
-                </a:solidFill>
-                <a:latin typeface="Cambria" pitchFamily="34" charset="0"/>
-                <a:ea typeface="Cambria" pitchFamily="34" charset="-122"/>
-                <a:cs typeface="Cambria" pitchFamily="34" charset="-120"/>
-              </a:rPr>
-              <a:t>Le week-end ne gonfle pas les paniers, il les déplace</a:t>
-            </a:r>
-            <a:endParaRPr lang="en-US" sz="2700" dirty="0"/>
-          </a:p>
-        </p:txBody>
-      </p:sp>
-      <p:pic>
-        <p:nvPicPr>
-          <p:cNvPr id="4" name="Image 0" descr="02_projet\_ppt\fig06.png"/>
-          <p:cNvPicPr>
-            <a:picLocks noChangeAspect="1"/>
-          </p:cNvPicPr>
-          <p:nvPr/>
-        </p:nvPicPr>
-        <p:blipFill>
-          <a:blip r:embed="rId3"/>
-          <a:stretch>
-            <a:fillRect/>
-          </a:stretch>
-        </p:blipFill>
-        <p:spPr>
-          <a:xfrm>
-            <a:off x="594360" y="1481726"/>
-            <a:ext cx="6903720" cy="3565364"/>
-          </a:xfrm>
-          <a:prstGeom prst="rect">
-            <a:avLst/>
-          </a:prstGeom>
-        </p:spPr>
-      </p:pic>
-      <p:sp>
-        <p:nvSpPr>
-          <p:cNvPr id="5" name="Text 2"/>
-          <p:cNvSpPr txBox="1"/>
-          <p:nvPr/>
-        </p:nvSpPr>
-        <p:spPr>
-          <a:xfrm>
-            <a:off x="594360" y="5440680"/>
-            <a:ext cx="6903720" cy="457200"/>
-          </a:xfrm>
-          <a:prstGeom prst="rect">
-            <a:avLst/>
-          </a:prstGeom>
-          <a:noFill/>
-          <a:ln/>
-        </p:spPr>
-        <p:txBody>
-          <a:bodyPr wrap="square" lIns="0" tIns="0" rIns="0" bIns="0" rtlCol="0" anchor="t"/>
-          <a:lstStyle/>
-          <a:p>
-            <a:pPr marL="0" indent="0">
-              <a:buNone/>
-            </a:pPr>
-            <a:r>
-              <a:rPr lang="en-US" sz="1100" i="1" dirty="0">
-                <a:solidFill>
-                  <a:srgbClr val="5D6B75"/>
-                </a:solidFill>
-                <a:latin typeface="Calibri" pitchFamily="34" charset="0"/>
-                <a:ea typeface="Calibri" pitchFamily="34" charset="-122"/>
-                <a:cs typeface="Calibri" pitchFamily="34" charset="-120"/>
-              </a:rPr>
-              <a:t>Les petits paniers reculent de 7 points au profit des gros.</a:t>
-            </a:r>
-            <a:endParaRPr lang="en-US" sz="1100" dirty="0"/>
-          </a:p>
-        </p:txBody>
-      </p:sp>
-      <p:sp>
-        <p:nvSpPr>
-          <p:cNvPr id="6" name="Shape 3"/>
-          <p:cNvSpPr/>
-          <p:nvPr/>
-        </p:nvSpPr>
-        <p:spPr>
-          <a:xfrm>
-            <a:off x="7818120" y="1207008"/>
-            <a:ext cx="3749040" cy="3200400"/>
-          </a:xfrm>
-          <a:prstGeom prst="roundRect">
-            <a:avLst>
-              <a:gd name="adj" fmla="val 1714"/>
-            </a:avLst>
-          </a:prstGeom>
-          <a:solidFill>
-            <a:srgbClr val="EAF3F4"/>
-          </a:solidFill>
-          <a:ln w="12700">
-            <a:solidFill>
-              <a:srgbClr val="D3E5E7"/>
-            </a:solidFill>
-            <a:prstDash val="solid"/>
-          </a:ln>
-        </p:spPr>
-        <p:txBody>
-          <a:bodyPr/>
-          <a:lstStyle/>
-          <a:p>
-            <a:endParaRPr lang="fr-FR"/>
-          </a:p>
-        </p:txBody>
-      </p:sp>
-      <p:sp>
-        <p:nvSpPr>
-          <p:cNvPr id="7" name="Text 4"/>
-          <p:cNvSpPr txBox="1"/>
-          <p:nvPr/>
-        </p:nvSpPr>
-        <p:spPr>
-          <a:xfrm>
-            <a:off x="8074152" y="1389888"/>
-            <a:ext cx="3236976" cy="219456"/>
-          </a:xfrm>
-          <a:prstGeom prst="rect">
-            <a:avLst/>
-          </a:prstGeom>
-          <a:noFill/>
-          <a:ln/>
-        </p:spPr>
-        <p:txBody>
-          <a:bodyPr wrap="square" lIns="0" tIns="0" rIns="0" bIns="0" rtlCol="0" anchor="ctr"/>
-          <a:lstStyle/>
-          <a:p>
-            <a:pPr marL="0" indent="0">
-              <a:buNone/>
-            </a:pPr>
-            <a:r>
-              <a:rPr lang="en-US" sz="950" b="1" kern="0" spc="120" dirty="0">
-                <a:solidFill>
-                  <a:srgbClr val="0E7C86"/>
-                </a:solidFill>
-                <a:latin typeface="Calibri" pitchFamily="34" charset="0"/>
-                <a:ea typeface="Calibri" pitchFamily="34" charset="-122"/>
-                <a:cs typeface="Calibri" pitchFamily="34" charset="-120"/>
-              </a:rPr>
-              <a:t>CE QUE NOUS PROPOSONS</a:t>
-            </a:r>
-            <a:endParaRPr lang="en-US" sz="950" dirty="0"/>
-          </a:p>
-        </p:txBody>
-      </p:sp>
-      <p:sp>
-        <p:nvSpPr>
-          <p:cNvPr id="8" name="Text 5"/>
-          <p:cNvSpPr txBox="1"/>
-          <p:nvPr/>
-        </p:nvSpPr>
-        <p:spPr>
-          <a:xfrm>
-            <a:off x="8074152" y="1682496"/>
-            <a:ext cx="3236976" cy="2505456"/>
-          </a:xfrm>
-          <a:prstGeom prst="rect">
-            <a:avLst/>
-          </a:prstGeom>
-          <a:noFill/>
-          <a:ln/>
-        </p:spPr>
-        <p:txBody>
-          <a:bodyPr wrap="square" lIns="0" tIns="0" rIns="0" bIns="0" rtlCol="0" anchor="t"/>
-          <a:lstStyle/>
-          <a:p>
-            <a:pPr marL="0" indent="0">
-              <a:lnSpc>
-                <a:spcPct val="110000"/>
-              </a:lnSpc>
-              <a:buNone/>
-            </a:pPr>
-            <a:r>
-              <a:rPr lang="en-US" sz="1300" dirty="0">
-                <a:solidFill>
-                  <a:srgbClr val="16232B"/>
-                </a:solidFill>
-                <a:latin typeface="Calibri" pitchFamily="34" charset="0"/>
-                <a:ea typeface="Calibri" pitchFamily="34" charset="-122"/>
-                <a:cs typeface="Calibri" pitchFamily="34" charset="-120"/>
-              </a:rPr>
-              <a:t>Placer les offres à seuil — « livraison offerte dès X articles » — le week-end, où les gros paniers sont déjà la norme.</a:t>
-            </a:r>
-            <a:endParaRPr lang="en-US" sz="1300" dirty="0"/>
-          </a:p>
-        </p:txBody>
-      </p:sp>
-      <p:sp>
-        <p:nvSpPr>
-          <p:cNvPr id="9" name="Text 6"/>
-          <p:cNvSpPr txBox="1"/>
-          <p:nvPr/>
-        </p:nvSpPr>
-        <p:spPr>
-          <a:xfrm>
-            <a:off x="7818120" y="4663440"/>
-            <a:ext cx="548640" cy="548640"/>
-          </a:xfrm>
-          <a:prstGeom prst="rect">
-            <a:avLst/>
-          </a:prstGeom>
-          <a:noFill/>
-          <a:ln/>
-        </p:spPr>
-        <p:txBody>
-          <a:bodyPr wrap="square" lIns="0" tIns="0" rIns="0" bIns="0" rtlCol="0" anchor="ctr"/>
-          <a:lstStyle/>
-          <a:p>
-            <a:pPr marL="0" indent="0">
-              <a:buNone/>
-            </a:pPr>
-            <a:r>
-              <a:rPr lang="en-US" sz="3400" b="1" dirty="0">
-                <a:solidFill>
-                  <a:srgbClr val="D8E4E6"/>
-                </a:solidFill>
-                <a:latin typeface="Cambria" pitchFamily="34" charset="0"/>
-                <a:ea typeface="Cambria" pitchFamily="34" charset="-122"/>
-                <a:cs typeface="Cambria" pitchFamily="34" charset="-120"/>
-              </a:rPr>
-              <a:t>6</a:t>
-            </a:r>
-            <a:endParaRPr lang="en-US" sz="3400" dirty="0"/>
-          </a:p>
-        </p:txBody>
-      </p:sp>
-    </p:spTree>
-  </p:cSld>
-  <p:clrMapOvr>
-    <a:masterClrMapping/>
-  </p:clrMapOvr>
-</p:sld>
-</file>
-
-<file path=ppt/slides/slide11.xml><?xml version="1.0" encoding="utf-8"?>
-<p:sld xmlns:a="http://schemas.openxmlformats.org/drawingml/2006/main" xmlns:r="http://schemas.openxmlformats.org/officeDocument/2006/relationships" xmlns:p="http://schemas.openxmlformats.org/presentationml/2006/main">
   <p:cSld name="Slide 10">
     <p:bg>
       <p:bgPr>
@@ -2832,7 +2504,7 @@
 </p:sld>
 </file>
 
-<file path=ppt/slides/slide12.xml><?xml version="1.0" encoding="utf-8"?>
+<file path=ppt/slides/slide11.xml><?xml version="1.0" encoding="utf-8"?>
 <p:sld xmlns:a="http://schemas.openxmlformats.org/drawingml/2006/main" xmlns:r="http://schemas.openxmlformats.org/officeDocument/2006/relationships" xmlns:p="http://schemas.openxmlformats.org/presentationml/2006/main">
   <p:cSld name="Slide 11">
     <p:bg>
@@ -3160,7 +2832,7 @@
 </p:sld>
 </file>
 
-<file path=ppt/slides/slide13.xml><?xml version="1.0" encoding="utf-8"?>
+<file path=ppt/slides/slide12.xml><?xml version="1.0" encoding="utf-8"?>
 <p:sld xmlns:a="http://schemas.openxmlformats.org/drawingml/2006/main" xmlns:r="http://schemas.openxmlformats.org/officeDocument/2006/relationships" xmlns:p="http://schemas.openxmlformats.org/presentationml/2006/main">
   <p:cSld name="Slide 12">
     <p:bg>
@@ -3488,7 +3160,7 @@
 </p:sld>
 </file>
 
-<file path=ppt/slides/slide14.xml><?xml version="1.0" encoding="utf-8"?>
+<file path=ppt/slides/slide13.xml><?xml version="1.0" encoding="utf-8"?>
 <p:sld xmlns:a="http://schemas.openxmlformats.org/drawingml/2006/main" xmlns:r="http://schemas.openxmlformats.org/officeDocument/2006/relationships" xmlns:p="http://schemas.openxmlformats.org/presentationml/2006/main">
   <p:cSld name="Slide 13">
     <p:bg>
@@ -3816,7 +3488,7 @@
 </p:sld>
 </file>
 
-<file path=ppt/slides/slide15.xml><?xml version="1.0" encoding="utf-8"?>
+<file path=ppt/slides/slide14.xml><?xml version="1.0" encoding="utf-8"?>
 <p:sld xmlns:a="http://schemas.openxmlformats.org/drawingml/2006/main" xmlns:r="http://schemas.openxmlformats.org/officeDocument/2006/relationships" xmlns:p="http://schemas.openxmlformats.org/presentationml/2006/main">
   <p:cSld name="Slide 14">
     <p:bg>
@@ -4535,7 +4207,7 @@
 </p:sld>
 </file>
 
-<file path=ppt/slides/slide16.xml><?xml version="1.0" encoding="utf-8"?>
+<file path=ppt/slides/slide15.xml><?xml version="1.0" encoding="utf-8"?>
 <p:sld xmlns:a="http://schemas.openxmlformats.org/drawingml/2006/main" xmlns:r="http://schemas.openxmlformats.org/officeDocument/2006/relationships" xmlns:p="http://schemas.openxmlformats.org/presentationml/2006/main">
   <p:cSld name="Slide 18">
     <p:bg>
@@ -4711,6 +4383,695 @@
               <a:t>.</a:t>
             </a:r>
             <a:endParaRPr lang="en-US" sz="1600" dirty="0"/>
+          </a:p>
+        </p:txBody>
+      </p:sp>
+    </p:spTree>
+  </p:cSld>
+  <p:clrMapOvr>
+    <a:masterClrMapping/>
+  </p:clrMapOvr>
+</p:sld>
+</file>
+
+<file path=ppt/slides/slide16.xml><?xml version="1.0" encoding="utf-8"?>
+<p:sld xmlns:a="http://schemas.openxmlformats.org/drawingml/2006/main" xmlns:p="http://schemas.openxmlformats.org/presentationml/2006/main" xmlns:r="http://schemas.openxmlformats.org/officeDocument/2006/relationships">
+  <p:cSld>
+    <p:bg>
+      <p:bgPr>
+        <a:solidFill>
+          <a:srgbClr val="FFFFFF"/>
+        </a:solidFill>
+        <a:effectLst/>
+      </p:bgPr>
+    </p:bg>
+    <p:spTree>
+      <p:nvGrpSpPr>
+        <p:cNvPr id="1" name=""/>
+        <p:cNvGrpSpPr/>
+        <p:nvPr/>
+      </p:nvGrpSpPr>
+      <p:grpSpPr/>
+      <p:sp>
+        <p:nvSpPr>
+          <p:cNvPr id="2" name="Text 0"/>
+          <p:cNvSpPr txBox="1"/>
+          <p:nvPr/>
+        </p:nvSpPr>
+        <p:spPr>
+          <a:xfrm>
+            <a:off x="594360" y="182880"/>
+            <a:ext cx="10972800" cy="219456"/>
+          </a:xfrm>
+          <a:prstGeom prst="rect">
+            <a:avLst/>
+          </a:prstGeom>
+          <a:noFill/>
+        </p:spPr>
+        <p:txBody>
+          <a:bodyPr wrap="square" anchor="ctr" lIns="0" rIns="0" tIns="0" bIns="0">
+            <a:spAutoFit/>
+          </a:bodyPr>
+          <a:lstStyle/>
+          <a:p>
+            <a:r>
+              <a:rPr sz="1050" b="1" spc="160">
+                <a:solidFill>
+                  <a:srgbClr val="0E7C86"/>
+                </a:solidFill>
+                <a:latin typeface="Calibri"/>
+              </a:rPr>
+              <a:t>AVEC QUOI NOUS AVONS TRAVAILLÉ</a:t>
+            </a:r>
+          </a:p>
+        </p:txBody>
+      </p:sp>
+      <p:sp>
+        <p:nvSpPr>
+          <p:cNvPr id="3" name="Text 1"/>
+          <p:cNvSpPr txBox="1"/>
+          <p:nvPr/>
+        </p:nvSpPr>
+        <p:spPr>
+          <a:xfrm>
+            <a:off x="594360" y="384048"/>
+            <a:ext cx="10972800" cy="658368"/>
+          </a:xfrm>
+          <a:prstGeom prst="rect">
+            <a:avLst/>
+          </a:prstGeom>
+          <a:noFill/>
+        </p:spPr>
+        <p:txBody>
+          <a:bodyPr wrap="square" anchor="ctr" lIns="0" rIns="0" tIns="0" bIns="0">
+            <a:spAutoFit/>
+          </a:bodyPr>
+          <a:lstStyle/>
+          <a:p>
+            <a:r>
+              <a:rPr sz="2700" b="1">
+                <a:solidFill>
+                  <a:srgbClr val="16232B"/>
+                </a:solidFill>
+                <a:latin typeface="Cambria"/>
+              </a:rPr>
+              <a:t>Quatre bibliothèques, un choix assumé pour chacune</a:t>
+            </a:r>
+          </a:p>
+        </p:txBody>
+      </p:sp>
+      <p:sp>
+        <p:nvSpPr>
+          <p:cNvPr id="4" name="Shape 0"/>
+          <p:cNvSpPr/>
+          <p:nvPr/>
+        </p:nvSpPr>
+        <p:spPr>
+          <a:xfrm>
+            <a:off x="594360" y="1554480"/>
+            <a:ext cx="5358384" cy="1325880"/>
+          </a:xfrm>
+          <a:prstGeom prst="roundRect">
+            <a:avLst>
+              <a:gd name="adj" fmla="val 3077"/>
+            </a:avLst>
+          </a:prstGeom>
+          <a:solidFill>
+            <a:srgbClr val="EAF3F4"/>
+          </a:solidFill>
+          <a:ln w="12700">
+            <a:solidFill>
+              <a:srgbClr val="D3E5E7"/>
+            </a:solidFill>
+          </a:ln>
+          <a:effectLst/>
+        </p:spPr>
+        <p:style>
+          <a:lnRef idx="1">
+            <a:schemeClr val="accent1"/>
+          </a:lnRef>
+          <a:fillRef idx="3">
+            <a:schemeClr val="accent1"/>
+          </a:fillRef>
+          <a:effectRef idx="2">
+            <a:schemeClr val="accent1"/>
+          </a:effectRef>
+          <a:fontRef idx="minor">
+            <a:schemeClr val="lt1"/>
+          </a:fontRef>
+        </p:style>
+        <p:txBody>
+          <a:bodyPr rtlCol="0" anchor="ctr"/>
+          <a:lstStyle/>
+          <a:p>
+            <a:pPr algn="ctr"/>
+          </a:p>
+        </p:txBody>
+      </p:sp>
+      <p:sp>
+        <p:nvSpPr>
+          <p:cNvPr id="5" name="Text 2"/>
+          <p:cNvSpPr txBox="1"/>
+          <p:nvPr/>
+        </p:nvSpPr>
+        <p:spPr>
+          <a:xfrm>
+            <a:off x="868680" y="1737360"/>
+            <a:ext cx="4809744" cy="365760"/>
+          </a:xfrm>
+          <a:prstGeom prst="rect">
+            <a:avLst/>
+          </a:prstGeom>
+          <a:noFill/>
+        </p:spPr>
+        <p:txBody>
+          <a:bodyPr wrap="square" anchor="t" lIns="0" rIns="0" tIns="0" bIns="0">
+            <a:spAutoFit/>
+          </a:bodyPr>
+          <a:lstStyle/>
+          <a:p>
+            <a:r>
+              <a:rPr sz="1800" b="1">
+                <a:solidFill>
+                  <a:srgbClr val="0E7C86"/>
+                </a:solidFill>
+                <a:latin typeface="Cambria"/>
+              </a:rPr>
+              <a:t>pandas</a:t>
+            </a:r>
+            <a:r>
+              <a:rPr sz="1050" b="0">
+                <a:solidFill>
+                  <a:srgbClr val="5D6B75"/>
+                </a:solidFill>
+                <a:latin typeface="Calibri"/>
+              </a:rPr>
+              <a:t>   3.0</a:t>
+            </a:r>
+          </a:p>
+        </p:txBody>
+      </p:sp>
+      <p:sp>
+        <p:nvSpPr>
+          <p:cNvPr id="6" name="Text 3"/>
+          <p:cNvSpPr txBox="1"/>
+          <p:nvPr/>
+        </p:nvSpPr>
+        <p:spPr>
+          <a:xfrm>
+            <a:off x="868680" y="2231136"/>
+            <a:ext cx="4809744" cy="411479"/>
+          </a:xfrm>
+          <a:prstGeom prst="rect">
+            <a:avLst/>
+          </a:prstGeom>
+          <a:noFill/>
+        </p:spPr>
+        <p:txBody>
+          <a:bodyPr wrap="square" anchor="t" lIns="0" rIns="0" tIns="0" bIns="0">
+            <a:spAutoFit/>
+          </a:bodyPr>
+          <a:lstStyle/>
+          <a:p>
+            <a:pPr>
+              <a:lnSpc>
+                <a:spcPct val="118000"/>
+              </a:lnSpc>
+            </a:pPr>
+            <a:r>
+              <a:rPr sz="1250" b="0">
+                <a:solidFill>
+                  <a:srgbClr val="5D6B75"/>
+                </a:solidFill>
+                <a:latin typeface="Calibri"/>
+              </a:rPr>
+              <a:t>Manipuler 32 millions de lignes. Jointures et regroupements natifs, exécutés en C. Polars irait plus vite ; pandas est le standard.</a:t>
+            </a:r>
+          </a:p>
+        </p:txBody>
+      </p:sp>
+      <p:sp>
+        <p:nvSpPr>
+          <p:cNvPr id="7" name="Shape 1"/>
+          <p:cNvSpPr/>
+          <p:nvPr/>
+        </p:nvSpPr>
+        <p:spPr>
+          <a:xfrm>
+            <a:off x="6236208" y="1554480"/>
+            <a:ext cx="5358384" cy="1325880"/>
+          </a:xfrm>
+          <a:prstGeom prst="roundRect">
+            <a:avLst>
+              <a:gd name="adj" fmla="val 3077"/>
+            </a:avLst>
+          </a:prstGeom>
+          <a:solidFill>
+            <a:srgbClr val="EAF3F4"/>
+          </a:solidFill>
+          <a:ln w="12700">
+            <a:solidFill>
+              <a:srgbClr val="D3E5E7"/>
+            </a:solidFill>
+          </a:ln>
+          <a:effectLst/>
+        </p:spPr>
+        <p:style>
+          <a:lnRef idx="1">
+            <a:schemeClr val="accent1"/>
+          </a:lnRef>
+          <a:fillRef idx="3">
+            <a:schemeClr val="accent1"/>
+          </a:fillRef>
+          <a:effectRef idx="2">
+            <a:schemeClr val="accent1"/>
+          </a:effectRef>
+          <a:fontRef idx="minor">
+            <a:schemeClr val="lt1"/>
+          </a:fontRef>
+        </p:style>
+        <p:txBody>
+          <a:bodyPr rtlCol="0" anchor="ctr"/>
+          <a:lstStyle/>
+          <a:p>
+            <a:pPr algn="ctr"/>
+          </a:p>
+        </p:txBody>
+      </p:sp>
+      <p:sp>
+        <p:nvSpPr>
+          <p:cNvPr id="8" name="Text 4"/>
+          <p:cNvSpPr txBox="1"/>
+          <p:nvPr/>
+        </p:nvSpPr>
+        <p:spPr>
+          <a:xfrm>
+            <a:off x="6510528" y="1737360"/>
+            <a:ext cx="4809744" cy="365760"/>
+          </a:xfrm>
+          <a:prstGeom prst="rect">
+            <a:avLst/>
+          </a:prstGeom>
+          <a:noFill/>
+        </p:spPr>
+        <p:txBody>
+          <a:bodyPr wrap="square" anchor="t" lIns="0" rIns="0" tIns="0" bIns="0">
+            <a:spAutoFit/>
+          </a:bodyPr>
+          <a:lstStyle/>
+          <a:p>
+            <a:r>
+              <a:rPr sz="1800" b="1">
+                <a:solidFill>
+                  <a:srgbClr val="0E7C86"/>
+                </a:solidFill>
+                <a:latin typeface="Cambria"/>
+              </a:rPr>
+              <a:t>NumPy</a:t>
+            </a:r>
+            <a:r>
+              <a:rPr sz="1050" b="0">
+                <a:solidFill>
+                  <a:srgbClr val="5D6B75"/>
+                </a:solidFill>
+                <a:latin typeface="Calibri"/>
+              </a:rPr>
+              <a:t>   2.5</a:t>
+            </a:r>
+          </a:p>
+        </p:txBody>
+      </p:sp>
+      <p:sp>
+        <p:nvSpPr>
+          <p:cNvPr id="9" name="Text 5"/>
+          <p:cNvSpPr txBox="1"/>
+          <p:nvPr/>
+        </p:nvSpPr>
+        <p:spPr>
+          <a:xfrm>
+            <a:off x="6510528" y="2231136"/>
+            <a:ext cx="4809744" cy="411479"/>
+          </a:xfrm>
+          <a:prstGeom prst="rect">
+            <a:avLst/>
+          </a:prstGeom>
+          <a:noFill/>
+        </p:spPr>
+        <p:txBody>
+          <a:bodyPr wrap="square" anchor="t" lIns="0" rIns="0" tIns="0" bIns="0">
+            <a:spAutoFit/>
+          </a:bodyPr>
+          <a:lstStyle/>
+          <a:p>
+            <a:pPr>
+              <a:lnSpc>
+                <a:spcPct val="118000"/>
+              </a:lnSpc>
+            </a:pPr>
+            <a:r>
+              <a:rPr sz="1250" b="0">
+                <a:solidFill>
+                  <a:srgbClr val="5D6B75"/>
+                </a:solidFill>
+                <a:latin typeface="Calibri"/>
+              </a:rPr>
+              <a:t>Le calcul vectorisé sur lequel pandas repose. Et la graine aléatoire qui rend l'exécution reproductible.</a:t>
+            </a:r>
+          </a:p>
+        </p:txBody>
+      </p:sp>
+      <p:sp>
+        <p:nvSpPr>
+          <p:cNvPr id="10" name="Shape 2"/>
+          <p:cNvSpPr/>
+          <p:nvPr/>
+        </p:nvSpPr>
+        <p:spPr>
+          <a:xfrm>
+            <a:off x="594360" y="3035808"/>
+            <a:ext cx="5358384" cy="1325880"/>
+          </a:xfrm>
+          <a:prstGeom prst="roundRect">
+            <a:avLst>
+              <a:gd name="adj" fmla="val 3077"/>
+            </a:avLst>
+          </a:prstGeom>
+          <a:solidFill>
+            <a:srgbClr val="EAF3F4"/>
+          </a:solidFill>
+          <a:ln w="12700">
+            <a:solidFill>
+              <a:srgbClr val="D3E5E7"/>
+            </a:solidFill>
+          </a:ln>
+          <a:effectLst/>
+        </p:spPr>
+        <p:style>
+          <a:lnRef idx="1">
+            <a:schemeClr val="accent1"/>
+          </a:lnRef>
+          <a:fillRef idx="3">
+            <a:schemeClr val="accent1"/>
+          </a:fillRef>
+          <a:effectRef idx="2">
+            <a:schemeClr val="accent1"/>
+          </a:effectRef>
+          <a:fontRef idx="minor">
+            <a:schemeClr val="lt1"/>
+          </a:fontRef>
+        </p:style>
+        <p:txBody>
+          <a:bodyPr rtlCol="0" anchor="ctr"/>
+          <a:lstStyle/>
+          <a:p>
+            <a:pPr algn="ctr"/>
+          </a:p>
+        </p:txBody>
+      </p:sp>
+      <p:sp>
+        <p:nvSpPr>
+          <p:cNvPr id="11" name="Text 6"/>
+          <p:cNvSpPr txBox="1"/>
+          <p:nvPr/>
+        </p:nvSpPr>
+        <p:spPr>
+          <a:xfrm>
+            <a:off x="868680" y="3218688"/>
+            <a:ext cx="4809744" cy="365760"/>
+          </a:xfrm>
+          <a:prstGeom prst="rect">
+            <a:avLst/>
+          </a:prstGeom>
+          <a:noFill/>
+        </p:spPr>
+        <p:txBody>
+          <a:bodyPr wrap="square" anchor="t" lIns="0" rIns="0" tIns="0" bIns="0">
+            <a:spAutoFit/>
+          </a:bodyPr>
+          <a:lstStyle/>
+          <a:p>
+            <a:r>
+              <a:rPr sz="1800" b="1">
+                <a:solidFill>
+                  <a:srgbClr val="0E7C86"/>
+                </a:solidFill>
+                <a:latin typeface="Cambria"/>
+              </a:rPr>
+              <a:t>Matplotlib</a:t>
+            </a:r>
+            <a:r>
+              <a:rPr sz="1050" b="0">
+                <a:solidFill>
+                  <a:srgbClr val="5D6B75"/>
+                </a:solidFill>
+                <a:latin typeface="Calibri"/>
+              </a:rPr>
+              <a:t>   3.11</a:t>
+            </a:r>
+          </a:p>
+        </p:txBody>
+      </p:sp>
+      <p:sp>
+        <p:nvSpPr>
+          <p:cNvPr id="12" name="Text 7"/>
+          <p:cNvSpPr txBox="1"/>
+          <p:nvPr/>
+        </p:nvSpPr>
+        <p:spPr>
+          <a:xfrm>
+            <a:off x="868680" y="3712463"/>
+            <a:ext cx="4809744" cy="411479"/>
+          </a:xfrm>
+          <a:prstGeom prst="rect">
+            <a:avLst/>
+          </a:prstGeom>
+          <a:noFill/>
+        </p:spPr>
+        <p:txBody>
+          <a:bodyPr wrap="square" anchor="t" lIns="0" rIns="0" tIns="0" bIns="0">
+            <a:spAutoFit/>
+          </a:bodyPr>
+          <a:lstStyle/>
+          <a:p>
+            <a:pPr>
+              <a:lnSpc>
+                <a:spcPct val="118000"/>
+              </a:lnSpc>
+            </a:pPr>
+            <a:r>
+              <a:rPr sz="1250" b="0">
+                <a:solidFill>
+                  <a:srgbClr val="5D6B75"/>
+                </a:solidFill>
+                <a:latin typeface="Calibri"/>
+              </a:rPr>
+              <a:t>Les dix graphiques. Moins commode que Seaborn, mais le contrôle sur chaque élément — donc sur chaque ornement retiré.</a:t>
+            </a:r>
+          </a:p>
+        </p:txBody>
+      </p:sp>
+      <p:sp>
+        <p:nvSpPr>
+          <p:cNvPr id="13" name="Shape 3"/>
+          <p:cNvSpPr/>
+          <p:nvPr/>
+        </p:nvSpPr>
+        <p:spPr>
+          <a:xfrm>
+            <a:off x="6236208" y="3035808"/>
+            <a:ext cx="5358384" cy="1325880"/>
+          </a:xfrm>
+          <a:prstGeom prst="roundRect">
+            <a:avLst>
+              <a:gd name="adj" fmla="val 3077"/>
+            </a:avLst>
+          </a:prstGeom>
+          <a:solidFill>
+            <a:srgbClr val="EAF3F4"/>
+          </a:solidFill>
+          <a:ln w="12700">
+            <a:solidFill>
+              <a:srgbClr val="D3E5E7"/>
+            </a:solidFill>
+          </a:ln>
+          <a:effectLst/>
+        </p:spPr>
+        <p:style>
+          <a:lnRef idx="1">
+            <a:schemeClr val="accent1"/>
+          </a:lnRef>
+          <a:fillRef idx="3">
+            <a:schemeClr val="accent1"/>
+          </a:fillRef>
+          <a:effectRef idx="2">
+            <a:schemeClr val="accent1"/>
+          </a:effectRef>
+          <a:fontRef idx="minor">
+            <a:schemeClr val="lt1"/>
+          </a:fontRef>
+        </p:style>
+        <p:txBody>
+          <a:bodyPr rtlCol="0" anchor="ctr"/>
+          <a:lstStyle/>
+          <a:p>
+            <a:pPr algn="ctr"/>
+          </a:p>
+        </p:txBody>
+      </p:sp>
+      <p:sp>
+        <p:nvSpPr>
+          <p:cNvPr id="14" name="Text 8"/>
+          <p:cNvSpPr txBox="1"/>
+          <p:nvPr/>
+        </p:nvSpPr>
+        <p:spPr>
+          <a:xfrm>
+            <a:off x="6510528" y="3218688"/>
+            <a:ext cx="4809744" cy="365760"/>
+          </a:xfrm>
+          <a:prstGeom prst="rect">
+            <a:avLst/>
+          </a:prstGeom>
+          <a:noFill/>
+        </p:spPr>
+        <p:txBody>
+          <a:bodyPr wrap="square" anchor="t" lIns="0" rIns="0" tIns="0" bIns="0">
+            <a:spAutoFit/>
+          </a:bodyPr>
+          <a:lstStyle/>
+          <a:p>
+            <a:r>
+              <a:rPr sz="1800" b="1">
+                <a:solidFill>
+                  <a:srgbClr val="0E7C86"/>
+                </a:solidFill>
+                <a:latin typeface="Cambria"/>
+              </a:rPr>
+              <a:t>scikit-learn</a:t>
+            </a:r>
+            <a:r>
+              <a:rPr sz="1050" b="0">
+                <a:solidFill>
+                  <a:srgbClr val="5D6B75"/>
+                </a:solidFill>
+                <a:latin typeface="Calibri"/>
+              </a:rPr>
+              <a:t>   1.9</a:t>
+            </a:r>
+          </a:p>
+        </p:txBody>
+      </p:sp>
+      <p:sp>
+        <p:nvSpPr>
+          <p:cNvPr id="15" name="Text 9"/>
+          <p:cNvSpPr txBox="1"/>
+          <p:nvPr/>
+        </p:nvSpPr>
+        <p:spPr>
+          <a:xfrm>
+            <a:off x="6510528" y="3712463"/>
+            <a:ext cx="4809744" cy="411479"/>
+          </a:xfrm>
+          <a:prstGeom prst="rect">
+            <a:avLst/>
+          </a:prstGeom>
+          <a:noFill/>
+        </p:spPr>
+        <p:txBody>
+          <a:bodyPr wrap="square" anchor="t" lIns="0" rIns="0" tIns="0" bIns="0">
+            <a:spAutoFit/>
+          </a:bodyPr>
+          <a:lstStyle/>
+          <a:p>
+            <a:pPr>
+              <a:lnSpc>
+                <a:spcPct val="118000"/>
+              </a:lnSpc>
+            </a:pPr>
+            <a:r>
+              <a:rPr sz="1250" b="0">
+                <a:solidFill>
+                  <a:srgbClr val="5D6B75"/>
+                </a:solidFill>
+                <a:latin typeface="Calibri"/>
+              </a:rPr>
+              <a:t>Le modèle prédictif. Une seule interface </a:t>
+            </a:r>
+            <a:r>
+              <a:rPr sz="1250" b="1">
+                <a:solidFill>
+                  <a:srgbClr val="16232B"/>
+                </a:solidFill>
+                <a:latin typeface="Calibri"/>
+              </a:rPr>
+              <a:t>fit / predict</a:t>
+            </a:r>
+            <a:r>
+              <a:rPr sz="1250" b="0">
+                <a:solidFill>
+                  <a:srgbClr val="5D6B75"/>
+                </a:solidFill>
+                <a:latin typeface="Calibri"/>
+              </a:rPr>
+              <a:t> : comparer quatre algorithmes ne change qu'un nom.</a:t>
+            </a:r>
+          </a:p>
+        </p:txBody>
+      </p:sp>
+      <p:sp>
+        <p:nvSpPr>
+          <p:cNvPr id="16" name="Text 10"/>
+          <p:cNvSpPr txBox="1"/>
+          <p:nvPr/>
+        </p:nvSpPr>
+        <p:spPr>
+          <a:xfrm>
+            <a:off x="594360" y="4572000"/>
+            <a:ext cx="10972800" cy="640080"/>
+          </a:xfrm>
+          <a:prstGeom prst="rect">
+            <a:avLst/>
+          </a:prstGeom>
+          <a:noFill/>
+        </p:spPr>
+        <p:txBody>
+          <a:bodyPr wrap="square" anchor="ctr" lIns="0" rIns="0" tIns="0" bIns="0">
+            <a:spAutoFit/>
+          </a:bodyPr>
+          <a:lstStyle/>
+          <a:p>
+            <a:pPr>
+              <a:lnSpc>
+                <a:spcPct val="120000"/>
+              </a:lnSpc>
+            </a:pPr>
+            <a:r>
+              <a:rPr sz="1350" b="0">
+                <a:solidFill>
+                  <a:srgbClr val="5D6B75"/>
+                </a:solidFill>
+                <a:latin typeface="Calibri"/>
+              </a:rPr>
+              <a:t>Versions figées dans </a:t>
+            </a:r>
+            <a:r>
+              <a:rPr sz="1300" b="0">
+                <a:solidFill>
+                  <a:srgbClr val="16232B"/>
+                </a:solidFill>
+                <a:latin typeface="Consolas"/>
+              </a:rPr>
+              <a:t>requirements.txt</a:t>
+            </a:r>
+            <a:r>
+              <a:rPr sz="1350" b="0">
+                <a:solidFill>
+                  <a:srgbClr val="5D6B75"/>
+                </a:solidFill>
+                <a:latin typeface="Calibri"/>
+              </a:rPr>
+              <a:t>. Les types compacts imposés à pandas ramènent la mémoire de 3,2 Go à 1,0 Go.</a:t>
+            </a:r>
           </a:p>
         </p:txBody>
       </p:sp>
@@ -5324,767 +5685,6 @@
 </file>
 
 <file path=ppt/slides/slide3.xml><?xml version="1.0" encoding="utf-8"?>
-<p:sld xmlns:a="http://schemas.openxmlformats.org/drawingml/2006/main" xmlns:p="http://schemas.openxmlformats.org/presentationml/2006/main" xmlns:r="http://schemas.openxmlformats.org/officeDocument/2006/relationships">
-  <p:cSld>
-    <p:bg>
-      <p:bgPr>
-        <a:solidFill>
-          <a:srgbClr val="FFFFFF"/>
-        </a:solidFill>
-        <a:effectLst/>
-      </p:bgPr>
-    </p:bg>
-    <p:spTree>
-      <p:nvGrpSpPr>
-        <p:cNvPr id="1" name=""/>
-        <p:cNvGrpSpPr/>
-        <p:nvPr/>
-      </p:nvGrpSpPr>
-      <p:grpSpPr/>
-      <p:sp>
-        <p:nvSpPr>
-          <p:cNvPr id="2" name="Text 0"/>
-          <p:cNvSpPr txBox="1"/>
-          <p:nvPr/>
-        </p:nvSpPr>
-        <p:spPr>
-          <a:xfrm>
-            <a:off x="594360" y="182880"/>
-            <a:ext cx="10972800" cy="219456"/>
-          </a:xfrm>
-          <a:prstGeom prst="rect">
-            <a:avLst/>
-          </a:prstGeom>
-          <a:noFill/>
-        </p:spPr>
-        <p:txBody>
-          <a:bodyPr wrap="square" anchor="ctr" lIns="0" rIns="0" tIns="0" bIns="0">
-            <a:spAutoFit/>
-          </a:bodyPr>
-          <a:lstStyle/>
-          <a:p>
-            <a:r>
-              <a:rPr sz="1050" b="1" spc="160">
-                <a:solidFill>
-                  <a:srgbClr val="0E7C86"/>
-                </a:solidFill>
-                <a:latin typeface="Calibri"/>
-              </a:rPr>
-              <a:t>AVEC QUOI NOUS AVONS TRAVAILLÉ</a:t>
-            </a:r>
-          </a:p>
-        </p:txBody>
-      </p:sp>
-      <p:sp>
-        <p:nvSpPr>
-          <p:cNvPr id="3" name="Text 1"/>
-          <p:cNvSpPr txBox="1"/>
-          <p:nvPr/>
-        </p:nvSpPr>
-        <p:spPr>
-          <a:xfrm>
-            <a:off x="594360" y="384048"/>
-            <a:ext cx="10972800" cy="658368"/>
-          </a:xfrm>
-          <a:prstGeom prst="rect">
-            <a:avLst/>
-          </a:prstGeom>
-          <a:noFill/>
-        </p:spPr>
-        <p:txBody>
-          <a:bodyPr wrap="square" anchor="ctr" lIns="0" rIns="0" tIns="0" bIns="0">
-            <a:spAutoFit/>
-          </a:bodyPr>
-          <a:lstStyle/>
-          <a:p>
-            <a:r>
-              <a:rPr sz="2700" b="1">
-                <a:solidFill>
-                  <a:srgbClr val="16232B"/>
-                </a:solidFill>
-                <a:latin typeface="Cambria"/>
-              </a:rPr>
-              <a:t>Quatre bibliothèques, un choix assumé pour chacune</a:t>
-            </a:r>
-          </a:p>
-        </p:txBody>
-      </p:sp>
-      <p:sp>
-        <p:nvSpPr>
-          <p:cNvPr id="4" name="Shape 0"/>
-          <p:cNvSpPr/>
-          <p:nvPr/>
-        </p:nvSpPr>
-        <p:spPr>
-          <a:xfrm>
-            <a:off x="594360" y="1325880"/>
-            <a:ext cx="5358384" cy="1938528"/>
-          </a:xfrm>
-          <a:prstGeom prst="roundRect">
-            <a:avLst>
-              <a:gd name="adj" fmla="val 2800"/>
-            </a:avLst>
-          </a:prstGeom>
-          <a:solidFill>
-            <a:srgbClr val="FFFFFF"/>
-          </a:solidFill>
-          <a:ln w="12700">
-            <a:solidFill>
-              <a:srgbClr val="DFE6EA"/>
-            </a:solidFill>
-          </a:ln>
-          <a:effectLst/>
-        </p:spPr>
-        <p:style>
-          <a:lnRef idx="1">
-            <a:schemeClr val="accent1"/>
-          </a:lnRef>
-          <a:fillRef idx="3">
-            <a:schemeClr val="accent1"/>
-          </a:fillRef>
-          <a:effectRef idx="2">
-            <a:schemeClr val="accent1"/>
-          </a:effectRef>
-          <a:fontRef idx="minor">
-            <a:schemeClr val="lt1"/>
-          </a:fontRef>
-        </p:style>
-        <p:txBody>
-          <a:bodyPr rtlCol="0" anchor="ctr"/>
-          <a:lstStyle/>
-          <a:p>
-            <a:pPr algn="ctr"/>
-          </a:p>
-        </p:txBody>
-      </p:sp>
-      <p:sp>
-        <p:nvSpPr>
-          <p:cNvPr id="5" name="Text 2"/>
-          <p:cNvSpPr txBox="1"/>
-          <p:nvPr/>
-        </p:nvSpPr>
-        <p:spPr>
-          <a:xfrm>
-            <a:off x="868680" y="1508760"/>
-            <a:ext cx="4809744" cy="365760"/>
-          </a:xfrm>
-          <a:prstGeom prst="rect">
-            <a:avLst/>
-          </a:prstGeom>
-          <a:noFill/>
-        </p:spPr>
-        <p:txBody>
-          <a:bodyPr wrap="square" anchor="t" lIns="0" rIns="0" tIns="0" bIns="0">
-            <a:spAutoFit/>
-          </a:bodyPr>
-          <a:lstStyle/>
-          <a:p>
-            <a:r>
-              <a:rPr sz="1800" b="1">
-                <a:solidFill>
-                  <a:srgbClr val="0E7C86"/>
-                </a:solidFill>
-                <a:latin typeface="Cambria"/>
-              </a:rPr>
-              <a:t>pandas</a:t>
-            </a:r>
-            <a:r>
-              <a:rPr sz="1050" b="0">
-                <a:solidFill>
-                  <a:srgbClr val="5D6B75"/>
-                </a:solidFill>
-                <a:latin typeface="Calibri"/>
-              </a:rPr>
-              <a:t>   3.0</a:t>
-            </a:r>
-          </a:p>
-        </p:txBody>
-      </p:sp>
-      <p:sp>
-        <p:nvSpPr>
-          <p:cNvPr id="6" name="Text 3"/>
-          <p:cNvSpPr txBox="1"/>
-          <p:nvPr/>
-        </p:nvSpPr>
-        <p:spPr>
-          <a:xfrm>
-            <a:off x="868680" y="1965960"/>
-            <a:ext cx="4809744" cy="1069848"/>
-          </a:xfrm>
-          <a:prstGeom prst="rect">
-            <a:avLst/>
-          </a:prstGeom>
-          <a:noFill/>
-        </p:spPr>
-        <p:txBody>
-          <a:bodyPr wrap="square" anchor="t" lIns="0" rIns="0" tIns="0" bIns="0">
-            <a:spAutoFit/>
-          </a:bodyPr>
-          <a:lstStyle/>
-          <a:p>
-            <a:pPr>
-              <a:lnSpc>
-                <a:spcPct val="118000"/>
-              </a:lnSpc>
-            </a:pPr>
-            <a:r>
-              <a:rPr sz="1150" b="0">
-                <a:solidFill>
-                  <a:srgbClr val="5D6B75"/>
-                </a:solidFill>
-                <a:latin typeface="Calibri"/>
-              </a:rPr>
-              <a:t>Toute la manipulation. Le modèle </a:t>
-            </a:r>
-            <a:r>
-              <a:rPr sz="1150" b="1">
-                <a:solidFill>
-                  <a:srgbClr val="16232B"/>
-                </a:solidFill>
-                <a:latin typeface="Calibri"/>
-              </a:rPr>
-              <a:t>DataFrame</a:t>
-            </a:r>
-            <a:r>
-              <a:rPr sz="1150" b="0">
-                <a:solidFill>
-                  <a:srgbClr val="5D6B75"/>
-                </a:solidFill>
-                <a:latin typeface="Calibri"/>
-              </a:rPr>
-              <a:t> épouse le format tabulaire des CSV, et jointures comme regroupements y sont natifs, exécutés en C plutôt qu'en boucles Python. Polars irait plus vite ; pandas reste le standard qu'un relecteur sait lire.</a:t>
-            </a:r>
-          </a:p>
-        </p:txBody>
-      </p:sp>
-      <p:sp>
-        <p:nvSpPr>
-          <p:cNvPr id="7" name="Shape 1"/>
-          <p:cNvSpPr/>
-          <p:nvPr/>
-        </p:nvSpPr>
-        <p:spPr>
-          <a:xfrm>
-            <a:off x="6236208" y="1325880"/>
-            <a:ext cx="5358384" cy="1938528"/>
-          </a:xfrm>
-          <a:prstGeom prst="roundRect">
-            <a:avLst>
-              <a:gd name="adj" fmla="val 2800"/>
-            </a:avLst>
-          </a:prstGeom>
-          <a:solidFill>
-            <a:srgbClr val="FFFFFF"/>
-          </a:solidFill>
-          <a:ln w="12700">
-            <a:solidFill>
-              <a:srgbClr val="DFE6EA"/>
-            </a:solidFill>
-          </a:ln>
-          <a:effectLst/>
-        </p:spPr>
-        <p:style>
-          <a:lnRef idx="1">
-            <a:schemeClr val="accent1"/>
-          </a:lnRef>
-          <a:fillRef idx="3">
-            <a:schemeClr val="accent1"/>
-          </a:fillRef>
-          <a:effectRef idx="2">
-            <a:schemeClr val="accent1"/>
-          </a:effectRef>
-          <a:fontRef idx="minor">
-            <a:schemeClr val="lt1"/>
-          </a:fontRef>
-        </p:style>
-        <p:txBody>
-          <a:bodyPr rtlCol="0" anchor="ctr"/>
-          <a:lstStyle/>
-          <a:p>
-            <a:pPr algn="ctr"/>
-          </a:p>
-        </p:txBody>
-      </p:sp>
-      <p:sp>
-        <p:nvSpPr>
-          <p:cNvPr id="8" name="Text 4"/>
-          <p:cNvSpPr txBox="1"/>
-          <p:nvPr/>
-        </p:nvSpPr>
-        <p:spPr>
-          <a:xfrm>
-            <a:off x="6510528" y="1508760"/>
-            <a:ext cx="4809744" cy="365760"/>
-          </a:xfrm>
-          <a:prstGeom prst="rect">
-            <a:avLst/>
-          </a:prstGeom>
-          <a:noFill/>
-        </p:spPr>
-        <p:txBody>
-          <a:bodyPr wrap="square" anchor="t" lIns="0" rIns="0" tIns="0" bIns="0">
-            <a:spAutoFit/>
-          </a:bodyPr>
-          <a:lstStyle/>
-          <a:p>
-            <a:r>
-              <a:rPr sz="1800" b="1">
-                <a:solidFill>
-                  <a:srgbClr val="0E7C86"/>
-                </a:solidFill>
-                <a:latin typeface="Cambria"/>
-              </a:rPr>
-              <a:t>NumPy</a:t>
-            </a:r>
-            <a:r>
-              <a:rPr sz="1050" b="0">
-                <a:solidFill>
-                  <a:srgbClr val="5D6B75"/>
-                </a:solidFill>
-                <a:latin typeface="Calibri"/>
-              </a:rPr>
-              <a:t>   2.5</a:t>
-            </a:r>
-          </a:p>
-        </p:txBody>
-      </p:sp>
-      <p:sp>
-        <p:nvSpPr>
-          <p:cNvPr id="9" name="Text 5"/>
-          <p:cNvSpPr txBox="1"/>
-          <p:nvPr/>
-        </p:nvSpPr>
-        <p:spPr>
-          <a:xfrm>
-            <a:off x="6510528" y="1965960"/>
-            <a:ext cx="4809744" cy="1069848"/>
-          </a:xfrm>
-          <a:prstGeom prst="rect">
-            <a:avLst/>
-          </a:prstGeom>
-          <a:noFill/>
-        </p:spPr>
-        <p:txBody>
-          <a:bodyPr wrap="square" anchor="t" lIns="0" rIns="0" tIns="0" bIns="0">
-            <a:spAutoFit/>
-          </a:bodyPr>
-          <a:lstStyle/>
-          <a:p>
-            <a:pPr>
-              <a:lnSpc>
-                <a:spcPct val="118000"/>
-              </a:lnSpc>
-            </a:pPr>
-            <a:r>
-              <a:rPr sz="1150" b="0">
-                <a:solidFill>
-                  <a:srgbClr val="5D6B75"/>
-                </a:solidFill>
-                <a:latin typeface="Calibri"/>
-              </a:rPr>
-              <a:t>Les tableaux typés sur lesquels pandas repose lui-même. Nous nous en servons directement pour le calcul vectorisé — une opération sur 32 millions de valeurs d'un seul coup — et pour le tirage aléatoire à graine fixe qui rend l'exécution reproductible.</a:t>
-            </a:r>
-          </a:p>
-        </p:txBody>
-      </p:sp>
-      <p:sp>
-        <p:nvSpPr>
-          <p:cNvPr id="10" name="Shape 2"/>
-          <p:cNvSpPr/>
-          <p:nvPr/>
-        </p:nvSpPr>
-        <p:spPr>
-          <a:xfrm>
-            <a:off x="594360" y="3401568"/>
-            <a:ext cx="5358384" cy="1938528"/>
-          </a:xfrm>
-          <a:prstGeom prst="roundRect">
-            <a:avLst>
-              <a:gd name="adj" fmla="val 2800"/>
-            </a:avLst>
-          </a:prstGeom>
-          <a:solidFill>
-            <a:srgbClr val="FFFFFF"/>
-          </a:solidFill>
-          <a:ln w="12700">
-            <a:solidFill>
-              <a:srgbClr val="DFE6EA"/>
-            </a:solidFill>
-          </a:ln>
-          <a:effectLst/>
-        </p:spPr>
-        <p:style>
-          <a:lnRef idx="1">
-            <a:schemeClr val="accent1"/>
-          </a:lnRef>
-          <a:fillRef idx="3">
-            <a:schemeClr val="accent1"/>
-          </a:fillRef>
-          <a:effectRef idx="2">
-            <a:schemeClr val="accent1"/>
-          </a:effectRef>
-          <a:fontRef idx="minor">
-            <a:schemeClr val="lt1"/>
-          </a:fontRef>
-        </p:style>
-        <p:txBody>
-          <a:bodyPr rtlCol="0" anchor="ctr"/>
-          <a:lstStyle/>
-          <a:p>
-            <a:pPr algn="ctr"/>
-          </a:p>
-        </p:txBody>
-      </p:sp>
-      <p:sp>
-        <p:nvSpPr>
-          <p:cNvPr id="11" name="Text 6"/>
-          <p:cNvSpPr txBox="1"/>
-          <p:nvPr/>
-        </p:nvSpPr>
-        <p:spPr>
-          <a:xfrm>
-            <a:off x="868680" y="3584448"/>
-            <a:ext cx="4809744" cy="365760"/>
-          </a:xfrm>
-          <a:prstGeom prst="rect">
-            <a:avLst/>
-          </a:prstGeom>
-          <a:noFill/>
-        </p:spPr>
-        <p:txBody>
-          <a:bodyPr wrap="square" anchor="t" lIns="0" rIns="0" tIns="0" bIns="0">
-            <a:spAutoFit/>
-          </a:bodyPr>
-          <a:lstStyle/>
-          <a:p>
-            <a:r>
-              <a:rPr sz="1800" b="1">
-                <a:solidFill>
-                  <a:srgbClr val="0E7C86"/>
-                </a:solidFill>
-                <a:latin typeface="Cambria"/>
-              </a:rPr>
-              <a:t>Matplotlib</a:t>
-            </a:r>
-            <a:r>
-              <a:rPr sz="1050" b="0">
-                <a:solidFill>
-                  <a:srgbClr val="5D6B75"/>
-                </a:solidFill>
-                <a:latin typeface="Calibri"/>
-              </a:rPr>
-              <a:t>   3.11</a:t>
-            </a:r>
-          </a:p>
-        </p:txBody>
-      </p:sp>
-      <p:sp>
-        <p:nvSpPr>
-          <p:cNvPr id="12" name="Text 7"/>
-          <p:cNvSpPr txBox="1"/>
-          <p:nvPr/>
-        </p:nvSpPr>
-        <p:spPr>
-          <a:xfrm>
-            <a:off x="868680" y="4041648"/>
-            <a:ext cx="4809744" cy="1069848"/>
-          </a:xfrm>
-          <a:prstGeom prst="rect">
-            <a:avLst/>
-          </a:prstGeom>
-          <a:noFill/>
-        </p:spPr>
-        <p:txBody>
-          <a:bodyPr wrap="square" anchor="t" lIns="0" rIns="0" tIns="0" bIns="0">
-            <a:spAutoFit/>
-          </a:bodyPr>
-          <a:lstStyle/>
-          <a:p>
-            <a:pPr>
-              <a:lnSpc>
-                <a:spcPct val="118000"/>
-              </a:lnSpc>
-            </a:pPr>
-            <a:r>
-              <a:rPr sz="1150" b="0">
-                <a:solidFill>
-                  <a:srgbClr val="5D6B75"/>
-                </a:solidFill>
-                <a:latin typeface="Calibri"/>
-              </a:rPr>
-              <a:t>Les dix graphiques. Seaborn serait plus flatteur en moins de lignes, Plotly ajouterait l'interactivité ; Matplotlib donne le contrôle sur </a:t>
-            </a:r>
-            <a:r>
-              <a:rPr sz="1150" b="1">
-                <a:solidFill>
-                  <a:srgbClr val="16232B"/>
-                </a:solidFill>
-                <a:latin typeface="Calibri"/>
-              </a:rPr>
-              <a:t>chaque</a:t>
-            </a:r>
-            <a:r>
-              <a:rPr sz="1150" b="0">
-                <a:solidFill>
-                  <a:srgbClr val="5D6B75"/>
-                </a:solidFill>
-                <a:latin typeface="Calibri"/>
-              </a:rPr>
-              <a:t> élément — indispensable quand il faut justifier chaque choix visuel et retirer tout ornement inutile.</a:t>
-            </a:r>
-          </a:p>
-        </p:txBody>
-      </p:sp>
-      <p:sp>
-        <p:nvSpPr>
-          <p:cNvPr id="13" name="Shape 3"/>
-          <p:cNvSpPr/>
-          <p:nvPr/>
-        </p:nvSpPr>
-        <p:spPr>
-          <a:xfrm>
-            <a:off x="6236208" y="3401568"/>
-            <a:ext cx="5358384" cy="1938528"/>
-          </a:xfrm>
-          <a:prstGeom prst="roundRect">
-            <a:avLst>
-              <a:gd name="adj" fmla="val 2800"/>
-            </a:avLst>
-          </a:prstGeom>
-          <a:solidFill>
-            <a:srgbClr val="FFFFFF"/>
-          </a:solidFill>
-          <a:ln w="12700">
-            <a:solidFill>
-              <a:srgbClr val="DFE6EA"/>
-            </a:solidFill>
-          </a:ln>
-          <a:effectLst/>
-        </p:spPr>
-        <p:style>
-          <a:lnRef idx="1">
-            <a:schemeClr val="accent1"/>
-          </a:lnRef>
-          <a:fillRef idx="3">
-            <a:schemeClr val="accent1"/>
-          </a:fillRef>
-          <a:effectRef idx="2">
-            <a:schemeClr val="accent1"/>
-          </a:effectRef>
-          <a:fontRef idx="minor">
-            <a:schemeClr val="lt1"/>
-          </a:fontRef>
-        </p:style>
-        <p:txBody>
-          <a:bodyPr rtlCol="0" anchor="ctr"/>
-          <a:lstStyle/>
-          <a:p>
-            <a:pPr algn="ctr"/>
-          </a:p>
-        </p:txBody>
-      </p:sp>
-      <p:sp>
-        <p:nvSpPr>
-          <p:cNvPr id="14" name="Text 8"/>
-          <p:cNvSpPr txBox="1"/>
-          <p:nvPr/>
-        </p:nvSpPr>
-        <p:spPr>
-          <a:xfrm>
-            <a:off x="6510528" y="3584448"/>
-            <a:ext cx="4809744" cy="365760"/>
-          </a:xfrm>
-          <a:prstGeom prst="rect">
-            <a:avLst/>
-          </a:prstGeom>
-          <a:noFill/>
-        </p:spPr>
-        <p:txBody>
-          <a:bodyPr wrap="square" anchor="t" lIns="0" rIns="0" tIns="0" bIns="0">
-            <a:spAutoFit/>
-          </a:bodyPr>
-          <a:lstStyle/>
-          <a:p>
-            <a:r>
-              <a:rPr sz="1800" b="1">
-                <a:solidFill>
-                  <a:srgbClr val="0E7C86"/>
-                </a:solidFill>
-                <a:latin typeface="Cambria"/>
-              </a:rPr>
-              <a:t>scikit-learn</a:t>
-            </a:r>
-            <a:r>
-              <a:rPr sz="1050" b="0">
-                <a:solidFill>
-                  <a:srgbClr val="5D6B75"/>
-                </a:solidFill>
-                <a:latin typeface="Calibri"/>
-              </a:rPr>
-              <a:t>   1.9</a:t>
-            </a:r>
-          </a:p>
-        </p:txBody>
-      </p:sp>
-      <p:sp>
-        <p:nvSpPr>
-          <p:cNvPr id="15" name="Text 9"/>
-          <p:cNvSpPr txBox="1"/>
-          <p:nvPr/>
-        </p:nvSpPr>
-        <p:spPr>
-          <a:xfrm>
-            <a:off x="6510528" y="4041648"/>
-            <a:ext cx="4809744" cy="1069848"/>
-          </a:xfrm>
-          <a:prstGeom prst="rect">
-            <a:avLst/>
-          </a:prstGeom>
-          <a:noFill/>
-        </p:spPr>
-        <p:txBody>
-          <a:bodyPr wrap="square" anchor="t" lIns="0" rIns="0" tIns="0" bIns="0">
-            <a:spAutoFit/>
-          </a:bodyPr>
-          <a:lstStyle/>
-          <a:p>
-            <a:pPr>
-              <a:lnSpc>
-                <a:spcPct val="118000"/>
-              </a:lnSpc>
-            </a:pPr>
-            <a:r>
-              <a:rPr sz="1150" b="0">
-                <a:solidFill>
-                  <a:srgbClr val="5D6B75"/>
-                </a:solidFill>
-                <a:latin typeface="Calibri"/>
-              </a:rPr>
-              <a:t>Le modèle prédictif. Découpe, algorithmes, métriques et importance des variables partagent la même interface </a:t>
-            </a:r>
-            <a:r>
-              <a:rPr sz="1150" b="1">
-                <a:solidFill>
-                  <a:srgbClr val="16232B"/>
-                </a:solidFill>
-                <a:latin typeface="Calibri"/>
-              </a:rPr>
-              <a:t>fit / predict</a:t>
-            </a:r>
-            <a:r>
-              <a:rPr sz="1150" b="0">
-                <a:solidFill>
-                  <a:srgbClr val="5D6B75"/>
-                </a:solidFill>
-                <a:latin typeface="Calibri"/>
-              </a:rPr>
-              <a:t> : comparer quatre modèles ne demande alors que d'en changer le nom.</a:t>
-            </a:r>
-          </a:p>
-        </p:txBody>
-      </p:sp>
-      <p:sp>
-        <p:nvSpPr>
-          <p:cNvPr id="16" name="Text 10"/>
-          <p:cNvSpPr txBox="1"/>
-          <p:nvPr/>
-        </p:nvSpPr>
-        <p:spPr>
-          <a:xfrm>
-            <a:off x="594360" y="5623560"/>
-            <a:ext cx="10972800" cy="777240"/>
-          </a:xfrm>
-          <a:prstGeom prst="rect">
-            <a:avLst/>
-          </a:prstGeom>
-          <a:noFill/>
-        </p:spPr>
-        <p:txBody>
-          <a:bodyPr wrap="square" anchor="ctr" lIns="0" rIns="0" tIns="0" bIns="0">
-            <a:spAutoFit/>
-          </a:bodyPr>
-          <a:lstStyle/>
-          <a:p>
-            <a:pPr>
-              <a:lnSpc>
-                <a:spcPct val="120000"/>
-              </a:lnSpc>
-            </a:pPr>
-            <a:r>
-              <a:rPr sz="1350" b="0">
-                <a:solidFill>
-                  <a:srgbClr val="5D6B75"/>
-                </a:solidFill>
-                <a:latin typeface="Calibri"/>
-              </a:rPr>
-              <a:t>Versions figées dans </a:t>
-            </a:r>
-            <a:r>
-              <a:rPr sz="1300" b="0">
-                <a:solidFill>
-                  <a:srgbClr val="16232B"/>
-                </a:solidFill>
-                <a:latin typeface="Consolas"/>
-              </a:rPr>
-              <a:t>requirements.txt</a:t>
-            </a:r>
-            <a:r>
-              <a:rPr sz="1350" b="0">
-                <a:solidFill>
-                  <a:srgbClr val="5D6B75"/>
-                </a:solidFill>
-                <a:latin typeface="Calibri"/>
-              </a:rPr>
-              <a:t>. Les types compacts imposés à pandas — </a:t>
-            </a:r>
-            <a:r>
-              <a:rPr sz="1350" b="1">
-                <a:solidFill>
-                  <a:srgbClr val="16232B"/>
-                </a:solidFill>
-                <a:latin typeface="Calibri"/>
-              </a:rPr>
-              <a:t>int8</a:t>
-            </a:r>
-            <a:r>
-              <a:rPr sz="1350" b="0">
-                <a:solidFill>
-                  <a:srgbClr val="5D6B75"/>
-                </a:solidFill>
-                <a:latin typeface="Calibri"/>
-              </a:rPr>
-              <a:t>, </a:t>
-            </a:r>
-            <a:r>
-              <a:rPr sz="1350" b="1">
-                <a:solidFill>
-                  <a:srgbClr val="16232B"/>
-                </a:solidFill>
-                <a:latin typeface="Calibri"/>
-              </a:rPr>
-              <a:t>int16</a:t>
-            </a:r>
-            <a:r>
-              <a:rPr sz="1350" b="0">
-                <a:solidFill>
-                  <a:srgbClr val="5D6B75"/>
-                </a:solidFill>
-                <a:latin typeface="Calibri"/>
-              </a:rPr>
-              <a:t>, catégories — ramènent l'empreinte mémoire de 3,2 Go à 1,0 Go : c'est ce qui rend le projet exécutable sur une machine ordinaire, et non sur un serveur.</a:t>
-            </a:r>
-          </a:p>
-        </p:txBody>
-      </p:sp>
-    </p:spTree>
-  </p:cSld>
-  <p:clrMapOvr>
-    <a:masterClrMapping/>
-  </p:clrMapOvr>
-</p:sld>
-</file>
-
-<file path=ppt/slides/slide4.xml><?xml version="1.0" encoding="utf-8"?>
 <p:sld xmlns:a="http://schemas.openxmlformats.org/drawingml/2006/main" xmlns:r="http://schemas.openxmlformats.org/officeDocument/2006/relationships" xmlns:p="http://schemas.openxmlformats.org/presentationml/2006/main">
   <p:cSld name="Slide 3">
     <p:bg>
@@ -6327,7 +5927,7 @@
 </p:sld>
 </file>
 
-<file path=ppt/slides/slide5.xml><?xml version="1.0" encoding="utf-8"?>
+<file path=ppt/slides/slide4.xml><?xml version="1.0" encoding="utf-8"?>
 <p:sld xmlns:a="http://schemas.openxmlformats.org/drawingml/2006/main" xmlns:r="http://schemas.openxmlformats.org/officeDocument/2006/relationships" xmlns:p="http://schemas.openxmlformats.org/presentationml/2006/main">
   <p:cSld name="Slide 4">
     <p:bg>
@@ -6655,7 +6255,7 @@
 </p:sld>
 </file>
 
-<file path=ppt/slides/slide6.xml><?xml version="1.0" encoding="utf-8"?>
+<file path=ppt/slides/slide5.xml><?xml version="1.0" encoding="utf-8"?>
 <p:sld xmlns:a="http://schemas.openxmlformats.org/drawingml/2006/main" xmlns:r="http://schemas.openxmlformats.org/officeDocument/2006/relationships" xmlns:p="http://schemas.openxmlformats.org/presentationml/2006/main">
   <p:cSld name="Slide 5">
     <p:bg>
@@ -6983,7 +6583,7 @@
 </p:sld>
 </file>
 
-<file path=ppt/slides/slide7.xml><?xml version="1.0" encoding="utf-8"?>
+<file path=ppt/slides/slide6.xml><?xml version="1.0" encoding="utf-8"?>
 <p:sld xmlns:a="http://schemas.openxmlformats.org/drawingml/2006/main" xmlns:r="http://schemas.openxmlformats.org/officeDocument/2006/relationships" xmlns:p="http://schemas.openxmlformats.org/presentationml/2006/main">
   <p:cSld name="Slide 6">
     <p:bg>
@@ -7311,7 +6911,7 @@
 </p:sld>
 </file>
 
-<file path=ppt/slides/slide8.xml><?xml version="1.0" encoding="utf-8"?>
+<file path=ppt/slides/slide7.xml><?xml version="1.0" encoding="utf-8"?>
 <p:sld xmlns:a="http://schemas.openxmlformats.org/drawingml/2006/main" xmlns:r="http://schemas.openxmlformats.org/officeDocument/2006/relationships" xmlns:p="http://schemas.openxmlformats.org/presentationml/2006/main">
   <p:cSld name="Slide 7">
     <p:bg>
@@ -7639,7 +7239,7 @@
 </p:sld>
 </file>
 
-<file path=ppt/slides/slide9.xml><?xml version="1.0" encoding="utf-8"?>
+<file path=ppt/slides/slide8.xml><?xml version="1.0" encoding="utf-8"?>
 <p:sld xmlns:a="http://schemas.openxmlformats.org/drawingml/2006/main" xmlns:r="http://schemas.openxmlformats.org/officeDocument/2006/relationships" xmlns:p="http://schemas.openxmlformats.org/presentationml/2006/main">
   <p:cSld name="Slide 8">
     <p:bg>
@@ -7954,6 +7554,334 @@
                 <a:cs typeface="Cambria" pitchFamily="34" charset="-120"/>
               </a:rPr>
               <a:t>5</a:t>
+            </a:r>
+            <a:endParaRPr lang="en-US" sz="3400" dirty="0"/>
+          </a:p>
+        </p:txBody>
+      </p:sp>
+    </p:spTree>
+  </p:cSld>
+  <p:clrMapOvr>
+    <a:masterClrMapping/>
+  </p:clrMapOvr>
+</p:sld>
+</file>
+
+<file path=ppt/slides/slide9.xml><?xml version="1.0" encoding="utf-8"?>
+<p:sld xmlns:a="http://schemas.openxmlformats.org/drawingml/2006/main" xmlns:r="http://schemas.openxmlformats.org/officeDocument/2006/relationships" xmlns:p="http://schemas.openxmlformats.org/presentationml/2006/main">
+  <p:cSld name="Slide 9">
+    <p:bg>
+      <p:bgPr>
+        <a:solidFill>
+          <a:srgbClr val="FFFFFF"/>
+        </a:solidFill>
+        <a:effectLst/>
+      </p:bgPr>
+    </p:bg>
+    <p:spTree>
+      <p:nvGrpSpPr>
+        <p:cNvPr id="1" name=""/>
+        <p:cNvGrpSpPr/>
+        <p:nvPr/>
+      </p:nvGrpSpPr>
+      <p:grpSpPr>
+        <a:xfrm>
+          <a:off x="0" y="0"/>
+          <a:ext cx="0" cy="0"/>
+          <a:chOff x="0" y="0"/>
+          <a:chExt cx="0" cy="0"/>
+        </a:xfrm>
+      </p:grpSpPr>
+      <p:sp>
+        <p:nvSpPr>
+          <p:cNvPr id="2" name="Text 0"/>
+          <p:cNvSpPr txBox="1"/>
+          <p:nvPr/>
+        </p:nvSpPr>
+        <p:spPr>
+          <a:xfrm>
+            <a:off x="594360" y="182880"/>
+            <a:ext cx="10972800" cy="219456"/>
+          </a:xfrm>
+          <a:prstGeom prst="rect">
+            <a:avLst/>
+          </a:prstGeom>
+          <a:noFill/>
+          <a:ln/>
+        </p:spPr>
+        <p:txBody>
+          <a:bodyPr wrap="square" lIns="0" tIns="0" rIns="0" bIns="0" rtlCol="0" anchor="ctr"/>
+          <a:lstStyle/>
+          <a:p>
+            <a:pPr marL="0" indent="0">
+              <a:buNone/>
+            </a:pPr>
+            <a:r>
+              <a:rPr lang="en-US" sz="1050" b="1" kern="0" spc="160" dirty="0">
+                <a:solidFill>
+                  <a:srgbClr val="0E7C86"/>
+                </a:solidFill>
+                <a:latin typeface="Calibri" pitchFamily="34" charset="0"/>
+                <a:ea typeface="Calibri" pitchFamily="34" charset="-122"/>
+                <a:cs typeface="Calibri" pitchFamily="34" charset="-120"/>
+              </a:rPr>
+              <a:t>DÉMONSTRATION 6</a:t>
+            </a:r>
+            <a:endParaRPr lang="en-US" sz="1050" dirty="0"/>
+          </a:p>
+        </p:txBody>
+      </p:sp>
+      <p:sp>
+        <p:nvSpPr>
+          <p:cNvPr id="3" name="Text 1"/>
+          <p:cNvSpPr txBox="1"/>
+          <p:nvPr/>
+        </p:nvSpPr>
+        <p:spPr>
+          <a:xfrm>
+            <a:off x="594360" y="384048"/>
+            <a:ext cx="10972800" cy="658368"/>
+          </a:xfrm>
+          <a:prstGeom prst="rect">
+            <a:avLst/>
+          </a:prstGeom>
+          <a:noFill/>
+          <a:ln/>
+        </p:spPr>
+        <p:txBody>
+          <a:bodyPr wrap="square" lIns="0" tIns="0" rIns="0" bIns="0" rtlCol="0" anchor="ctr"/>
+          <a:lstStyle/>
+          <a:p>
+            <a:pPr marL="0" indent="0">
+              <a:buNone/>
+            </a:pPr>
+            <a:r>
+              <a:rPr lang="en-US" sz="2700" b="1" dirty="0">
+                <a:solidFill>
+                  <a:srgbClr val="16232B"/>
+                </a:solidFill>
+                <a:latin typeface="Cambria" pitchFamily="34" charset="0"/>
+                <a:ea typeface="Cambria" pitchFamily="34" charset="-122"/>
+                <a:cs typeface="Cambria" pitchFamily="34" charset="-120"/>
+              </a:rPr>
+              <a:t>Le week-end ne gonfle pas les paniers, il les déplace</a:t>
+            </a:r>
+            <a:endParaRPr lang="en-US" sz="2700" dirty="0"/>
+          </a:p>
+        </p:txBody>
+      </p:sp>
+      <p:pic>
+        <p:nvPicPr>
+          <p:cNvPr id="4" name="Image 0" descr="02_projet\_ppt\fig06.png"/>
+          <p:cNvPicPr>
+            <a:picLocks noChangeAspect="1"/>
+          </p:cNvPicPr>
+          <p:nvPr/>
+        </p:nvPicPr>
+        <p:blipFill>
+          <a:blip r:embed="rId3"/>
+          <a:stretch>
+            <a:fillRect/>
+          </a:stretch>
+        </p:blipFill>
+        <p:spPr>
+          <a:xfrm>
+            <a:off x="594360" y="1481726"/>
+            <a:ext cx="6903720" cy="3565364"/>
+          </a:xfrm>
+          <a:prstGeom prst="rect">
+            <a:avLst/>
+          </a:prstGeom>
+        </p:spPr>
+      </p:pic>
+      <p:sp>
+        <p:nvSpPr>
+          <p:cNvPr id="5" name="Text 2"/>
+          <p:cNvSpPr txBox="1"/>
+          <p:nvPr/>
+        </p:nvSpPr>
+        <p:spPr>
+          <a:xfrm>
+            <a:off x="594360" y="5440680"/>
+            <a:ext cx="6903720" cy="457200"/>
+          </a:xfrm>
+          <a:prstGeom prst="rect">
+            <a:avLst/>
+          </a:prstGeom>
+          <a:noFill/>
+          <a:ln/>
+        </p:spPr>
+        <p:txBody>
+          <a:bodyPr wrap="square" lIns="0" tIns="0" rIns="0" bIns="0" rtlCol="0" anchor="t"/>
+          <a:lstStyle/>
+          <a:p>
+            <a:pPr marL="0" indent="0">
+              <a:buNone/>
+            </a:pPr>
+            <a:r>
+              <a:rPr lang="en-US" sz="1100" i="1" dirty="0">
+                <a:solidFill>
+                  <a:srgbClr val="5D6B75"/>
+                </a:solidFill>
+                <a:latin typeface="Calibri" pitchFamily="34" charset="0"/>
+                <a:ea typeface="Calibri" pitchFamily="34" charset="-122"/>
+                <a:cs typeface="Calibri" pitchFamily="34" charset="-120"/>
+              </a:rPr>
+              <a:t>Les petits paniers reculent de 7 points au profit des gros.</a:t>
+            </a:r>
+            <a:endParaRPr lang="en-US" sz="1100" dirty="0"/>
+          </a:p>
+        </p:txBody>
+      </p:sp>
+      <p:sp>
+        <p:nvSpPr>
+          <p:cNvPr id="6" name="Shape 3"/>
+          <p:cNvSpPr/>
+          <p:nvPr/>
+        </p:nvSpPr>
+        <p:spPr>
+          <a:xfrm>
+            <a:off x="7818120" y="1207008"/>
+            <a:ext cx="3749040" cy="3200400"/>
+          </a:xfrm>
+          <a:prstGeom prst="roundRect">
+            <a:avLst>
+              <a:gd name="adj" fmla="val 1714"/>
+            </a:avLst>
+          </a:prstGeom>
+          <a:solidFill>
+            <a:srgbClr val="EAF3F4"/>
+          </a:solidFill>
+          <a:ln w="12700">
+            <a:solidFill>
+              <a:srgbClr val="D3E5E7"/>
+            </a:solidFill>
+            <a:prstDash val="solid"/>
+          </a:ln>
+        </p:spPr>
+        <p:txBody>
+          <a:bodyPr/>
+          <a:lstStyle/>
+          <a:p>
+            <a:endParaRPr lang="fr-FR"/>
+          </a:p>
+        </p:txBody>
+      </p:sp>
+      <p:sp>
+        <p:nvSpPr>
+          <p:cNvPr id="7" name="Text 4"/>
+          <p:cNvSpPr txBox="1"/>
+          <p:nvPr/>
+        </p:nvSpPr>
+        <p:spPr>
+          <a:xfrm>
+            <a:off x="8074152" y="1389888"/>
+            <a:ext cx="3236976" cy="219456"/>
+          </a:xfrm>
+          <a:prstGeom prst="rect">
+            <a:avLst/>
+          </a:prstGeom>
+          <a:noFill/>
+          <a:ln/>
+        </p:spPr>
+        <p:txBody>
+          <a:bodyPr wrap="square" lIns="0" tIns="0" rIns="0" bIns="0" rtlCol="0" anchor="ctr"/>
+          <a:lstStyle/>
+          <a:p>
+            <a:pPr marL="0" indent="0">
+              <a:buNone/>
+            </a:pPr>
+            <a:r>
+              <a:rPr lang="en-US" sz="950" b="1" kern="0" spc="120" dirty="0">
+                <a:solidFill>
+                  <a:srgbClr val="0E7C86"/>
+                </a:solidFill>
+                <a:latin typeface="Calibri" pitchFamily="34" charset="0"/>
+                <a:ea typeface="Calibri" pitchFamily="34" charset="-122"/>
+                <a:cs typeface="Calibri" pitchFamily="34" charset="-120"/>
+              </a:rPr>
+              <a:t>CE QUE NOUS PROPOSONS</a:t>
+            </a:r>
+            <a:endParaRPr lang="en-US" sz="950" dirty="0"/>
+          </a:p>
+        </p:txBody>
+      </p:sp>
+      <p:sp>
+        <p:nvSpPr>
+          <p:cNvPr id="8" name="Text 5"/>
+          <p:cNvSpPr txBox="1"/>
+          <p:nvPr/>
+        </p:nvSpPr>
+        <p:spPr>
+          <a:xfrm>
+            <a:off x="8074152" y="1682496"/>
+            <a:ext cx="3236976" cy="2505456"/>
+          </a:xfrm>
+          <a:prstGeom prst="rect">
+            <a:avLst/>
+          </a:prstGeom>
+          <a:noFill/>
+          <a:ln/>
+        </p:spPr>
+        <p:txBody>
+          <a:bodyPr wrap="square" lIns="0" tIns="0" rIns="0" bIns="0" rtlCol="0" anchor="t"/>
+          <a:lstStyle/>
+          <a:p>
+            <a:pPr marL="0" indent="0">
+              <a:lnSpc>
+                <a:spcPct val="110000"/>
+              </a:lnSpc>
+              <a:buNone/>
+            </a:pPr>
+            <a:r>
+              <a:rPr lang="en-US" sz="1300" dirty="0">
+                <a:solidFill>
+                  <a:srgbClr val="16232B"/>
+                </a:solidFill>
+                <a:latin typeface="Calibri" pitchFamily="34" charset="0"/>
+                <a:ea typeface="Calibri" pitchFamily="34" charset="-122"/>
+                <a:cs typeface="Calibri" pitchFamily="34" charset="-120"/>
+              </a:rPr>
+              <a:t>Placer les offres à seuil — « livraison offerte dès X articles » — le week-end, où les gros paniers sont déjà la norme.</a:t>
+            </a:r>
+            <a:endParaRPr lang="en-US" sz="1300" dirty="0"/>
+          </a:p>
+        </p:txBody>
+      </p:sp>
+      <p:sp>
+        <p:nvSpPr>
+          <p:cNvPr id="9" name="Text 6"/>
+          <p:cNvSpPr txBox="1"/>
+          <p:nvPr/>
+        </p:nvSpPr>
+        <p:spPr>
+          <a:xfrm>
+            <a:off x="7818120" y="4663440"/>
+            <a:ext cx="548640" cy="548640"/>
+          </a:xfrm>
+          <a:prstGeom prst="rect">
+            <a:avLst/>
+          </a:prstGeom>
+          <a:noFill/>
+          <a:ln/>
+        </p:spPr>
+        <p:txBody>
+          <a:bodyPr wrap="square" lIns="0" tIns="0" rIns="0" bIns="0" rtlCol="0" anchor="ctr"/>
+          <a:lstStyle/>
+          <a:p>
+            <a:pPr marL="0" indent="0">
+              <a:buNone/>
+            </a:pPr>
+            <a:r>
+              <a:rPr lang="en-US" sz="3400" b="1" dirty="0">
+                <a:solidFill>
+                  <a:srgbClr val="D8E4E6"/>
+                </a:solidFill>
+                <a:latin typeface="Cambria" pitchFamily="34" charset="0"/>
+                <a:ea typeface="Cambria" pitchFamily="34" charset="-122"/>
+                <a:cs typeface="Cambria" pitchFamily="34" charset="-120"/>
+              </a:rPr>
+              <a:t>6</a:t>
             </a:r>
             <a:endParaRPr lang="en-US" sz="3400" dirty="0"/>
           </a:p>

--- a/02_projet/soutenance.pptx
+++ b/02_projet/soutenance.pptx
@@ -5,25 +5,25 @@
     <p:sldMasterId id="2147483648" r:id="rId1"/>
   </p:sldMasterIdLst>
   <p:notesMasterIdLst>
-    <p:notesMasterId r:id="rId17"/>
+    <p:notesMasterId r:id="rId18"/>
   </p:notesMasterIdLst>
   <p:sldIdLst>
     <p:sldId id="256" r:id="rId2"/>
     <p:sldId id="257" r:id="rId3"/>
-    <p:sldId id="274" r:id="rId22"/>
-    <p:sldId id="258" r:id="rId4"/>
-    <p:sldId id="259" r:id="rId5"/>
-    <p:sldId id="260" r:id="rId6"/>
-    <p:sldId id="261" r:id="rId7"/>
-    <p:sldId id="262" r:id="rId8"/>
-    <p:sldId id="263" r:id="rId9"/>
-    <p:sldId id="264" r:id="rId10"/>
-    <p:sldId id="265" r:id="rId11"/>
-    <p:sldId id="266" r:id="rId12"/>
-    <p:sldId id="267" r:id="rId13"/>
-    <p:sldId id="268" r:id="rId14"/>
-    <p:sldId id="269" r:id="rId15"/>
-    <p:sldId id="273" r:id="rId16"/>
+    <p:sldId id="274" r:id="rId4"/>
+    <p:sldId id="258" r:id="rId5"/>
+    <p:sldId id="259" r:id="rId6"/>
+    <p:sldId id="260" r:id="rId7"/>
+    <p:sldId id="261" r:id="rId8"/>
+    <p:sldId id="262" r:id="rId9"/>
+    <p:sldId id="263" r:id="rId10"/>
+    <p:sldId id="264" r:id="rId11"/>
+    <p:sldId id="265" r:id="rId12"/>
+    <p:sldId id="266" r:id="rId13"/>
+    <p:sldId id="267" r:id="rId14"/>
+    <p:sldId id="268" r:id="rId15"/>
+    <p:sldId id="269" r:id="rId16"/>
+    <p:sldId id="273" r:id="rId17"/>
   </p:sldIdLst>
   <p:sldSz cx="12192000" cy="6858000"/>
   <p:notesSz cx="6858000" cy="12192000"/>
@@ -387,10 +387,10 @@
           <a:p>
             <a:r>
               <a:rPr lang="en-US" dirty="0"/>
-              <a:t>50 secondes.
-« On s'attendrait à ce que le lait revienne plus vite que les pâtes. Ce n'est pas le cas : entre l'allée la plus rapide et la plus lente, il n'y a que 2,7 jours d'écart. »
-LA CONCLUSION : le client ne commande pas quand il manque de lait. Il rachète du lait quand il fait ses courses.
-À DIRE AVANT QU'ON LE DEMANDE : notre première analyse utilisait la médiane et concluait à une platitude parfaite. Or cette variable ne prend que des valeurs entières : la médiane tombait toujours sur 7 ou 8. C'était un artefact. La moyenne révèle l'écart réel. RACONTEZ CETTE ERREUR, ELLE VOUS SERT — elle prouve que vous vérifiez.</a:t>
+              <a:t>45 secondes.
+« Le dimanche, les paniers de un à cinq articles tombent de 35 % à 25 %, et ceux de onze à vingt montent de 25 % à 33 %. »
+LA NUANCE QUI COMPTE : ce n'est pas une hausse générale, c'est un transfert. Les mêmes clients font moins de courses d'appoint et davantage de vraies courses. Le dire ainsi vaut mieux que « le panier moyen augmente ».
+SI ON DEMANDE POURQUOI PAS UNE MOYENNE : parce qu'elle masque la nature de l'effet. Elle passe de 9,3 à 11,1, ce qui suggère une hausse uniforme — les tranches montrent un déplacement.</a:t>
             </a:r>
           </a:p>
         </p:txBody>
@@ -477,10 +477,10 @@
           <a:p>
             <a:r>
               <a:rPr lang="en-US" dirty="0"/>
-              <a:t>40 secondes.
-« La composition du panier se déforme avec l'ancienneté. Certains rayons gagnent du terrain chez les clients installés, d'autres reculent après la première commande. »
-HONNÊTETÉ À ASSUMER : les écarts sont modestes — un à deux points. C'est une dérive lente, pas une substitution. Dites-le vous-même, cela vous crédibilise.
-LA CONSÉQUENCE OPÉRATIONNELLE RESTE VALABLE : les deux missions n'appellent ni les mêmes rayons ni les mêmes outils.</a:t>
+              <a:t>50 secondes.
+« On s'attendrait à ce que le lait revienne plus vite que les pâtes. Ce n'est pas le cas : entre l'allée la plus rapide et la plus lente, il n'y a que 2,7 jours d'écart. »
+LA CONCLUSION : le client ne commande pas quand il manque de lait. Il rachète du lait quand il fait ses courses.
+À DIRE AVANT QU'ON LE DEMANDE : notre première analyse utilisait la médiane et concluait à une platitude parfaite. Or cette variable ne prend que des valeurs entières : la médiane tombait toujours sur 7 ou 8. C'était un artefact. La moyenne révèle l'écart réel. RACONTEZ CETTE ERREUR, ELLE VOUS SERT — elle prouve que vous vérifiez.</a:t>
             </a:r>
           </a:p>
         </p:txBody>
@@ -567,10 +567,10 @@
           <a:p>
             <a:r>
               <a:rPr lang="en-US" dirty="0"/>
-              <a:t>60 secondes — C'EST VOTRE MEILLEURE DIAPOSITIVE.
-« Nous avons cherché quels produits s'achètent ensemble. Le comptage brut ne dit rien : il classe par popularité et met en tête bananes et fraises, ce qui est une tautologie. »
-« Nous avons donc calculé le lift : combien de fois plus souvent que le hasard. Et là, les couples changent complètement. Jalapeños et coriandre. Coriandre et oignon rouge. Citrons verts et coriandre. Ce sont des RECETTES. »
-LA RÉVÉLATION : à côté de la routine hebdomadaire, il existe un achat d'intention — « ce soir je cuisine tel plat ». Et puisque le panier ne grossit jamais, c'est le seul canal mesuré par lequel une nouveauté peut y entrer.</a:t>
+              <a:t>40 secondes.
+« La composition du panier se déforme avec l'ancienneté. Certains rayons gagnent du terrain chez les clients installés, d'autres reculent après la première commande. »
+HONNÊTETÉ À ASSUMER : les écarts sont modestes — un à deux points. C'est une dérive lente, pas une substitution. Dites-le vous-même, cela vous crédibilise.
+LA CONSÉQUENCE OPÉRATIONNELLE RESTE VALABLE : les deux missions n'appellent ni les mêmes rayons ni les mêmes outils.</a:t>
             </a:r>
           </a:p>
         </p:txBody>
@@ -657,10 +657,10 @@
           <a:p>
             <a:r>
               <a:rPr lang="en-US" dirty="0"/>
-              <a:t>40 secondes.
-« Si ce mode existe, il doit laisser une trace inverse : des produits très vendus mais rarement rachetés. La voici. »
-« Thym, concentré de tomate, courge butternut, huile d'olive, gingembre, échalote. Ce sont des ingrédients, pas des produits de base. Tout le monde en achète un jour, personne n'en rachète chaque semaine. »
-LE RENVERSEMENT À FAIRE ENTENDRE : ce ne sont pas des échecs. Chercher à augmenter leur réachat serait une erreur — ils ne fonctionnent pas ainsi. Il faut les traiter comme des portes d'entrée vers une recette.</a:t>
+              <a:t>60 secondes — C'EST VOTRE MEILLEURE DIAPOSITIVE.
+« Nous avons cherché quels produits s'achètent ensemble. Le comptage brut ne dit rien : il classe par popularité et met en tête bananes et fraises, ce qui est une tautologie. »
+« Nous avons donc calculé le lift : combien de fois plus souvent que le hasard. Et là, les couples changent complètement. Jalapeños et coriandre. Coriandre et oignon rouge. Citrons verts et coriandre. Ce sont des RECETTES. »
+LA RÉVÉLATION : à côté de la routine hebdomadaire, il existe un achat d'intention — « ce soir je cuisine tel plat ». Et puisque le panier ne grossit jamais, c'est le seul canal mesuré par lequel une nouveauté peut y entrer.</a:t>
             </a:r>
           </a:p>
         </p:txBody>
@@ -747,11 +747,10 @@
           <a:p>
             <a:r>
               <a:rPr lang="en-US" dirty="0"/>
-              <a:t>LE MOMENT DE LA VENTE — 90 secondes.
-Ralentissez. C'est ce que le jury doit retenir.
-Énoncez les quatre décisions dans l'ordre, en rattachant chacune à sa démonstration : « la première découle du graphique 1 », etc. Cela montre que rien n'est affirmé sans preuve.
-INSISTEZ SUR L'ORDRE : elles sont classées par rendement attendu, pas par facilité. La première est la plus rentable parce qu'elle agit sur la seule fenêtre où le comportement est encore malléable.
-SI ON DEMANDE LE COÛT : les trois premières sont des réallocations de budget existant, pas des dépenses nouvelles. Seule la quatrième demande un développement.</a:t>
+              <a:t>40 secondes.
+« Si ce mode existe, il doit laisser une trace inverse : des produits très vendus mais rarement rachetés. La voici. »
+« Thym, concentré de tomate, courge butternut, huile d'olive, gingembre, échalote. Ce sont des ingrédients, pas des produits de base. Tout le monde en achète un jour, personne n'en rachète chaque semaine. »
+LE RENVERSEMENT À FAIRE ENTENDRE : ce ne sont pas des échecs. Chercher à augmenter leur réachat serait une erreur — ils ne fonctionnent pas ainsi. Il faut les traiter comme des portes d'entrée vers une recette.</a:t>
             </a:r>
           </a:p>
         </p:txBody>
@@ -838,10 +837,11 @@
           <a:p>
             <a:r>
               <a:rPr lang="en-US" dirty="0"/>
-              <a:t>CLÔTURE — 20 secondes.
-Revenez à la phrase d'ouverture. La boucle se referme, et c'est elle que le jury emportera.
-« Nous avons commencé en disant que vous vendiez une habitude. Nous espérons vous avoir montré que c'est mesurable, et surtout que c'est actionnable. »
-Puis marquez un silence et proposez les questions. Ne meublez pas.</a:t>
+              <a:t>LE MOMENT DE LA VENTE — 90 secondes.
+Ralentissez. C'est ce que le jury doit retenir.
+Énoncez les quatre décisions dans l'ordre, en rattachant chacune à sa démonstration : « la première découle du graphique 1 », etc. Cela montre que rien n'est affirmé sans preuve.
+INSISTEZ SUR L'ORDRE : elles sont classées par rendement attendu, pas par facilité. La première est la plus rentable parce qu'elle agit sur la seule fenêtre où le comportement est encore malléable.
+SI ON DEMANDE LE COÛT : les trois premières sont des réallocations de budget existant, pas des dépenses nouvelles. Seule la quatrième demande un développement.</a:t>
             </a:r>
           </a:p>
         </p:txBody>
@@ -883,7 +883,7 @@
 </file>
 
 <file path=ppt/notesSlides/notesSlide16.xml><?xml version="1.0" encoding="utf-8"?>
-<p:notes xmlns:a="http://schemas.openxmlformats.org/drawingml/2006/main" xmlns:p="http://schemas.openxmlformats.org/presentationml/2006/main" xmlns:r="http://schemas.openxmlformats.org/officeDocument/2006/relationships">
+<p:notes xmlns:a="http://schemas.openxmlformats.org/drawingml/2006/main" xmlns:r="http://schemas.openxmlformats.org/officeDocument/2006/relationships" xmlns:p="http://schemas.openxmlformats.org/presentationml/2006/main">
   <p:cSld>
     <p:spTree>
       <p:nvGrpSpPr>
@@ -927,13 +927,11 @@
           <a:lstStyle/>
           <a:p>
             <a:r>
-              <a:rPr lang="fr-FR"/>
-              <a:t>AVEC QUOI — 40 secondes.
-Ne lisez pas les quatre cases : donnez la logique. « Chaque bibliothèque a été choisie contre une alternative, pas prise par défaut. »
-LE POINT À FAIRE ENTENDRE : Matplotlib plutôt que Seaborn est un choix coûteux — davantage de lignes de code — mais c'est lui qui nous a permis de retirer chaque ornement inutile. Sans ce contrôle, la promesse d'un graphique lisible ne tenait pas.
-LE CHIFFRE À CITER : 3,2 Go ramenés à 1,0 Go en imposant les types. Par défaut pandas met tout entier en int64, huit octets par valeur ; un jour de semaine en occupe un seul. Sur 32 millions de lignes, cet écart décide de la faisabilité.
-SI ON DEMANDE POURQUOI PAS POLARS : plus rapide, mais moins répandu. Ce code est fait pour être relu et repris — nous avons préféré le standard à la performance.
-SI ON DEMANDE POURQUOI PAS UNE BASE DE DONNÉES : une fois typées, les cinq tables tiennent en mémoire. Un SGBD n'aurait rien apporté et aurait ajouté une dépendance à installer.</a:t>
+              <a:rPr lang="en-US" dirty="0"/>
+              <a:t>CLÔTURE — 20 secondes.
+Revenez à la phrase d'ouverture. La boucle se referme, et c'est elle que le jury emportera.
+« Nous avons commencé en disant que vous vendiez une habitude. Nous espérons vous avoir montré que c'est mesurable, et surtout que c'est actionnable. »
+Puis marquez un silence et proposez les questions. Ne meublez pas.</a:t>
             </a:r>
           </a:p>
         </p:txBody>
@@ -955,13 +953,18 @@
           <a:p>
             <a:fld id="{F7021451-1387-4CA6-816F-3879F97B5CBC}" type="slidenum">
               <a:rPr lang="en-US"/>
-              <a:t>2</a:t>
+              <a:t>16</a:t>
             </a:fld>
             <a:endParaRPr lang="en-US"/>
           </a:p>
         </p:txBody>
       </p:sp>
     </p:spTree>
+    <p:extLst>
+      <p:ext uri="{BB962C8B-B14F-4D97-AF65-F5344CB8AC3E}">
+        <p14:creationId xmlns:p14="http://schemas.microsoft.com/office/powerpoint/2010/main" val="1024086991"/>
+      </p:ext>
+    </p:extLst>
   </p:cSld>
   <p:clrMapOvr>
     <a:masterClrMapping/>
@@ -1103,11 +1106,13 @@
           <a:lstStyle/>
           <a:p>
             <a:r>
-              <a:rPr lang="en-US" dirty="0"/>
-              <a:t>LE PIVOT — 30 secondes.
-C'est le moment le plus important de la présentation. Laissez le chiffre s'installer avant de parler.
-« Six articles sur dix que vous vendez, le client les avait déjà achetés. Votre chiffre d'affaires ne vient pas de la découverte, il vient de la répétition. »
-Tout ce qui suit découle de cette phrase — les dix démonstrations qui viennent ne font que l'établir et en tirer les conséquences.</a:t>
+              <a:rPr lang="fr-FR"/>
+              <a:t>AVEC QUOI — 40 secondes.
+Ne lisez pas les quatre cases : donnez la logique. « Chaque bibliothèque a été choisie contre une alternative, pas prise par défaut. »
+LE POINT À FAIRE ENTENDRE : Matplotlib plutôt que Seaborn est un choix coûteux — davantage de lignes de code — mais c'est lui qui nous a permis de retirer chaque ornement inutile. Sans ce contrôle, la promesse d'un graphique lisible ne tenait pas.
+LE CHIFFRE À CITER : 3,2 Go ramenés à 1,0 Go en imposant les types. Par défaut pandas met tout entier en int64, huit octets par valeur ; un jour de semaine en occupe un seul. Sur 32 millions de lignes, cet écart décide de la faisabilité.
+SI ON DEMANDE POURQUOI PAS POLARS : plus rapide, mais moins répandu. Ce code est fait pour être relu et repris — nous avons préféré le standard à la performance.
+SI ON DEMANDE POURQUOI PAS UNE BASE DE DONNÉES : une fois typées, les cinq tables tiennent en mémoire. Un SGBD n'aurait rien apporté et aurait ajouté une dépendance à installer.</a:t>
             </a:r>
           </a:p>
         </p:txBody>
@@ -1136,11 +1141,6 @@
         </p:txBody>
       </p:sp>
     </p:spTree>
-    <p:extLst>
-      <p:ext uri="{BB962C8B-B14F-4D97-AF65-F5344CB8AC3E}">
-        <p14:creationId xmlns:p14="http://schemas.microsoft.com/office/powerpoint/2010/main" val="1024086991"/>
-      </p:ext>
-    </p:extLst>
   </p:cSld>
   <p:clrMapOvr>
     <a:masterClrMapping/>
@@ -1194,10 +1194,10 @@
           <a:p>
             <a:r>
               <a:rPr lang="en-US" dirty="0"/>
-              <a:t>60 secondes.
-« Regardez la ligne du bas : elle est plate. De la deuxième à la quatre-vingtième commande, le panier reste à dix articles. Quinze ans de données ne la font pas bouger. » Puis la seconde : « en revanche, ce qu'il y a dedans se répète de plus en plus — 29 % de rachats au début, plus de 80 % ensuite. »
-LA CONCLUSION À ÉNONCER : le panier ne grossit pas, il se fige. Espérer un panier moyen plus gros est donc vain — c'est un objectif que les données déclarent inatteignable.
-OBJECTION PROBABLE : « la courbe descend à la fin ». Réponse : oui, de 10,4 à 9,0 après la quarantième commande, sur des effectifs plus faibles. Cela renforce l'argument.</a:t>
+              <a:t>LE PIVOT — 30 secondes.
+C'est le moment le plus important de la présentation. Laissez le chiffre s'installer avant de parler.
+« Six articles sur dix que vous vendez, le client les avait déjà achetés. Votre chiffre d'affaires ne vient pas de la découverte, il vient de la répétition. »
+Tout ce qui suit découle de cette phrase — les dix démonstrations qui viennent ne font que l'établir et en tirer les conséquences.</a:t>
             </a:r>
           </a:p>
         </p:txBody>
@@ -1284,10 +1284,10 @@
           <a:p>
             <a:r>
               <a:rPr lang="en-US" dirty="0"/>
-              <a:t>45 secondes.
-« Le premier article déposé dans le panier est racheté deux fois sur trois. Le vingtième, une fois sur deux. La décroissance est parfaitement régulière. »
-L'INTERPRÉTATION : le début du panier, ce sont les courses automatiques — le client ne réfléchit pas. La fin, c'est l'improvisation. C'est là qu'il est encore disponible pour une suggestion.
-OBJECTION : « les positions élevées sont-elles fiables ? » Seules celles comptant au moins 20 000 lignes de commande sont tracées.</a:t>
+              <a:t>60 secondes.
+« Regardez la ligne du bas : elle est plate. De la deuxième à la quatre-vingtième commande, le panier reste à dix articles. Quinze ans de données ne la font pas bouger. » Puis la seconde : « en revanche, ce qu'il y a dedans se répète de plus en plus — 29 % de rachats au début, plus de 80 % ensuite. »
+LA CONCLUSION À ÉNONCER : le panier ne grossit pas, il se fige. Espérer un panier moyen plus gros est donc vain — c'est un objectif que les données déclarent inatteignable.
+OBJECTION PROBABLE : « la courbe descend à la fin ». Réponse : oui, de 10,4 à 9,0 après la quarantième commande, sur des effectifs plus faibles. Cela renforce l'argument.</a:t>
             </a:r>
           </a:p>
         </p:txBody>
@@ -1375,9 +1375,9 @@
             <a:r>
               <a:rPr lang="en-US" dirty="0"/>
               <a:t>45 secondes.
-« Les produits laitiers se rachètent dans deux tiers des cas, l'hygiène dans un tiers. C'est un rapport de un à deux, et il est structurel : on consomme du lait tous les jours, pas du shampoing. »
-LA CONSÉQUENCE : leur appliquer le même objectif de fidélisation n'a pas de sens. C'est une erreur de pilotage courante, et elle se corrige sans rien investir.
-SI ON DEMANDE OÙ EST LE RAYON « NON RENSEIGNÉ » : écarté volontairement. Ce sont 1 258 produits non classés — liquide vaisselle, pommes, stylos — dont le taux moyen ne décrit aucun comportement. Ils restent dans les totaux, où ils pèsent 0,21 %.</a:t>
+« Le premier article déposé dans le panier est racheté deux fois sur trois. Le vingtième, une fois sur deux. La décroissance est parfaitement régulière. »
+L'INTERPRÉTATION : le début du panier, ce sont les courses automatiques — le client ne réfléchit pas. La fin, c'est l'improvisation. C'est là qu'il est encore disponible pour une suggestion.
+OBJECTION : « les positions élevées sont-elles fiables ? » Seules celles comptant au moins 20 000 lignes de commande sont tracées.</a:t>
             </a:r>
           </a:p>
         </p:txBody>
@@ -1464,10 +1464,10 @@
           <a:p>
             <a:r>
               <a:rPr lang="en-US" dirty="0"/>
-              <a:t>40 secondes.
-« Une référence sur dix est bio. Mais trois articles vendus sur dix le sont. Et ces produits se rachètent 6,6 points au-dessus du reste. »
-LA FORMULE À RETENIR : une référence bio travaille trois fois plus qu'une référence ordinaire. Ce n'est pas une niche, c'est un moteur de fidélité sous-exploité.
-RÉSERVE À ANNONCER VOUS-MÊME : nous repérons le bio par le mot « organic » dans le libellé. C'est une approximation, mais l'écart est trop marqué pour tenir à ce biais. Et attention : nous constatons une association, pas une causalité.</a:t>
+              <a:t>45 secondes.
+« Les produits laitiers se rachètent dans deux tiers des cas, l'hygiène dans un tiers. C'est un rapport de un à deux, et il est structurel : on consomme du lait tous les jours, pas du shampoing. »
+LA CONSÉQUENCE : leur appliquer le même objectif de fidélisation n'a pas de sens. C'est une erreur de pilotage courante, et elle se corrige sans rien investir.
+SI ON DEMANDE OÙ EST LE RAYON « NON RENSEIGNÉ » : écarté volontairement. Ce sont 1 258 produits non classés — liquide vaisselle, pommes, stylos — dont le taux moyen ne décrit aucun comportement. Ils restent dans les totaux, où ils pèsent 0,21 %.</a:t>
             </a:r>
           </a:p>
         </p:txBody>
@@ -1555,9 +1555,9 @@
             <a:r>
               <a:rPr lang="en-US" dirty="0"/>
               <a:t>40 secondes.
-« Cette carte croise le jour et l'heure. Deux foyers apparaissent, nettement séparés : le lundi vers dix heures, et le dimanche début d'après-midi. »
-L'INTERPRÉTATION : ce ne sont pas les mêmes courses. L'une ressemble au réapprovisionnement de semaine, l'autre à la course familiale. Une communication du dimanche ne parle pas au client du lundi.
-LE PIÈGE À ÉVITER : dimensionner la logistique sur la moyenne. Aucun client ne commande à l'heure moyenne.</a:t>
+« Une référence sur dix est bio. Mais trois articles vendus sur dix le sont. Et ces produits se rachètent 6,6 points au-dessus du reste. »
+LA FORMULE À RETENIR : une référence bio travaille trois fois plus qu'une référence ordinaire. Ce n'est pas une niche, c'est un moteur de fidélité sous-exploité.
+RÉSERVE À ANNONCER VOUS-MÊME : nous repérons le bio par le mot « organic » dans le libellé. C'est une approximation, mais l'écart est trop marqué pour tenir à ce biais. Et attention : nous constatons une association, pas une causalité.</a:t>
             </a:r>
           </a:p>
         </p:txBody>
@@ -1644,10 +1644,10 @@
           <a:p>
             <a:r>
               <a:rPr lang="en-US" dirty="0"/>
-              <a:t>45 secondes.
-« Le dimanche, les paniers de un à cinq articles tombent de 35 % à 25 %, et ceux de onze à vingt montent de 25 % à 33 %. »
-LA NUANCE QUI COMPTE : ce n'est pas une hausse générale, c'est un transfert. Les mêmes clients font moins de courses d'appoint et davantage de vraies courses. Le dire ainsi vaut mieux que « le panier moyen augmente ».
-SI ON DEMANDE POURQUOI PAS UNE MOYENNE : parce qu'elle masque la nature de l'effet. Elle passe de 9,3 à 11,1, ce qui suggère une hausse uniforme — les tranches montrent un déplacement.</a:t>
+              <a:t>40 secondes.
+« Cette carte croise le jour et l'heure. Deux foyers apparaissent, nettement séparés : le lundi vers dix heures, et le dimanche début d'après-midi. »
+L'INTERPRÉTATION : ce ne sont pas les mêmes courses. L'une ressemble au réapprovisionnement de semaine, l'autre à la course familiale. Une communication du dimanche ne parle pas au client du lundi.
+LE PIÈGE À ÉVITER : dimensionner la logistique sur la moyenne. Aucun client ne commande à l'heure moyenne.</a:t>
             </a:r>
           </a:p>
         </p:txBody>
@@ -2178,6 +2178,334 @@
 
 <file path=ppt/slides/slide10.xml><?xml version="1.0" encoding="utf-8"?>
 <p:sld xmlns:a="http://schemas.openxmlformats.org/drawingml/2006/main" xmlns:r="http://schemas.openxmlformats.org/officeDocument/2006/relationships" xmlns:p="http://schemas.openxmlformats.org/presentationml/2006/main">
+  <p:cSld name="Slide 9">
+    <p:bg>
+      <p:bgPr>
+        <a:solidFill>
+          <a:srgbClr val="FFFFFF"/>
+        </a:solidFill>
+        <a:effectLst/>
+      </p:bgPr>
+    </p:bg>
+    <p:spTree>
+      <p:nvGrpSpPr>
+        <p:cNvPr id="1" name=""/>
+        <p:cNvGrpSpPr/>
+        <p:nvPr/>
+      </p:nvGrpSpPr>
+      <p:grpSpPr>
+        <a:xfrm>
+          <a:off x="0" y="0"/>
+          <a:ext cx="0" cy="0"/>
+          <a:chOff x="0" y="0"/>
+          <a:chExt cx="0" cy="0"/>
+        </a:xfrm>
+      </p:grpSpPr>
+      <p:sp>
+        <p:nvSpPr>
+          <p:cNvPr id="2" name="Text 0"/>
+          <p:cNvSpPr txBox="1"/>
+          <p:nvPr/>
+        </p:nvSpPr>
+        <p:spPr>
+          <a:xfrm>
+            <a:off x="594360" y="182880"/>
+            <a:ext cx="10972800" cy="219456"/>
+          </a:xfrm>
+          <a:prstGeom prst="rect">
+            <a:avLst/>
+          </a:prstGeom>
+          <a:noFill/>
+          <a:ln/>
+        </p:spPr>
+        <p:txBody>
+          <a:bodyPr wrap="square" lIns="0" tIns="0" rIns="0" bIns="0" rtlCol="0" anchor="ctr"/>
+          <a:lstStyle/>
+          <a:p>
+            <a:pPr marL="0" indent="0">
+              <a:buNone/>
+            </a:pPr>
+            <a:r>
+              <a:rPr lang="en-US" sz="1050" b="1" kern="0" spc="160" dirty="0">
+                <a:solidFill>
+                  <a:srgbClr val="0E7C86"/>
+                </a:solidFill>
+                <a:latin typeface="Calibri" pitchFamily="34" charset="0"/>
+                <a:ea typeface="Calibri" pitchFamily="34" charset="-122"/>
+                <a:cs typeface="Calibri" pitchFamily="34" charset="-120"/>
+              </a:rPr>
+              <a:t>DÉMONSTRATION 6</a:t>
+            </a:r>
+            <a:endParaRPr lang="en-US" sz="1050" dirty="0"/>
+          </a:p>
+        </p:txBody>
+      </p:sp>
+      <p:sp>
+        <p:nvSpPr>
+          <p:cNvPr id="3" name="Text 1"/>
+          <p:cNvSpPr txBox="1"/>
+          <p:nvPr/>
+        </p:nvSpPr>
+        <p:spPr>
+          <a:xfrm>
+            <a:off x="594360" y="384048"/>
+            <a:ext cx="10972800" cy="658368"/>
+          </a:xfrm>
+          <a:prstGeom prst="rect">
+            <a:avLst/>
+          </a:prstGeom>
+          <a:noFill/>
+          <a:ln/>
+        </p:spPr>
+        <p:txBody>
+          <a:bodyPr wrap="square" lIns="0" tIns="0" rIns="0" bIns="0" rtlCol="0" anchor="ctr"/>
+          <a:lstStyle/>
+          <a:p>
+            <a:pPr marL="0" indent="0">
+              <a:buNone/>
+            </a:pPr>
+            <a:r>
+              <a:rPr lang="en-US" sz="2700" b="1" dirty="0">
+                <a:solidFill>
+                  <a:srgbClr val="16232B"/>
+                </a:solidFill>
+                <a:latin typeface="Cambria" pitchFamily="34" charset="0"/>
+                <a:ea typeface="Cambria" pitchFamily="34" charset="-122"/>
+                <a:cs typeface="Cambria" pitchFamily="34" charset="-120"/>
+              </a:rPr>
+              <a:t>Le week-end ne gonfle pas les paniers, il les déplace</a:t>
+            </a:r>
+            <a:endParaRPr lang="en-US" sz="2700" dirty="0"/>
+          </a:p>
+        </p:txBody>
+      </p:sp>
+      <p:pic>
+        <p:nvPicPr>
+          <p:cNvPr id="4" name="Image 0" descr="02_projet\_ppt\fig06.png"/>
+          <p:cNvPicPr>
+            <a:picLocks noChangeAspect="1"/>
+          </p:cNvPicPr>
+          <p:nvPr/>
+        </p:nvPicPr>
+        <p:blipFill>
+          <a:blip r:embed="rId3"/>
+          <a:stretch>
+            <a:fillRect/>
+          </a:stretch>
+        </p:blipFill>
+        <p:spPr>
+          <a:xfrm>
+            <a:off x="594360" y="1481726"/>
+            <a:ext cx="6903720" cy="3565364"/>
+          </a:xfrm>
+          <a:prstGeom prst="rect">
+            <a:avLst/>
+          </a:prstGeom>
+        </p:spPr>
+      </p:pic>
+      <p:sp>
+        <p:nvSpPr>
+          <p:cNvPr id="5" name="Text 2"/>
+          <p:cNvSpPr txBox="1"/>
+          <p:nvPr/>
+        </p:nvSpPr>
+        <p:spPr>
+          <a:xfrm>
+            <a:off x="594360" y="5440680"/>
+            <a:ext cx="6903720" cy="457200"/>
+          </a:xfrm>
+          <a:prstGeom prst="rect">
+            <a:avLst/>
+          </a:prstGeom>
+          <a:noFill/>
+          <a:ln/>
+        </p:spPr>
+        <p:txBody>
+          <a:bodyPr wrap="square" lIns="0" tIns="0" rIns="0" bIns="0" rtlCol="0" anchor="t"/>
+          <a:lstStyle/>
+          <a:p>
+            <a:pPr marL="0" indent="0">
+              <a:buNone/>
+            </a:pPr>
+            <a:r>
+              <a:rPr lang="en-US" sz="1100" i="1" dirty="0">
+                <a:solidFill>
+                  <a:srgbClr val="5D6B75"/>
+                </a:solidFill>
+                <a:latin typeface="Calibri" pitchFamily="34" charset="0"/>
+                <a:ea typeface="Calibri" pitchFamily="34" charset="-122"/>
+                <a:cs typeface="Calibri" pitchFamily="34" charset="-120"/>
+              </a:rPr>
+              <a:t>Les petits paniers reculent de 7 points au profit des gros.</a:t>
+            </a:r>
+            <a:endParaRPr lang="en-US" sz="1100" dirty="0"/>
+          </a:p>
+        </p:txBody>
+      </p:sp>
+      <p:sp>
+        <p:nvSpPr>
+          <p:cNvPr id="6" name="Shape 3"/>
+          <p:cNvSpPr/>
+          <p:nvPr/>
+        </p:nvSpPr>
+        <p:spPr>
+          <a:xfrm>
+            <a:off x="7818120" y="1207008"/>
+            <a:ext cx="3749040" cy="3200400"/>
+          </a:xfrm>
+          <a:prstGeom prst="roundRect">
+            <a:avLst>
+              <a:gd name="adj" fmla="val 1714"/>
+            </a:avLst>
+          </a:prstGeom>
+          <a:solidFill>
+            <a:srgbClr val="EAF3F4"/>
+          </a:solidFill>
+          <a:ln w="12700">
+            <a:solidFill>
+              <a:srgbClr val="D3E5E7"/>
+            </a:solidFill>
+            <a:prstDash val="solid"/>
+          </a:ln>
+        </p:spPr>
+        <p:txBody>
+          <a:bodyPr/>
+          <a:lstStyle/>
+          <a:p>
+            <a:endParaRPr lang="fr-FR"/>
+          </a:p>
+        </p:txBody>
+      </p:sp>
+      <p:sp>
+        <p:nvSpPr>
+          <p:cNvPr id="7" name="Text 4"/>
+          <p:cNvSpPr txBox="1"/>
+          <p:nvPr/>
+        </p:nvSpPr>
+        <p:spPr>
+          <a:xfrm>
+            <a:off x="8074152" y="1389888"/>
+            <a:ext cx="3236976" cy="219456"/>
+          </a:xfrm>
+          <a:prstGeom prst="rect">
+            <a:avLst/>
+          </a:prstGeom>
+          <a:noFill/>
+          <a:ln/>
+        </p:spPr>
+        <p:txBody>
+          <a:bodyPr wrap="square" lIns="0" tIns="0" rIns="0" bIns="0" rtlCol="0" anchor="ctr"/>
+          <a:lstStyle/>
+          <a:p>
+            <a:pPr marL="0" indent="0">
+              <a:buNone/>
+            </a:pPr>
+            <a:r>
+              <a:rPr lang="en-US" sz="950" b="1" kern="0" spc="120" dirty="0">
+                <a:solidFill>
+                  <a:srgbClr val="0E7C86"/>
+                </a:solidFill>
+                <a:latin typeface="Calibri" pitchFamily="34" charset="0"/>
+                <a:ea typeface="Calibri" pitchFamily="34" charset="-122"/>
+                <a:cs typeface="Calibri" pitchFamily="34" charset="-120"/>
+              </a:rPr>
+              <a:t>CE QUE NOUS PROPOSONS</a:t>
+            </a:r>
+            <a:endParaRPr lang="en-US" sz="950" dirty="0"/>
+          </a:p>
+        </p:txBody>
+      </p:sp>
+      <p:sp>
+        <p:nvSpPr>
+          <p:cNvPr id="8" name="Text 5"/>
+          <p:cNvSpPr txBox="1"/>
+          <p:nvPr/>
+        </p:nvSpPr>
+        <p:spPr>
+          <a:xfrm>
+            <a:off x="8074152" y="1682496"/>
+            <a:ext cx="3236976" cy="2505456"/>
+          </a:xfrm>
+          <a:prstGeom prst="rect">
+            <a:avLst/>
+          </a:prstGeom>
+          <a:noFill/>
+          <a:ln/>
+        </p:spPr>
+        <p:txBody>
+          <a:bodyPr wrap="square" lIns="0" tIns="0" rIns="0" bIns="0" rtlCol="0" anchor="t"/>
+          <a:lstStyle/>
+          <a:p>
+            <a:pPr marL="0" indent="0">
+              <a:lnSpc>
+                <a:spcPct val="110000"/>
+              </a:lnSpc>
+              <a:buNone/>
+            </a:pPr>
+            <a:r>
+              <a:rPr lang="en-US" sz="1300" dirty="0">
+                <a:solidFill>
+                  <a:srgbClr val="16232B"/>
+                </a:solidFill>
+                <a:latin typeface="Calibri" pitchFamily="34" charset="0"/>
+                <a:ea typeface="Calibri" pitchFamily="34" charset="-122"/>
+                <a:cs typeface="Calibri" pitchFamily="34" charset="-120"/>
+              </a:rPr>
+              <a:t>Placer les offres à seuil — « livraison offerte dès X articles » — le week-end, où les gros paniers sont déjà la norme.</a:t>
+            </a:r>
+            <a:endParaRPr lang="en-US" sz="1300" dirty="0"/>
+          </a:p>
+        </p:txBody>
+      </p:sp>
+      <p:sp>
+        <p:nvSpPr>
+          <p:cNvPr id="9" name="Text 6"/>
+          <p:cNvSpPr txBox="1"/>
+          <p:nvPr/>
+        </p:nvSpPr>
+        <p:spPr>
+          <a:xfrm>
+            <a:off x="7818120" y="4663440"/>
+            <a:ext cx="548640" cy="548640"/>
+          </a:xfrm>
+          <a:prstGeom prst="rect">
+            <a:avLst/>
+          </a:prstGeom>
+          <a:noFill/>
+          <a:ln/>
+        </p:spPr>
+        <p:txBody>
+          <a:bodyPr wrap="square" lIns="0" tIns="0" rIns="0" bIns="0" rtlCol="0" anchor="ctr"/>
+          <a:lstStyle/>
+          <a:p>
+            <a:pPr marL="0" indent="0">
+              <a:buNone/>
+            </a:pPr>
+            <a:r>
+              <a:rPr lang="en-US" sz="3400" b="1" dirty="0">
+                <a:solidFill>
+                  <a:srgbClr val="D8E4E6"/>
+                </a:solidFill>
+                <a:latin typeface="Cambria" pitchFamily="34" charset="0"/>
+                <a:ea typeface="Cambria" pitchFamily="34" charset="-122"/>
+                <a:cs typeface="Cambria" pitchFamily="34" charset="-120"/>
+              </a:rPr>
+              <a:t>6</a:t>
+            </a:r>
+            <a:endParaRPr lang="en-US" sz="3400" dirty="0"/>
+          </a:p>
+        </p:txBody>
+      </p:sp>
+    </p:spTree>
+  </p:cSld>
+  <p:clrMapOvr>
+    <a:masterClrMapping/>
+  </p:clrMapOvr>
+</p:sld>
+</file>
+
+<file path=ppt/slides/slide11.xml><?xml version="1.0" encoding="utf-8"?>
+<p:sld xmlns:a="http://schemas.openxmlformats.org/drawingml/2006/main" xmlns:r="http://schemas.openxmlformats.org/officeDocument/2006/relationships" xmlns:p="http://schemas.openxmlformats.org/presentationml/2006/main">
   <p:cSld name="Slide 10">
     <p:bg>
       <p:bgPr>
@@ -2504,7 +2832,7 @@
 </p:sld>
 </file>
 
-<file path=ppt/slides/slide11.xml><?xml version="1.0" encoding="utf-8"?>
+<file path=ppt/slides/slide12.xml><?xml version="1.0" encoding="utf-8"?>
 <p:sld xmlns:a="http://schemas.openxmlformats.org/drawingml/2006/main" xmlns:r="http://schemas.openxmlformats.org/officeDocument/2006/relationships" xmlns:p="http://schemas.openxmlformats.org/presentationml/2006/main">
   <p:cSld name="Slide 11">
     <p:bg>
@@ -2832,7 +3160,7 @@
 </p:sld>
 </file>
 
-<file path=ppt/slides/slide12.xml><?xml version="1.0" encoding="utf-8"?>
+<file path=ppt/slides/slide13.xml><?xml version="1.0" encoding="utf-8"?>
 <p:sld xmlns:a="http://schemas.openxmlformats.org/drawingml/2006/main" xmlns:r="http://schemas.openxmlformats.org/officeDocument/2006/relationships" xmlns:p="http://schemas.openxmlformats.org/presentationml/2006/main">
   <p:cSld name="Slide 12">
     <p:bg>
@@ -3160,7 +3488,7 @@
 </p:sld>
 </file>
 
-<file path=ppt/slides/slide13.xml><?xml version="1.0" encoding="utf-8"?>
+<file path=ppt/slides/slide14.xml><?xml version="1.0" encoding="utf-8"?>
 <p:sld xmlns:a="http://schemas.openxmlformats.org/drawingml/2006/main" xmlns:r="http://schemas.openxmlformats.org/officeDocument/2006/relationships" xmlns:p="http://schemas.openxmlformats.org/presentationml/2006/main">
   <p:cSld name="Slide 13">
     <p:bg>
@@ -3488,7 +3816,7 @@
 </p:sld>
 </file>
 
-<file path=ppt/slides/slide14.xml><?xml version="1.0" encoding="utf-8"?>
+<file path=ppt/slides/slide15.xml><?xml version="1.0" encoding="utf-8"?>
 <p:sld xmlns:a="http://schemas.openxmlformats.org/drawingml/2006/main" xmlns:r="http://schemas.openxmlformats.org/officeDocument/2006/relationships" xmlns:p="http://schemas.openxmlformats.org/presentationml/2006/main">
   <p:cSld name="Slide 14">
     <p:bg>
@@ -4207,7 +4535,7 @@
 </p:sld>
 </file>
 
-<file path=ppt/slides/slide15.xml><?xml version="1.0" encoding="utf-8"?>
+<file path=ppt/slides/slide16.xml><?xml version="1.0" encoding="utf-8"?>
 <p:sld xmlns:a="http://schemas.openxmlformats.org/drawingml/2006/main" xmlns:r="http://schemas.openxmlformats.org/officeDocument/2006/relationships" xmlns:p="http://schemas.openxmlformats.org/presentationml/2006/main">
   <p:cSld name="Slide 18">
     <p:bg>
@@ -4383,695 +4711,6 @@
               <a:t>.</a:t>
             </a:r>
             <a:endParaRPr lang="en-US" sz="1600" dirty="0"/>
-          </a:p>
-        </p:txBody>
-      </p:sp>
-    </p:spTree>
-  </p:cSld>
-  <p:clrMapOvr>
-    <a:masterClrMapping/>
-  </p:clrMapOvr>
-</p:sld>
-</file>
-
-<file path=ppt/slides/slide16.xml><?xml version="1.0" encoding="utf-8"?>
-<p:sld xmlns:a="http://schemas.openxmlformats.org/drawingml/2006/main" xmlns:p="http://schemas.openxmlformats.org/presentationml/2006/main" xmlns:r="http://schemas.openxmlformats.org/officeDocument/2006/relationships">
-  <p:cSld>
-    <p:bg>
-      <p:bgPr>
-        <a:solidFill>
-          <a:srgbClr val="FFFFFF"/>
-        </a:solidFill>
-        <a:effectLst/>
-      </p:bgPr>
-    </p:bg>
-    <p:spTree>
-      <p:nvGrpSpPr>
-        <p:cNvPr id="1" name=""/>
-        <p:cNvGrpSpPr/>
-        <p:nvPr/>
-      </p:nvGrpSpPr>
-      <p:grpSpPr/>
-      <p:sp>
-        <p:nvSpPr>
-          <p:cNvPr id="2" name="Text 0"/>
-          <p:cNvSpPr txBox="1"/>
-          <p:nvPr/>
-        </p:nvSpPr>
-        <p:spPr>
-          <a:xfrm>
-            <a:off x="594360" y="182880"/>
-            <a:ext cx="10972800" cy="219456"/>
-          </a:xfrm>
-          <a:prstGeom prst="rect">
-            <a:avLst/>
-          </a:prstGeom>
-          <a:noFill/>
-        </p:spPr>
-        <p:txBody>
-          <a:bodyPr wrap="square" anchor="ctr" lIns="0" rIns="0" tIns="0" bIns="0">
-            <a:spAutoFit/>
-          </a:bodyPr>
-          <a:lstStyle/>
-          <a:p>
-            <a:r>
-              <a:rPr sz="1050" b="1" spc="160">
-                <a:solidFill>
-                  <a:srgbClr val="0E7C86"/>
-                </a:solidFill>
-                <a:latin typeface="Calibri"/>
-              </a:rPr>
-              <a:t>AVEC QUOI NOUS AVONS TRAVAILLÉ</a:t>
-            </a:r>
-          </a:p>
-        </p:txBody>
-      </p:sp>
-      <p:sp>
-        <p:nvSpPr>
-          <p:cNvPr id="3" name="Text 1"/>
-          <p:cNvSpPr txBox="1"/>
-          <p:nvPr/>
-        </p:nvSpPr>
-        <p:spPr>
-          <a:xfrm>
-            <a:off x="594360" y="384048"/>
-            <a:ext cx="10972800" cy="658368"/>
-          </a:xfrm>
-          <a:prstGeom prst="rect">
-            <a:avLst/>
-          </a:prstGeom>
-          <a:noFill/>
-        </p:spPr>
-        <p:txBody>
-          <a:bodyPr wrap="square" anchor="ctr" lIns="0" rIns="0" tIns="0" bIns="0">
-            <a:spAutoFit/>
-          </a:bodyPr>
-          <a:lstStyle/>
-          <a:p>
-            <a:r>
-              <a:rPr sz="2700" b="1">
-                <a:solidFill>
-                  <a:srgbClr val="16232B"/>
-                </a:solidFill>
-                <a:latin typeface="Cambria"/>
-              </a:rPr>
-              <a:t>Quatre bibliothèques, un choix assumé pour chacune</a:t>
-            </a:r>
-          </a:p>
-        </p:txBody>
-      </p:sp>
-      <p:sp>
-        <p:nvSpPr>
-          <p:cNvPr id="4" name="Shape 0"/>
-          <p:cNvSpPr/>
-          <p:nvPr/>
-        </p:nvSpPr>
-        <p:spPr>
-          <a:xfrm>
-            <a:off x="594360" y="1554480"/>
-            <a:ext cx="5358384" cy="1325880"/>
-          </a:xfrm>
-          <a:prstGeom prst="roundRect">
-            <a:avLst>
-              <a:gd name="adj" fmla="val 3077"/>
-            </a:avLst>
-          </a:prstGeom>
-          <a:solidFill>
-            <a:srgbClr val="EAF3F4"/>
-          </a:solidFill>
-          <a:ln w="12700">
-            <a:solidFill>
-              <a:srgbClr val="D3E5E7"/>
-            </a:solidFill>
-          </a:ln>
-          <a:effectLst/>
-        </p:spPr>
-        <p:style>
-          <a:lnRef idx="1">
-            <a:schemeClr val="accent1"/>
-          </a:lnRef>
-          <a:fillRef idx="3">
-            <a:schemeClr val="accent1"/>
-          </a:fillRef>
-          <a:effectRef idx="2">
-            <a:schemeClr val="accent1"/>
-          </a:effectRef>
-          <a:fontRef idx="minor">
-            <a:schemeClr val="lt1"/>
-          </a:fontRef>
-        </p:style>
-        <p:txBody>
-          <a:bodyPr rtlCol="0" anchor="ctr"/>
-          <a:lstStyle/>
-          <a:p>
-            <a:pPr algn="ctr"/>
-          </a:p>
-        </p:txBody>
-      </p:sp>
-      <p:sp>
-        <p:nvSpPr>
-          <p:cNvPr id="5" name="Text 2"/>
-          <p:cNvSpPr txBox="1"/>
-          <p:nvPr/>
-        </p:nvSpPr>
-        <p:spPr>
-          <a:xfrm>
-            <a:off x="868680" y="1737360"/>
-            <a:ext cx="4809744" cy="365760"/>
-          </a:xfrm>
-          <a:prstGeom prst="rect">
-            <a:avLst/>
-          </a:prstGeom>
-          <a:noFill/>
-        </p:spPr>
-        <p:txBody>
-          <a:bodyPr wrap="square" anchor="t" lIns="0" rIns="0" tIns="0" bIns="0">
-            <a:spAutoFit/>
-          </a:bodyPr>
-          <a:lstStyle/>
-          <a:p>
-            <a:r>
-              <a:rPr sz="1800" b="1">
-                <a:solidFill>
-                  <a:srgbClr val="0E7C86"/>
-                </a:solidFill>
-                <a:latin typeface="Cambria"/>
-              </a:rPr>
-              <a:t>pandas</a:t>
-            </a:r>
-            <a:r>
-              <a:rPr sz="1050" b="0">
-                <a:solidFill>
-                  <a:srgbClr val="5D6B75"/>
-                </a:solidFill>
-                <a:latin typeface="Calibri"/>
-              </a:rPr>
-              <a:t>   3.0</a:t>
-            </a:r>
-          </a:p>
-        </p:txBody>
-      </p:sp>
-      <p:sp>
-        <p:nvSpPr>
-          <p:cNvPr id="6" name="Text 3"/>
-          <p:cNvSpPr txBox="1"/>
-          <p:nvPr/>
-        </p:nvSpPr>
-        <p:spPr>
-          <a:xfrm>
-            <a:off x="868680" y="2231136"/>
-            <a:ext cx="4809744" cy="411479"/>
-          </a:xfrm>
-          <a:prstGeom prst="rect">
-            <a:avLst/>
-          </a:prstGeom>
-          <a:noFill/>
-        </p:spPr>
-        <p:txBody>
-          <a:bodyPr wrap="square" anchor="t" lIns="0" rIns="0" tIns="0" bIns="0">
-            <a:spAutoFit/>
-          </a:bodyPr>
-          <a:lstStyle/>
-          <a:p>
-            <a:pPr>
-              <a:lnSpc>
-                <a:spcPct val="118000"/>
-              </a:lnSpc>
-            </a:pPr>
-            <a:r>
-              <a:rPr sz="1250" b="0">
-                <a:solidFill>
-                  <a:srgbClr val="5D6B75"/>
-                </a:solidFill>
-                <a:latin typeface="Calibri"/>
-              </a:rPr>
-              <a:t>Manipuler 32 millions de lignes. Jointures et regroupements natifs, exécutés en C. Polars irait plus vite ; pandas est le standard.</a:t>
-            </a:r>
-          </a:p>
-        </p:txBody>
-      </p:sp>
-      <p:sp>
-        <p:nvSpPr>
-          <p:cNvPr id="7" name="Shape 1"/>
-          <p:cNvSpPr/>
-          <p:nvPr/>
-        </p:nvSpPr>
-        <p:spPr>
-          <a:xfrm>
-            <a:off x="6236208" y="1554480"/>
-            <a:ext cx="5358384" cy="1325880"/>
-          </a:xfrm>
-          <a:prstGeom prst="roundRect">
-            <a:avLst>
-              <a:gd name="adj" fmla="val 3077"/>
-            </a:avLst>
-          </a:prstGeom>
-          <a:solidFill>
-            <a:srgbClr val="EAF3F4"/>
-          </a:solidFill>
-          <a:ln w="12700">
-            <a:solidFill>
-              <a:srgbClr val="D3E5E7"/>
-            </a:solidFill>
-          </a:ln>
-          <a:effectLst/>
-        </p:spPr>
-        <p:style>
-          <a:lnRef idx="1">
-            <a:schemeClr val="accent1"/>
-          </a:lnRef>
-          <a:fillRef idx="3">
-            <a:schemeClr val="accent1"/>
-          </a:fillRef>
-          <a:effectRef idx="2">
-            <a:schemeClr val="accent1"/>
-          </a:effectRef>
-          <a:fontRef idx="minor">
-            <a:schemeClr val="lt1"/>
-          </a:fontRef>
-        </p:style>
-        <p:txBody>
-          <a:bodyPr rtlCol="0" anchor="ctr"/>
-          <a:lstStyle/>
-          <a:p>
-            <a:pPr algn="ctr"/>
-          </a:p>
-        </p:txBody>
-      </p:sp>
-      <p:sp>
-        <p:nvSpPr>
-          <p:cNvPr id="8" name="Text 4"/>
-          <p:cNvSpPr txBox="1"/>
-          <p:nvPr/>
-        </p:nvSpPr>
-        <p:spPr>
-          <a:xfrm>
-            <a:off x="6510528" y="1737360"/>
-            <a:ext cx="4809744" cy="365760"/>
-          </a:xfrm>
-          <a:prstGeom prst="rect">
-            <a:avLst/>
-          </a:prstGeom>
-          <a:noFill/>
-        </p:spPr>
-        <p:txBody>
-          <a:bodyPr wrap="square" anchor="t" lIns="0" rIns="0" tIns="0" bIns="0">
-            <a:spAutoFit/>
-          </a:bodyPr>
-          <a:lstStyle/>
-          <a:p>
-            <a:r>
-              <a:rPr sz="1800" b="1">
-                <a:solidFill>
-                  <a:srgbClr val="0E7C86"/>
-                </a:solidFill>
-                <a:latin typeface="Cambria"/>
-              </a:rPr>
-              <a:t>NumPy</a:t>
-            </a:r>
-            <a:r>
-              <a:rPr sz="1050" b="0">
-                <a:solidFill>
-                  <a:srgbClr val="5D6B75"/>
-                </a:solidFill>
-                <a:latin typeface="Calibri"/>
-              </a:rPr>
-              <a:t>   2.5</a:t>
-            </a:r>
-          </a:p>
-        </p:txBody>
-      </p:sp>
-      <p:sp>
-        <p:nvSpPr>
-          <p:cNvPr id="9" name="Text 5"/>
-          <p:cNvSpPr txBox="1"/>
-          <p:nvPr/>
-        </p:nvSpPr>
-        <p:spPr>
-          <a:xfrm>
-            <a:off x="6510528" y="2231136"/>
-            <a:ext cx="4809744" cy="411479"/>
-          </a:xfrm>
-          <a:prstGeom prst="rect">
-            <a:avLst/>
-          </a:prstGeom>
-          <a:noFill/>
-        </p:spPr>
-        <p:txBody>
-          <a:bodyPr wrap="square" anchor="t" lIns="0" rIns="0" tIns="0" bIns="0">
-            <a:spAutoFit/>
-          </a:bodyPr>
-          <a:lstStyle/>
-          <a:p>
-            <a:pPr>
-              <a:lnSpc>
-                <a:spcPct val="118000"/>
-              </a:lnSpc>
-            </a:pPr>
-            <a:r>
-              <a:rPr sz="1250" b="0">
-                <a:solidFill>
-                  <a:srgbClr val="5D6B75"/>
-                </a:solidFill>
-                <a:latin typeface="Calibri"/>
-              </a:rPr>
-              <a:t>Le calcul vectorisé sur lequel pandas repose. Et la graine aléatoire qui rend l'exécution reproductible.</a:t>
-            </a:r>
-          </a:p>
-        </p:txBody>
-      </p:sp>
-      <p:sp>
-        <p:nvSpPr>
-          <p:cNvPr id="10" name="Shape 2"/>
-          <p:cNvSpPr/>
-          <p:nvPr/>
-        </p:nvSpPr>
-        <p:spPr>
-          <a:xfrm>
-            <a:off x="594360" y="3035808"/>
-            <a:ext cx="5358384" cy="1325880"/>
-          </a:xfrm>
-          <a:prstGeom prst="roundRect">
-            <a:avLst>
-              <a:gd name="adj" fmla="val 3077"/>
-            </a:avLst>
-          </a:prstGeom>
-          <a:solidFill>
-            <a:srgbClr val="EAF3F4"/>
-          </a:solidFill>
-          <a:ln w="12700">
-            <a:solidFill>
-              <a:srgbClr val="D3E5E7"/>
-            </a:solidFill>
-          </a:ln>
-          <a:effectLst/>
-        </p:spPr>
-        <p:style>
-          <a:lnRef idx="1">
-            <a:schemeClr val="accent1"/>
-          </a:lnRef>
-          <a:fillRef idx="3">
-            <a:schemeClr val="accent1"/>
-          </a:fillRef>
-          <a:effectRef idx="2">
-            <a:schemeClr val="accent1"/>
-          </a:effectRef>
-          <a:fontRef idx="minor">
-            <a:schemeClr val="lt1"/>
-          </a:fontRef>
-        </p:style>
-        <p:txBody>
-          <a:bodyPr rtlCol="0" anchor="ctr"/>
-          <a:lstStyle/>
-          <a:p>
-            <a:pPr algn="ctr"/>
-          </a:p>
-        </p:txBody>
-      </p:sp>
-      <p:sp>
-        <p:nvSpPr>
-          <p:cNvPr id="11" name="Text 6"/>
-          <p:cNvSpPr txBox="1"/>
-          <p:nvPr/>
-        </p:nvSpPr>
-        <p:spPr>
-          <a:xfrm>
-            <a:off x="868680" y="3218688"/>
-            <a:ext cx="4809744" cy="365760"/>
-          </a:xfrm>
-          <a:prstGeom prst="rect">
-            <a:avLst/>
-          </a:prstGeom>
-          <a:noFill/>
-        </p:spPr>
-        <p:txBody>
-          <a:bodyPr wrap="square" anchor="t" lIns="0" rIns="0" tIns="0" bIns="0">
-            <a:spAutoFit/>
-          </a:bodyPr>
-          <a:lstStyle/>
-          <a:p>
-            <a:r>
-              <a:rPr sz="1800" b="1">
-                <a:solidFill>
-                  <a:srgbClr val="0E7C86"/>
-                </a:solidFill>
-                <a:latin typeface="Cambria"/>
-              </a:rPr>
-              <a:t>Matplotlib</a:t>
-            </a:r>
-            <a:r>
-              <a:rPr sz="1050" b="0">
-                <a:solidFill>
-                  <a:srgbClr val="5D6B75"/>
-                </a:solidFill>
-                <a:latin typeface="Calibri"/>
-              </a:rPr>
-              <a:t>   3.11</a:t>
-            </a:r>
-          </a:p>
-        </p:txBody>
-      </p:sp>
-      <p:sp>
-        <p:nvSpPr>
-          <p:cNvPr id="12" name="Text 7"/>
-          <p:cNvSpPr txBox="1"/>
-          <p:nvPr/>
-        </p:nvSpPr>
-        <p:spPr>
-          <a:xfrm>
-            <a:off x="868680" y="3712463"/>
-            <a:ext cx="4809744" cy="411479"/>
-          </a:xfrm>
-          <a:prstGeom prst="rect">
-            <a:avLst/>
-          </a:prstGeom>
-          <a:noFill/>
-        </p:spPr>
-        <p:txBody>
-          <a:bodyPr wrap="square" anchor="t" lIns="0" rIns="0" tIns="0" bIns="0">
-            <a:spAutoFit/>
-          </a:bodyPr>
-          <a:lstStyle/>
-          <a:p>
-            <a:pPr>
-              <a:lnSpc>
-                <a:spcPct val="118000"/>
-              </a:lnSpc>
-            </a:pPr>
-            <a:r>
-              <a:rPr sz="1250" b="0">
-                <a:solidFill>
-                  <a:srgbClr val="5D6B75"/>
-                </a:solidFill>
-                <a:latin typeface="Calibri"/>
-              </a:rPr>
-              <a:t>Les dix graphiques. Moins commode que Seaborn, mais le contrôle sur chaque élément — donc sur chaque ornement retiré.</a:t>
-            </a:r>
-          </a:p>
-        </p:txBody>
-      </p:sp>
-      <p:sp>
-        <p:nvSpPr>
-          <p:cNvPr id="13" name="Shape 3"/>
-          <p:cNvSpPr/>
-          <p:nvPr/>
-        </p:nvSpPr>
-        <p:spPr>
-          <a:xfrm>
-            <a:off x="6236208" y="3035808"/>
-            <a:ext cx="5358384" cy="1325880"/>
-          </a:xfrm>
-          <a:prstGeom prst="roundRect">
-            <a:avLst>
-              <a:gd name="adj" fmla="val 3077"/>
-            </a:avLst>
-          </a:prstGeom>
-          <a:solidFill>
-            <a:srgbClr val="EAF3F4"/>
-          </a:solidFill>
-          <a:ln w="12700">
-            <a:solidFill>
-              <a:srgbClr val="D3E5E7"/>
-            </a:solidFill>
-          </a:ln>
-          <a:effectLst/>
-        </p:spPr>
-        <p:style>
-          <a:lnRef idx="1">
-            <a:schemeClr val="accent1"/>
-          </a:lnRef>
-          <a:fillRef idx="3">
-            <a:schemeClr val="accent1"/>
-          </a:fillRef>
-          <a:effectRef idx="2">
-            <a:schemeClr val="accent1"/>
-          </a:effectRef>
-          <a:fontRef idx="minor">
-            <a:schemeClr val="lt1"/>
-          </a:fontRef>
-        </p:style>
-        <p:txBody>
-          <a:bodyPr rtlCol="0" anchor="ctr"/>
-          <a:lstStyle/>
-          <a:p>
-            <a:pPr algn="ctr"/>
-          </a:p>
-        </p:txBody>
-      </p:sp>
-      <p:sp>
-        <p:nvSpPr>
-          <p:cNvPr id="14" name="Text 8"/>
-          <p:cNvSpPr txBox="1"/>
-          <p:nvPr/>
-        </p:nvSpPr>
-        <p:spPr>
-          <a:xfrm>
-            <a:off x="6510528" y="3218688"/>
-            <a:ext cx="4809744" cy="365760"/>
-          </a:xfrm>
-          <a:prstGeom prst="rect">
-            <a:avLst/>
-          </a:prstGeom>
-          <a:noFill/>
-        </p:spPr>
-        <p:txBody>
-          <a:bodyPr wrap="square" anchor="t" lIns="0" rIns="0" tIns="0" bIns="0">
-            <a:spAutoFit/>
-          </a:bodyPr>
-          <a:lstStyle/>
-          <a:p>
-            <a:r>
-              <a:rPr sz="1800" b="1">
-                <a:solidFill>
-                  <a:srgbClr val="0E7C86"/>
-                </a:solidFill>
-                <a:latin typeface="Cambria"/>
-              </a:rPr>
-              <a:t>scikit-learn</a:t>
-            </a:r>
-            <a:r>
-              <a:rPr sz="1050" b="0">
-                <a:solidFill>
-                  <a:srgbClr val="5D6B75"/>
-                </a:solidFill>
-                <a:latin typeface="Calibri"/>
-              </a:rPr>
-              <a:t>   1.9</a:t>
-            </a:r>
-          </a:p>
-        </p:txBody>
-      </p:sp>
-      <p:sp>
-        <p:nvSpPr>
-          <p:cNvPr id="15" name="Text 9"/>
-          <p:cNvSpPr txBox="1"/>
-          <p:nvPr/>
-        </p:nvSpPr>
-        <p:spPr>
-          <a:xfrm>
-            <a:off x="6510528" y="3712463"/>
-            <a:ext cx="4809744" cy="411479"/>
-          </a:xfrm>
-          <a:prstGeom prst="rect">
-            <a:avLst/>
-          </a:prstGeom>
-          <a:noFill/>
-        </p:spPr>
-        <p:txBody>
-          <a:bodyPr wrap="square" anchor="t" lIns="0" rIns="0" tIns="0" bIns="0">
-            <a:spAutoFit/>
-          </a:bodyPr>
-          <a:lstStyle/>
-          <a:p>
-            <a:pPr>
-              <a:lnSpc>
-                <a:spcPct val="118000"/>
-              </a:lnSpc>
-            </a:pPr>
-            <a:r>
-              <a:rPr sz="1250" b="0">
-                <a:solidFill>
-                  <a:srgbClr val="5D6B75"/>
-                </a:solidFill>
-                <a:latin typeface="Calibri"/>
-              </a:rPr>
-              <a:t>Le modèle prédictif. Une seule interface </a:t>
-            </a:r>
-            <a:r>
-              <a:rPr sz="1250" b="1">
-                <a:solidFill>
-                  <a:srgbClr val="16232B"/>
-                </a:solidFill>
-                <a:latin typeface="Calibri"/>
-              </a:rPr>
-              <a:t>fit / predict</a:t>
-            </a:r>
-            <a:r>
-              <a:rPr sz="1250" b="0">
-                <a:solidFill>
-                  <a:srgbClr val="5D6B75"/>
-                </a:solidFill>
-                <a:latin typeface="Calibri"/>
-              </a:rPr>
-              <a:t> : comparer quatre algorithmes ne change qu'un nom.</a:t>
-            </a:r>
-          </a:p>
-        </p:txBody>
-      </p:sp>
-      <p:sp>
-        <p:nvSpPr>
-          <p:cNvPr id="16" name="Text 10"/>
-          <p:cNvSpPr txBox="1"/>
-          <p:nvPr/>
-        </p:nvSpPr>
-        <p:spPr>
-          <a:xfrm>
-            <a:off x="594360" y="4572000"/>
-            <a:ext cx="10972800" cy="640080"/>
-          </a:xfrm>
-          <a:prstGeom prst="rect">
-            <a:avLst/>
-          </a:prstGeom>
-          <a:noFill/>
-        </p:spPr>
-        <p:txBody>
-          <a:bodyPr wrap="square" anchor="ctr" lIns="0" rIns="0" tIns="0" bIns="0">
-            <a:spAutoFit/>
-          </a:bodyPr>
-          <a:lstStyle/>
-          <a:p>
-            <a:pPr>
-              <a:lnSpc>
-                <a:spcPct val="120000"/>
-              </a:lnSpc>
-            </a:pPr>
-            <a:r>
-              <a:rPr sz="1350" b="0">
-                <a:solidFill>
-                  <a:srgbClr val="5D6B75"/>
-                </a:solidFill>
-                <a:latin typeface="Calibri"/>
-              </a:rPr>
-              <a:t>Versions figées dans </a:t>
-            </a:r>
-            <a:r>
-              <a:rPr sz="1300" b="0">
-                <a:solidFill>
-                  <a:srgbClr val="16232B"/>
-                </a:solidFill>
-                <a:latin typeface="Consolas"/>
-              </a:rPr>
-              <a:t>requirements.txt</a:t>
-            </a:r>
-            <a:r>
-              <a:rPr sz="1350" b="0">
-                <a:solidFill>
-                  <a:srgbClr val="5D6B75"/>
-                </a:solidFill>
-                <a:latin typeface="Calibri"/>
-              </a:rPr>
-              <a:t>. Les types compacts imposés à pandas ramènent la mémoire de 3,2 Go à 1,0 Go.</a:t>
-            </a:r>
           </a:p>
         </p:txBody>
       </p:sp>
@@ -5686,6 +5325,796 @@
 
 <file path=ppt/slides/slide3.xml><?xml version="1.0" encoding="utf-8"?>
 <p:sld xmlns:a="http://schemas.openxmlformats.org/drawingml/2006/main" xmlns:r="http://schemas.openxmlformats.org/officeDocument/2006/relationships" xmlns:p="http://schemas.openxmlformats.org/presentationml/2006/main">
+  <p:cSld>
+    <p:bg>
+      <p:bgPr>
+        <a:solidFill>
+          <a:srgbClr val="FFFFFF"/>
+        </a:solidFill>
+        <a:effectLst/>
+      </p:bgPr>
+    </p:bg>
+    <p:spTree>
+      <p:nvGrpSpPr>
+        <p:cNvPr id="1" name=""/>
+        <p:cNvGrpSpPr/>
+        <p:nvPr/>
+      </p:nvGrpSpPr>
+      <p:grpSpPr>
+        <a:xfrm>
+          <a:off x="0" y="0"/>
+          <a:ext cx="0" cy="0"/>
+          <a:chOff x="0" y="0"/>
+          <a:chExt cx="0" cy="0"/>
+        </a:xfrm>
+      </p:grpSpPr>
+      <p:sp>
+        <p:nvSpPr>
+          <p:cNvPr id="2" name="Text 0"/>
+          <p:cNvSpPr txBox="1"/>
+          <p:nvPr/>
+        </p:nvSpPr>
+        <p:spPr>
+          <a:xfrm>
+            <a:off x="594360" y="182880"/>
+            <a:ext cx="10972800" cy="219456"/>
+          </a:xfrm>
+          <a:prstGeom prst="rect">
+            <a:avLst/>
+          </a:prstGeom>
+          <a:noFill/>
+        </p:spPr>
+        <p:txBody>
+          <a:bodyPr wrap="square" lIns="0" tIns="0" rIns="0" bIns="0" anchor="ctr">
+            <a:spAutoFit/>
+          </a:bodyPr>
+          <a:lstStyle/>
+          <a:p>
+            <a:r>
+              <a:rPr sz="1050" b="1" spc="160">
+                <a:solidFill>
+                  <a:srgbClr val="0E7C86"/>
+                </a:solidFill>
+                <a:latin typeface="Calibri"/>
+              </a:rPr>
+              <a:t>AVEC QUOI NOUS AVONS TRAVAILLÉ</a:t>
+            </a:r>
+          </a:p>
+        </p:txBody>
+      </p:sp>
+      <p:sp>
+        <p:nvSpPr>
+          <p:cNvPr id="3" name="Text 1"/>
+          <p:cNvSpPr txBox="1"/>
+          <p:nvPr/>
+        </p:nvSpPr>
+        <p:spPr>
+          <a:xfrm>
+            <a:off x="594360" y="384048"/>
+            <a:ext cx="10972800" cy="658368"/>
+          </a:xfrm>
+          <a:prstGeom prst="rect">
+            <a:avLst/>
+          </a:prstGeom>
+          <a:noFill/>
+        </p:spPr>
+        <p:txBody>
+          <a:bodyPr wrap="square" lIns="0" tIns="0" rIns="0" bIns="0" anchor="ctr">
+            <a:spAutoFit/>
+          </a:bodyPr>
+          <a:lstStyle/>
+          <a:p>
+            <a:r>
+              <a:rPr sz="2700" b="1">
+                <a:solidFill>
+                  <a:srgbClr val="16232B"/>
+                </a:solidFill>
+                <a:latin typeface="Cambria"/>
+              </a:rPr>
+              <a:t>Quatre bibliothèques, un choix assumé pour chacune</a:t>
+            </a:r>
+          </a:p>
+        </p:txBody>
+      </p:sp>
+      <p:sp>
+        <p:nvSpPr>
+          <p:cNvPr id="4" name="Shape 0"/>
+          <p:cNvSpPr/>
+          <p:nvPr/>
+        </p:nvSpPr>
+        <p:spPr>
+          <a:xfrm>
+            <a:off x="594360" y="1554480"/>
+            <a:ext cx="5358384" cy="1325880"/>
+          </a:xfrm>
+          <a:prstGeom prst="roundRect">
+            <a:avLst>
+              <a:gd name="adj" fmla="val 3077"/>
+            </a:avLst>
+          </a:prstGeom>
+          <a:solidFill>
+            <a:srgbClr val="EAF3F4"/>
+          </a:solidFill>
+          <a:ln w="12700">
+            <a:solidFill>
+              <a:srgbClr val="D3E5E7"/>
+            </a:solidFill>
+          </a:ln>
+          <a:effectLst/>
+        </p:spPr>
+        <p:style>
+          <a:lnRef idx="1">
+            <a:schemeClr val="accent1"/>
+          </a:lnRef>
+          <a:fillRef idx="3">
+            <a:schemeClr val="accent1"/>
+          </a:fillRef>
+          <a:effectRef idx="2">
+            <a:schemeClr val="accent1"/>
+          </a:effectRef>
+          <a:fontRef idx="minor">
+            <a:schemeClr val="lt1"/>
+          </a:fontRef>
+        </p:style>
+        <p:txBody>
+          <a:bodyPr rtlCol="0" anchor="ctr"/>
+          <a:lstStyle/>
+          <a:p>
+            <a:pPr algn="ctr"/>
+            <a:endParaRPr/>
+          </a:p>
+        </p:txBody>
+      </p:sp>
+      <p:sp>
+        <p:nvSpPr>
+          <p:cNvPr id="5" name="Text 2"/>
+          <p:cNvSpPr txBox="1"/>
+          <p:nvPr/>
+        </p:nvSpPr>
+        <p:spPr>
+          <a:xfrm>
+            <a:off x="868680" y="1737360"/>
+            <a:ext cx="4809744" cy="365760"/>
+          </a:xfrm>
+          <a:prstGeom prst="rect">
+            <a:avLst/>
+          </a:prstGeom>
+          <a:noFill/>
+        </p:spPr>
+        <p:txBody>
+          <a:bodyPr wrap="square" lIns="0" tIns="0" rIns="0" bIns="0" anchor="t">
+            <a:spAutoFit/>
+          </a:bodyPr>
+          <a:lstStyle/>
+          <a:p>
+            <a:r>
+              <a:rPr sz="1800" b="1">
+                <a:solidFill>
+                  <a:srgbClr val="0E7C86"/>
+                </a:solidFill>
+                <a:latin typeface="Cambria"/>
+              </a:rPr>
+              <a:t>pandas</a:t>
+            </a:r>
+            <a:r>
+              <a:rPr sz="1050" b="0">
+                <a:solidFill>
+                  <a:srgbClr val="5D6B75"/>
+                </a:solidFill>
+                <a:latin typeface="Calibri"/>
+              </a:rPr>
+              <a:t>   3.0</a:t>
+            </a:r>
+          </a:p>
+        </p:txBody>
+      </p:sp>
+      <p:sp>
+        <p:nvSpPr>
+          <p:cNvPr id="6" name="Text 3"/>
+          <p:cNvSpPr txBox="1"/>
+          <p:nvPr/>
+        </p:nvSpPr>
+        <p:spPr>
+          <a:xfrm>
+            <a:off x="868680" y="2231136"/>
+            <a:ext cx="4809744" cy="411479"/>
+          </a:xfrm>
+          <a:prstGeom prst="rect">
+            <a:avLst/>
+          </a:prstGeom>
+          <a:noFill/>
+        </p:spPr>
+        <p:txBody>
+          <a:bodyPr wrap="square" lIns="0" tIns="0" rIns="0" bIns="0" anchor="t">
+            <a:spAutoFit/>
+          </a:bodyPr>
+          <a:lstStyle/>
+          <a:p>
+            <a:pPr>
+              <a:lnSpc>
+                <a:spcPct val="118000"/>
+              </a:lnSpc>
+            </a:pPr>
+            <a:r>
+              <a:rPr sz="1250" b="0">
+                <a:solidFill>
+                  <a:srgbClr val="5D6B75"/>
+                </a:solidFill>
+                <a:latin typeface="Calibri"/>
+              </a:rPr>
+              <a:t>Manipuler 32 millions de lignes. Jointures et regroupements natifs, exécutés en C. Polars irait plus vite ; pandas est le standard.</a:t>
+            </a:r>
+          </a:p>
+        </p:txBody>
+      </p:sp>
+      <p:sp>
+        <p:nvSpPr>
+          <p:cNvPr id="7" name="Shape 1"/>
+          <p:cNvSpPr/>
+          <p:nvPr/>
+        </p:nvSpPr>
+        <p:spPr>
+          <a:xfrm>
+            <a:off x="6236208" y="1554480"/>
+            <a:ext cx="5358384" cy="1325880"/>
+          </a:xfrm>
+          <a:prstGeom prst="roundRect">
+            <a:avLst>
+              <a:gd name="adj" fmla="val 3077"/>
+            </a:avLst>
+          </a:prstGeom>
+          <a:solidFill>
+            <a:srgbClr val="EAF3F4"/>
+          </a:solidFill>
+          <a:ln w="12700">
+            <a:solidFill>
+              <a:srgbClr val="D3E5E7"/>
+            </a:solidFill>
+          </a:ln>
+          <a:effectLst/>
+        </p:spPr>
+        <p:style>
+          <a:lnRef idx="1">
+            <a:schemeClr val="accent1"/>
+          </a:lnRef>
+          <a:fillRef idx="3">
+            <a:schemeClr val="accent1"/>
+          </a:fillRef>
+          <a:effectRef idx="2">
+            <a:schemeClr val="accent1"/>
+          </a:effectRef>
+          <a:fontRef idx="minor">
+            <a:schemeClr val="lt1"/>
+          </a:fontRef>
+        </p:style>
+        <p:txBody>
+          <a:bodyPr rtlCol="0" anchor="ctr"/>
+          <a:lstStyle/>
+          <a:p>
+            <a:pPr algn="ctr"/>
+            <a:endParaRPr/>
+          </a:p>
+        </p:txBody>
+      </p:sp>
+      <p:sp>
+        <p:nvSpPr>
+          <p:cNvPr id="8" name="Text 4"/>
+          <p:cNvSpPr txBox="1"/>
+          <p:nvPr/>
+        </p:nvSpPr>
+        <p:spPr>
+          <a:xfrm>
+            <a:off x="6510528" y="1737360"/>
+            <a:ext cx="4809744" cy="365760"/>
+          </a:xfrm>
+          <a:prstGeom prst="rect">
+            <a:avLst/>
+          </a:prstGeom>
+          <a:noFill/>
+        </p:spPr>
+        <p:txBody>
+          <a:bodyPr wrap="square" lIns="0" tIns="0" rIns="0" bIns="0" anchor="t">
+            <a:spAutoFit/>
+          </a:bodyPr>
+          <a:lstStyle/>
+          <a:p>
+            <a:r>
+              <a:rPr sz="1800" b="1" dirty="0">
+                <a:solidFill>
+                  <a:srgbClr val="0E7C86"/>
+                </a:solidFill>
+                <a:latin typeface="Cambria"/>
+              </a:rPr>
+              <a:t>NumPy</a:t>
+            </a:r>
+            <a:r>
+              <a:rPr sz="1050" b="0" dirty="0">
+                <a:solidFill>
+                  <a:srgbClr val="5D6B75"/>
+                </a:solidFill>
+                <a:latin typeface="Calibri"/>
+              </a:rPr>
+              <a:t>   2.5</a:t>
+            </a:r>
+          </a:p>
+        </p:txBody>
+      </p:sp>
+      <p:sp>
+        <p:nvSpPr>
+          <p:cNvPr id="9" name="Text 5"/>
+          <p:cNvSpPr txBox="1"/>
+          <p:nvPr/>
+        </p:nvSpPr>
+        <p:spPr>
+          <a:xfrm>
+            <a:off x="6510528" y="2231136"/>
+            <a:ext cx="4809744" cy="411479"/>
+          </a:xfrm>
+          <a:prstGeom prst="rect">
+            <a:avLst/>
+          </a:prstGeom>
+          <a:noFill/>
+        </p:spPr>
+        <p:txBody>
+          <a:bodyPr wrap="square" lIns="0" tIns="0" rIns="0" bIns="0" anchor="t">
+            <a:spAutoFit/>
+          </a:bodyPr>
+          <a:lstStyle/>
+          <a:p>
+            <a:pPr>
+              <a:lnSpc>
+                <a:spcPct val="118000"/>
+              </a:lnSpc>
+            </a:pPr>
+            <a:r>
+              <a:rPr sz="1250" b="0" dirty="0">
+                <a:solidFill>
+                  <a:srgbClr val="5D6B75"/>
+                </a:solidFill>
+                <a:latin typeface="Calibri"/>
+              </a:rPr>
+              <a:t>Le </a:t>
+            </a:r>
+            <a:r>
+              <a:rPr sz="1250" b="0" dirty="0" err="1">
+                <a:solidFill>
+                  <a:srgbClr val="5D6B75"/>
+                </a:solidFill>
+                <a:latin typeface="Calibri"/>
+              </a:rPr>
+              <a:t>calcul</a:t>
+            </a:r>
+            <a:r>
+              <a:rPr sz="1250" b="0" dirty="0">
+                <a:solidFill>
+                  <a:srgbClr val="5D6B75"/>
+                </a:solidFill>
+                <a:latin typeface="Calibri"/>
+              </a:rPr>
+              <a:t> </a:t>
+            </a:r>
+            <a:r>
+              <a:rPr sz="1250" b="0" dirty="0" err="1">
+                <a:solidFill>
+                  <a:srgbClr val="5D6B75"/>
+                </a:solidFill>
+                <a:latin typeface="Calibri"/>
+              </a:rPr>
+              <a:t>vectorisé</a:t>
+            </a:r>
+            <a:r>
+              <a:rPr sz="1250" b="0" dirty="0">
+                <a:solidFill>
+                  <a:srgbClr val="5D6B75"/>
+                </a:solidFill>
+                <a:latin typeface="Calibri"/>
+              </a:rPr>
+              <a:t> sur </a:t>
+            </a:r>
+            <a:r>
+              <a:rPr sz="1250" b="0" dirty="0" err="1">
+                <a:solidFill>
+                  <a:srgbClr val="5D6B75"/>
+                </a:solidFill>
+                <a:latin typeface="Calibri"/>
+              </a:rPr>
+              <a:t>lequel</a:t>
+            </a:r>
+            <a:r>
+              <a:rPr sz="1250" b="0" dirty="0">
+                <a:solidFill>
+                  <a:srgbClr val="5D6B75"/>
+                </a:solidFill>
+                <a:latin typeface="Calibri"/>
+              </a:rPr>
+              <a:t> pandas repose. Et la graine </a:t>
+            </a:r>
+            <a:r>
+              <a:rPr sz="1250" b="0" dirty="0" err="1">
+                <a:solidFill>
+                  <a:srgbClr val="5D6B75"/>
+                </a:solidFill>
+                <a:latin typeface="Calibri"/>
+              </a:rPr>
+              <a:t>aléatoire</a:t>
+            </a:r>
+            <a:r>
+              <a:rPr sz="1250" b="0" dirty="0">
+                <a:solidFill>
+                  <a:srgbClr val="5D6B75"/>
+                </a:solidFill>
+                <a:latin typeface="Calibri"/>
+              </a:rPr>
+              <a:t> qui rend </a:t>
+            </a:r>
+            <a:r>
+              <a:rPr sz="1250" b="0" dirty="0" err="1">
+                <a:solidFill>
+                  <a:srgbClr val="5D6B75"/>
+                </a:solidFill>
+                <a:latin typeface="Calibri"/>
+              </a:rPr>
+              <a:t>l'exécution</a:t>
+            </a:r>
+            <a:r>
+              <a:rPr sz="1250" b="0" dirty="0">
+                <a:solidFill>
+                  <a:srgbClr val="5D6B75"/>
+                </a:solidFill>
+                <a:latin typeface="Calibri"/>
+              </a:rPr>
+              <a:t> reproductible.</a:t>
+            </a:r>
+          </a:p>
+        </p:txBody>
+      </p:sp>
+      <p:sp>
+        <p:nvSpPr>
+          <p:cNvPr id="10" name="Shape 2"/>
+          <p:cNvSpPr/>
+          <p:nvPr/>
+        </p:nvSpPr>
+        <p:spPr>
+          <a:xfrm>
+            <a:off x="594360" y="3035808"/>
+            <a:ext cx="5358384" cy="1325880"/>
+          </a:xfrm>
+          <a:prstGeom prst="roundRect">
+            <a:avLst>
+              <a:gd name="adj" fmla="val 3077"/>
+            </a:avLst>
+          </a:prstGeom>
+          <a:solidFill>
+            <a:srgbClr val="EAF3F4"/>
+          </a:solidFill>
+          <a:ln w="12700">
+            <a:solidFill>
+              <a:srgbClr val="D3E5E7"/>
+            </a:solidFill>
+          </a:ln>
+          <a:effectLst/>
+        </p:spPr>
+        <p:style>
+          <a:lnRef idx="1">
+            <a:schemeClr val="accent1"/>
+          </a:lnRef>
+          <a:fillRef idx="3">
+            <a:schemeClr val="accent1"/>
+          </a:fillRef>
+          <a:effectRef idx="2">
+            <a:schemeClr val="accent1"/>
+          </a:effectRef>
+          <a:fontRef idx="minor">
+            <a:schemeClr val="lt1"/>
+          </a:fontRef>
+        </p:style>
+        <p:txBody>
+          <a:bodyPr rtlCol="0" anchor="ctr"/>
+          <a:lstStyle/>
+          <a:p>
+            <a:pPr algn="ctr"/>
+            <a:endParaRPr/>
+          </a:p>
+        </p:txBody>
+      </p:sp>
+      <p:sp>
+        <p:nvSpPr>
+          <p:cNvPr id="11" name="Text 6"/>
+          <p:cNvSpPr txBox="1"/>
+          <p:nvPr/>
+        </p:nvSpPr>
+        <p:spPr>
+          <a:xfrm>
+            <a:off x="868680" y="3218688"/>
+            <a:ext cx="4809744" cy="365760"/>
+          </a:xfrm>
+          <a:prstGeom prst="rect">
+            <a:avLst/>
+          </a:prstGeom>
+          <a:noFill/>
+        </p:spPr>
+        <p:txBody>
+          <a:bodyPr wrap="square" lIns="0" tIns="0" rIns="0" bIns="0" anchor="t">
+            <a:spAutoFit/>
+          </a:bodyPr>
+          <a:lstStyle/>
+          <a:p>
+            <a:r>
+              <a:rPr sz="1800" b="1">
+                <a:solidFill>
+                  <a:srgbClr val="0E7C86"/>
+                </a:solidFill>
+                <a:latin typeface="Cambria"/>
+              </a:rPr>
+              <a:t>Matplotlib</a:t>
+            </a:r>
+            <a:r>
+              <a:rPr sz="1050" b="0">
+                <a:solidFill>
+                  <a:srgbClr val="5D6B75"/>
+                </a:solidFill>
+                <a:latin typeface="Calibri"/>
+              </a:rPr>
+              <a:t>   3.11</a:t>
+            </a:r>
+          </a:p>
+        </p:txBody>
+      </p:sp>
+      <p:sp>
+        <p:nvSpPr>
+          <p:cNvPr id="12" name="Text 7"/>
+          <p:cNvSpPr txBox="1"/>
+          <p:nvPr/>
+        </p:nvSpPr>
+        <p:spPr>
+          <a:xfrm>
+            <a:off x="868680" y="3712463"/>
+            <a:ext cx="4809744" cy="411479"/>
+          </a:xfrm>
+          <a:prstGeom prst="rect">
+            <a:avLst/>
+          </a:prstGeom>
+          <a:noFill/>
+        </p:spPr>
+        <p:txBody>
+          <a:bodyPr wrap="square" lIns="0" tIns="0" rIns="0" bIns="0" anchor="t">
+            <a:spAutoFit/>
+          </a:bodyPr>
+          <a:lstStyle/>
+          <a:p>
+            <a:pPr>
+              <a:lnSpc>
+                <a:spcPct val="118000"/>
+              </a:lnSpc>
+            </a:pPr>
+            <a:r>
+              <a:rPr sz="1250" b="0">
+                <a:solidFill>
+                  <a:srgbClr val="5D6B75"/>
+                </a:solidFill>
+                <a:latin typeface="Calibri"/>
+              </a:rPr>
+              <a:t>Les dix graphiques. Moins commode que Seaborn, mais le contrôle sur chaque élément — donc sur chaque ornement retiré.</a:t>
+            </a:r>
+          </a:p>
+        </p:txBody>
+      </p:sp>
+      <p:sp>
+        <p:nvSpPr>
+          <p:cNvPr id="13" name="Shape 3"/>
+          <p:cNvSpPr/>
+          <p:nvPr/>
+        </p:nvSpPr>
+        <p:spPr>
+          <a:xfrm>
+            <a:off x="6236208" y="3035808"/>
+            <a:ext cx="5358384" cy="1325880"/>
+          </a:xfrm>
+          <a:prstGeom prst="roundRect">
+            <a:avLst>
+              <a:gd name="adj" fmla="val 3077"/>
+            </a:avLst>
+          </a:prstGeom>
+          <a:solidFill>
+            <a:srgbClr val="EAF3F4"/>
+          </a:solidFill>
+          <a:ln w="12700">
+            <a:solidFill>
+              <a:srgbClr val="D3E5E7"/>
+            </a:solidFill>
+          </a:ln>
+          <a:effectLst/>
+        </p:spPr>
+        <p:style>
+          <a:lnRef idx="1">
+            <a:schemeClr val="accent1"/>
+          </a:lnRef>
+          <a:fillRef idx="3">
+            <a:schemeClr val="accent1"/>
+          </a:fillRef>
+          <a:effectRef idx="2">
+            <a:schemeClr val="accent1"/>
+          </a:effectRef>
+          <a:fontRef idx="minor">
+            <a:schemeClr val="lt1"/>
+          </a:fontRef>
+        </p:style>
+        <p:txBody>
+          <a:bodyPr rtlCol="0" anchor="ctr"/>
+          <a:lstStyle/>
+          <a:p>
+            <a:pPr algn="ctr"/>
+            <a:endParaRPr/>
+          </a:p>
+        </p:txBody>
+      </p:sp>
+      <p:sp>
+        <p:nvSpPr>
+          <p:cNvPr id="14" name="Text 8"/>
+          <p:cNvSpPr txBox="1"/>
+          <p:nvPr/>
+        </p:nvSpPr>
+        <p:spPr>
+          <a:xfrm>
+            <a:off x="6510528" y="3218688"/>
+            <a:ext cx="4809744" cy="365760"/>
+          </a:xfrm>
+          <a:prstGeom prst="rect">
+            <a:avLst/>
+          </a:prstGeom>
+          <a:noFill/>
+        </p:spPr>
+        <p:txBody>
+          <a:bodyPr wrap="square" lIns="0" tIns="0" rIns="0" bIns="0" anchor="t">
+            <a:spAutoFit/>
+          </a:bodyPr>
+          <a:lstStyle/>
+          <a:p>
+            <a:r>
+              <a:rPr sz="1800" b="1">
+                <a:solidFill>
+                  <a:srgbClr val="0E7C86"/>
+                </a:solidFill>
+                <a:latin typeface="Cambria"/>
+              </a:rPr>
+              <a:t>scikit-learn</a:t>
+            </a:r>
+            <a:r>
+              <a:rPr sz="1050" b="0">
+                <a:solidFill>
+                  <a:srgbClr val="5D6B75"/>
+                </a:solidFill>
+                <a:latin typeface="Calibri"/>
+              </a:rPr>
+              <a:t>   1.9</a:t>
+            </a:r>
+          </a:p>
+        </p:txBody>
+      </p:sp>
+      <p:sp>
+        <p:nvSpPr>
+          <p:cNvPr id="15" name="Text 9"/>
+          <p:cNvSpPr txBox="1"/>
+          <p:nvPr/>
+        </p:nvSpPr>
+        <p:spPr>
+          <a:xfrm>
+            <a:off x="6510528" y="3712463"/>
+            <a:ext cx="4809744" cy="411479"/>
+          </a:xfrm>
+          <a:prstGeom prst="rect">
+            <a:avLst/>
+          </a:prstGeom>
+          <a:noFill/>
+        </p:spPr>
+        <p:txBody>
+          <a:bodyPr wrap="square" lIns="0" tIns="0" rIns="0" bIns="0" anchor="t">
+            <a:spAutoFit/>
+          </a:bodyPr>
+          <a:lstStyle/>
+          <a:p>
+            <a:pPr>
+              <a:lnSpc>
+                <a:spcPct val="118000"/>
+              </a:lnSpc>
+            </a:pPr>
+            <a:r>
+              <a:rPr sz="1250" b="0">
+                <a:solidFill>
+                  <a:srgbClr val="5D6B75"/>
+                </a:solidFill>
+                <a:latin typeface="Calibri"/>
+              </a:rPr>
+              <a:t>Le modèle prédictif. Une seule interface </a:t>
+            </a:r>
+            <a:r>
+              <a:rPr sz="1250" b="1">
+                <a:solidFill>
+                  <a:srgbClr val="16232B"/>
+                </a:solidFill>
+                <a:latin typeface="Calibri"/>
+              </a:rPr>
+              <a:t>fit / predict</a:t>
+            </a:r>
+            <a:r>
+              <a:rPr sz="1250" b="0">
+                <a:solidFill>
+                  <a:srgbClr val="5D6B75"/>
+                </a:solidFill>
+                <a:latin typeface="Calibri"/>
+              </a:rPr>
+              <a:t> : comparer quatre algorithmes ne change qu'un nom.</a:t>
+            </a:r>
+          </a:p>
+        </p:txBody>
+      </p:sp>
+      <p:sp>
+        <p:nvSpPr>
+          <p:cNvPr id="16" name="Text 10"/>
+          <p:cNvSpPr txBox="1"/>
+          <p:nvPr/>
+        </p:nvSpPr>
+        <p:spPr>
+          <a:xfrm>
+            <a:off x="594360" y="4572000"/>
+            <a:ext cx="10972800" cy="640080"/>
+          </a:xfrm>
+          <a:prstGeom prst="rect">
+            <a:avLst/>
+          </a:prstGeom>
+          <a:noFill/>
+        </p:spPr>
+        <p:txBody>
+          <a:bodyPr wrap="square" lIns="0" tIns="0" rIns="0" bIns="0" anchor="ctr">
+            <a:spAutoFit/>
+          </a:bodyPr>
+          <a:lstStyle/>
+          <a:p>
+            <a:pPr>
+              <a:lnSpc>
+                <a:spcPct val="120000"/>
+              </a:lnSpc>
+            </a:pPr>
+            <a:r>
+              <a:rPr sz="1350" b="0">
+                <a:solidFill>
+                  <a:srgbClr val="5D6B75"/>
+                </a:solidFill>
+                <a:latin typeface="Calibri"/>
+              </a:rPr>
+              <a:t>Versions figées dans </a:t>
+            </a:r>
+            <a:r>
+              <a:rPr sz="1300" b="0">
+                <a:solidFill>
+                  <a:srgbClr val="16232B"/>
+                </a:solidFill>
+                <a:latin typeface="Consolas"/>
+              </a:rPr>
+              <a:t>requirements.txt</a:t>
+            </a:r>
+            <a:r>
+              <a:rPr sz="1350" b="0">
+                <a:solidFill>
+                  <a:srgbClr val="5D6B75"/>
+                </a:solidFill>
+                <a:latin typeface="Calibri"/>
+              </a:rPr>
+              <a:t>. Les types compacts imposés à pandas ramènent la mémoire de 3,2 Go à 1,0 Go.</a:t>
+            </a:r>
+          </a:p>
+        </p:txBody>
+      </p:sp>
+    </p:spTree>
+  </p:cSld>
+  <p:clrMapOvr>
+    <a:masterClrMapping/>
+  </p:clrMapOvr>
+</p:sld>
+</file>
+
+<file path=ppt/slides/slide4.xml><?xml version="1.0" encoding="utf-8"?>
+<p:sld xmlns:a="http://schemas.openxmlformats.org/drawingml/2006/main" xmlns:r="http://schemas.openxmlformats.org/officeDocument/2006/relationships" xmlns:p="http://schemas.openxmlformats.org/presentationml/2006/main">
   <p:cSld name="Slide 3">
     <p:bg>
       <p:bgPr>
@@ -5927,7 +6356,7 @@
 </p:sld>
 </file>
 
-<file path=ppt/slides/slide4.xml><?xml version="1.0" encoding="utf-8"?>
+<file path=ppt/slides/slide5.xml><?xml version="1.0" encoding="utf-8"?>
 <p:sld xmlns:a="http://schemas.openxmlformats.org/drawingml/2006/main" xmlns:r="http://schemas.openxmlformats.org/officeDocument/2006/relationships" xmlns:p="http://schemas.openxmlformats.org/presentationml/2006/main">
   <p:cSld name="Slide 4">
     <p:bg>
@@ -6255,7 +6684,7 @@
 </p:sld>
 </file>
 
-<file path=ppt/slides/slide5.xml><?xml version="1.0" encoding="utf-8"?>
+<file path=ppt/slides/slide6.xml><?xml version="1.0" encoding="utf-8"?>
 <p:sld xmlns:a="http://schemas.openxmlformats.org/drawingml/2006/main" xmlns:r="http://schemas.openxmlformats.org/officeDocument/2006/relationships" xmlns:p="http://schemas.openxmlformats.org/presentationml/2006/main">
   <p:cSld name="Slide 5">
     <p:bg>
@@ -6583,7 +7012,7 @@
 </p:sld>
 </file>
 
-<file path=ppt/slides/slide6.xml><?xml version="1.0" encoding="utf-8"?>
+<file path=ppt/slides/slide7.xml><?xml version="1.0" encoding="utf-8"?>
 <p:sld xmlns:a="http://schemas.openxmlformats.org/drawingml/2006/main" xmlns:r="http://schemas.openxmlformats.org/officeDocument/2006/relationships" xmlns:p="http://schemas.openxmlformats.org/presentationml/2006/main">
   <p:cSld name="Slide 6">
     <p:bg>
@@ -6911,7 +7340,7 @@
 </p:sld>
 </file>
 
-<file path=ppt/slides/slide7.xml><?xml version="1.0" encoding="utf-8"?>
+<file path=ppt/slides/slide8.xml><?xml version="1.0" encoding="utf-8"?>
 <p:sld xmlns:a="http://schemas.openxmlformats.org/drawingml/2006/main" xmlns:r="http://schemas.openxmlformats.org/officeDocument/2006/relationships" xmlns:p="http://schemas.openxmlformats.org/presentationml/2006/main">
   <p:cSld name="Slide 7">
     <p:bg>
@@ -7239,7 +7668,7 @@
 </p:sld>
 </file>
 
-<file path=ppt/slides/slide8.xml><?xml version="1.0" encoding="utf-8"?>
+<file path=ppt/slides/slide9.xml><?xml version="1.0" encoding="utf-8"?>
 <p:sld xmlns:a="http://schemas.openxmlformats.org/drawingml/2006/main" xmlns:r="http://schemas.openxmlformats.org/officeDocument/2006/relationships" xmlns:p="http://schemas.openxmlformats.org/presentationml/2006/main">
   <p:cSld name="Slide 8">
     <p:bg>
@@ -7554,334 +7983,6 @@
                 <a:cs typeface="Cambria" pitchFamily="34" charset="-120"/>
               </a:rPr>
               <a:t>5</a:t>
-            </a:r>
-            <a:endParaRPr lang="en-US" sz="3400" dirty="0"/>
-          </a:p>
-        </p:txBody>
-      </p:sp>
-    </p:spTree>
-  </p:cSld>
-  <p:clrMapOvr>
-    <a:masterClrMapping/>
-  </p:clrMapOvr>
-</p:sld>
-</file>
-
-<file path=ppt/slides/slide9.xml><?xml version="1.0" encoding="utf-8"?>
-<p:sld xmlns:a="http://schemas.openxmlformats.org/drawingml/2006/main" xmlns:r="http://schemas.openxmlformats.org/officeDocument/2006/relationships" xmlns:p="http://schemas.openxmlformats.org/presentationml/2006/main">
-  <p:cSld name="Slide 9">
-    <p:bg>
-      <p:bgPr>
-        <a:solidFill>
-          <a:srgbClr val="FFFFFF"/>
-        </a:solidFill>
-        <a:effectLst/>
-      </p:bgPr>
-    </p:bg>
-    <p:spTree>
-      <p:nvGrpSpPr>
-        <p:cNvPr id="1" name=""/>
-        <p:cNvGrpSpPr/>
-        <p:nvPr/>
-      </p:nvGrpSpPr>
-      <p:grpSpPr>
-        <a:xfrm>
-          <a:off x="0" y="0"/>
-          <a:ext cx="0" cy="0"/>
-          <a:chOff x="0" y="0"/>
-          <a:chExt cx="0" cy="0"/>
-        </a:xfrm>
-      </p:grpSpPr>
-      <p:sp>
-        <p:nvSpPr>
-          <p:cNvPr id="2" name="Text 0"/>
-          <p:cNvSpPr txBox="1"/>
-          <p:nvPr/>
-        </p:nvSpPr>
-        <p:spPr>
-          <a:xfrm>
-            <a:off x="594360" y="182880"/>
-            <a:ext cx="10972800" cy="219456"/>
-          </a:xfrm>
-          <a:prstGeom prst="rect">
-            <a:avLst/>
-          </a:prstGeom>
-          <a:noFill/>
-          <a:ln/>
-        </p:spPr>
-        <p:txBody>
-          <a:bodyPr wrap="square" lIns="0" tIns="0" rIns="0" bIns="0" rtlCol="0" anchor="ctr"/>
-          <a:lstStyle/>
-          <a:p>
-            <a:pPr marL="0" indent="0">
-              <a:buNone/>
-            </a:pPr>
-            <a:r>
-              <a:rPr lang="en-US" sz="1050" b="1" kern="0" spc="160" dirty="0">
-                <a:solidFill>
-                  <a:srgbClr val="0E7C86"/>
-                </a:solidFill>
-                <a:latin typeface="Calibri" pitchFamily="34" charset="0"/>
-                <a:ea typeface="Calibri" pitchFamily="34" charset="-122"/>
-                <a:cs typeface="Calibri" pitchFamily="34" charset="-120"/>
-              </a:rPr>
-              <a:t>DÉMONSTRATION 6</a:t>
-            </a:r>
-            <a:endParaRPr lang="en-US" sz="1050" dirty="0"/>
-          </a:p>
-        </p:txBody>
-      </p:sp>
-      <p:sp>
-        <p:nvSpPr>
-          <p:cNvPr id="3" name="Text 1"/>
-          <p:cNvSpPr txBox="1"/>
-          <p:nvPr/>
-        </p:nvSpPr>
-        <p:spPr>
-          <a:xfrm>
-            <a:off x="594360" y="384048"/>
-            <a:ext cx="10972800" cy="658368"/>
-          </a:xfrm>
-          <a:prstGeom prst="rect">
-            <a:avLst/>
-          </a:prstGeom>
-          <a:noFill/>
-          <a:ln/>
-        </p:spPr>
-        <p:txBody>
-          <a:bodyPr wrap="square" lIns="0" tIns="0" rIns="0" bIns="0" rtlCol="0" anchor="ctr"/>
-          <a:lstStyle/>
-          <a:p>
-            <a:pPr marL="0" indent="0">
-              <a:buNone/>
-            </a:pPr>
-            <a:r>
-              <a:rPr lang="en-US" sz="2700" b="1" dirty="0">
-                <a:solidFill>
-                  <a:srgbClr val="16232B"/>
-                </a:solidFill>
-                <a:latin typeface="Cambria" pitchFamily="34" charset="0"/>
-                <a:ea typeface="Cambria" pitchFamily="34" charset="-122"/>
-                <a:cs typeface="Cambria" pitchFamily="34" charset="-120"/>
-              </a:rPr>
-              <a:t>Le week-end ne gonfle pas les paniers, il les déplace</a:t>
-            </a:r>
-            <a:endParaRPr lang="en-US" sz="2700" dirty="0"/>
-          </a:p>
-        </p:txBody>
-      </p:sp>
-      <p:pic>
-        <p:nvPicPr>
-          <p:cNvPr id="4" name="Image 0" descr="02_projet\_ppt\fig06.png"/>
-          <p:cNvPicPr>
-            <a:picLocks noChangeAspect="1"/>
-          </p:cNvPicPr>
-          <p:nvPr/>
-        </p:nvPicPr>
-        <p:blipFill>
-          <a:blip r:embed="rId3"/>
-          <a:stretch>
-            <a:fillRect/>
-          </a:stretch>
-        </p:blipFill>
-        <p:spPr>
-          <a:xfrm>
-            <a:off x="594360" y="1481726"/>
-            <a:ext cx="6903720" cy="3565364"/>
-          </a:xfrm>
-          <a:prstGeom prst="rect">
-            <a:avLst/>
-          </a:prstGeom>
-        </p:spPr>
-      </p:pic>
-      <p:sp>
-        <p:nvSpPr>
-          <p:cNvPr id="5" name="Text 2"/>
-          <p:cNvSpPr txBox="1"/>
-          <p:nvPr/>
-        </p:nvSpPr>
-        <p:spPr>
-          <a:xfrm>
-            <a:off x="594360" y="5440680"/>
-            <a:ext cx="6903720" cy="457200"/>
-          </a:xfrm>
-          <a:prstGeom prst="rect">
-            <a:avLst/>
-          </a:prstGeom>
-          <a:noFill/>
-          <a:ln/>
-        </p:spPr>
-        <p:txBody>
-          <a:bodyPr wrap="square" lIns="0" tIns="0" rIns="0" bIns="0" rtlCol="0" anchor="t"/>
-          <a:lstStyle/>
-          <a:p>
-            <a:pPr marL="0" indent="0">
-              <a:buNone/>
-            </a:pPr>
-            <a:r>
-              <a:rPr lang="en-US" sz="1100" i="1" dirty="0">
-                <a:solidFill>
-                  <a:srgbClr val="5D6B75"/>
-                </a:solidFill>
-                <a:latin typeface="Calibri" pitchFamily="34" charset="0"/>
-                <a:ea typeface="Calibri" pitchFamily="34" charset="-122"/>
-                <a:cs typeface="Calibri" pitchFamily="34" charset="-120"/>
-              </a:rPr>
-              <a:t>Les petits paniers reculent de 7 points au profit des gros.</a:t>
-            </a:r>
-            <a:endParaRPr lang="en-US" sz="1100" dirty="0"/>
-          </a:p>
-        </p:txBody>
-      </p:sp>
-      <p:sp>
-        <p:nvSpPr>
-          <p:cNvPr id="6" name="Shape 3"/>
-          <p:cNvSpPr/>
-          <p:nvPr/>
-        </p:nvSpPr>
-        <p:spPr>
-          <a:xfrm>
-            <a:off x="7818120" y="1207008"/>
-            <a:ext cx="3749040" cy="3200400"/>
-          </a:xfrm>
-          <a:prstGeom prst="roundRect">
-            <a:avLst>
-              <a:gd name="adj" fmla="val 1714"/>
-            </a:avLst>
-          </a:prstGeom>
-          <a:solidFill>
-            <a:srgbClr val="EAF3F4"/>
-          </a:solidFill>
-          <a:ln w="12700">
-            <a:solidFill>
-              <a:srgbClr val="D3E5E7"/>
-            </a:solidFill>
-            <a:prstDash val="solid"/>
-          </a:ln>
-        </p:spPr>
-        <p:txBody>
-          <a:bodyPr/>
-          <a:lstStyle/>
-          <a:p>
-            <a:endParaRPr lang="fr-FR"/>
-          </a:p>
-        </p:txBody>
-      </p:sp>
-      <p:sp>
-        <p:nvSpPr>
-          <p:cNvPr id="7" name="Text 4"/>
-          <p:cNvSpPr txBox="1"/>
-          <p:nvPr/>
-        </p:nvSpPr>
-        <p:spPr>
-          <a:xfrm>
-            <a:off x="8074152" y="1389888"/>
-            <a:ext cx="3236976" cy="219456"/>
-          </a:xfrm>
-          <a:prstGeom prst="rect">
-            <a:avLst/>
-          </a:prstGeom>
-          <a:noFill/>
-          <a:ln/>
-        </p:spPr>
-        <p:txBody>
-          <a:bodyPr wrap="square" lIns="0" tIns="0" rIns="0" bIns="0" rtlCol="0" anchor="ctr"/>
-          <a:lstStyle/>
-          <a:p>
-            <a:pPr marL="0" indent="0">
-              <a:buNone/>
-            </a:pPr>
-            <a:r>
-              <a:rPr lang="en-US" sz="950" b="1" kern="0" spc="120" dirty="0">
-                <a:solidFill>
-                  <a:srgbClr val="0E7C86"/>
-                </a:solidFill>
-                <a:latin typeface="Calibri" pitchFamily="34" charset="0"/>
-                <a:ea typeface="Calibri" pitchFamily="34" charset="-122"/>
-                <a:cs typeface="Calibri" pitchFamily="34" charset="-120"/>
-              </a:rPr>
-              <a:t>CE QUE NOUS PROPOSONS</a:t>
-            </a:r>
-            <a:endParaRPr lang="en-US" sz="950" dirty="0"/>
-          </a:p>
-        </p:txBody>
-      </p:sp>
-      <p:sp>
-        <p:nvSpPr>
-          <p:cNvPr id="8" name="Text 5"/>
-          <p:cNvSpPr txBox="1"/>
-          <p:nvPr/>
-        </p:nvSpPr>
-        <p:spPr>
-          <a:xfrm>
-            <a:off x="8074152" y="1682496"/>
-            <a:ext cx="3236976" cy="2505456"/>
-          </a:xfrm>
-          <a:prstGeom prst="rect">
-            <a:avLst/>
-          </a:prstGeom>
-          <a:noFill/>
-          <a:ln/>
-        </p:spPr>
-        <p:txBody>
-          <a:bodyPr wrap="square" lIns="0" tIns="0" rIns="0" bIns="0" rtlCol="0" anchor="t"/>
-          <a:lstStyle/>
-          <a:p>
-            <a:pPr marL="0" indent="0">
-              <a:lnSpc>
-                <a:spcPct val="110000"/>
-              </a:lnSpc>
-              <a:buNone/>
-            </a:pPr>
-            <a:r>
-              <a:rPr lang="en-US" sz="1300" dirty="0">
-                <a:solidFill>
-                  <a:srgbClr val="16232B"/>
-                </a:solidFill>
-                <a:latin typeface="Calibri" pitchFamily="34" charset="0"/>
-                <a:ea typeface="Calibri" pitchFamily="34" charset="-122"/>
-                <a:cs typeface="Calibri" pitchFamily="34" charset="-120"/>
-              </a:rPr>
-              <a:t>Placer les offres à seuil — « livraison offerte dès X articles » — le week-end, où les gros paniers sont déjà la norme.</a:t>
-            </a:r>
-            <a:endParaRPr lang="en-US" sz="1300" dirty="0"/>
-          </a:p>
-        </p:txBody>
-      </p:sp>
-      <p:sp>
-        <p:nvSpPr>
-          <p:cNvPr id="9" name="Text 6"/>
-          <p:cNvSpPr txBox="1"/>
-          <p:nvPr/>
-        </p:nvSpPr>
-        <p:spPr>
-          <a:xfrm>
-            <a:off x="7818120" y="4663440"/>
-            <a:ext cx="548640" cy="548640"/>
-          </a:xfrm>
-          <a:prstGeom prst="rect">
-            <a:avLst/>
-          </a:prstGeom>
-          <a:noFill/>
-          <a:ln/>
-        </p:spPr>
-        <p:txBody>
-          <a:bodyPr wrap="square" lIns="0" tIns="0" rIns="0" bIns="0" rtlCol="0" anchor="ctr"/>
-          <a:lstStyle/>
-          <a:p>
-            <a:pPr marL="0" indent="0">
-              <a:buNone/>
-            </a:pPr>
-            <a:r>
-              <a:rPr lang="en-US" sz="3400" b="1" dirty="0">
-                <a:solidFill>
-                  <a:srgbClr val="D8E4E6"/>
-                </a:solidFill>
-                <a:latin typeface="Cambria" pitchFamily="34" charset="0"/>
-                <a:ea typeface="Cambria" pitchFamily="34" charset="-122"/>
-                <a:cs typeface="Cambria" pitchFamily="34" charset="-120"/>
-              </a:rPr>
-              <a:t>6</a:t>
             </a:r>
             <a:endParaRPr lang="en-US" sz="3400" dirty="0"/>
           </a:p>
